--- a/docs/Airline_Reliability_PB.pptx
+++ b/docs/Airline_Reliability_PB.pptx
@@ -2288,7 +2288,25 @@
                 </a:solidFill>
                 <a:latin typeface="Aptos"/>
               </a:rPr>
-              <a:t>AIRFLOW — FROM SCRIPTS TO PIPELINE</a:t>
+              <a:t>AIRFLOW </a:t>
+            </a:r>
+            <a:r>
+              <a:rPr lang="de-DE" sz="2700" b="1" dirty="0">
+                <a:solidFill>
+                  <a:srgbClr val="005020"/>
+                </a:solidFill>
+                <a:latin typeface="Aptos"/>
+              </a:rPr>
+              <a:t>-</a:t>
+            </a:r>
+            <a:r>
+              <a:rPr sz="2700" b="1" dirty="0">
+                <a:solidFill>
+                  <a:srgbClr val="005020"/>
+                </a:solidFill>
+                <a:latin typeface="Aptos"/>
+              </a:rPr>
+              <a:t> FROM SCRIPTS TO PIPELINE</a:t>
             </a:r>
           </a:p>
         </p:txBody>
@@ -3000,7 +3018,7 @@
         <p:spPr>
           <a:xfrm>
             <a:off x="4069080" y="5056632"/>
-            <a:ext cx="3474720" cy="274320"/>
+            <a:ext cx="3474720" cy="292388"/>
           </a:xfrm>
           <a:prstGeom prst="rect">
             <a:avLst/>
@@ -3015,13 +3033,31 @@
           <a:p>
             <a:pPr algn="ctr"/>
             <a:r>
-              <a:rPr sz="1300" b="1">
+              <a:rPr sz="1300" b="1" dirty="0">
                 <a:solidFill>
                   <a:srgbClr val="005020"/>
                 </a:solidFill>
                 <a:latin typeface="Aptos"/>
               </a:rPr>
-              <a:t>▶ LIVE DEMO — AIRFLOW</a:t>
+              <a:t>▶ LIVE DEMO </a:t>
+            </a:r>
+            <a:r>
+              <a:rPr lang="de-DE" sz="1300" b="1" dirty="0">
+                <a:solidFill>
+                  <a:srgbClr val="005020"/>
+                </a:solidFill>
+                <a:latin typeface="Aptos"/>
+              </a:rPr>
+              <a:t>-</a:t>
+            </a:r>
+            <a:r>
+              <a:rPr sz="1300" b="1" dirty="0">
+                <a:solidFill>
+                  <a:srgbClr val="005020"/>
+                </a:solidFill>
+                <a:latin typeface="Aptos"/>
+              </a:rPr>
+              <a:t> AIRFLOW</a:t>
             </a:r>
           </a:p>
         </p:txBody>
@@ -3286,13 +3322,31 @@
           <a:p>
             <a:pPr algn="l"/>
             <a:r>
-              <a:rPr sz="2700" b="1">
+              <a:rPr sz="2700" b="1" dirty="0">
                 <a:solidFill>
                   <a:srgbClr val="005020"/>
                 </a:solidFill>
                 <a:latin typeface="Aptos"/>
               </a:rPr>
-              <a:t>END-TO-END PROOF — JUNE 2026</a:t>
+              <a:t>END-TO-END PROOF </a:t>
+            </a:r>
+            <a:r>
+              <a:rPr lang="de-DE" sz="2700" b="1" dirty="0">
+                <a:solidFill>
+                  <a:srgbClr val="005020"/>
+                </a:solidFill>
+                <a:latin typeface="Aptos"/>
+              </a:rPr>
+              <a:t>-</a:t>
+            </a:r>
+            <a:r>
+              <a:rPr sz="2700" b="1" dirty="0">
+                <a:solidFill>
+                  <a:srgbClr val="005020"/>
+                </a:solidFill>
+                <a:latin typeface="Aptos"/>
+              </a:rPr>
+              <a:t> JUNE 2026</a:t>
             </a:r>
           </a:p>
         </p:txBody>
@@ -3671,13 +3725,31 @@
           <a:p>
             <a:pPr algn="l"/>
             <a:r>
-              <a:rPr sz="2700" b="1">
+              <a:rPr sz="2700" b="1" dirty="0">
                 <a:solidFill>
                   <a:srgbClr val="005020"/>
                 </a:solidFill>
                 <a:latin typeface="Aptos"/>
               </a:rPr>
-              <a:t>CONSUMPTION LAYER — RELIABILITY DASHBOARD</a:t>
+              <a:t>CONSUMPTION LAYER </a:t>
+            </a:r>
+            <a:r>
+              <a:rPr lang="de-DE" sz="2700" b="1" dirty="0">
+                <a:solidFill>
+                  <a:srgbClr val="005020"/>
+                </a:solidFill>
+                <a:latin typeface="Aptos"/>
+              </a:rPr>
+              <a:t>-</a:t>
+            </a:r>
+            <a:r>
+              <a:rPr sz="2700" b="1" dirty="0">
+                <a:solidFill>
+                  <a:srgbClr val="005020"/>
+                </a:solidFill>
+                <a:latin typeface="Aptos"/>
+              </a:rPr>
+              <a:t> RELIABILITY DASHBOARD</a:t>
             </a:r>
           </a:p>
         </p:txBody>
@@ -3747,7 +3819,25 @@
                 </a:solidFill>
                 <a:latin typeface="Aptos"/>
               </a:rPr>
-              <a:t>The Gold layer becomes an interactive decision layer — without exposing pipeline complexity.</a:t>
+              <a:t>The Gold layer becomes an interactive decision layer </a:t>
+            </a:r>
+            <a:r>
+              <a:rPr lang="de-DE" sz="1900" b="1" dirty="0">
+                <a:solidFill>
+                  <a:srgbClr val="005020"/>
+                </a:solidFill>
+                <a:latin typeface="Aptos"/>
+              </a:rPr>
+              <a:t>-</a:t>
+            </a:r>
+            <a:r>
+              <a:rPr sz="1900" b="1" dirty="0">
+                <a:solidFill>
+                  <a:srgbClr val="005020"/>
+                </a:solidFill>
+                <a:latin typeface="Aptos"/>
+              </a:rPr>
+              <a:t> without exposing pipeline complexity.</a:t>
             </a:r>
           </a:p>
         </p:txBody>
@@ -4414,7 +4504,7 @@
         <p:spPr>
           <a:xfrm>
             <a:off x="1051560" y="2331720"/>
-            <a:ext cx="3886200" cy="2057400"/>
+            <a:ext cx="3886200" cy="1284967"/>
           </a:xfrm>
           <a:prstGeom prst="rect">
             <a:avLst/>
@@ -4439,6 +4529,7 @@
               </a:defRPr>
             </a:pPr>
             <a:r>
+              <a:rPr dirty="0"/>
               <a:t>• reliable monthly KPI basis</a:t>
             </a:r>
           </a:p>
@@ -4455,6 +4546,7 @@
               </a:defRPr>
             </a:pPr>
             <a:r>
+              <a:rPr dirty="0"/>
               <a:t>• airline, airport and route comparison</a:t>
             </a:r>
           </a:p>
@@ -4471,6 +4563,7 @@
               </a:defRPr>
             </a:pPr>
             <a:r>
+              <a:rPr dirty="0"/>
               <a:t>• identify areas for deeper analysis</a:t>
             </a:r>
           </a:p>
@@ -4487,7 +4580,16 @@
               </a:defRPr>
             </a:pPr>
             <a:r>
-              <a:t>• support decisions — not replace them</a:t>
+              <a:rPr dirty="0"/>
+              <a:t>• support decisions </a:t>
+            </a:r>
+            <a:r>
+              <a:rPr lang="de-DE" dirty="0"/>
+              <a:t>-</a:t>
+            </a:r>
+            <a:r>
+              <a:rPr dirty="0"/>
+              <a:t> not replace them</a:t>
             </a:r>
           </a:p>
         </p:txBody>
@@ -4703,8 +4805,8 @@
         </p:nvSpPr>
         <p:spPr>
           <a:xfrm>
-            <a:off x="502920" y="4828032"/>
-            <a:ext cx="11155680" cy="502920"/>
+            <a:off x="0" y="4828032"/>
+            <a:ext cx="11234057" cy="707886"/>
           </a:xfrm>
           <a:prstGeom prst="rect">
             <a:avLst/>
@@ -4719,14 +4821,29 @@
           <a:p>
             <a:pPr algn="ctr"/>
             <a:r>
-              <a:rPr sz="4000" b="1" dirty="0">
+              <a:rPr sz="4000" b="1" u="sng" dirty="0">
                 <a:solidFill>
                   <a:srgbClr val="005020"/>
                 </a:solidFill>
                 <a:latin typeface="Aptos"/>
               </a:rPr>
-              <a:t>Reliable decisions require reliable data.</a:t>
-            </a:r>
+              <a:t>Reliable decisions require reliable data</a:t>
+            </a:r>
+            <a:r>
+              <a:rPr lang="de-DE" sz="4000" b="1" u="sng" dirty="0">
+                <a:solidFill>
+                  <a:srgbClr val="005020"/>
+                </a:solidFill>
+                <a:latin typeface="Aptos"/>
+              </a:rPr>
+              <a:t>!</a:t>
+            </a:r>
+            <a:endParaRPr sz="4000" b="1" u="sng" dirty="0">
+              <a:solidFill>
+                <a:srgbClr val="005020"/>
+              </a:solidFill>
+              <a:latin typeface="Aptos"/>
+            </a:endParaRPr>
           </a:p>
         </p:txBody>
       </p:sp>
@@ -5233,13 +5350,31 @@
           <a:p>
             <a:pPr algn="l"/>
             <a:r>
-              <a:rPr sz="2700" b="1">
+              <a:rPr sz="2700" b="1" dirty="0">
                 <a:solidFill>
                   <a:srgbClr val="005020"/>
                 </a:solidFill>
                 <a:latin typeface="Aptos"/>
               </a:rPr>
-              <a:t>MOTIVATION &amp; GOALS — TWO PERSPECTIVES</a:t>
+              <a:t>MOTIVATION &amp; GOALS </a:t>
+            </a:r>
+            <a:r>
+              <a:rPr lang="de-DE" sz="2700" b="1" dirty="0">
+                <a:solidFill>
+                  <a:srgbClr val="005020"/>
+                </a:solidFill>
+                <a:latin typeface="Aptos"/>
+              </a:rPr>
+              <a:t>-</a:t>
+            </a:r>
+            <a:r>
+              <a:rPr sz="2700" b="1" dirty="0">
+                <a:solidFill>
+                  <a:srgbClr val="005020"/>
+                </a:solidFill>
+                <a:latin typeface="Aptos"/>
+              </a:rPr>
+              <a:t> TWO PERSPECTIVES</a:t>
             </a:r>
           </a:p>
         </p:txBody>
@@ -5891,7 +6026,25 @@
                 </a:solidFill>
                 <a:latin typeface="Aptos"/>
               </a:rPr>
-              <a:t>Why this stakeholder? The result supports decisions across airline, airport and route reliability — without </a:t>
+              <a:t>Why this stakeholder? The result supports decisions across airline, airport and route reliability </a:t>
+            </a:r>
+            <a:r>
+              <a:rPr lang="de-DE" sz="1900" b="1" dirty="0">
+                <a:solidFill>
+                  <a:srgbClr val="58645B"/>
+                </a:solidFill>
+                <a:latin typeface="Aptos"/>
+              </a:rPr>
+              <a:t>-</a:t>
+            </a:r>
+            <a:r>
+              <a:rPr sz="1900" b="1" dirty="0">
+                <a:solidFill>
+                  <a:srgbClr val="58645B"/>
+                </a:solidFill>
+                <a:latin typeface="Aptos"/>
+              </a:rPr>
+              <a:t> without </a:t>
             </a:r>
             <a:r>
               <a:rPr lang="de-DE" sz="1900" b="1" dirty="0" err="1">
@@ -7028,7 +7181,7 @@
         <p:spPr>
           <a:xfrm>
             <a:off x="777240" y="3273551"/>
-            <a:ext cx="4846320" cy="2057727"/>
+            <a:ext cx="4846320" cy="2167129"/>
           </a:xfrm>
           <a:prstGeom prst="roundRect">
             <a:avLst/>
@@ -7196,7 +7349,7 @@
         <p:spPr>
           <a:xfrm>
             <a:off x="5897880" y="3273551"/>
-            <a:ext cx="4846320" cy="2057727"/>
+            <a:ext cx="4846320" cy="2167129"/>
           </a:xfrm>
           <a:prstGeom prst="roundRect">
             <a:avLst/>
@@ -7548,7 +7701,7 @@
         </p:nvSpPr>
         <p:spPr>
           <a:xfrm>
-            <a:off x="621792" y="2496312"/>
+            <a:off x="621792" y="2414672"/>
             <a:ext cx="1371600" cy="201168"/>
           </a:xfrm>
           <a:prstGeom prst="rect">
@@ -7564,7 +7717,7 @@
           <a:p>
             <a:pPr algn="ctr"/>
             <a:r>
-              <a:rPr sz="1050" b="1">
+              <a:rPr sz="1050" b="1" dirty="0">
                 <a:solidFill>
                   <a:srgbClr val="005020"/>
                 </a:solidFill>
@@ -7583,7 +7736,7 @@
         </p:nvSpPr>
         <p:spPr>
           <a:xfrm>
-            <a:off x="621792" y="2739936"/>
+            <a:off x="621792" y="2658296"/>
             <a:ext cx="1371600" cy="182880"/>
           </a:xfrm>
           <a:prstGeom prst="rect">
@@ -7699,7 +7852,7 @@
         </p:nvSpPr>
         <p:spPr>
           <a:xfrm>
-            <a:off x="2404872" y="2496312"/>
+            <a:off x="2404872" y="2414672"/>
             <a:ext cx="1371600" cy="201168"/>
           </a:xfrm>
           <a:prstGeom prst="rect">
@@ -7734,7 +7887,7 @@
         </p:nvSpPr>
         <p:spPr>
           <a:xfrm>
-            <a:off x="2404872" y="2739936"/>
+            <a:off x="2404872" y="2658296"/>
             <a:ext cx="1371600" cy="182880"/>
           </a:xfrm>
           <a:prstGeom prst="rect">
@@ -7850,7 +8003,7 @@
         </p:nvSpPr>
         <p:spPr>
           <a:xfrm>
-            <a:off x="4187951" y="2496312"/>
+            <a:off x="4187951" y="2414672"/>
             <a:ext cx="1371600" cy="201168"/>
           </a:xfrm>
           <a:prstGeom prst="rect">
@@ -7885,7 +8038,7 @@
         </p:nvSpPr>
         <p:spPr>
           <a:xfrm>
-            <a:off x="4187951" y="2739936"/>
+            <a:off x="4187951" y="2658296"/>
             <a:ext cx="1371600" cy="182880"/>
           </a:xfrm>
           <a:prstGeom prst="rect">
@@ -8001,7 +8154,7 @@
         </p:nvSpPr>
         <p:spPr>
           <a:xfrm>
-            <a:off x="5971031" y="2496312"/>
+            <a:off x="5971031" y="2414672"/>
             <a:ext cx="1371600" cy="201168"/>
           </a:xfrm>
           <a:prstGeom prst="rect">
@@ -8036,7 +8189,7 @@
         </p:nvSpPr>
         <p:spPr>
           <a:xfrm>
-            <a:off x="5971031" y="2739936"/>
+            <a:off x="5971031" y="2658296"/>
             <a:ext cx="1371600" cy="182880"/>
           </a:xfrm>
           <a:prstGeom prst="rect">
@@ -8152,7 +8305,7 @@
         </p:nvSpPr>
         <p:spPr>
           <a:xfrm>
-            <a:off x="7754112" y="2496312"/>
+            <a:off x="7754112" y="2414672"/>
             <a:ext cx="1371600" cy="201168"/>
           </a:xfrm>
           <a:prstGeom prst="rect">
@@ -8187,7 +8340,7 @@
         </p:nvSpPr>
         <p:spPr>
           <a:xfrm>
-            <a:off x="7754112" y="2739936"/>
+            <a:off x="7754112" y="2658296"/>
             <a:ext cx="1371600" cy="182880"/>
           </a:xfrm>
           <a:prstGeom prst="rect">
@@ -8303,7 +8456,7 @@
         </p:nvSpPr>
         <p:spPr>
           <a:xfrm>
-            <a:off x="9537192" y="2496312"/>
+            <a:off x="9537192" y="2414672"/>
             <a:ext cx="1371600" cy="201168"/>
           </a:xfrm>
           <a:prstGeom prst="rect">
@@ -8338,7 +8491,7 @@
         </p:nvSpPr>
         <p:spPr>
           <a:xfrm>
-            <a:off x="9537192" y="2739936"/>
+            <a:off x="9537192" y="2658296"/>
             <a:ext cx="1371600" cy="182880"/>
           </a:xfrm>
           <a:prstGeom prst="rect">
@@ -8489,7 +8642,7 @@
         </p:nvSpPr>
         <p:spPr>
           <a:xfrm>
-            <a:off x="621792" y="2983884"/>
+            <a:off x="621792" y="2902244"/>
             <a:ext cx="1371600" cy="201168"/>
           </a:xfrm>
           <a:prstGeom prst="rect">
@@ -8524,7 +8677,7 @@
         </p:nvSpPr>
         <p:spPr>
           <a:xfrm>
-            <a:off x="2404872" y="2983884"/>
+            <a:off x="2404872" y="2902244"/>
             <a:ext cx="1371600" cy="201168"/>
           </a:xfrm>
           <a:prstGeom prst="rect">
@@ -8559,7 +8712,7 @@
         </p:nvSpPr>
         <p:spPr>
           <a:xfrm>
-            <a:off x="4187951" y="2983884"/>
+            <a:off x="4187951" y="2902244"/>
             <a:ext cx="1371600" cy="201168"/>
           </a:xfrm>
           <a:prstGeom prst="rect">
@@ -8594,7 +8747,7 @@
         </p:nvSpPr>
         <p:spPr>
           <a:xfrm>
-            <a:off x="5971031" y="2983884"/>
+            <a:off x="5971031" y="2902244"/>
             <a:ext cx="1371600" cy="201168"/>
           </a:xfrm>
           <a:prstGeom prst="rect">
@@ -8629,7 +8782,7 @@
         </p:nvSpPr>
         <p:spPr>
           <a:xfrm>
-            <a:off x="7754112" y="2983884"/>
+            <a:off x="7754112" y="2902244"/>
             <a:ext cx="1371600" cy="201168"/>
           </a:xfrm>
           <a:prstGeom prst="rect">
@@ -8664,7 +8817,7 @@
         </p:nvSpPr>
         <p:spPr>
           <a:xfrm>
-            <a:off x="9537192" y="2983884"/>
+            <a:off x="9537192" y="2902244"/>
             <a:ext cx="1371600" cy="201168"/>
           </a:xfrm>
           <a:prstGeom prst="rect">
@@ -8733,13 +8886,31 @@
           <a:p>
             <a:pPr algn="l"/>
             <a:r>
-              <a:rPr sz="2700" b="1">
+              <a:rPr sz="2700" b="1" dirty="0">
                 <a:solidFill>
                   <a:srgbClr val="005020"/>
                 </a:solidFill>
                 <a:latin typeface="Aptos"/>
               </a:rPr>
-              <a:t>INGESTION &amp; BRONZE — PRESERVE THE SOURCE</a:t>
+              <a:t>INGESTION &amp; BRONZE </a:t>
+            </a:r>
+            <a:r>
+              <a:rPr lang="de-DE" sz="2700" b="1" dirty="0">
+                <a:solidFill>
+                  <a:srgbClr val="005020"/>
+                </a:solidFill>
+                <a:latin typeface="Aptos"/>
+              </a:rPr>
+              <a:t>-</a:t>
+            </a:r>
+            <a:r>
+              <a:rPr sz="2700" b="1" dirty="0">
+                <a:solidFill>
+                  <a:srgbClr val="005020"/>
+                </a:solidFill>
+                <a:latin typeface="Aptos"/>
+              </a:rPr>
+              <a:t> PRESERVE THE SOURCE</a:t>
             </a:r>
           </a:p>
         </p:txBody>
@@ -9309,7 +9480,25 @@
                 </a:solidFill>
                 <a:latin typeface="Aptos"/>
               </a:rPr>
-              <a:t>Silver is the quality boundary of the pipeline — not just another file format.</a:t>
+              <a:t>Silver is the quality boundary of the pipeline </a:t>
+            </a:r>
+            <a:r>
+              <a:rPr lang="de-DE" sz="1900" b="1" dirty="0">
+                <a:solidFill>
+                  <a:srgbClr val="005020"/>
+                </a:solidFill>
+                <a:latin typeface="Aptos"/>
+              </a:rPr>
+              <a:t>-</a:t>
+            </a:r>
+            <a:r>
+              <a:rPr sz="1900" b="1" dirty="0">
+                <a:solidFill>
+                  <a:srgbClr val="005020"/>
+                </a:solidFill>
+                <a:latin typeface="Aptos"/>
+              </a:rPr>
+              <a:t> not just another file format.</a:t>
             </a:r>
           </a:p>
         </p:txBody>
@@ -9550,7 +9739,25 @@
                 </a:solidFill>
                 <a:latin typeface="Aptos"/>
               </a:rPr>
-              <a:t>standardisation</a:t>
+              <a:t>standardi</a:t>
+            </a:r>
+            <a:r>
+              <a:rPr lang="de-DE" sz="1250" b="0" dirty="0">
+                <a:solidFill>
+                  <a:srgbClr val="FFFFFF"/>
+                </a:solidFill>
+                <a:latin typeface="Aptos"/>
+              </a:rPr>
+              <a:t>s</a:t>
+            </a:r>
+            <a:r>
+              <a:rPr sz="1250" b="0" dirty="0" err="1">
+                <a:solidFill>
+                  <a:srgbClr val="FFFFFF"/>
+                </a:solidFill>
+                <a:latin typeface="Aptos"/>
+              </a:rPr>
+              <a:t>ation</a:t>
             </a:r>
             <a:endParaRPr sz="1250" b="0" dirty="0">
               <a:solidFill>
@@ -11523,17 +11730,6 @@
 </file>
 
 <file path=customXml/item1.xml><?xml version="1.0" encoding="utf-8"?>
-<p:properties xmlns:p="http://schemas.microsoft.com/office/2006/metadata/properties" xmlns:xsi="http://www.w3.org/2001/XMLSchema-instance" xmlns:pc="http://schemas.microsoft.com/office/infopath/2007/PartnerControls">
-  <documentManagement>
-    <lcf76f155ced4ddcb4097134ff3c332f xmlns="9aa5a65c-f4ce-4ee4-acf7-5e3b2ace5bfd">
-      <Terms xmlns="http://schemas.microsoft.com/office/infopath/2007/PartnerControls"/>
-    </lcf76f155ced4ddcb4097134ff3c332f>
-    <TaxCatchAll xmlns="66bb7404-1a7c-4cd5-b899-503b4f4a7830" xsi:nil="true"/>
-  </documentManagement>
-</p:properties>
-</file>
-
-<file path=customXml/item2.xml><?xml version="1.0" encoding="utf-8"?>
 <ct:contentTypeSchema xmlns:ct="http://schemas.microsoft.com/office/2006/metadata/contentType" xmlns:ma="http://schemas.microsoft.com/office/2006/metadata/properties/metaAttributes" ct:_="" ma:_="" ma:contentTypeName="Document" ma:contentTypeID="0x0101006CD9D0312D38F94DA02BEC0C7012E0F5" ma:contentTypeVersion="11" ma:contentTypeDescription="Create a new document." ma:contentTypeScope="" ma:versionID="9a73361d995b0bed58ef5b3962fcd148">
   <xsd:schema xmlns:xsd="http://www.w3.org/2001/XMLSchema" xmlns:xs="http://www.w3.org/2001/XMLSchema" xmlns:p="http://schemas.microsoft.com/office/2006/metadata/properties" xmlns:ns2="9aa5a65c-f4ce-4ee4-acf7-5e3b2ace5bfd" xmlns:ns3="66bb7404-1a7c-4cd5-b899-503b4f4a7830" targetNamespace="http://schemas.microsoft.com/office/2006/metadata/properties" ma:root="true" ma:fieldsID="a85bbe206d45265116e8c51ee0380a62" ns2:_="" ns3:_="">
     <xsd:import namespace="9aa5a65c-f4ce-4ee4-acf7-5e3b2ace5bfd"/>
@@ -11728,6 +11924,17 @@
 </ct:contentTypeSchema>
 </file>
 
+<file path=customXml/item2.xml><?xml version="1.0" encoding="utf-8"?>
+<p:properties xmlns:p="http://schemas.microsoft.com/office/2006/metadata/properties" xmlns:xsi="http://www.w3.org/2001/XMLSchema-instance" xmlns:pc="http://schemas.microsoft.com/office/infopath/2007/PartnerControls">
+  <documentManagement>
+    <lcf76f155ced4ddcb4097134ff3c332f xmlns="9aa5a65c-f4ce-4ee4-acf7-5e3b2ace5bfd">
+      <Terms xmlns="http://schemas.microsoft.com/office/infopath/2007/PartnerControls"/>
+    </lcf76f155ced4ddcb4097134ff3c332f>
+    <TaxCatchAll xmlns="66bb7404-1a7c-4cd5-b899-503b4f4a7830" xsi:nil="true"/>
+  </documentManagement>
+</p:properties>
+</file>
+
 <file path=customXml/item3.xml><?xml version="1.0" encoding="utf-8"?>
 <?mso-contentType ?>
 <FormTemplates xmlns="http://schemas.microsoft.com/sharepoint/v3/contenttype/forms">
@@ -11738,17 +11945,6 @@
 </file>
 
 <file path=customXml/itemProps1.xml><?xml version="1.0" encoding="utf-8"?>
-<ds:datastoreItem xmlns:ds="http://schemas.openxmlformats.org/officeDocument/2006/customXml" ds:itemID="{80B8EBE4-FC2B-439D-83E4-1FC00013EB90}">
-  <ds:schemaRefs>
-    <ds:schemaRef ds:uri="http://schemas.microsoft.com/office/2006/metadata/properties"/>
-    <ds:schemaRef ds:uri="http://schemas.microsoft.com/office/infopath/2007/PartnerControls"/>
-    <ds:schemaRef ds:uri="9aa5a65c-f4ce-4ee4-acf7-5e3b2ace5bfd"/>
-    <ds:schemaRef ds:uri="66bb7404-1a7c-4cd5-b899-503b4f4a7830"/>
-  </ds:schemaRefs>
-</ds:datastoreItem>
-</file>
-
-<file path=customXml/itemProps2.xml><?xml version="1.0" encoding="utf-8"?>
 <ds:datastoreItem xmlns:ds="http://schemas.openxmlformats.org/officeDocument/2006/customXml" ds:itemID="{D9BC1E96-25F1-44B9-8174-507263BA1D6E}">
   <ds:schemaRefs>
     <ds:schemaRef ds:uri="http://schemas.microsoft.com/office/2006/metadata/contentType"/>
@@ -11767,6 +11963,17 @@
 </ds:datastoreItem>
 </file>
 
+<file path=customXml/itemProps2.xml><?xml version="1.0" encoding="utf-8"?>
+<ds:datastoreItem xmlns:ds="http://schemas.openxmlformats.org/officeDocument/2006/customXml" ds:itemID="{80B8EBE4-FC2B-439D-83E4-1FC00013EB90}">
+  <ds:schemaRefs>
+    <ds:schemaRef ds:uri="http://schemas.microsoft.com/office/2006/metadata/properties"/>
+    <ds:schemaRef ds:uri="http://schemas.microsoft.com/office/infopath/2007/PartnerControls"/>
+    <ds:schemaRef ds:uri="9aa5a65c-f4ce-4ee4-acf7-5e3b2ace5bfd"/>
+    <ds:schemaRef ds:uri="66bb7404-1a7c-4cd5-b899-503b4f4a7830"/>
+  </ds:schemaRefs>
+</ds:datastoreItem>
+</file>
+
 <file path=customXml/itemProps3.xml><?xml version="1.0" encoding="utf-8"?>
 <ds:datastoreItem xmlns:ds="http://schemas.openxmlformats.org/officeDocument/2006/customXml" ds:itemID="{50732050-07CB-4EA1-8B62-F2C4125C0DDD}">
   <ds:schemaRefs>

--- a/docs/Airline_Reliability_PB.pptx
+++ b/docs/Airline_Reliability_PB.pptx
@@ -15,7 +15,7 @@
     <p:sldId id="263" r:id="rId12"/>
     <p:sldId id="264" r:id="rId13"/>
     <p:sldId id="265" r:id="rId14"/>
-    <p:sldId id="266" r:id="rId15"/>
+    <p:sldId id="269" r:id="rId15"/>
     <p:sldId id="267" r:id="rId16"/>
     <p:sldId id="268" r:id="rId17"/>
   </p:sldIdLst>
@@ -3293,7 +3293,13 @@
   <p:cSld>
     <p:spTree>
       <p:nvGrpSpPr>
-        <p:cNvPr id="1" name=""/>
+        <p:cNvPr id="1" name="">
+          <a:extLst>
+            <a:ext uri="{FF2B5EF4-FFF2-40B4-BE49-F238E27FC236}">
+              <a16:creationId xmlns:a16="http://schemas.microsoft.com/office/drawing/2014/main" id="{D1C0C18B-D69B-3CCF-0DD2-FBA71514A3CF}"/>
+            </a:ext>
+          </a:extLst>
+        </p:cNvPr>
         <p:cNvGrpSpPr/>
         <p:nvPr/>
       </p:nvGrpSpPr>
@@ -3307,7 +3313,13 @@
       </p:grpSpPr>
       <p:sp>
         <p:nvSpPr>
-          <p:cNvPr id="2" name="Title 1"/>
+          <p:cNvPr id="2" name="Title 1">
+            <a:extLst>
+              <a:ext uri="{FF2B5EF4-FFF2-40B4-BE49-F238E27FC236}">
+                <a16:creationId xmlns:a16="http://schemas.microsoft.com/office/drawing/2014/main" id="{45652794-9615-21CD-7BCD-98243930C62B}"/>
+              </a:ext>
+            </a:extLst>
+          </p:cNvPr>
           <p:cNvSpPr>
             <a:spLocks noGrp="1"/>
           </p:cNvSpPr>
@@ -3315,45 +3327,43 @@
             <p:ph type="title"/>
           </p:nvPr>
         </p:nvSpPr>
-        <p:spPr/>
+        <p:spPr>
+          <a:xfrm>
+            <a:off x="334963" y="234951"/>
+            <a:ext cx="11522075" cy="679223"/>
+          </a:xfrm>
+        </p:spPr>
         <p:txBody>
           <a:bodyPr wrap="square" anchor="t"/>
           <a:lstStyle/>
           <a:p>
-            <a:pPr algn="l"/>
-            <a:r>
-              <a:rPr sz="2700" b="1" dirty="0">
+            <a:r>
+              <a:rPr lang="de-DE" dirty="0">
                 <a:solidFill>
                   <a:srgbClr val="005020"/>
                 </a:solidFill>
                 <a:latin typeface="Aptos"/>
               </a:rPr>
-              <a:t>END-TO-END PROOF </a:t>
-            </a:r>
-            <a:r>
-              <a:rPr lang="de-DE" sz="2700" b="1" dirty="0">
-                <a:solidFill>
-                  <a:srgbClr val="005020"/>
-                </a:solidFill>
-                <a:latin typeface="Aptos"/>
-              </a:rPr>
-              <a:t>-</a:t>
-            </a:r>
-            <a:r>
-              <a:rPr sz="2700" b="1" dirty="0">
-                <a:solidFill>
-                  <a:srgbClr val="005020"/>
-                </a:solidFill>
-                <a:latin typeface="Aptos"/>
-              </a:rPr>
-              <a:t> JUNE 2026</a:t>
-            </a:r>
-          </a:p>
-        </p:txBody>
-      </p:sp>
-      <p:sp>
-        <p:nvSpPr>
-          <p:cNvPr id="4" name="TextBox 3"/>
+              <a:t>AUTOMATED TESTING – WHEN &amp; WHY</a:t>
+            </a:r>
+            <a:endParaRPr sz="2700" b="1" dirty="0">
+              <a:solidFill>
+                <a:srgbClr val="005020"/>
+              </a:solidFill>
+              <a:latin typeface="Aptos"/>
+            </a:endParaRPr>
+          </a:p>
+        </p:txBody>
+      </p:sp>
+      <p:sp>
+        <p:nvSpPr>
+          <p:cNvPr id="4" name="TextBox 3">
+            <a:extLst>
+              <a:ext uri="{FF2B5EF4-FFF2-40B4-BE49-F238E27FC236}">
+                <a16:creationId xmlns:a16="http://schemas.microsoft.com/office/drawing/2014/main" id="{94A1FF53-835F-1C5E-A7F2-7516B1C6CFE5}"/>
+              </a:ext>
+            </a:extLst>
+          </p:cNvPr>
           <p:cNvSpPr txBox="1"/>
           <p:nvPr/>
         </p:nvSpPr>
@@ -3388,14 +3398,20 @@
       </p:sp>
       <p:sp>
         <p:nvSpPr>
-          <p:cNvPr id="5" name="TextBox 4"/>
-          <p:cNvSpPr txBox="1"/>
-          <p:nvPr/>
-        </p:nvSpPr>
-        <p:spPr>
-          <a:xfrm>
-            <a:off x="777240" y="1453240"/>
-            <a:ext cx="9875520" cy="384721"/>
+          <p:cNvPr id="5" name="TextBox 4">
+            <a:extLst>
+              <a:ext uri="{FF2B5EF4-FFF2-40B4-BE49-F238E27FC236}">
+                <a16:creationId xmlns:a16="http://schemas.microsoft.com/office/drawing/2014/main" id="{EBEEB028-565D-9E6F-8CD3-304950ACA325}"/>
+              </a:ext>
+            </a:extLst>
+          </p:cNvPr>
+          <p:cNvSpPr txBox="1"/>
+          <p:nvPr/>
+        </p:nvSpPr>
+        <p:spPr>
+          <a:xfrm>
+            <a:off x="791988" y="1453240"/>
+            <a:ext cx="10601141" cy="400110"/>
           </a:xfrm>
           <a:prstGeom prst="rect">
             <a:avLst/>
@@ -3408,53 +3424,41 @@
           </a:bodyPr>
           <a:lstStyle/>
           <a:p>
-            <a:pPr algn="l"/>
-            <a:r>
-              <a:rPr sz="1900" b="1" dirty="0">
-                <a:solidFill>
-                  <a:srgbClr val="005020"/>
-                </a:solidFill>
-                <a:latin typeface="Aptos"/>
-              </a:rPr>
-              <a:t>The architecture was verified as one complete process from ingestion to Gold.</a:t>
-            </a:r>
-          </a:p>
-        </p:txBody>
-      </p:sp>
-      <p:pic>
-        <p:nvPicPr>
-          <p:cNvPr id="6" name="Picture 5" descr="template_slide2_image.png"/>
-          <p:cNvPicPr>
-            <a:picLocks noChangeAspect="1"/>
-          </p:cNvPicPr>
-          <p:nvPr/>
-        </p:nvPicPr>
-        <p:blipFill>
-          <a:blip r:embed="rId2"/>
-          <a:stretch>
-            <a:fillRect/>
-          </a:stretch>
-        </p:blipFill>
-        <p:spPr>
-          <a:xfrm>
-            <a:off x="822960" y="1956159"/>
-            <a:ext cx="5120640" cy="2840193"/>
-          </a:xfrm>
-          <a:prstGeom prst="rect">
-            <a:avLst/>
-          </a:prstGeom>
-        </p:spPr>
-      </p:pic>
-      <p:sp>
-        <p:nvSpPr>
-          <p:cNvPr id="7" name="Rounded Rectangle 6"/>
+            <a:r>
+              <a:rPr lang="en-US" sz="2000" b="1" dirty="0" err="1">
+                <a:solidFill>
+                  <a:srgbClr val="005C2D"/>
+                </a:solidFill>
+              </a:rPr>
+              <a:t>Pytest</a:t>
+            </a:r>
+            <a:r>
+              <a:rPr lang="en-US" sz="2000" b="1" dirty="0">
+                <a:solidFill>
+                  <a:srgbClr val="005C2D"/>
+                </a:solidFill>
+              </a:rPr>
+              <a:t> validates critical code logic independently from the monthly Airflow data run.</a:t>
+            </a:r>
+          </a:p>
+        </p:txBody>
+      </p:sp>
+      <p:sp>
+        <p:nvSpPr>
+          <p:cNvPr id="7" name="Rounded Rectangle 6">
+            <a:extLst>
+              <a:ext uri="{FF2B5EF4-FFF2-40B4-BE49-F238E27FC236}">
+                <a16:creationId xmlns:a16="http://schemas.microsoft.com/office/drawing/2014/main" id="{005B13BF-361D-2FA3-A89E-5EE8F4F160CE}"/>
+              </a:ext>
+            </a:extLst>
+          </p:cNvPr>
           <p:cNvSpPr/>
           <p:nvPr/>
         </p:nvSpPr>
         <p:spPr>
           <a:xfrm>
-            <a:off x="6309360" y="1910440"/>
-            <a:ext cx="4389120" cy="3429000"/>
+            <a:off x="830327" y="1910440"/>
+            <a:ext cx="4663437" cy="1607050"/>
           </a:xfrm>
           <a:prstGeom prst="roundRect">
             <a:avLst/>
@@ -3493,14 +3497,20 @@
       </p:sp>
       <p:sp>
         <p:nvSpPr>
-          <p:cNvPr id="8" name="TextBox 7"/>
-          <p:cNvSpPr txBox="1"/>
-          <p:nvPr/>
-        </p:nvSpPr>
-        <p:spPr>
-          <a:xfrm>
-            <a:off x="6583680" y="2166471"/>
-            <a:ext cx="2011680" cy="219456"/>
+          <p:cNvPr id="8" name="TextBox 7">
+            <a:extLst>
+              <a:ext uri="{FF2B5EF4-FFF2-40B4-BE49-F238E27FC236}">
+                <a16:creationId xmlns:a16="http://schemas.microsoft.com/office/drawing/2014/main" id="{6BD043B3-7FDF-106D-0282-5A284CFD559E}"/>
+              </a:ext>
+            </a:extLst>
+          </p:cNvPr>
+          <p:cNvSpPr txBox="1"/>
+          <p:nvPr/>
+        </p:nvSpPr>
+        <p:spPr>
+          <a:xfrm>
+            <a:off x="1104648" y="1982120"/>
+            <a:ext cx="2011680" cy="261610"/>
           </a:xfrm>
           <a:prstGeom prst="rect">
             <a:avLst/>
@@ -3515,62 +3525,39 @@
           <a:p>
             <a:pPr algn="l"/>
             <a:r>
-              <a:rPr sz="1100" b="1">
+              <a:rPr lang="de-DE" sz="1100" b="1" dirty="0">
                 <a:solidFill>
                   <a:srgbClr val="DFF5E4"/>
                 </a:solidFill>
                 <a:latin typeface="Aptos"/>
               </a:rPr>
-              <a:t>CONFIRMED RUN</a:t>
-            </a:r>
-          </a:p>
-        </p:txBody>
-      </p:sp>
-      <p:sp>
-        <p:nvSpPr>
-          <p:cNvPr id="9" name="TextBox 8"/>
-          <p:cNvSpPr txBox="1"/>
-          <p:nvPr/>
-        </p:nvSpPr>
-        <p:spPr>
-          <a:xfrm>
-            <a:off x="6583680" y="2550520"/>
-            <a:ext cx="3749039" cy="365760"/>
-          </a:xfrm>
-          <a:prstGeom prst="rect">
-            <a:avLst/>
-          </a:prstGeom>
-          <a:noFill/>
-        </p:spPr>
-        <p:txBody>
-          <a:bodyPr wrap="square" anchor="t">
-            <a:spAutoFit/>
-          </a:bodyPr>
-          <a:lstStyle/>
-          <a:p>
-            <a:pPr algn="l"/>
-            <a:r>
-              <a:rPr sz="2000" b="1">
-                <a:solidFill>
-                  <a:srgbClr val="FFFFFF"/>
-                </a:solidFill>
-                <a:latin typeface="Aptos"/>
-              </a:rPr>
-              <a:t>8 / 8 Airflow tasks successful</a:t>
-            </a:r>
-          </a:p>
-        </p:txBody>
-      </p:sp>
-      <p:sp>
-        <p:nvSpPr>
-          <p:cNvPr id="10" name="TextBox 9"/>
-          <p:cNvSpPr txBox="1"/>
-          <p:nvPr/>
-        </p:nvSpPr>
-        <p:spPr>
-          <a:xfrm>
-            <a:off x="6583680" y="3172312"/>
-            <a:ext cx="3474720" cy="1508760"/>
+              <a:t>WHAT IS TESTED?</a:t>
+            </a:r>
+            <a:endParaRPr sz="1100" b="1" dirty="0">
+              <a:solidFill>
+                <a:srgbClr val="DFF5E4"/>
+              </a:solidFill>
+              <a:latin typeface="Aptos"/>
+            </a:endParaRPr>
+          </a:p>
+        </p:txBody>
+      </p:sp>
+      <p:sp>
+        <p:nvSpPr>
+          <p:cNvPr id="10" name="TextBox 9">
+            <a:extLst>
+              <a:ext uri="{FF2B5EF4-FFF2-40B4-BE49-F238E27FC236}">
+                <a16:creationId xmlns:a16="http://schemas.microsoft.com/office/drawing/2014/main" id="{E864C497-EEF3-2603-ECC1-72D2CD5BBAB7}"/>
+              </a:ext>
+            </a:extLst>
+          </p:cNvPr>
+          <p:cNvSpPr txBox="1"/>
+          <p:nvPr/>
+        </p:nvSpPr>
+        <p:spPr>
+          <a:xfrm>
+            <a:off x="1104648" y="2154682"/>
+            <a:ext cx="3474720" cy="1284967"/>
           </a:xfrm>
           <a:prstGeom prst="rect">
             <a:avLst/>
@@ -3595,8 +3582,22 @@
               </a:defRPr>
             </a:pPr>
             <a:r>
-              <a:t>• 607,577 fact-flight rows</a:t>
-            </a:r>
+              <a:rPr dirty="0"/>
+              <a:t>• </a:t>
+            </a:r>
+            <a:r>
+              <a:rPr lang="de-DE" dirty="0" err="1"/>
+              <a:t>schema</a:t>
+            </a:r>
+            <a:r>
+              <a:rPr lang="de-DE" dirty="0"/>
+              <a:t> </a:t>
+            </a:r>
+            <a:r>
+              <a:rPr lang="de-DE" dirty="0" err="1"/>
+              <a:t>validation</a:t>
+            </a:r>
+            <a:endParaRPr lang="de-DE" dirty="0"/>
           </a:p>
           <a:p>
             <a:pPr>
@@ -3611,8 +3612,30 @@
               </a:defRPr>
             </a:pPr>
             <a:r>
-              <a:t>• 12 airline Gold rows</a:t>
-            </a:r>
+              <a:rPr dirty="0"/>
+              <a:t>• </a:t>
+            </a:r>
+            <a:r>
+              <a:rPr lang="de-DE" dirty="0" err="1"/>
+              <a:t>data</a:t>
+            </a:r>
+            <a:r>
+              <a:rPr lang="de-DE" dirty="0"/>
+              <a:t>-quality </a:t>
+            </a:r>
+            <a:r>
+              <a:rPr lang="de-DE" dirty="0" err="1"/>
+              <a:t>rules</a:t>
+            </a:r>
+            <a:r>
+              <a:rPr lang="de-DE" dirty="0"/>
+              <a:t> &amp; route </a:t>
+            </a:r>
+            <a:r>
+              <a:rPr lang="de-DE" dirty="0" err="1"/>
+              <a:t>logic</a:t>
+            </a:r>
+            <a:endParaRPr lang="de-DE" dirty="0"/>
           </a:p>
           <a:p>
             <a:pPr>
@@ -3627,8 +3650,46 @@
               </a:defRPr>
             </a:pPr>
             <a:r>
-              <a:t>• 351 airports × ARR / DEP</a:t>
-            </a:r>
+              <a:rPr lang="de-DE" dirty="0"/>
+              <a:t>• </a:t>
+            </a:r>
+            <a:r>
+              <a:rPr lang="de-DE" dirty="0" err="1"/>
+              <a:t>Silver</a:t>
+            </a:r>
+            <a:r>
+              <a:rPr lang="de-DE" dirty="0"/>
+              <a:t> </a:t>
+            </a:r>
+            <a:r>
+              <a:rPr lang="de-DE" dirty="0" err="1"/>
+              <a:t>flight</a:t>
+            </a:r>
+            <a:r>
+              <a:rPr lang="de-DE" dirty="0"/>
+              <a:t> &amp; </a:t>
+            </a:r>
+            <a:r>
+              <a:rPr lang="de-DE" dirty="0" err="1"/>
+              <a:t>reference</a:t>
+            </a:r>
+            <a:r>
+              <a:rPr lang="de-DE" dirty="0"/>
+              <a:t> </a:t>
+            </a:r>
+            <a:r>
+              <a:rPr lang="de-DE" dirty="0" err="1"/>
+              <a:t>path</a:t>
+            </a:r>
+            <a:r>
+              <a:rPr lang="de-DE" dirty="0"/>
+              <a:t> </a:t>
+            </a:r>
+            <a:r>
+              <a:rPr lang="de-DE" dirty="0" err="1"/>
+              <a:t>handling</a:t>
+            </a:r>
+            <a:endParaRPr lang="de-DE" dirty="0"/>
           </a:p>
           <a:p>
             <a:pPr>
@@ -3643,14 +3704,42 @@
               </a:defRPr>
             </a:pPr>
             <a:r>
-              <a:t>• 6,131 route Gold rows</a:t>
-            </a:r>
-          </a:p>
-        </p:txBody>
-      </p:sp>
-      <p:sp>
-        <p:nvSpPr>
-          <p:cNvPr id="11" name="TextBox 10"/>
+              <a:rPr dirty="0"/>
+              <a:t>• </a:t>
+            </a:r>
+            <a:r>
+              <a:rPr lang="de-DE" dirty="0" err="1"/>
+              <a:t>controlled</a:t>
+            </a:r>
+            <a:r>
+              <a:rPr lang="de-DE" dirty="0"/>
+              <a:t> </a:t>
+            </a:r>
+            <a:r>
+              <a:rPr lang="de-DE" dirty="0" err="1"/>
+              <a:t>failure</a:t>
+            </a:r>
+            <a:r>
+              <a:rPr lang="de-DE" dirty="0"/>
+              <a:t> </a:t>
+            </a:r>
+            <a:r>
+              <a:rPr lang="de-DE" dirty="0" err="1"/>
+              <a:t>behaviour</a:t>
+            </a:r>
+            <a:endParaRPr dirty="0"/>
+          </a:p>
+        </p:txBody>
+      </p:sp>
+      <p:sp>
+        <p:nvSpPr>
+          <p:cNvPr id="11" name="TextBox 10">
+            <a:extLst>
+              <a:ext uri="{FF2B5EF4-FFF2-40B4-BE49-F238E27FC236}">
+                <a16:creationId xmlns:a16="http://schemas.microsoft.com/office/drawing/2014/main" id="{474E0B06-7584-1C52-23D6-72FC4B14AB7D}"/>
+              </a:ext>
+            </a:extLst>
+          </p:cNvPr>
           <p:cNvSpPr txBox="1"/>
           <p:nvPr/>
         </p:nvSpPr>
@@ -3668,22 +3757,452 @@
           <a:bodyPr wrap="square" anchor="t">
             <a:spAutoFit/>
           </a:bodyPr>
+          <a:lstStyle>
+            <a:defPPr>
+              <a:defRPr lang="de-DE"/>
+            </a:defPPr>
+            <a:lvl1pPr algn="ctr">
+              <a:defRPr sz="1600" b="1">
+                <a:solidFill>
+                  <a:srgbClr val="58645B"/>
+                </a:solidFill>
+                <a:latin typeface="Aptos"/>
+              </a:defRPr>
+            </a:lvl1pPr>
+          </a:lstStyle>
+          <a:p>
+            <a:r>
+              <a:rPr lang="en-US" dirty="0"/>
+              <a:t>Monthly Airflow quality checks validate new data – </a:t>
+            </a:r>
+            <a:r>
+              <a:rPr lang="en-US" dirty="0" err="1"/>
+              <a:t>pytest</a:t>
+            </a:r>
+            <a:r>
+              <a:rPr lang="en-US" dirty="0"/>
+              <a:t> validates the code when the code changes.</a:t>
+            </a:r>
+            <a:endParaRPr dirty="0"/>
+          </a:p>
+        </p:txBody>
+      </p:sp>
+      <p:sp>
+        <p:nvSpPr>
+          <p:cNvPr id="12" name="TextBox 22">
+            <a:extLst>
+              <a:ext uri="{FF2B5EF4-FFF2-40B4-BE49-F238E27FC236}">
+                <a16:creationId xmlns:a16="http://schemas.microsoft.com/office/drawing/2014/main" id="{AA1A3F1D-78DF-88CB-9B00-D668F914EDCA}"/>
+              </a:ext>
+            </a:extLst>
+          </p:cNvPr>
+          <p:cNvSpPr txBox="1"/>
+          <p:nvPr/>
+        </p:nvSpPr>
+        <p:spPr>
+          <a:xfrm>
+            <a:off x="2743200" y="5876636"/>
+            <a:ext cx="6309360" cy="246221"/>
+          </a:xfrm>
+          <a:prstGeom prst="rect">
+            <a:avLst/>
+          </a:prstGeom>
+          <a:noFill/>
+        </p:spPr>
+        <p:txBody>
+          <a:bodyPr wrap="square" anchor="t">
+            <a:spAutoFit/>
+          </a:bodyPr>
           <a:lstStyle/>
           <a:p>
             <a:pPr algn="ctr"/>
             <a:r>
-              <a:rPr sz="1600" b="1" dirty="0">
+              <a:rPr lang="en-US" sz="1000" b="1" dirty="0">
+                <a:latin typeface="Aptos" panose="020B0004020202020204" pitchFamily="34" charset="0"/>
+              </a:rPr>
+              <a:t>Current setup: </a:t>
+            </a:r>
+            <a:r>
+              <a:rPr lang="en-US" sz="1000" b="1" dirty="0" err="1">
+                <a:latin typeface="Aptos" panose="020B0004020202020204" pitchFamily="34" charset="0"/>
+              </a:rPr>
+              <a:t>pytest</a:t>
+            </a:r>
+            <a:r>
+              <a:rPr lang="en-US" sz="1000" b="1" dirty="0">
+                <a:latin typeface="Aptos" panose="020B0004020202020204" pitchFamily="34" charset="0"/>
+              </a:rPr>
+              <a:t> is started manually - it is not part of the Airflow DAG.</a:t>
+            </a:r>
+            <a:r>
+              <a:rPr lang="de-DE" sz="1000" b="1" dirty="0">
                 <a:solidFill>
                   <a:srgbClr val="58645B"/>
                 </a:solidFill>
-                <a:latin typeface="Aptos"/>
-              </a:rPr>
-              <a:t>This is the proof point: individual components work together as one pipeline.</a:t>
-            </a:r>
-          </a:p>
-        </p:txBody>
-      </p:sp>
+                <a:latin typeface="Aptos" panose="020B0004020202020204" pitchFamily="34" charset="0"/>
+              </a:rPr>
+              <a:t> </a:t>
+            </a:r>
+            <a:endParaRPr sz="1000" b="1" dirty="0">
+              <a:solidFill>
+                <a:srgbClr val="58645B"/>
+              </a:solidFill>
+              <a:latin typeface="Aptos" panose="020B0004020202020204" pitchFamily="34" charset="0"/>
+            </a:endParaRPr>
+          </a:p>
+        </p:txBody>
+      </p:sp>
+      <p:sp>
+        <p:nvSpPr>
+          <p:cNvPr id="14" name="Rounded Rectangle 6">
+            <a:extLst>
+              <a:ext uri="{FF2B5EF4-FFF2-40B4-BE49-F238E27FC236}">
+                <a16:creationId xmlns:a16="http://schemas.microsoft.com/office/drawing/2014/main" id="{1AEDAAA8-F657-70D1-C28F-A8C1295D4861}"/>
+              </a:ext>
+            </a:extLst>
+          </p:cNvPr>
+          <p:cNvSpPr/>
+          <p:nvPr/>
+        </p:nvSpPr>
+        <p:spPr>
+          <a:xfrm>
+            <a:off x="830327" y="3617750"/>
+            <a:ext cx="4663437" cy="1607050"/>
+          </a:xfrm>
+          <a:prstGeom prst="roundRect">
+            <a:avLst/>
+          </a:prstGeom>
+          <a:solidFill>
+            <a:srgbClr val="219149"/>
+          </a:solidFill>
+          <a:ln>
+            <a:solidFill>
+              <a:srgbClr val="DFF5E4"/>
+            </a:solidFill>
+          </a:ln>
+        </p:spPr>
+        <p:style>
+          <a:lnRef idx="1">
+            <a:schemeClr val="accent1"/>
+          </a:lnRef>
+          <a:fillRef idx="3">
+            <a:schemeClr val="accent1"/>
+          </a:fillRef>
+          <a:effectRef idx="2">
+            <a:schemeClr val="accent1"/>
+          </a:effectRef>
+          <a:fontRef idx="minor">
+            <a:schemeClr val="lt1"/>
+          </a:fontRef>
+        </p:style>
+        <p:txBody>
+          <a:bodyPr rtlCol="0" anchor="ctr"/>
+          <a:lstStyle/>
+          <a:p>
+            <a:pPr algn="ctr"/>
+            <a:endParaRPr/>
+          </a:p>
+        </p:txBody>
+      </p:sp>
+      <p:sp>
+        <p:nvSpPr>
+          <p:cNvPr id="16" name="TextBox 7">
+            <a:extLst>
+              <a:ext uri="{FF2B5EF4-FFF2-40B4-BE49-F238E27FC236}">
+                <a16:creationId xmlns:a16="http://schemas.microsoft.com/office/drawing/2014/main" id="{6D658B2B-16FB-1101-F7A6-8ABED01A4B6F}"/>
+              </a:ext>
+            </a:extLst>
+          </p:cNvPr>
+          <p:cNvSpPr txBox="1"/>
+          <p:nvPr/>
+        </p:nvSpPr>
+        <p:spPr>
+          <a:xfrm>
+            <a:off x="1104648" y="3689430"/>
+            <a:ext cx="2331720" cy="261610"/>
+          </a:xfrm>
+          <a:prstGeom prst="rect">
+            <a:avLst/>
+          </a:prstGeom>
+          <a:noFill/>
+        </p:spPr>
+        <p:txBody>
+          <a:bodyPr wrap="square" anchor="t">
+            <a:spAutoFit/>
+          </a:bodyPr>
+          <a:lstStyle/>
+          <a:p>
+            <a:pPr algn="l"/>
+            <a:r>
+              <a:rPr lang="de-DE" sz="1100" b="1" dirty="0">
+                <a:solidFill>
+                  <a:srgbClr val="DFF5E4"/>
+                </a:solidFill>
+                <a:latin typeface="Aptos"/>
+              </a:rPr>
+              <a:t>WHEN SHOULD TESTS BE RUN?</a:t>
+            </a:r>
+            <a:endParaRPr sz="1100" b="1" dirty="0">
+              <a:solidFill>
+                <a:srgbClr val="DFF5E4"/>
+              </a:solidFill>
+              <a:latin typeface="Aptos"/>
+            </a:endParaRPr>
+          </a:p>
+        </p:txBody>
+      </p:sp>
+      <p:sp>
+        <p:nvSpPr>
+          <p:cNvPr id="18" name="TextBox 9">
+            <a:extLst>
+              <a:ext uri="{FF2B5EF4-FFF2-40B4-BE49-F238E27FC236}">
+                <a16:creationId xmlns:a16="http://schemas.microsoft.com/office/drawing/2014/main" id="{30FF2E97-F4DC-D2F5-8786-D3AF3A3C1597}"/>
+              </a:ext>
+            </a:extLst>
+          </p:cNvPr>
+          <p:cNvSpPr txBox="1"/>
+          <p:nvPr/>
+        </p:nvSpPr>
+        <p:spPr>
+          <a:xfrm>
+            <a:off x="1104646" y="3861992"/>
+            <a:ext cx="4389119" cy="1284967"/>
+          </a:xfrm>
+          <a:prstGeom prst="rect">
+            <a:avLst/>
+          </a:prstGeom>
+          <a:noFill/>
+        </p:spPr>
+        <p:txBody>
+          <a:bodyPr wrap="square">
+            <a:spAutoFit/>
+          </a:bodyPr>
+          <a:lstStyle/>
+          <a:p>
+            <a:pPr>
+              <a:spcAft>
+                <a:spcPts val="700"/>
+              </a:spcAft>
+              <a:defRPr sz="1500">
+                <a:solidFill>
+                  <a:srgbClr val="FFFFFF"/>
+                </a:solidFill>
+                <a:latin typeface="Aptos"/>
+              </a:defRPr>
+            </a:pPr>
+            <a:r>
+              <a:rPr lang="de-DE" dirty="0"/>
+              <a:t>• after </a:t>
+            </a:r>
+            <a:r>
+              <a:rPr lang="de-DE" dirty="0" err="1"/>
+              <a:t>changes</a:t>
+            </a:r>
+            <a:r>
+              <a:rPr lang="de-DE" dirty="0"/>
+              <a:t> to </a:t>
+            </a:r>
+            <a:r>
+              <a:rPr lang="de-DE" dirty="0" err="1"/>
+              <a:t>transformation</a:t>
+            </a:r>
+            <a:r>
+              <a:rPr lang="de-DE" dirty="0"/>
+              <a:t> </a:t>
+            </a:r>
+            <a:r>
+              <a:rPr lang="de-DE" dirty="0" err="1"/>
+              <a:t>or</a:t>
+            </a:r>
+            <a:r>
+              <a:rPr lang="de-DE" dirty="0"/>
+              <a:t> </a:t>
+            </a:r>
+            <a:r>
+              <a:rPr lang="de-DE" dirty="0" err="1"/>
+              <a:t>loading</a:t>
+            </a:r>
+            <a:r>
+              <a:rPr lang="de-DE" dirty="0"/>
+              <a:t> code</a:t>
+            </a:r>
+          </a:p>
+          <a:p>
+            <a:pPr>
+              <a:spcAft>
+                <a:spcPts val="700"/>
+              </a:spcAft>
+              <a:defRPr sz="1500">
+                <a:solidFill>
+                  <a:srgbClr val="FFFFFF"/>
+                </a:solidFill>
+                <a:latin typeface="Aptos"/>
+              </a:defRPr>
+            </a:pPr>
+            <a:r>
+              <a:rPr lang="de-DE" dirty="0"/>
+              <a:t>• </a:t>
+            </a:r>
+            <a:r>
+              <a:rPr lang="de-DE" dirty="0" err="1"/>
+              <a:t>before</a:t>
+            </a:r>
+            <a:r>
+              <a:rPr lang="de-DE" dirty="0"/>
+              <a:t> </a:t>
+            </a:r>
+            <a:r>
+              <a:rPr lang="de-DE" dirty="0" err="1"/>
+              <a:t>commit</a:t>
+            </a:r>
+            <a:r>
+              <a:rPr lang="de-DE" dirty="0"/>
+              <a:t> / release / </a:t>
+            </a:r>
+            <a:r>
+              <a:rPr lang="de-DE" dirty="0" err="1"/>
+              <a:t>presentation</a:t>
+            </a:r>
+            <a:endParaRPr lang="de-DE" dirty="0"/>
+          </a:p>
+          <a:p>
+            <a:pPr>
+              <a:spcAft>
+                <a:spcPts val="700"/>
+              </a:spcAft>
+              <a:defRPr sz="1500">
+                <a:solidFill>
+                  <a:srgbClr val="FFFFFF"/>
+                </a:solidFill>
+                <a:latin typeface="Aptos"/>
+              </a:defRPr>
+            </a:pPr>
+            <a:r>
+              <a:rPr lang="de-DE" dirty="0"/>
+              <a:t>• After </a:t>
+            </a:r>
+            <a:r>
+              <a:rPr lang="de-DE" dirty="0" err="1"/>
+              <a:t>dependency</a:t>
+            </a:r>
+            <a:r>
+              <a:rPr lang="de-DE" dirty="0"/>
+              <a:t> </a:t>
+            </a:r>
+            <a:r>
+              <a:rPr lang="de-DE" dirty="0" err="1"/>
+              <a:t>or</a:t>
+            </a:r>
+            <a:r>
+              <a:rPr lang="de-DE" dirty="0"/>
+              <a:t> </a:t>
+            </a:r>
+            <a:r>
+              <a:rPr lang="de-DE" dirty="0" err="1"/>
+              <a:t>environment</a:t>
+            </a:r>
+            <a:r>
+              <a:rPr lang="de-DE" dirty="0"/>
+              <a:t> </a:t>
+            </a:r>
+            <a:r>
+              <a:rPr lang="de-DE" dirty="0" err="1"/>
+              <a:t>changes</a:t>
+            </a:r>
+            <a:endParaRPr lang="de-DE" dirty="0"/>
+          </a:p>
+          <a:p>
+            <a:pPr>
+              <a:spcAft>
+                <a:spcPts val="700"/>
+              </a:spcAft>
+              <a:defRPr sz="1500">
+                <a:solidFill>
+                  <a:srgbClr val="FFFFFF"/>
+                </a:solidFill>
+                <a:latin typeface="Aptos"/>
+              </a:defRPr>
+            </a:pPr>
+            <a:r>
+              <a:rPr lang="de-DE" dirty="0"/>
+              <a:t>• Not </a:t>
+            </a:r>
+            <a:r>
+              <a:rPr lang="de-DE" dirty="0" err="1"/>
+              <a:t>simply</a:t>
+            </a:r>
+            <a:r>
+              <a:rPr lang="de-DE" dirty="0"/>
+              <a:t> </a:t>
+            </a:r>
+            <a:r>
+              <a:rPr lang="de-DE" dirty="0" err="1"/>
+              <a:t>because</a:t>
+            </a:r>
+            <a:r>
+              <a:rPr lang="de-DE" dirty="0"/>
+              <a:t> a </a:t>
+            </a:r>
+            <a:r>
+              <a:rPr lang="de-DE" dirty="0" err="1"/>
+              <a:t>new</a:t>
+            </a:r>
+            <a:r>
+              <a:rPr lang="de-DE" dirty="0"/>
+              <a:t> </a:t>
+            </a:r>
+            <a:r>
+              <a:rPr lang="de-DE" dirty="0" err="1"/>
+              <a:t>month</a:t>
+            </a:r>
+            <a:r>
+              <a:rPr lang="de-DE" dirty="0"/>
+              <a:t> </a:t>
+            </a:r>
+            <a:r>
+              <a:rPr lang="de-DE" dirty="0" err="1"/>
+              <a:t>arrives</a:t>
+            </a:r>
+            <a:endParaRPr dirty="0"/>
+          </a:p>
+        </p:txBody>
+      </p:sp>
+      <p:pic>
+        <p:nvPicPr>
+          <p:cNvPr id="20" name="Picture 5" descr="template_slide2_image.png">
+            <a:extLst>
+              <a:ext uri="{FF2B5EF4-FFF2-40B4-BE49-F238E27FC236}">
+                <a16:creationId xmlns:a16="http://schemas.microsoft.com/office/drawing/2014/main" id="{4FE1A6CF-DB17-B3AF-43C1-5C46BB9292B0}"/>
+              </a:ext>
+            </a:extLst>
+          </p:cNvPr>
+          <p:cNvPicPr>
+            <a:picLocks noChangeAspect="1"/>
+          </p:cNvPicPr>
+          <p:nvPr/>
+        </p:nvPicPr>
+        <p:blipFill>
+          <a:blip r:embed="rId2"/>
+          <a:stretch>
+            <a:fillRect/>
+          </a:stretch>
+        </p:blipFill>
+        <p:spPr>
+          <a:xfrm>
+            <a:off x="5852156" y="2154154"/>
+            <a:ext cx="5120640" cy="2840193"/>
+          </a:xfrm>
+          <a:prstGeom prst="rect">
+            <a:avLst/>
+          </a:prstGeom>
+        </p:spPr>
+      </p:pic>
     </p:spTree>
+    <p:extLst>
+      <p:ext uri="{BB962C8B-B14F-4D97-AF65-F5344CB8AC3E}">
+        <p14:creationId xmlns:p14="http://schemas.microsoft.com/office/powerpoint/2010/main" val="3782760169"/>
+      </p:ext>
+    </p:extLst>
   </p:cSld>
   <p:clrMapOvr>
     <a:masterClrMapping/>
@@ -4069,7 +4588,52 @@
                 </a:solidFill>
                 <a:latin typeface="Aptos"/>
               </a:rPr>
-              <a:t>departure / arrival </a:t>
+              <a:t>departure </a:t>
+            </a:r>
+            <a:r>
+              <a:rPr lang="de-DE" sz="1400" b="0" dirty="0">
+                <a:solidFill>
+                  <a:srgbClr val="FFFFFF"/>
+                </a:solidFill>
+                <a:latin typeface="Aptos"/>
+              </a:rPr>
+              <a:t>&amp;</a:t>
+            </a:r>
+            <a:r>
+              <a:rPr sz="1400" b="0" dirty="0">
+                <a:solidFill>
+                  <a:srgbClr val="FFFFFF"/>
+                </a:solidFill>
+                <a:latin typeface="Aptos"/>
+              </a:rPr>
+              <a:t> arrival</a:t>
+            </a:r>
+            <a:r>
+              <a:rPr lang="de-DE" sz="1400" b="0" dirty="0">
+                <a:solidFill>
+                  <a:srgbClr val="FFFFFF"/>
+                </a:solidFill>
+                <a:latin typeface="Aptos"/>
+              </a:rPr>
+              <a:t> </a:t>
+            </a:r>
+            <a:r>
+              <a:rPr lang="de-DE" sz="1400" b="0" dirty="0" err="1">
+                <a:solidFill>
+                  <a:srgbClr val="FFFFFF"/>
+                </a:solidFill>
+                <a:latin typeface="Aptos"/>
+              </a:rPr>
+              <a:t>reliability</a:t>
+            </a:r>
+            <a:r>
+              <a:rPr sz="1400" b="0" dirty="0">
+                <a:solidFill>
+                  <a:srgbClr val="FFFFFF"/>
+                </a:solidFill>
+                <a:latin typeface="Aptos"/>
+              </a:rPr>
+              <a:t> </a:t>
             </a:r>
             <a:endParaRPr lang="de-DE" sz="1400" b="0" dirty="0">
               <a:solidFill>
@@ -4081,13 +4645,31 @@
           <a:p>
             <a:pPr algn="ctr"/>
             <a:r>
+              <a:rPr lang="de-DE" sz="1400" b="0" dirty="0" err="1">
+                <a:solidFill>
+                  <a:srgbClr val="FFFFFF"/>
+                </a:solidFill>
+                <a:latin typeface="Aptos"/>
+              </a:rPr>
+              <a:t>with</a:t>
+            </a:r>
+            <a:r>
+              <a:rPr lang="de-DE" sz="1400" b="0" dirty="0">
+                <a:solidFill>
+                  <a:srgbClr val="FFFFFF"/>
+                </a:solidFill>
+                <a:latin typeface="Aptos"/>
+              </a:rPr>
+              <a:t> KPI and</a:t>
+            </a:r>
+            <a:r>
               <a:rPr sz="1400" b="0" dirty="0">
                 <a:solidFill>
                   <a:srgbClr val="FFFFFF"/>
                 </a:solidFill>
                 <a:latin typeface="Aptos"/>
               </a:rPr>
-              <a:t>reliability plus map</a:t>
+              <a:t> map</a:t>
             </a:r>
           </a:p>
         </p:txBody>
@@ -4368,13 +4950,31 @@
           <a:p>
             <a:pPr algn="l"/>
             <a:r>
-              <a:rPr sz="2500" b="1">
+              <a:rPr sz="2500" b="1" dirty="0">
                 <a:solidFill>
                   <a:srgbClr val="005020"/>
                 </a:solidFill>
                 <a:latin typeface="Aptos"/>
               </a:rPr>
-              <a:t>RECOMMENDATIONS &amp; OUTLOOK</a:t>
+              <a:t>RE</a:t>
+            </a:r>
+            <a:r>
+              <a:rPr lang="de-DE" sz="2500" b="1" dirty="0">
+                <a:solidFill>
+                  <a:srgbClr val="005020"/>
+                </a:solidFill>
+                <a:latin typeface="Aptos"/>
+              </a:rPr>
+              <a:t>SULTS</a:t>
+            </a:r>
+            <a:r>
+              <a:rPr sz="2500" b="1" dirty="0">
+                <a:solidFill>
+                  <a:srgbClr val="005020"/>
+                </a:solidFill>
+                <a:latin typeface="Aptos"/>
+              </a:rPr>
+              <a:t> &amp; OUTLOOK</a:t>
             </a:r>
           </a:p>
         </p:txBody>
@@ -10328,8 +10928,8 @@
         </p:nvSpPr>
         <p:spPr>
           <a:xfrm>
-            <a:off x="3904488" y="3063240"/>
-            <a:ext cx="2020824" cy="228600"/>
+            <a:off x="3904488" y="3095896"/>
+            <a:ext cx="2020824" cy="307777"/>
           </a:xfrm>
           <a:prstGeom prst="rect">
             <a:avLst/>
@@ -10344,7 +10944,7 @@
           <a:p>
             <a:pPr algn="ctr"/>
             <a:r>
-              <a:rPr sz="1800" b="1">
+              <a:rPr sz="1400" b="1" dirty="0" err="1">
                 <a:solidFill>
                   <a:srgbClr val="005020"/>
                 </a:solidFill>
@@ -10352,6 +10952,12 @@
               </a:rPr>
               <a:t>fact_flight</a:t>
             </a:r>
+            <a:endParaRPr sz="1400" b="1" dirty="0">
+              <a:solidFill>
+                <a:srgbClr val="005020"/>
+              </a:solidFill>
+              <a:latin typeface="Aptos"/>
+            </a:endParaRPr>
           </a:p>
         </p:txBody>
       </p:sp>
@@ -10425,7 +11031,7 @@
           <a:p>
             <a:pPr algn="ctr"/>
             <a:r>
-              <a:rPr sz="1400" b="1">
+              <a:rPr sz="1400" b="1" dirty="0" err="1">
                 <a:solidFill>
                   <a:srgbClr val="005020"/>
                 </a:solidFill>
@@ -10433,6 +11039,12 @@
               </a:rPr>
               <a:t>dim_date</a:t>
             </a:r>
+            <a:endParaRPr sz="1400" b="1" dirty="0">
+              <a:solidFill>
+                <a:srgbClr val="005020"/>
+              </a:solidFill>
+              <a:latin typeface="Aptos"/>
+            </a:endParaRPr>
           </a:p>
         </p:txBody>
       </p:sp>
@@ -10506,7 +11118,7 @@
           <a:p>
             <a:pPr algn="ctr"/>
             <a:r>
-              <a:rPr sz="1400" b="1">
+              <a:rPr sz="1400" b="1" dirty="0" err="1">
                 <a:solidFill>
                   <a:srgbClr val="005020"/>
                 </a:solidFill>
@@ -10514,6 +11126,12 @@
               </a:rPr>
               <a:t>dim_airline</a:t>
             </a:r>
+            <a:endParaRPr sz="1400" b="1" dirty="0">
+              <a:solidFill>
+                <a:srgbClr val="005020"/>
+              </a:solidFill>
+              <a:latin typeface="Aptos"/>
+            </a:endParaRPr>
           </a:p>
         </p:txBody>
       </p:sp>
@@ -10587,7 +11205,7 @@
           <a:p>
             <a:pPr algn="ctr"/>
             <a:r>
-              <a:rPr sz="1400" b="1">
+              <a:rPr sz="1400" b="1" dirty="0" err="1">
                 <a:solidFill>
                   <a:srgbClr val="005020"/>
                 </a:solidFill>
@@ -10595,6 +11213,12 @@
               </a:rPr>
               <a:t>dim_airport</a:t>
             </a:r>
+            <a:endParaRPr sz="1400" b="1" dirty="0">
+              <a:solidFill>
+                <a:srgbClr val="005020"/>
+              </a:solidFill>
+              <a:latin typeface="Aptos"/>
+            </a:endParaRPr>
           </a:p>
         </p:txBody>
       </p:sp>
@@ -10653,7 +11277,7 @@
         <p:spPr>
           <a:xfrm>
             <a:off x="7955280" y="1837944"/>
-            <a:ext cx="2468880" cy="228600"/>
+            <a:ext cx="2468880" cy="323165"/>
           </a:xfrm>
           <a:prstGeom prst="rect">
             <a:avLst/>
@@ -10668,7 +11292,7 @@
           <a:p>
             <a:pPr algn="ctr"/>
             <a:r>
-              <a:rPr sz="1350" b="1">
+              <a:rPr sz="1500" b="1" dirty="0">
                 <a:solidFill>
                   <a:srgbClr val="005020"/>
                 </a:solidFill>
@@ -10734,7 +11358,7 @@
         <p:spPr>
           <a:xfrm>
             <a:off x="7955280" y="3072384"/>
-            <a:ext cx="2468880" cy="228600"/>
+            <a:ext cx="2468880" cy="323165"/>
           </a:xfrm>
           <a:prstGeom prst="rect">
             <a:avLst/>
@@ -10749,7 +11373,7 @@
           <a:p>
             <a:pPr algn="ctr"/>
             <a:r>
-              <a:rPr sz="1350" b="1">
+              <a:rPr sz="1500" b="1" dirty="0">
                 <a:solidFill>
                   <a:srgbClr val="005020"/>
                 </a:solidFill>
@@ -10815,7 +11439,7 @@
         <p:spPr>
           <a:xfrm>
             <a:off x="7955280" y="4306824"/>
-            <a:ext cx="2468880" cy="228600"/>
+            <a:ext cx="2468880" cy="323165"/>
           </a:xfrm>
           <a:prstGeom prst="rect">
             <a:avLst/>
@@ -10830,7 +11454,7 @@
           <a:p>
             <a:pPr algn="ctr"/>
             <a:r>
-              <a:rPr sz="1350" b="1">
+              <a:rPr sz="1500" b="1" dirty="0">
                 <a:solidFill>
                   <a:srgbClr val="005020"/>
                 </a:solidFill>
@@ -10871,7 +11495,25 @@
                 </a:solidFill>
                 <a:latin typeface="Aptos"/>
               </a:rPr>
-              <a:t>The model separates operational detail from business-level reliability metrics.</a:t>
+              <a:t>The </a:t>
+            </a:r>
+            <a:r>
+              <a:rPr lang="de-DE" sz="1600" b="1" dirty="0">
+                <a:solidFill>
+                  <a:srgbClr val="005020"/>
+                </a:solidFill>
+                <a:latin typeface="Aptos"/>
+              </a:rPr>
+              <a:t>star-schema </a:t>
+            </a:r>
+            <a:r>
+              <a:rPr sz="1600" b="1" dirty="0">
+                <a:solidFill>
+                  <a:srgbClr val="005020"/>
+                </a:solidFill>
+                <a:latin typeface="Aptos"/>
+              </a:rPr>
+              <a:t>model separates operational detail from business-level reliability metrics.</a:t>
             </a:r>
           </a:p>
         </p:txBody>
@@ -11730,6 +12372,17 @@
 </file>
 
 <file path=customXml/item1.xml><?xml version="1.0" encoding="utf-8"?>
+<p:properties xmlns:p="http://schemas.microsoft.com/office/2006/metadata/properties" xmlns:xsi="http://www.w3.org/2001/XMLSchema-instance" xmlns:pc="http://schemas.microsoft.com/office/infopath/2007/PartnerControls">
+  <documentManagement>
+    <lcf76f155ced4ddcb4097134ff3c332f xmlns="9aa5a65c-f4ce-4ee4-acf7-5e3b2ace5bfd">
+      <Terms xmlns="http://schemas.microsoft.com/office/infopath/2007/PartnerControls"/>
+    </lcf76f155ced4ddcb4097134ff3c332f>
+    <TaxCatchAll xmlns="66bb7404-1a7c-4cd5-b899-503b4f4a7830" xsi:nil="true"/>
+  </documentManagement>
+</p:properties>
+</file>
+
+<file path=customXml/item2.xml><?xml version="1.0" encoding="utf-8"?>
 <ct:contentTypeSchema xmlns:ct="http://schemas.microsoft.com/office/2006/metadata/contentType" xmlns:ma="http://schemas.microsoft.com/office/2006/metadata/properties/metaAttributes" ct:_="" ma:_="" ma:contentTypeName="Document" ma:contentTypeID="0x0101006CD9D0312D38F94DA02BEC0C7012E0F5" ma:contentTypeVersion="11" ma:contentTypeDescription="Create a new document." ma:contentTypeScope="" ma:versionID="9a73361d995b0bed58ef5b3962fcd148">
   <xsd:schema xmlns:xsd="http://www.w3.org/2001/XMLSchema" xmlns:xs="http://www.w3.org/2001/XMLSchema" xmlns:p="http://schemas.microsoft.com/office/2006/metadata/properties" xmlns:ns2="9aa5a65c-f4ce-4ee4-acf7-5e3b2ace5bfd" xmlns:ns3="66bb7404-1a7c-4cd5-b899-503b4f4a7830" targetNamespace="http://schemas.microsoft.com/office/2006/metadata/properties" ma:root="true" ma:fieldsID="a85bbe206d45265116e8c51ee0380a62" ns2:_="" ns3:_="">
     <xsd:import namespace="9aa5a65c-f4ce-4ee4-acf7-5e3b2ace5bfd"/>
@@ -11924,17 +12577,6 @@
 </ct:contentTypeSchema>
 </file>
 
-<file path=customXml/item2.xml><?xml version="1.0" encoding="utf-8"?>
-<p:properties xmlns:p="http://schemas.microsoft.com/office/2006/metadata/properties" xmlns:xsi="http://www.w3.org/2001/XMLSchema-instance" xmlns:pc="http://schemas.microsoft.com/office/infopath/2007/PartnerControls">
-  <documentManagement>
-    <lcf76f155ced4ddcb4097134ff3c332f xmlns="9aa5a65c-f4ce-4ee4-acf7-5e3b2ace5bfd">
-      <Terms xmlns="http://schemas.microsoft.com/office/infopath/2007/PartnerControls"/>
-    </lcf76f155ced4ddcb4097134ff3c332f>
-    <TaxCatchAll xmlns="66bb7404-1a7c-4cd5-b899-503b4f4a7830" xsi:nil="true"/>
-  </documentManagement>
-</p:properties>
-</file>
-
 <file path=customXml/item3.xml><?xml version="1.0" encoding="utf-8"?>
 <?mso-contentType ?>
 <FormTemplates xmlns="http://schemas.microsoft.com/sharepoint/v3/contenttype/forms">
@@ -11945,6 +12587,17 @@
 </file>
 
 <file path=customXml/itemProps1.xml><?xml version="1.0" encoding="utf-8"?>
+<ds:datastoreItem xmlns:ds="http://schemas.openxmlformats.org/officeDocument/2006/customXml" ds:itemID="{80B8EBE4-FC2B-439D-83E4-1FC00013EB90}">
+  <ds:schemaRefs>
+    <ds:schemaRef ds:uri="http://schemas.microsoft.com/office/2006/metadata/properties"/>
+    <ds:schemaRef ds:uri="http://schemas.microsoft.com/office/infopath/2007/PartnerControls"/>
+    <ds:schemaRef ds:uri="9aa5a65c-f4ce-4ee4-acf7-5e3b2ace5bfd"/>
+    <ds:schemaRef ds:uri="66bb7404-1a7c-4cd5-b899-503b4f4a7830"/>
+  </ds:schemaRefs>
+</ds:datastoreItem>
+</file>
+
+<file path=customXml/itemProps2.xml><?xml version="1.0" encoding="utf-8"?>
 <ds:datastoreItem xmlns:ds="http://schemas.openxmlformats.org/officeDocument/2006/customXml" ds:itemID="{D9BC1E96-25F1-44B9-8174-507263BA1D6E}">
   <ds:schemaRefs>
     <ds:schemaRef ds:uri="http://schemas.microsoft.com/office/2006/metadata/contentType"/>
@@ -11963,17 +12616,6 @@
 </ds:datastoreItem>
 </file>
 
-<file path=customXml/itemProps2.xml><?xml version="1.0" encoding="utf-8"?>
-<ds:datastoreItem xmlns:ds="http://schemas.openxmlformats.org/officeDocument/2006/customXml" ds:itemID="{80B8EBE4-FC2B-439D-83E4-1FC00013EB90}">
-  <ds:schemaRefs>
-    <ds:schemaRef ds:uri="http://schemas.microsoft.com/office/2006/metadata/properties"/>
-    <ds:schemaRef ds:uri="http://schemas.microsoft.com/office/infopath/2007/PartnerControls"/>
-    <ds:schemaRef ds:uri="9aa5a65c-f4ce-4ee4-acf7-5e3b2ace5bfd"/>
-    <ds:schemaRef ds:uri="66bb7404-1a7c-4cd5-b899-503b4f4a7830"/>
-  </ds:schemaRefs>
-</ds:datastoreItem>
-</file>
-
 <file path=customXml/itemProps3.xml><?xml version="1.0" encoding="utf-8"?>
 <ds:datastoreItem xmlns:ds="http://schemas.openxmlformats.org/officeDocument/2006/customXml" ds:itemID="{50732050-07CB-4EA1-8B62-F2C4125C0DDD}">
   <ds:schemaRefs>

--- a/docs/Airline_Reliability_PB.pptx
+++ b/docs/Airline_Reliability_PB.pptx
@@ -1,14 +1,20 @@
 
 <file path=ppt/presentation.xml><?xml version="1.0" encoding="utf-8"?>
-<p:presentation xmlns:a="http://schemas.openxmlformats.org/drawingml/2006/main" xmlns:r="http://schemas.openxmlformats.org/officeDocument/2006/relationships" xmlns:p="http://schemas.openxmlformats.org/presentationml/2006/main" saveSubsetFonts="1" autoCompressPictures="0">
+<p:presentation xmlns:a="http://schemas.openxmlformats.org/drawingml/2006/main" xmlns:r="http://schemas.openxmlformats.org/officeDocument/2006/relationships" xmlns:p="http://schemas.openxmlformats.org/presentationml/2006/main" showSpecialPlsOnTitleSld="0" saveSubsetFonts="1" autoCompressPictures="0">
   <p:sldMasterIdLst>
     <p:sldMasterId id="2147483660" r:id="rId4"/>
   </p:sldMasterIdLst>
+  <p:notesMasterIdLst>
+    <p:notesMasterId r:id="rId22"/>
+  </p:notesMasterIdLst>
+  <p:handoutMasterIdLst>
+    <p:handoutMasterId r:id="rId23"/>
+  </p:handoutMasterIdLst>
   <p:sldIdLst>
     <p:sldId id="256" r:id="rId5"/>
     <p:sldId id="257" r:id="rId6"/>
     <p:sldId id="258" r:id="rId7"/>
-    <p:sldId id="259" r:id="rId8"/>
+    <p:sldId id="270" r:id="rId8"/>
     <p:sldId id="260" r:id="rId9"/>
     <p:sldId id="261" r:id="rId10"/>
     <p:sldId id="262" r:id="rId11"/>
@@ -17,7 +23,11 @@
     <p:sldId id="265" r:id="rId14"/>
     <p:sldId id="269" r:id="rId15"/>
     <p:sldId id="267" r:id="rId16"/>
-    <p:sldId id="268" r:id="rId17"/>
+    <p:sldId id="273" r:id="rId17"/>
+    <p:sldId id="276" r:id="rId18"/>
+    <p:sldId id="275" r:id="rId19"/>
+    <p:sldId id="268" r:id="rId20"/>
+    <p:sldId id="271" r:id="rId21"/>
   </p:sldIdLst>
   <p:sldSz cx="12192000" cy="6858000"/>
   <p:notesSz cx="6858000" cy="9144000"/>
@@ -119,6 +129,9 @@
   <p:extLst>
     <p:ext uri="{EFAFB233-063F-42B5-8137-9DF3F51BA10A}">
       <p15:sldGuideLst xmlns:p15="http://schemas.microsoft.com/office/powerpoint/2012/main"/>
+    </p:ext>
+    <p:ext uri="{2D200454-40CA-4A62-9FC3-DE9A4176ACB9}">
+      <p15:notesGuideLst xmlns:p15="http://schemas.microsoft.com/office/powerpoint/2012/main"/>
     </p:ext>
   </p:extLst>
 </p:presentation>
@@ -353,6 +366,546 @@
 </pc:chgInfo>
 </file>
 
+<file path=ppt/handoutMasters/handoutMaster1.xml><?xml version="1.0" encoding="utf-8"?>
+<p:handoutMaster xmlns:a="http://schemas.openxmlformats.org/drawingml/2006/main" xmlns:r="http://schemas.openxmlformats.org/officeDocument/2006/relationships" xmlns:p="http://schemas.openxmlformats.org/presentationml/2006/main">
+  <p:cSld>
+    <p:bg>
+      <p:bgRef idx="1001">
+        <a:schemeClr val="bg1"/>
+      </p:bgRef>
+    </p:bg>
+    <p:spTree>
+      <p:nvGrpSpPr>
+        <p:cNvPr id="1" name=""/>
+        <p:cNvGrpSpPr/>
+        <p:nvPr/>
+      </p:nvGrpSpPr>
+      <p:grpSpPr>
+        <a:xfrm>
+          <a:off x="0" y="0"/>
+          <a:ext cx="0" cy="0"/>
+          <a:chOff x="0" y="0"/>
+          <a:chExt cx="0" cy="0"/>
+        </a:xfrm>
+      </p:grpSpPr>
+      <p:sp>
+        <p:nvSpPr>
+          <p:cNvPr id="2" name="Kopfzeilenplatzhalter 1">
+            <a:extLst>
+              <a:ext uri="{FF2B5EF4-FFF2-40B4-BE49-F238E27FC236}">
+                <a16:creationId xmlns:a16="http://schemas.microsoft.com/office/drawing/2014/main" id="{8AD1B1D2-63FC-4CD3-E539-ACF1F404BB7F}"/>
+              </a:ext>
+            </a:extLst>
+          </p:cNvPr>
+          <p:cNvSpPr>
+            <a:spLocks noGrp="1"/>
+          </p:cNvSpPr>
+          <p:nvPr>
+            <p:ph type="hdr" sz="quarter"/>
+          </p:nvPr>
+        </p:nvSpPr>
+        <p:spPr>
+          <a:xfrm>
+            <a:off x="0" y="0"/>
+            <a:ext cx="2971800" cy="458788"/>
+          </a:xfrm>
+          <a:prstGeom prst="rect">
+            <a:avLst/>
+          </a:prstGeom>
+        </p:spPr>
+        <p:txBody>
+          <a:bodyPr vert="horz" lIns="91440" tIns="45720" rIns="91440" bIns="45720" rtlCol="0"/>
+          <a:lstStyle>
+            <a:lvl1pPr algn="l">
+              <a:defRPr sz="1200"/>
+            </a:lvl1pPr>
+          </a:lstStyle>
+          <a:p>
+            <a:endParaRPr lang="de-DE"/>
+          </a:p>
+        </p:txBody>
+      </p:sp>
+      <p:sp>
+        <p:nvSpPr>
+          <p:cNvPr id="3" name="Datumsplatzhalter 2">
+            <a:extLst>
+              <a:ext uri="{FF2B5EF4-FFF2-40B4-BE49-F238E27FC236}">
+                <a16:creationId xmlns:a16="http://schemas.microsoft.com/office/drawing/2014/main" id="{96A9716E-3564-3E88-D126-25C894C4CA2E}"/>
+              </a:ext>
+            </a:extLst>
+          </p:cNvPr>
+          <p:cNvSpPr>
+            <a:spLocks noGrp="1"/>
+          </p:cNvSpPr>
+          <p:nvPr>
+            <p:ph type="dt" sz="quarter" idx="1"/>
+          </p:nvPr>
+        </p:nvSpPr>
+        <p:spPr>
+          <a:xfrm>
+            <a:off x="3884613" y="0"/>
+            <a:ext cx="2971800" cy="458788"/>
+          </a:xfrm>
+          <a:prstGeom prst="rect">
+            <a:avLst/>
+          </a:prstGeom>
+        </p:spPr>
+        <p:txBody>
+          <a:bodyPr vert="horz" lIns="91440" tIns="45720" rIns="91440" bIns="45720" rtlCol="0"/>
+          <a:lstStyle>
+            <a:lvl1pPr algn="r">
+              <a:defRPr sz="1200"/>
+            </a:lvl1pPr>
+          </a:lstStyle>
+          <a:p>
+            <a:fld id="{3CF752A9-003E-4083-9847-72AB3F27C035}" type="datetimeFigureOut">
+              <a:rPr lang="de-DE" smtClean="0"/>
+              <a:t>03.09.2026</a:t>
+            </a:fld>
+            <a:endParaRPr lang="de-DE"/>
+          </a:p>
+        </p:txBody>
+      </p:sp>
+      <p:sp>
+        <p:nvSpPr>
+          <p:cNvPr id="4" name="Fußzeilenplatzhalter 3">
+            <a:extLst>
+              <a:ext uri="{FF2B5EF4-FFF2-40B4-BE49-F238E27FC236}">
+                <a16:creationId xmlns:a16="http://schemas.microsoft.com/office/drawing/2014/main" id="{E1C78FA7-4ED0-102A-627D-E9FE3381B0C4}"/>
+              </a:ext>
+            </a:extLst>
+          </p:cNvPr>
+          <p:cNvSpPr>
+            <a:spLocks noGrp="1"/>
+          </p:cNvSpPr>
+          <p:nvPr>
+            <p:ph type="ftr" sz="quarter" idx="2"/>
+          </p:nvPr>
+        </p:nvSpPr>
+        <p:spPr>
+          <a:xfrm>
+            <a:off x="0" y="8685213"/>
+            <a:ext cx="2971800" cy="458787"/>
+          </a:xfrm>
+          <a:prstGeom prst="rect">
+            <a:avLst/>
+          </a:prstGeom>
+        </p:spPr>
+        <p:txBody>
+          <a:bodyPr vert="horz" lIns="91440" tIns="45720" rIns="91440" bIns="45720" rtlCol="0" anchor="b"/>
+          <a:lstStyle>
+            <a:lvl1pPr algn="l">
+              <a:defRPr sz="1200"/>
+            </a:lvl1pPr>
+          </a:lstStyle>
+          <a:p>
+            <a:endParaRPr lang="de-DE"/>
+          </a:p>
+        </p:txBody>
+      </p:sp>
+      <p:sp>
+        <p:nvSpPr>
+          <p:cNvPr id="5" name="Foliennummernplatzhalter 4">
+            <a:extLst>
+              <a:ext uri="{FF2B5EF4-FFF2-40B4-BE49-F238E27FC236}">
+                <a16:creationId xmlns:a16="http://schemas.microsoft.com/office/drawing/2014/main" id="{4C926AD6-72F8-2034-146F-D82CC4869E31}"/>
+              </a:ext>
+            </a:extLst>
+          </p:cNvPr>
+          <p:cNvSpPr>
+            <a:spLocks noGrp="1"/>
+          </p:cNvSpPr>
+          <p:nvPr>
+            <p:ph type="sldNum" sz="quarter" idx="3"/>
+          </p:nvPr>
+        </p:nvSpPr>
+        <p:spPr>
+          <a:xfrm>
+            <a:off x="3884613" y="8685213"/>
+            <a:ext cx="2971800" cy="458787"/>
+          </a:xfrm>
+          <a:prstGeom prst="rect">
+            <a:avLst/>
+          </a:prstGeom>
+        </p:spPr>
+        <p:txBody>
+          <a:bodyPr vert="horz" lIns="91440" tIns="45720" rIns="91440" bIns="45720" rtlCol="0" anchor="b"/>
+          <a:lstStyle>
+            <a:lvl1pPr algn="r">
+              <a:defRPr sz="1200"/>
+            </a:lvl1pPr>
+          </a:lstStyle>
+          <a:p>
+            <a:fld id="{84A65C52-4DFC-4F14-A37C-948ACAE5FB6E}" type="slidenum">
+              <a:rPr lang="de-DE" smtClean="0"/>
+              <a:t>‹Nr.›</a:t>
+            </a:fld>
+            <a:endParaRPr lang="de-DE"/>
+          </a:p>
+        </p:txBody>
+      </p:sp>
+    </p:spTree>
+    <p:extLst>
+      <p:ext uri="{BB962C8B-B14F-4D97-AF65-F5344CB8AC3E}">
+        <p14:creationId xmlns:p14="http://schemas.microsoft.com/office/powerpoint/2010/main" val="1780929447"/>
+      </p:ext>
+    </p:extLst>
+  </p:cSld>
+  <p:clrMap bg1="lt1" tx1="dk1" bg2="lt2" tx2="dk2" accent1="accent1" accent2="accent2" accent3="accent3" accent4="accent4" accent5="accent5" accent6="accent6" hlink="hlink" folHlink="folHlink"/>
+  <p:hf sldNum="0" hdr="0" ftr="0" dt="0"/>
+</p:handoutMaster>
+</file>
+
+<file path=ppt/notesMasters/notesMaster1.xml><?xml version="1.0" encoding="utf-8"?>
+<p:notesMaster xmlns:a="http://schemas.openxmlformats.org/drawingml/2006/main" xmlns:r="http://schemas.openxmlformats.org/officeDocument/2006/relationships" xmlns:p="http://schemas.openxmlformats.org/presentationml/2006/main">
+  <p:cSld>
+    <p:bg>
+      <p:bgRef idx="1001">
+        <a:schemeClr val="bg1"/>
+      </p:bgRef>
+    </p:bg>
+    <p:spTree>
+      <p:nvGrpSpPr>
+        <p:cNvPr id="1" name=""/>
+        <p:cNvGrpSpPr/>
+        <p:nvPr/>
+      </p:nvGrpSpPr>
+      <p:grpSpPr>
+        <a:xfrm>
+          <a:off x="0" y="0"/>
+          <a:ext cx="0" cy="0"/>
+          <a:chOff x="0" y="0"/>
+          <a:chExt cx="0" cy="0"/>
+        </a:xfrm>
+      </p:grpSpPr>
+      <p:sp>
+        <p:nvSpPr>
+          <p:cNvPr id="2" name="Kopfzeilenplatzhalter 1"/>
+          <p:cNvSpPr>
+            <a:spLocks noGrp="1"/>
+          </p:cNvSpPr>
+          <p:nvPr>
+            <p:ph type="hdr" sz="quarter"/>
+          </p:nvPr>
+        </p:nvSpPr>
+        <p:spPr>
+          <a:xfrm>
+            <a:off x="0" y="0"/>
+            <a:ext cx="2971800" cy="458788"/>
+          </a:xfrm>
+          <a:prstGeom prst="rect">
+            <a:avLst/>
+          </a:prstGeom>
+        </p:spPr>
+        <p:txBody>
+          <a:bodyPr vert="horz" lIns="91440" tIns="45720" rIns="91440" bIns="45720" rtlCol="0"/>
+          <a:lstStyle>
+            <a:lvl1pPr algn="l">
+              <a:defRPr sz="1200"/>
+            </a:lvl1pPr>
+          </a:lstStyle>
+          <a:p>
+            <a:endParaRPr lang="de-DE"/>
+          </a:p>
+        </p:txBody>
+      </p:sp>
+      <p:sp>
+        <p:nvSpPr>
+          <p:cNvPr id="3" name="Datumsplatzhalter 2"/>
+          <p:cNvSpPr>
+            <a:spLocks noGrp="1"/>
+          </p:cNvSpPr>
+          <p:nvPr>
+            <p:ph type="dt" idx="1"/>
+          </p:nvPr>
+        </p:nvSpPr>
+        <p:spPr>
+          <a:xfrm>
+            <a:off x="3884613" y="0"/>
+            <a:ext cx="2971800" cy="458788"/>
+          </a:xfrm>
+          <a:prstGeom prst="rect">
+            <a:avLst/>
+          </a:prstGeom>
+        </p:spPr>
+        <p:txBody>
+          <a:bodyPr vert="horz" lIns="91440" tIns="45720" rIns="91440" bIns="45720" rtlCol="0"/>
+          <a:lstStyle>
+            <a:lvl1pPr algn="r">
+              <a:defRPr sz="1200"/>
+            </a:lvl1pPr>
+          </a:lstStyle>
+          <a:p>
+            <a:fld id="{613AC1BD-E3F7-4C50-97FB-293B748B6C7F}" type="datetimeFigureOut">
+              <a:rPr lang="de-DE" smtClean="0"/>
+              <a:t>03.09.2026</a:t>
+            </a:fld>
+            <a:endParaRPr lang="de-DE"/>
+          </a:p>
+        </p:txBody>
+      </p:sp>
+      <p:sp>
+        <p:nvSpPr>
+          <p:cNvPr id="4" name="Folienbildplatzhalter 3"/>
+          <p:cNvSpPr>
+            <a:spLocks noGrp="1" noRot="1" noChangeAspect="1"/>
+          </p:cNvSpPr>
+          <p:nvPr>
+            <p:ph type="sldImg" idx="2"/>
+          </p:nvPr>
+        </p:nvSpPr>
+        <p:spPr>
+          <a:xfrm>
+            <a:off x="685800" y="1143000"/>
+            <a:ext cx="5486400" cy="3086100"/>
+          </a:xfrm>
+          <a:prstGeom prst="rect">
+            <a:avLst/>
+          </a:prstGeom>
+          <a:noFill/>
+          <a:ln w="12700">
+            <a:solidFill>
+              <a:prstClr val="black"/>
+            </a:solidFill>
+          </a:ln>
+        </p:spPr>
+        <p:txBody>
+          <a:bodyPr vert="horz" lIns="91440" tIns="45720" rIns="91440" bIns="45720" rtlCol="0" anchor="ctr"/>
+          <a:lstStyle/>
+          <a:p>
+            <a:endParaRPr lang="de-DE"/>
+          </a:p>
+        </p:txBody>
+      </p:sp>
+      <p:sp>
+        <p:nvSpPr>
+          <p:cNvPr id="5" name="Notizenplatzhalter 4"/>
+          <p:cNvSpPr>
+            <a:spLocks noGrp="1"/>
+          </p:cNvSpPr>
+          <p:nvPr>
+            <p:ph type="body" sz="quarter" idx="3"/>
+          </p:nvPr>
+        </p:nvSpPr>
+        <p:spPr>
+          <a:xfrm>
+            <a:off x="685800" y="4400550"/>
+            <a:ext cx="5486400" cy="3600450"/>
+          </a:xfrm>
+          <a:prstGeom prst="rect">
+            <a:avLst/>
+          </a:prstGeom>
+        </p:spPr>
+        <p:txBody>
+          <a:bodyPr vert="horz" lIns="91440" tIns="45720" rIns="91440" bIns="45720" rtlCol="0"/>
+          <a:lstStyle/>
+          <a:p>
+            <a:pPr lvl="0"/>
+            <a:r>
+              <a:rPr lang="de-DE"/>
+              <a:t>Mastertextformat bearbeiten</a:t>
+            </a:r>
+          </a:p>
+          <a:p>
+            <a:pPr lvl="1"/>
+            <a:r>
+              <a:rPr lang="de-DE"/>
+              <a:t>Zweite Ebene</a:t>
+            </a:r>
+          </a:p>
+          <a:p>
+            <a:pPr lvl="2"/>
+            <a:r>
+              <a:rPr lang="de-DE"/>
+              <a:t>Dritte Ebene</a:t>
+            </a:r>
+          </a:p>
+          <a:p>
+            <a:pPr lvl="3"/>
+            <a:r>
+              <a:rPr lang="de-DE"/>
+              <a:t>Vierte Ebene</a:t>
+            </a:r>
+          </a:p>
+          <a:p>
+            <a:pPr lvl="4"/>
+            <a:r>
+              <a:rPr lang="de-DE"/>
+              <a:t>Fünfte Ebene</a:t>
+            </a:r>
+          </a:p>
+        </p:txBody>
+      </p:sp>
+      <p:sp>
+        <p:nvSpPr>
+          <p:cNvPr id="6" name="Fußzeilenplatzhalter 5"/>
+          <p:cNvSpPr>
+            <a:spLocks noGrp="1"/>
+          </p:cNvSpPr>
+          <p:nvPr>
+            <p:ph type="ftr" sz="quarter" idx="4"/>
+          </p:nvPr>
+        </p:nvSpPr>
+        <p:spPr>
+          <a:xfrm>
+            <a:off x="0" y="8685213"/>
+            <a:ext cx="2971800" cy="458787"/>
+          </a:xfrm>
+          <a:prstGeom prst="rect">
+            <a:avLst/>
+          </a:prstGeom>
+        </p:spPr>
+        <p:txBody>
+          <a:bodyPr vert="horz" lIns="91440" tIns="45720" rIns="91440" bIns="45720" rtlCol="0" anchor="b"/>
+          <a:lstStyle>
+            <a:lvl1pPr algn="l">
+              <a:defRPr sz="1200"/>
+            </a:lvl1pPr>
+          </a:lstStyle>
+          <a:p>
+            <a:endParaRPr lang="de-DE"/>
+          </a:p>
+        </p:txBody>
+      </p:sp>
+      <p:sp>
+        <p:nvSpPr>
+          <p:cNvPr id="7" name="Foliennummernplatzhalter 6"/>
+          <p:cNvSpPr>
+            <a:spLocks noGrp="1"/>
+          </p:cNvSpPr>
+          <p:nvPr>
+            <p:ph type="sldNum" sz="quarter" idx="5"/>
+          </p:nvPr>
+        </p:nvSpPr>
+        <p:spPr>
+          <a:xfrm>
+            <a:off x="3884613" y="8685213"/>
+            <a:ext cx="2971800" cy="458787"/>
+          </a:xfrm>
+          <a:prstGeom prst="rect">
+            <a:avLst/>
+          </a:prstGeom>
+        </p:spPr>
+        <p:txBody>
+          <a:bodyPr vert="horz" lIns="91440" tIns="45720" rIns="91440" bIns="45720" rtlCol="0" anchor="b"/>
+          <a:lstStyle>
+            <a:lvl1pPr algn="r">
+              <a:defRPr sz="1200"/>
+            </a:lvl1pPr>
+          </a:lstStyle>
+          <a:p>
+            <a:fld id="{9D6D4113-1DEC-41A9-89D0-906BFF289B62}" type="slidenum">
+              <a:rPr lang="de-DE" smtClean="0"/>
+              <a:t>‹Nr.›</a:t>
+            </a:fld>
+            <a:endParaRPr lang="de-DE"/>
+          </a:p>
+        </p:txBody>
+      </p:sp>
+    </p:spTree>
+    <p:extLst>
+      <p:ext uri="{BB962C8B-B14F-4D97-AF65-F5344CB8AC3E}">
+        <p14:creationId xmlns:p14="http://schemas.microsoft.com/office/powerpoint/2010/main" val="3739027911"/>
+      </p:ext>
+    </p:extLst>
+  </p:cSld>
+  <p:clrMap bg1="lt1" tx1="dk1" bg2="lt2" tx2="dk2" accent1="accent1" accent2="accent2" accent3="accent3" accent4="accent4" accent5="accent5" accent6="accent6" hlink="hlink" folHlink="folHlink"/>
+  <p:hf sldNum="0" hdr="0" ftr="0" dt="0"/>
+  <p:notesStyle>
+    <a:lvl1pPr marL="0" algn="l" defTabSz="914400" rtl="0" eaLnBrk="1" latinLnBrk="0" hangingPunct="1">
+      <a:defRPr sz="1200" kern="1200">
+        <a:solidFill>
+          <a:schemeClr val="tx1"/>
+        </a:solidFill>
+        <a:latin typeface="+mn-lt"/>
+        <a:ea typeface="+mn-ea"/>
+        <a:cs typeface="+mn-cs"/>
+      </a:defRPr>
+    </a:lvl1pPr>
+    <a:lvl2pPr marL="457200" algn="l" defTabSz="914400" rtl="0" eaLnBrk="1" latinLnBrk="0" hangingPunct="1">
+      <a:defRPr sz="1200" kern="1200">
+        <a:solidFill>
+          <a:schemeClr val="tx1"/>
+        </a:solidFill>
+        <a:latin typeface="+mn-lt"/>
+        <a:ea typeface="+mn-ea"/>
+        <a:cs typeface="+mn-cs"/>
+      </a:defRPr>
+    </a:lvl2pPr>
+    <a:lvl3pPr marL="914400" algn="l" defTabSz="914400" rtl="0" eaLnBrk="1" latinLnBrk="0" hangingPunct="1">
+      <a:defRPr sz="1200" kern="1200">
+        <a:solidFill>
+          <a:schemeClr val="tx1"/>
+        </a:solidFill>
+        <a:latin typeface="+mn-lt"/>
+        <a:ea typeface="+mn-ea"/>
+        <a:cs typeface="+mn-cs"/>
+      </a:defRPr>
+    </a:lvl3pPr>
+    <a:lvl4pPr marL="1371600" algn="l" defTabSz="914400" rtl="0" eaLnBrk="1" latinLnBrk="0" hangingPunct="1">
+      <a:defRPr sz="1200" kern="1200">
+        <a:solidFill>
+          <a:schemeClr val="tx1"/>
+        </a:solidFill>
+        <a:latin typeface="+mn-lt"/>
+        <a:ea typeface="+mn-ea"/>
+        <a:cs typeface="+mn-cs"/>
+      </a:defRPr>
+    </a:lvl4pPr>
+    <a:lvl5pPr marL="1828800" algn="l" defTabSz="914400" rtl="0" eaLnBrk="1" latinLnBrk="0" hangingPunct="1">
+      <a:defRPr sz="1200" kern="1200">
+        <a:solidFill>
+          <a:schemeClr val="tx1"/>
+        </a:solidFill>
+        <a:latin typeface="+mn-lt"/>
+        <a:ea typeface="+mn-ea"/>
+        <a:cs typeface="+mn-cs"/>
+      </a:defRPr>
+    </a:lvl5pPr>
+    <a:lvl6pPr marL="2286000" algn="l" defTabSz="914400" rtl="0" eaLnBrk="1" latinLnBrk="0" hangingPunct="1">
+      <a:defRPr sz="1200" kern="1200">
+        <a:solidFill>
+          <a:schemeClr val="tx1"/>
+        </a:solidFill>
+        <a:latin typeface="+mn-lt"/>
+        <a:ea typeface="+mn-ea"/>
+        <a:cs typeface="+mn-cs"/>
+      </a:defRPr>
+    </a:lvl6pPr>
+    <a:lvl7pPr marL="2743200" algn="l" defTabSz="914400" rtl="0" eaLnBrk="1" latinLnBrk="0" hangingPunct="1">
+      <a:defRPr sz="1200" kern="1200">
+        <a:solidFill>
+          <a:schemeClr val="tx1"/>
+        </a:solidFill>
+        <a:latin typeface="+mn-lt"/>
+        <a:ea typeface="+mn-ea"/>
+        <a:cs typeface="+mn-cs"/>
+      </a:defRPr>
+    </a:lvl7pPr>
+    <a:lvl8pPr marL="3200400" algn="l" defTabSz="914400" rtl="0" eaLnBrk="1" latinLnBrk="0" hangingPunct="1">
+      <a:defRPr sz="1200" kern="1200">
+        <a:solidFill>
+          <a:schemeClr val="tx1"/>
+        </a:solidFill>
+        <a:latin typeface="+mn-lt"/>
+        <a:ea typeface="+mn-ea"/>
+        <a:cs typeface="+mn-cs"/>
+      </a:defRPr>
+    </a:lvl8pPr>
+    <a:lvl9pPr marL="3657600" algn="l" defTabSz="914400" rtl="0" eaLnBrk="1" latinLnBrk="0" hangingPunct="1">
+      <a:defRPr sz="1200" kern="1200">
+        <a:solidFill>
+          <a:schemeClr val="tx1"/>
+        </a:solidFill>
+        <a:latin typeface="+mn-lt"/>
+        <a:ea typeface="+mn-ea"/>
+        <a:cs typeface="+mn-cs"/>
+      </a:defRPr>
+    </a:lvl9pPr>
+  </p:notesStyle>
+</p:notesMaster>
+</file>
+
 <file path=ppt/slideLayouts/slideLayout1.xml><?xml version="1.0" encoding="utf-8"?>
 <p:sldLayout xmlns:a="http://schemas.openxmlformats.org/drawingml/2006/main" xmlns:r="http://schemas.openxmlformats.org/officeDocument/2006/relationships" xmlns:p="http://schemas.openxmlformats.org/presentationml/2006/main" type="title" preserve="1">
   <p:cSld name="Title Slide">
@@ -594,6 +1147,38 @@
           </a:prstGeom>
         </p:spPr>
       </p:pic>
+      <p:sp>
+        <p:nvSpPr>
+          <p:cNvPr id="6" name="Textfeld 5">
+            <a:extLst>
+              <a:ext uri="{FF2B5EF4-FFF2-40B4-BE49-F238E27FC236}">
+                <a16:creationId xmlns:a16="http://schemas.microsoft.com/office/drawing/2014/main" id="{97A1D6AB-AD74-41A1-EF93-47EF50602521}"/>
+              </a:ext>
+            </a:extLst>
+          </p:cNvPr>
+          <p:cNvSpPr txBox="1"/>
+          <p:nvPr userDrawn="1"/>
+        </p:nvSpPr>
+        <p:spPr>
+          <a:xfrm>
+            <a:off x="11743267" y="6519333"/>
+            <a:ext cx="184731" cy="369332"/>
+          </a:xfrm>
+          <a:prstGeom prst="rect">
+            <a:avLst/>
+          </a:prstGeom>
+          <a:noFill/>
+        </p:spPr>
+        <p:txBody>
+          <a:bodyPr wrap="none" rtlCol="0">
+            <a:spAutoFit/>
+          </a:bodyPr>
+          <a:lstStyle/>
+          <a:p>
+            <a:endParaRPr lang="de-DE" dirty="0"/>
+          </a:p>
+        </p:txBody>
+      </p:sp>
     </p:spTree>
     <p:extLst>
       <p:ext uri="{BB962C8B-B14F-4D97-AF65-F5344CB8AC3E}">
@@ -1401,7 +1986,7 @@
         <p:spPr bwMode="auto">
           <a:xfrm>
             <a:off x="0" y="6453188"/>
-            <a:ext cx="12192000" cy="230187"/>
+            <a:ext cx="11576114" cy="230187"/>
           </a:xfrm>
           <a:prstGeom prst="rect">
             <a:avLst/>
@@ -1416,7 +2001,7 @@
           <a:effectLst/>
         </p:spPr>
         <p:txBody>
-          <a:bodyPr>
+          <a:bodyPr wrap="square" anchor="t" anchorCtr="0">
             <a:spAutoFit/>
           </a:bodyPr>
           <a:lstStyle>
@@ -1573,34 +2158,7 @@
                 <a:cs typeface="Times New Roman" panose="02020603050405020304" pitchFamily="18" charset="0"/>
                 <a:sym typeface="Symbol" panose="05050102010706020507" pitchFamily="18" charset="2"/>
               </a:rPr>
-              <a:t>	   	        	                                                                                                     				 </a:t>
-            </a:r>
-            <a:fld id="{F17E069C-6063-4662-AE63-E3B50100F010}" type="slidenum">
-              <a:rPr lang="en-GB" altLang="de-DE" sz="900" smtClean="0">
-                <a:solidFill>
-                  <a:schemeClr val="bg1"/>
-                </a:solidFill>
-                <a:latin typeface="Tahoma" panose="020B0604030504040204" pitchFamily="34" charset="0"/>
-                <a:ea typeface="Tahoma" panose="020B0604030504040204" pitchFamily="34" charset="0"/>
-                <a:cs typeface="Tahoma" panose="020B0604030504040204" pitchFamily="34" charset="0"/>
-              </a:rPr>
-              <a:pPr eaLnBrk="1" hangingPunct="1">
-                <a:spcBef>
-                  <a:spcPct val="50000"/>
-                </a:spcBef>
-                <a:defRPr/>
-              </a:pPr>
-              <a:t>‹Nr.›</a:t>
-            </a:fld>
-            <a:r>
-              <a:rPr lang="en-GB" altLang="de-DE" sz="900" dirty="0">
-                <a:solidFill>
-                  <a:schemeClr val="bg1"/>
-                </a:solidFill>
-                <a:latin typeface="+mj-lt"/>
-                <a:cs typeface="Times New Roman" panose="02020603050405020304" pitchFamily="18" charset="0"/>
-              </a:rPr>
-              <a:t> </a:t>
+              <a:t>	   	        	                                                                                                     			</a:t>
             </a:r>
             <a:endParaRPr lang="de-DE" altLang="de-DE" sz="900" b="1" dirty="0">
               <a:solidFill>
@@ -1674,6 +2232,62 @@
           <a:effectLst/>
         </p:spPr>
       </p:cxnSp>
+      <p:sp>
+        <p:nvSpPr>
+          <p:cNvPr id="3" name="TextBox 4">
+            <a:extLst>
+              <a:ext uri="{FF2B5EF4-FFF2-40B4-BE49-F238E27FC236}">
+                <a16:creationId xmlns:a16="http://schemas.microsoft.com/office/drawing/2014/main" id="{89EF6F4D-0D8F-4C52-63A4-73B3F2A71984}"/>
+              </a:ext>
+            </a:extLst>
+          </p:cNvPr>
+          <p:cNvSpPr txBox="1"/>
+          <p:nvPr userDrawn="1"/>
+        </p:nvSpPr>
+        <p:spPr>
+          <a:xfrm>
+            <a:off x="11576114" y="6453188"/>
+            <a:ext cx="615886" cy="215444"/>
+          </a:xfrm>
+          <a:prstGeom prst="rect">
+            <a:avLst/>
+          </a:prstGeom>
+          <a:noFill/>
+        </p:spPr>
+        <p:txBody>
+          <a:bodyPr wrap="square" anchor="t" anchorCtr="0">
+            <a:spAutoFit/>
+          </a:bodyPr>
+          <a:lstStyle/>
+          <a:p>
+            <a:pPr algn="ctr"/>
+            <a:fld id="{26BEBEC2-555B-4F74-AE4A-AE9A68B5DD21}" type="slidenum">
+              <a:rPr lang="de-DE" sz="800" b="1" smtClean="0">
+                <a:solidFill>
+                  <a:srgbClr val="DFF5E4"/>
+                </a:solidFill>
+                <a:latin typeface="Aptos"/>
+              </a:rPr>
+              <a:t>‹Nr.›</a:t>
+            </a:fld>
+            <a:r>
+              <a:rPr lang="de-DE" sz="800" b="1" dirty="0">
+                <a:solidFill>
+                  <a:srgbClr val="DFF5E4"/>
+                </a:solidFill>
+                <a:latin typeface="Aptos"/>
+              </a:rPr>
+              <a:t>/17</a:t>
+            </a:r>
+            <a:endParaRPr sz="800" b="1" dirty="0">
+              <a:solidFill>
+                <a:srgbClr val="005020"/>
+              </a:solidFill>
+              <a:latin typeface="Aptos"/>
+            </a:endParaRPr>
+          </a:p>
+        </p:txBody>
+      </p:sp>
     </p:spTree>
     <p:extLst>
       <p:ext uri="{BB962C8B-B14F-4D97-AF65-F5344CB8AC3E}">
@@ -1688,7 +2302,7 @@
     <p:sldLayoutId id="2147483663" r:id="rId3"/>
     <p:sldLayoutId id="2147483664" r:id="rId4"/>
   </p:sldLayoutIdLst>
-  <p:hf hdr="0"/>
+  <p:hf hdr="0" ftr="0" dt="0"/>
   <p:txStyles>
     <p:titleStyle>
       <a:lvl1pPr algn="l" rtl="0" eaLnBrk="0" fontAlgn="base" hangingPunct="0">
@@ -2131,14 +2745,19 @@
             <p:ph type="ctrTitle"/>
           </p:nvPr>
         </p:nvSpPr>
-        <p:spPr/>
+        <p:spPr>
+          <a:xfrm>
+            <a:off x="1088136" y="1078030"/>
+            <a:ext cx="9288096" cy="2956718"/>
+          </a:xfrm>
+        </p:spPr>
         <p:txBody>
           <a:bodyPr wrap="square" anchor="t"/>
           <a:lstStyle/>
           <a:p>
             <a:pPr algn="l"/>
             <a:r>
-              <a:rPr sz="3300" b="1">
+              <a:rPr sz="3300" b="1" dirty="0">
                 <a:solidFill>
                   <a:srgbClr val="FFFFFF"/>
                 </a:solidFill>
@@ -2150,7 +2769,7 @@
           <a:p>
             <a:pPr algn="l"/>
             <a:r>
-              <a:rPr sz="3300" b="1">
+              <a:rPr sz="3300" b="1" dirty="0">
                 <a:solidFill>
                   <a:srgbClr val="FFFFFF"/>
                 </a:solidFill>
@@ -2178,7 +2797,7 @@
           <a:p>
             <a:pPr algn="l"/>
             <a:r>
-              <a:rPr sz="1700" b="0">
+              <a:rPr sz="1700" b="0" dirty="0">
                 <a:solidFill>
                   <a:srgbClr val="FFFFFF"/>
                 </a:solidFill>
@@ -2189,7 +2808,7 @@
           </a:p>
           <a:p>
             <a:pPr algn="l"/>
-            <a:endParaRPr sz="1700" b="0">
+            <a:endParaRPr sz="1700" b="0" dirty="0">
               <a:solidFill>
                 <a:srgbClr val="FFFFFF"/>
               </a:solidFill>
@@ -2199,7 +2818,7 @@
           <a:p>
             <a:pPr algn="l"/>
             <a:r>
-              <a:rPr sz="1700" b="0">
+              <a:rPr sz="1700" b="0" dirty="0">
                 <a:solidFill>
                   <a:srgbClr val="FFFFFF"/>
                 </a:solidFill>
@@ -2227,8 +2846,8 @@
         </p:blipFill>
         <p:spPr>
           <a:xfrm>
-            <a:off x="9006840" y="1325880"/>
-            <a:ext cx="1874519" cy="2331720"/>
+            <a:off x="8102601" y="1250637"/>
+            <a:ext cx="2252286" cy="2801626"/>
           </a:xfrm>
           <a:prstGeom prst="rect">
             <a:avLst/>
@@ -2240,6 +2859,106 @@
           </a:ln>
         </p:spPr>
       </p:pic>
+      <p:pic>
+        <p:nvPicPr>
+          <p:cNvPr id="15" name="Grafik 14">
+            <a:extLst>
+              <a:ext uri="{FF2B5EF4-FFF2-40B4-BE49-F238E27FC236}">
+                <a16:creationId xmlns:a16="http://schemas.microsoft.com/office/drawing/2014/main" id="{62D02214-C38A-76CA-402F-451B70D92223}"/>
+              </a:ext>
+            </a:extLst>
+          </p:cNvPr>
+          <p:cNvPicPr>
+            <a:picLocks noChangeAspect="1"/>
+          </p:cNvPicPr>
+          <p:nvPr/>
+        </p:nvPicPr>
+        <p:blipFill>
+          <a:blip r:embed="rId3"/>
+          <a:stretch>
+            <a:fillRect/>
+          </a:stretch>
+        </p:blipFill>
+        <p:spPr>
+          <a:xfrm>
+            <a:off x="10652396" y="2923343"/>
+            <a:ext cx="1128920" cy="1128920"/>
+          </a:xfrm>
+          <a:prstGeom prst="rect">
+            <a:avLst/>
+          </a:prstGeom>
+        </p:spPr>
+      </p:pic>
+      <p:sp>
+        <p:nvSpPr>
+          <p:cNvPr id="5" name="Rechteck 4">
+            <a:extLst>
+              <a:ext uri="{FF2B5EF4-FFF2-40B4-BE49-F238E27FC236}">
+                <a16:creationId xmlns:a16="http://schemas.microsoft.com/office/drawing/2014/main" id="{360BD43E-4892-E168-9B86-A771195DCED6}"/>
+              </a:ext>
+            </a:extLst>
+          </p:cNvPr>
+          <p:cNvSpPr/>
+          <p:nvPr/>
+        </p:nvSpPr>
+        <p:spPr bwMode="auto">
+          <a:xfrm>
+            <a:off x="11616611" y="6383707"/>
+            <a:ext cx="461473" cy="307649"/>
+          </a:xfrm>
+          <a:prstGeom prst="rect">
+            <a:avLst/>
+          </a:prstGeom>
+          <a:solidFill>
+            <a:srgbClr val="0C7D2C"/>
+          </a:solidFill>
+          <a:ln w="9525" cap="flat" cmpd="sng" algn="ctr">
+            <a:noFill/>
+            <a:prstDash val="solid"/>
+            <a:round/>
+            <a:headEnd type="none" w="med" len="med"/>
+            <a:tailEnd type="none" w="med" len="med"/>
+          </a:ln>
+          <a:effectLst/>
+        </p:spPr>
+        <p:txBody>
+          <a:bodyPr vert="horz" wrap="square" lIns="91440" tIns="45720" rIns="91440" bIns="45720" numCol="1" rtlCol="0" anchor="t" anchorCtr="0" compatLnSpc="1">
+            <a:prstTxWarp prst="textNoShape">
+              <a:avLst/>
+            </a:prstTxWarp>
+            <a:spAutoFit/>
+          </a:bodyPr>
+          <a:lstStyle/>
+          <a:p>
+            <a:pPr marL="0" marR="0" indent="0" algn="l" defTabSz="914400" rtl="0" eaLnBrk="1" fontAlgn="base" latinLnBrk="0" hangingPunct="1">
+              <a:lnSpc>
+                <a:spcPct val="100000"/>
+              </a:lnSpc>
+              <a:spcBef>
+                <a:spcPct val="50000"/>
+              </a:spcBef>
+              <a:spcAft>
+                <a:spcPct val="0"/>
+              </a:spcAft>
+              <a:buClrTx/>
+              <a:buSzTx/>
+              <a:buFontTx/>
+              <a:buChar char="•"/>
+              <a:tabLst/>
+            </a:pPr>
+            <a:endParaRPr kumimoji="0" lang="de-DE" sz="1800" b="0" i="0" u="none" strike="noStrike" cap="none" normalizeH="0" baseline="0">
+              <a:ln>
+                <a:noFill/>
+              </a:ln>
+              <a:solidFill>
+                <a:schemeClr val="tx1"/>
+              </a:solidFill>
+              <a:effectLst/>
+              <a:latin typeface="Arial" charset="0"/>
+            </a:endParaRPr>
+          </a:p>
+        </p:txBody>
+      </p:sp>
     </p:spTree>
   </p:cSld>
   <p:clrMapOvr>
@@ -2313,14 +3032,14 @@
       </p:sp>
       <p:sp>
         <p:nvSpPr>
-          <p:cNvPr id="4" name="TextBox 3"/>
+          <p:cNvPr id="5" name="TextBox 4"/>
           <p:cNvSpPr txBox="1"/>
           <p:nvPr/>
         </p:nvSpPr>
         <p:spPr>
           <a:xfrm>
-            <a:off x="384048" y="109728"/>
-            <a:ext cx="365760" cy="182880"/>
+            <a:off x="777240" y="1441812"/>
+            <a:ext cx="9875520" cy="384721"/>
           </a:xfrm>
           <a:prstGeom prst="rect">
             <a:avLst/>
@@ -2333,41 +3052,6 @@
           </a:bodyPr>
           <a:lstStyle/>
           <a:p>
-            <a:pPr algn="ctr"/>
-            <a:r>
-              <a:rPr sz="800" b="1">
-                <a:solidFill>
-                  <a:srgbClr val="005020"/>
-                </a:solidFill>
-                <a:latin typeface="Aptos"/>
-              </a:rPr>
-              <a:t>09</a:t>
-            </a:r>
-          </a:p>
-        </p:txBody>
-      </p:sp>
-      <p:sp>
-        <p:nvSpPr>
-          <p:cNvPr id="5" name="TextBox 4"/>
-          <p:cNvSpPr txBox="1"/>
-          <p:nvPr/>
-        </p:nvSpPr>
-        <p:spPr>
-          <a:xfrm>
-            <a:off x="777240" y="1441812"/>
-            <a:ext cx="9875520" cy="384721"/>
-          </a:xfrm>
-          <a:prstGeom prst="rect">
-            <a:avLst/>
-          </a:prstGeom>
-          <a:noFill/>
-        </p:spPr>
-        <p:txBody>
-          <a:bodyPr wrap="square" anchor="t">
-            <a:spAutoFit/>
-          </a:bodyPr>
-          <a:lstStyle/>
-          <a:p>
             <a:pPr algn="l"/>
             <a:r>
               <a:rPr sz="1900" b="1" dirty="0">
@@ -2390,7 +3074,7 @@
         <p:spPr>
           <a:xfrm>
             <a:off x="777240" y="2057400"/>
-            <a:ext cx="2971800" cy="868680"/>
+            <a:ext cx="2984754" cy="868680"/>
           </a:xfrm>
           <a:prstGeom prst="roundRect">
             <a:avLst/>
@@ -2451,7 +3135,7 @@
           <a:p>
             <a:pPr algn="l"/>
             <a:r>
-              <a:rPr sz="1400" b="1">
+              <a:rPr sz="1400" b="1" dirty="0">
                 <a:solidFill>
                   <a:srgbClr val="DFF5E4"/>
                 </a:solidFill>
@@ -2486,7 +3170,7 @@
           <a:p>
             <a:pPr algn="l"/>
             <a:r>
-              <a:rPr sz="1150" b="0">
+              <a:rPr sz="1150" b="0" dirty="0">
                 <a:solidFill>
                   <a:srgbClr val="FFFFFF"/>
                 </a:solidFill>
@@ -2506,7 +3190,7 @@
         <p:spPr>
           <a:xfrm>
             <a:off x="4087368" y="2057400"/>
-            <a:ext cx="2971800" cy="868680"/>
+            <a:ext cx="2984754" cy="868680"/>
           </a:xfrm>
           <a:prstGeom prst="roundRect">
             <a:avLst/>
@@ -2567,7 +3251,7 @@
           <a:p>
             <a:pPr algn="l"/>
             <a:r>
-              <a:rPr sz="1400" b="1">
+              <a:rPr sz="1400" b="1" dirty="0">
                 <a:solidFill>
                   <a:srgbClr val="DFF5E4"/>
                 </a:solidFill>
@@ -2602,7 +3286,7 @@
           <a:p>
             <a:pPr algn="l"/>
             <a:r>
-              <a:rPr sz="1150" b="0">
+              <a:rPr sz="1150" b="0" dirty="0">
                 <a:solidFill>
                   <a:srgbClr val="FFFFFF"/>
                 </a:solidFill>
@@ -2622,7 +3306,7 @@
         <p:spPr>
           <a:xfrm>
             <a:off x="7397496" y="2057400"/>
-            <a:ext cx="2971800" cy="868680"/>
+            <a:ext cx="2984754" cy="868680"/>
           </a:xfrm>
           <a:prstGeom prst="roundRect">
             <a:avLst/>
@@ -2683,7 +3367,7 @@
           <a:p>
             <a:pPr algn="l"/>
             <a:r>
-              <a:rPr sz="1400" b="1">
+              <a:rPr sz="1400" b="1" dirty="0">
                 <a:solidFill>
                   <a:srgbClr val="DFF5E4"/>
                 </a:solidFill>
@@ -2718,7 +3402,7 @@
           <a:p>
             <a:pPr algn="l"/>
             <a:r>
-              <a:rPr sz="1150" b="0">
+              <a:rPr sz="1150" b="0" dirty="0">
                 <a:solidFill>
                   <a:srgbClr val="FFFFFF"/>
                 </a:solidFill>
@@ -2738,7 +3422,7 @@
         <p:spPr>
           <a:xfrm>
             <a:off x="777240" y="3337560"/>
-            <a:ext cx="2971800" cy="868680"/>
+            <a:ext cx="2984754" cy="868680"/>
           </a:xfrm>
           <a:prstGeom prst="roundRect">
             <a:avLst/>
@@ -2854,7 +3538,7 @@
         <p:spPr>
           <a:xfrm>
             <a:off x="4087368" y="3337560"/>
-            <a:ext cx="2971800" cy="868680"/>
+            <a:ext cx="2984754" cy="868680"/>
           </a:xfrm>
           <a:prstGeom prst="roundRect">
             <a:avLst/>
@@ -2899,7 +3583,7 @@
         </p:nvSpPr>
         <p:spPr>
           <a:xfrm>
-            <a:off x="4251960" y="3483864"/>
+            <a:off x="4251959" y="3483864"/>
             <a:ext cx="2560320" cy="219456"/>
           </a:xfrm>
           <a:prstGeom prst="rect">
@@ -2934,7 +3618,7 @@
         </p:nvSpPr>
         <p:spPr>
           <a:xfrm>
-            <a:off x="4251960" y="3794760"/>
+            <a:off x="4251959" y="3794760"/>
             <a:ext cx="2560320" cy="182880"/>
           </a:xfrm>
           <a:prstGeom prst="rect">
@@ -3157,7 +3841,7 @@
         <p:spPr>
           <a:xfrm>
             <a:off x="7397496" y="3337560"/>
-            <a:ext cx="2971800" cy="868680"/>
+            <a:ext cx="2984754" cy="868680"/>
           </a:xfrm>
           <a:prstGeom prst="roundRect">
             <a:avLst/>
@@ -3217,7 +3901,7 @@
           <a:lstStyle/>
           <a:p>
             <a:r>
-              <a:rPr sz="1400" b="1">
+              <a:rPr sz="1400" b="1" dirty="0">
                 <a:solidFill>
                   <a:srgbClr val="DFF5E4"/>
                 </a:solidFill>
@@ -3257,16 +3941,25 @@
                 </a:solidFill>
                 <a:latin typeface="Aptos"/>
               </a:rPr>
-              <a:t>Alert via </a:t>
-            </a:r>
-            <a:r>
-              <a:rPr lang="de-DE" sz="1150" dirty="0" err="1">
+              <a:t>Email </a:t>
+            </a:r>
+            <a:r>
+              <a:rPr lang="de-DE" sz="1150" b="0" dirty="0" err="1">
                 <a:solidFill>
                   <a:srgbClr val="FFFFFF"/>
                 </a:solidFill>
                 <a:latin typeface="Aptos"/>
               </a:rPr>
-              <a:t>emails</a:t>
+              <a:t>alerts</a:t>
+            </a:r>
+            <a:r>
+              <a:rPr lang="de-DE" sz="1150" b="0" dirty="0">
+                <a:solidFill>
+                  <a:srgbClr val="FFFFFF"/>
+                </a:solidFill>
+                <a:latin typeface="Aptos"/>
+              </a:rPr>
+              <a:t> </a:t>
             </a:r>
             <a:r>
               <a:rPr sz="1150" b="0" dirty="0">
@@ -3275,7 +3968,7 @@
                 </a:solidFill>
                 <a:latin typeface="Aptos"/>
               </a:rPr>
-              <a:t> on errors</a:t>
+              <a:t>on errors</a:t>
             </a:r>
           </a:p>
         </p:txBody>
@@ -3338,7 +4031,7 @@
           <a:lstStyle/>
           <a:p>
             <a:r>
-              <a:rPr lang="de-DE" dirty="0">
+              <a:rPr lang="de-DE" sz="2700" dirty="0">
                 <a:solidFill>
                   <a:srgbClr val="005020"/>
                 </a:solidFill>
@@ -3352,47 +4045,6 @@
               </a:solidFill>
               <a:latin typeface="Aptos"/>
             </a:endParaRPr>
-          </a:p>
-        </p:txBody>
-      </p:sp>
-      <p:sp>
-        <p:nvSpPr>
-          <p:cNvPr id="4" name="TextBox 3">
-            <a:extLst>
-              <a:ext uri="{FF2B5EF4-FFF2-40B4-BE49-F238E27FC236}">
-                <a16:creationId xmlns:a16="http://schemas.microsoft.com/office/drawing/2014/main" id="{94A1FF53-835F-1C5E-A7F2-7516B1C6CFE5}"/>
-              </a:ext>
-            </a:extLst>
-          </p:cNvPr>
-          <p:cNvSpPr txBox="1"/>
-          <p:nvPr/>
-        </p:nvSpPr>
-        <p:spPr>
-          <a:xfrm>
-            <a:off x="384048" y="109728"/>
-            <a:ext cx="365760" cy="182880"/>
-          </a:xfrm>
-          <a:prstGeom prst="rect">
-            <a:avLst/>
-          </a:prstGeom>
-          <a:noFill/>
-        </p:spPr>
-        <p:txBody>
-          <a:bodyPr wrap="square" anchor="t">
-            <a:spAutoFit/>
-          </a:bodyPr>
-          <a:lstStyle/>
-          <a:p>
-            <a:pPr algn="ctr"/>
-            <a:r>
-              <a:rPr sz="800" b="1">
-                <a:solidFill>
-                  <a:srgbClr val="005020"/>
-                </a:solidFill>
-                <a:latin typeface="Aptos"/>
-              </a:rPr>
-              <a:t>10</a:t>
-            </a:r>
           </a:p>
         </p:txBody>
       </p:sp>
@@ -3557,7 +4209,7 @@
         <p:spPr>
           <a:xfrm>
             <a:off x="1104648" y="2154682"/>
-            <a:ext cx="3474720" cy="1284967"/>
+            <a:ext cx="3698088" cy="1284967"/>
           </a:xfrm>
           <a:prstGeom prst="rect">
             <a:avLst/>
@@ -3570,10 +4222,12 @@
           </a:bodyPr>
           <a:lstStyle/>
           <a:p>
-            <a:pPr>
+            <a:pPr marL="285750" indent="-285750">
               <a:spcAft>
                 <a:spcPts val="700"/>
               </a:spcAft>
+              <a:buFont typeface="Arial" panose="020B0604020202020204" pitchFamily="34" charset="0"/>
+              <a:buChar char="•"/>
               <a:defRPr sz="1500">
                 <a:solidFill>
                   <a:srgbClr val="FFFFFF"/>
@@ -3582,10 +4236,6 @@
               </a:defRPr>
             </a:pPr>
             <a:r>
-              <a:rPr dirty="0"/>
-              <a:t>• </a:t>
-            </a:r>
-            <a:r>
               <a:rPr lang="de-DE" dirty="0" err="1"/>
               <a:t>schema</a:t>
             </a:r>
@@ -3600,10 +4250,12 @@
             <a:endParaRPr lang="de-DE" dirty="0"/>
           </a:p>
           <a:p>
-            <a:pPr>
+            <a:pPr marL="285750" indent="-285750">
               <a:spcAft>
                 <a:spcPts val="700"/>
               </a:spcAft>
+              <a:buFont typeface="Arial" panose="020B0604020202020204" pitchFamily="34" charset="0"/>
+              <a:buChar char="•"/>
               <a:defRPr sz="1500">
                 <a:solidFill>
                   <a:srgbClr val="FFFFFF"/>
@@ -3612,10 +4264,6 @@
               </a:defRPr>
             </a:pPr>
             <a:r>
-              <a:rPr dirty="0"/>
-              <a:t>• </a:t>
-            </a:r>
-            <a:r>
               <a:rPr lang="de-DE" dirty="0" err="1"/>
               <a:t>data</a:t>
             </a:r>
@@ -3638,10 +4286,12 @@
             <a:endParaRPr lang="de-DE" dirty="0"/>
           </a:p>
           <a:p>
-            <a:pPr>
+            <a:pPr marL="285750" indent="-285750">
               <a:spcAft>
                 <a:spcPts val="700"/>
               </a:spcAft>
+              <a:buFont typeface="Arial" panose="020B0604020202020204" pitchFamily="34" charset="0"/>
+              <a:buChar char="•"/>
               <a:defRPr sz="1500">
                 <a:solidFill>
                   <a:srgbClr val="FFFFFF"/>
@@ -3650,10 +4300,6 @@
               </a:defRPr>
             </a:pPr>
             <a:r>
-              <a:rPr lang="de-DE" dirty="0"/>
-              <a:t>• </a:t>
-            </a:r>
-            <a:r>
               <a:rPr lang="de-DE" dirty="0" err="1"/>
               <a:t>Silver</a:t>
             </a:r>
@@ -3692,10 +4338,12 @@
             <a:endParaRPr lang="de-DE" dirty="0"/>
           </a:p>
           <a:p>
-            <a:pPr>
+            <a:pPr marL="285750" indent="-285750">
               <a:spcAft>
                 <a:spcPts val="700"/>
               </a:spcAft>
+              <a:buFont typeface="Arial" panose="020B0604020202020204" pitchFamily="34" charset="0"/>
+              <a:buChar char="•"/>
               <a:defRPr sz="1500">
                 <a:solidFill>
                   <a:srgbClr val="FFFFFF"/>
@@ -3703,10 +4351,6 @@
                 <a:latin typeface="Aptos"/>
               </a:defRPr>
             </a:pPr>
-            <a:r>
-              <a:rPr dirty="0"/>
-              <a:t>• </a:t>
-            </a:r>
             <a:r>
               <a:rPr lang="de-DE" dirty="0" err="1"/>
               <a:t>controlled</a:t>
@@ -3979,10 +4623,12 @@
           </a:bodyPr>
           <a:lstStyle/>
           <a:p>
-            <a:pPr>
+            <a:pPr marL="285750" indent="-285750">
               <a:spcAft>
                 <a:spcPts val="700"/>
               </a:spcAft>
+              <a:buFont typeface="Arial" panose="020B0604020202020204" pitchFamily="34" charset="0"/>
+              <a:buChar char="•"/>
               <a:defRPr sz="1500">
                 <a:solidFill>
                   <a:srgbClr val="FFFFFF"/>
@@ -3992,7 +4638,7 @@
             </a:pPr>
             <a:r>
               <a:rPr lang="de-DE" dirty="0"/>
-              <a:t>• after </a:t>
+              <a:t>after </a:t>
             </a:r>
             <a:r>
               <a:rPr lang="de-DE" dirty="0" err="1"/>
@@ -4028,10 +4674,12 @@
             </a:r>
           </a:p>
           <a:p>
-            <a:pPr>
+            <a:pPr marL="285750" indent="-285750">
               <a:spcAft>
                 <a:spcPts val="700"/>
               </a:spcAft>
+              <a:buFont typeface="Arial" panose="020B0604020202020204" pitchFamily="34" charset="0"/>
+              <a:buChar char="•"/>
               <a:defRPr sz="1500">
                 <a:solidFill>
                   <a:srgbClr val="FFFFFF"/>
@@ -4040,10 +4688,6 @@
               </a:defRPr>
             </a:pPr>
             <a:r>
-              <a:rPr lang="de-DE" dirty="0"/>
-              <a:t>• </a:t>
-            </a:r>
-            <a:r>
               <a:rPr lang="de-DE" dirty="0" err="1"/>
               <a:t>before</a:t>
             </a:r>
@@ -4066,10 +4710,12 @@
             <a:endParaRPr lang="de-DE" dirty="0"/>
           </a:p>
           <a:p>
-            <a:pPr>
+            <a:pPr marL="285750" indent="-285750">
               <a:spcAft>
                 <a:spcPts val="700"/>
               </a:spcAft>
+              <a:buFont typeface="Arial" panose="020B0604020202020204" pitchFamily="34" charset="0"/>
+              <a:buChar char="•"/>
               <a:defRPr sz="1500">
                 <a:solidFill>
                   <a:srgbClr val="FFFFFF"/>
@@ -4079,7 +4725,7 @@
             </a:pPr>
             <a:r>
               <a:rPr lang="de-DE" dirty="0"/>
-              <a:t>• After </a:t>
+              <a:t>After </a:t>
             </a:r>
             <a:r>
               <a:rPr lang="de-DE" dirty="0" err="1"/>
@@ -4112,10 +4758,12 @@
             <a:endParaRPr lang="de-DE" dirty="0"/>
           </a:p>
           <a:p>
-            <a:pPr>
+            <a:pPr marL="285750" indent="-285750">
               <a:spcAft>
                 <a:spcPts val="700"/>
               </a:spcAft>
+              <a:buFont typeface="Arial" panose="020B0604020202020204" pitchFamily="34" charset="0"/>
+              <a:buChar char="•"/>
               <a:defRPr sz="1500">
                 <a:solidFill>
                   <a:srgbClr val="FFFFFF"/>
@@ -4125,7 +4773,7 @@
             </a:pPr>
             <a:r>
               <a:rPr lang="de-DE" dirty="0"/>
-              <a:t>• Not </a:t>
+              <a:t>Not </a:t>
             </a:r>
             <a:r>
               <a:rPr lang="de-DE" dirty="0" err="1"/>
@@ -4275,41 +4923,6 @@
       </p:sp>
       <p:sp>
         <p:nvSpPr>
-          <p:cNvPr id="4" name="TextBox 3"/>
-          <p:cNvSpPr txBox="1"/>
-          <p:nvPr/>
-        </p:nvSpPr>
-        <p:spPr>
-          <a:xfrm>
-            <a:off x="384048" y="109728"/>
-            <a:ext cx="365760" cy="182880"/>
-          </a:xfrm>
-          <a:prstGeom prst="rect">
-            <a:avLst/>
-          </a:prstGeom>
-          <a:noFill/>
-        </p:spPr>
-        <p:txBody>
-          <a:bodyPr wrap="square" anchor="t">
-            <a:spAutoFit/>
-          </a:bodyPr>
-          <a:lstStyle/>
-          <a:p>
-            <a:pPr algn="ctr"/>
-            <a:r>
-              <a:rPr sz="800" b="1">
-                <a:solidFill>
-                  <a:srgbClr val="005020"/>
-                </a:solidFill>
-                <a:latin typeface="Aptos"/>
-              </a:rPr>
-              <a:t>11</a:t>
-            </a:r>
-          </a:p>
-        </p:txBody>
-      </p:sp>
-      <p:sp>
-        <p:nvSpPr>
           <p:cNvPr id="5" name="TextBox 4"/>
           <p:cNvSpPr txBox="1"/>
           <p:nvPr/>
@@ -4466,7 +5079,7 @@
           <a:p>
             <a:pPr algn="ctr"/>
             <a:r>
-              <a:rPr sz="1400" b="0">
+              <a:rPr sz="1400" b="0" dirty="0">
                 <a:solidFill>
                   <a:srgbClr val="FFFFFF"/>
                 </a:solidFill>
@@ -4744,7 +5357,7 @@
           <a:p>
             <a:pPr algn="ctr"/>
             <a:r>
-              <a:rPr sz="1400" b="1">
+              <a:rPr sz="1400" b="1" dirty="0">
                 <a:solidFill>
                   <a:srgbClr val="DFF5E4"/>
                 </a:solidFill>
@@ -4935,95 +5548,806 @@
       </p:grpSpPr>
       <p:sp>
         <p:nvSpPr>
-          <p:cNvPr id="4" name="Title 3"/>
-          <p:cNvSpPr>
-            <a:spLocks noGrp="1"/>
+          <p:cNvPr id="6" name="Title 3">
+            <a:extLst>
+              <a:ext uri="{FF2B5EF4-FFF2-40B4-BE49-F238E27FC236}">
+                <a16:creationId xmlns:a16="http://schemas.microsoft.com/office/drawing/2014/main" id="{DDF9FABB-6CEF-8AE9-D948-608577322A90}"/>
+              </a:ext>
+            </a:extLst>
+          </p:cNvPr>
+          <p:cNvSpPr txBox="1">
+            <a:spLocks/>
           </p:cNvSpPr>
-          <p:nvPr>
-            <p:ph type="title"/>
-          </p:nvPr>
-        </p:nvSpPr>
-        <p:spPr/>
+          <p:nvPr/>
+        </p:nvSpPr>
+        <p:spPr>
+          <a:xfrm>
+            <a:off x="354416" y="280068"/>
+            <a:ext cx="11502621" cy="1143000"/>
+          </a:xfrm>
+          <a:prstGeom prst="rect">
+            <a:avLst/>
+          </a:prstGeom>
+        </p:spPr>
         <p:txBody>
           <a:bodyPr wrap="square" anchor="t"/>
-          <a:lstStyle/>
-          <a:p>
-            <a:pPr algn="l"/>
-            <a:r>
-              <a:rPr sz="2500" b="1" dirty="0">
+          <a:lstStyle>
+            <a:lvl1pPr algn="l" rtl="0" eaLnBrk="0" fontAlgn="base" hangingPunct="0">
+              <a:spcBef>
+                <a:spcPct val="0"/>
+              </a:spcBef>
+              <a:spcAft>
+                <a:spcPct val="0"/>
+              </a:spcAft>
+              <a:defRPr sz="2800" b="1">
+                <a:solidFill>
+                  <a:schemeClr val="bg2">
+                    <a:lumMod val="75000"/>
+                  </a:schemeClr>
+                </a:solidFill>
+                <a:latin typeface="Lato" panose="020F0502020204030203" pitchFamily="34" charset="0"/>
+                <a:ea typeface="Lato" panose="020F0502020204030203" pitchFamily="34" charset="0"/>
+                <a:cs typeface="Lato" panose="020F0502020204030203" pitchFamily="34" charset="0"/>
+              </a:defRPr>
+            </a:lvl1pPr>
+            <a:lvl2pPr algn="l" rtl="0" eaLnBrk="0" fontAlgn="base" hangingPunct="0">
+              <a:spcBef>
+                <a:spcPct val="0"/>
+              </a:spcBef>
+              <a:spcAft>
+                <a:spcPct val="0"/>
+              </a:spcAft>
+              <a:defRPr sz="2000" b="1">
+                <a:solidFill>
+                  <a:srgbClr val="595959"/>
+                </a:solidFill>
+                <a:latin typeface="Helvetica-Bold"/>
+                <a:cs typeface="Tahoma" pitchFamily="34" charset="0"/>
+              </a:defRPr>
+            </a:lvl2pPr>
+            <a:lvl3pPr algn="l" rtl="0" eaLnBrk="0" fontAlgn="base" hangingPunct="0">
+              <a:spcBef>
+                <a:spcPct val="0"/>
+              </a:spcBef>
+              <a:spcAft>
+                <a:spcPct val="0"/>
+              </a:spcAft>
+              <a:defRPr sz="2000" b="1">
+                <a:solidFill>
+                  <a:srgbClr val="595959"/>
+                </a:solidFill>
+                <a:latin typeface="Helvetica-Bold"/>
+                <a:cs typeface="Tahoma" pitchFamily="34" charset="0"/>
+              </a:defRPr>
+            </a:lvl3pPr>
+            <a:lvl4pPr algn="l" rtl="0" eaLnBrk="0" fontAlgn="base" hangingPunct="0">
+              <a:spcBef>
+                <a:spcPct val="0"/>
+              </a:spcBef>
+              <a:spcAft>
+                <a:spcPct val="0"/>
+              </a:spcAft>
+              <a:defRPr sz="2000" b="1">
+                <a:solidFill>
+                  <a:srgbClr val="595959"/>
+                </a:solidFill>
+                <a:latin typeface="Helvetica-Bold"/>
+                <a:cs typeface="Tahoma" pitchFamily="34" charset="0"/>
+              </a:defRPr>
+            </a:lvl4pPr>
+            <a:lvl5pPr algn="l" rtl="0" eaLnBrk="0" fontAlgn="base" hangingPunct="0">
+              <a:spcBef>
+                <a:spcPct val="0"/>
+              </a:spcBef>
+              <a:spcAft>
+                <a:spcPct val="0"/>
+              </a:spcAft>
+              <a:defRPr sz="2000" b="1">
+                <a:solidFill>
+                  <a:srgbClr val="595959"/>
+                </a:solidFill>
+                <a:latin typeface="Helvetica-Bold"/>
+                <a:cs typeface="Tahoma" pitchFamily="34" charset="0"/>
+              </a:defRPr>
+            </a:lvl5pPr>
+            <a:lvl6pPr marL="457200" algn="ctr" rtl="0" fontAlgn="base">
+              <a:spcBef>
+                <a:spcPct val="0"/>
+              </a:spcBef>
+              <a:spcAft>
+                <a:spcPct val="0"/>
+              </a:spcAft>
+              <a:defRPr sz="2400" b="1">
+                <a:solidFill>
+                  <a:srgbClr val="646B86"/>
+                </a:solidFill>
+                <a:latin typeface="Arial" charset="0"/>
+              </a:defRPr>
+            </a:lvl6pPr>
+            <a:lvl7pPr marL="914400" algn="ctr" rtl="0" fontAlgn="base">
+              <a:spcBef>
+                <a:spcPct val="0"/>
+              </a:spcBef>
+              <a:spcAft>
+                <a:spcPct val="0"/>
+              </a:spcAft>
+              <a:defRPr sz="2400" b="1">
+                <a:solidFill>
+                  <a:srgbClr val="646B86"/>
+                </a:solidFill>
+                <a:latin typeface="Arial" charset="0"/>
+              </a:defRPr>
+            </a:lvl7pPr>
+            <a:lvl8pPr marL="1371600" algn="ctr" rtl="0" fontAlgn="base">
+              <a:spcBef>
+                <a:spcPct val="0"/>
+              </a:spcBef>
+              <a:spcAft>
+                <a:spcPct val="0"/>
+              </a:spcAft>
+              <a:defRPr sz="2400" b="1">
+                <a:solidFill>
+                  <a:srgbClr val="646B86"/>
+                </a:solidFill>
+                <a:latin typeface="Arial" charset="0"/>
+              </a:defRPr>
+            </a:lvl8pPr>
+            <a:lvl9pPr marL="1828800" algn="ctr" rtl="0" fontAlgn="base">
+              <a:spcBef>
+                <a:spcPct val="0"/>
+              </a:spcBef>
+              <a:spcAft>
+                <a:spcPct val="0"/>
+              </a:spcAft>
+              <a:defRPr sz="2400" b="1">
+                <a:solidFill>
+                  <a:srgbClr val="646B86"/>
+                </a:solidFill>
+                <a:latin typeface="Arial" charset="0"/>
+              </a:defRPr>
+            </a:lvl9pPr>
+          </a:lstStyle>
+          <a:p>
+            <a:r>
+              <a:rPr lang="de-DE" sz="2700" kern="0" dirty="0">
                 <a:solidFill>
                   <a:srgbClr val="005020"/>
                 </a:solidFill>
                 <a:latin typeface="Aptos"/>
               </a:rPr>
-              <a:t>RE</a:t>
-            </a:r>
-            <a:r>
-              <a:rPr lang="de-DE" sz="2500" b="1" dirty="0">
+              <a:t>5 AIRLINES WITH THE MOST FLIGHTS 01/25-06/26 (PLUS </a:t>
+            </a:r>
+          </a:p>
+          <a:p>
+            <a:r>
+              <a:rPr lang="de-DE" sz="2700" kern="0" dirty="0">
                 <a:solidFill>
                   <a:srgbClr val="005020"/>
                 </a:solidFill>
                 <a:latin typeface="Aptos"/>
               </a:rPr>
-              <a:t>SULTS</a:t>
-            </a:r>
-            <a:r>
-              <a:rPr sz="2500" b="1" dirty="0">
+              <a:t>ALL AIRLINES), METRIC: AVG. DEPARTURE DELAY</a:t>
+            </a:r>
+          </a:p>
+        </p:txBody>
+      </p:sp>
+      <p:pic>
+        <p:nvPicPr>
+          <p:cNvPr id="13" name="Grafik 12">
+            <a:extLst>
+              <a:ext uri="{FF2B5EF4-FFF2-40B4-BE49-F238E27FC236}">
+                <a16:creationId xmlns:a16="http://schemas.microsoft.com/office/drawing/2014/main" id="{12C6464C-F017-9535-E086-3E25F1C3BDAB}"/>
+              </a:ext>
+            </a:extLst>
+          </p:cNvPr>
+          <p:cNvPicPr>
+            <a:picLocks noChangeAspect="1"/>
+          </p:cNvPicPr>
+          <p:nvPr/>
+        </p:nvPicPr>
+        <p:blipFill>
+          <a:blip r:embed="rId2"/>
+          <a:stretch>
+            <a:fillRect/>
+          </a:stretch>
+        </p:blipFill>
+        <p:spPr>
+          <a:xfrm>
+            <a:off x="2122256" y="1511723"/>
+            <a:ext cx="7467680" cy="4624029"/>
+          </a:xfrm>
+          <a:prstGeom prst="rect">
+            <a:avLst/>
+          </a:prstGeom>
+          <a:ln>
+            <a:solidFill>
+              <a:srgbClr val="0A7A35"/>
+            </a:solidFill>
+          </a:ln>
+        </p:spPr>
+      </p:pic>
+    </p:spTree>
+    <p:extLst>
+      <p:ext uri="{BB962C8B-B14F-4D97-AF65-F5344CB8AC3E}">
+        <p14:creationId xmlns:p14="http://schemas.microsoft.com/office/powerpoint/2010/main" val="2450462166"/>
+      </p:ext>
+    </p:extLst>
+  </p:cSld>
+  <p:clrMapOvr>
+    <a:masterClrMapping/>
+  </p:clrMapOvr>
+</p:sld>
+</file>
+
+<file path=ppt/slides/slide14.xml><?xml version="1.0" encoding="utf-8"?>
+<p:sld xmlns:a="http://schemas.openxmlformats.org/drawingml/2006/main" xmlns:r="http://schemas.openxmlformats.org/officeDocument/2006/relationships" xmlns:p="http://schemas.openxmlformats.org/presentationml/2006/main">
+  <p:cSld>
+    <p:spTree>
+      <p:nvGrpSpPr>
+        <p:cNvPr id="1" name="">
+          <a:extLst>
+            <a:ext uri="{FF2B5EF4-FFF2-40B4-BE49-F238E27FC236}">
+              <a16:creationId xmlns:a16="http://schemas.microsoft.com/office/drawing/2014/main" id="{054F17CF-7C73-14AE-DAB7-BD2BD8FDCE91}"/>
+            </a:ext>
+          </a:extLst>
+        </p:cNvPr>
+        <p:cNvGrpSpPr/>
+        <p:nvPr/>
+      </p:nvGrpSpPr>
+      <p:grpSpPr>
+        <a:xfrm>
+          <a:off x="0" y="0"/>
+          <a:ext cx="0" cy="0"/>
+          <a:chOff x="0" y="0"/>
+          <a:chExt cx="0" cy="0"/>
+        </a:xfrm>
+      </p:grpSpPr>
+      <p:sp>
+        <p:nvSpPr>
+          <p:cNvPr id="6" name="Title 3">
+            <a:extLst>
+              <a:ext uri="{FF2B5EF4-FFF2-40B4-BE49-F238E27FC236}">
+                <a16:creationId xmlns:a16="http://schemas.microsoft.com/office/drawing/2014/main" id="{51528784-C5C9-CFF4-325A-ECDF45A9DD26}"/>
+              </a:ext>
+            </a:extLst>
+          </p:cNvPr>
+          <p:cNvSpPr txBox="1">
+            <a:spLocks/>
+          </p:cNvSpPr>
+          <p:nvPr/>
+        </p:nvSpPr>
+        <p:spPr>
+          <a:xfrm>
+            <a:off x="354416" y="280068"/>
+            <a:ext cx="11502621" cy="1143000"/>
+          </a:xfrm>
+          <a:prstGeom prst="rect">
+            <a:avLst/>
+          </a:prstGeom>
+        </p:spPr>
+        <p:txBody>
+          <a:bodyPr wrap="square" anchor="t"/>
+          <a:lstStyle>
+            <a:lvl1pPr algn="l" rtl="0" eaLnBrk="0" fontAlgn="base" hangingPunct="0">
+              <a:spcBef>
+                <a:spcPct val="0"/>
+              </a:spcBef>
+              <a:spcAft>
+                <a:spcPct val="0"/>
+              </a:spcAft>
+              <a:defRPr sz="2800" b="1">
+                <a:solidFill>
+                  <a:schemeClr val="bg2">
+                    <a:lumMod val="75000"/>
+                  </a:schemeClr>
+                </a:solidFill>
+                <a:latin typeface="Lato" panose="020F0502020204030203" pitchFamily="34" charset="0"/>
+                <a:ea typeface="Lato" panose="020F0502020204030203" pitchFamily="34" charset="0"/>
+                <a:cs typeface="Lato" panose="020F0502020204030203" pitchFamily="34" charset="0"/>
+              </a:defRPr>
+            </a:lvl1pPr>
+            <a:lvl2pPr algn="l" rtl="0" eaLnBrk="0" fontAlgn="base" hangingPunct="0">
+              <a:spcBef>
+                <a:spcPct val="0"/>
+              </a:spcBef>
+              <a:spcAft>
+                <a:spcPct val="0"/>
+              </a:spcAft>
+              <a:defRPr sz="2000" b="1">
+                <a:solidFill>
+                  <a:srgbClr val="595959"/>
+                </a:solidFill>
+                <a:latin typeface="Helvetica-Bold"/>
+                <a:cs typeface="Tahoma" pitchFamily="34" charset="0"/>
+              </a:defRPr>
+            </a:lvl2pPr>
+            <a:lvl3pPr algn="l" rtl="0" eaLnBrk="0" fontAlgn="base" hangingPunct="0">
+              <a:spcBef>
+                <a:spcPct val="0"/>
+              </a:spcBef>
+              <a:spcAft>
+                <a:spcPct val="0"/>
+              </a:spcAft>
+              <a:defRPr sz="2000" b="1">
+                <a:solidFill>
+                  <a:srgbClr val="595959"/>
+                </a:solidFill>
+                <a:latin typeface="Helvetica-Bold"/>
+                <a:cs typeface="Tahoma" pitchFamily="34" charset="0"/>
+              </a:defRPr>
+            </a:lvl3pPr>
+            <a:lvl4pPr algn="l" rtl="0" eaLnBrk="0" fontAlgn="base" hangingPunct="0">
+              <a:spcBef>
+                <a:spcPct val="0"/>
+              </a:spcBef>
+              <a:spcAft>
+                <a:spcPct val="0"/>
+              </a:spcAft>
+              <a:defRPr sz="2000" b="1">
+                <a:solidFill>
+                  <a:srgbClr val="595959"/>
+                </a:solidFill>
+                <a:latin typeface="Helvetica-Bold"/>
+                <a:cs typeface="Tahoma" pitchFamily="34" charset="0"/>
+              </a:defRPr>
+            </a:lvl4pPr>
+            <a:lvl5pPr algn="l" rtl="0" eaLnBrk="0" fontAlgn="base" hangingPunct="0">
+              <a:spcBef>
+                <a:spcPct val="0"/>
+              </a:spcBef>
+              <a:spcAft>
+                <a:spcPct val="0"/>
+              </a:spcAft>
+              <a:defRPr sz="2000" b="1">
+                <a:solidFill>
+                  <a:srgbClr val="595959"/>
+                </a:solidFill>
+                <a:latin typeface="Helvetica-Bold"/>
+                <a:cs typeface="Tahoma" pitchFamily="34" charset="0"/>
+              </a:defRPr>
+            </a:lvl5pPr>
+            <a:lvl6pPr marL="457200" algn="ctr" rtl="0" fontAlgn="base">
+              <a:spcBef>
+                <a:spcPct val="0"/>
+              </a:spcBef>
+              <a:spcAft>
+                <a:spcPct val="0"/>
+              </a:spcAft>
+              <a:defRPr sz="2400" b="1">
+                <a:solidFill>
+                  <a:srgbClr val="646B86"/>
+                </a:solidFill>
+                <a:latin typeface="Arial" charset="0"/>
+              </a:defRPr>
+            </a:lvl6pPr>
+            <a:lvl7pPr marL="914400" algn="ctr" rtl="0" fontAlgn="base">
+              <a:spcBef>
+                <a:spcPct val="0"/>
+              </a:spcBef>
+              <a:spcAft>
+                <a:spcPct val="0"/>
+              </a:spcAft>
+              <a:defRPr sz="2400" b="1">
+                <a:solidFill>
+                  <a:srgbClr val="646B86"/>
+                </a:solidFill>
+                <a:latin typeface="Arial" charset="0"/>
+              </a:defRPr>
+            </a:lvl7pPr>
+            <a:lvl8pPr marL="1371600" algn="ctr" rtl="0" fontAlgn="base">
+              <a:spcBef>
+                <a:spcPct val="0"/>
+              </a:spcBef>
+              <a:spcAft>
+                <a:spcPct val="0"/>
+              </a:spcAft>
+              <a:defRPr sz="2400" b="1">
+                <a:solidFill>
+                  <a:srgbClr val="646B86"/>
+                </a:solidFill>
+                <a:latin typeface="Arial" charset="0"/>
+              </a:defRPr>
+            </a:lvl8pPr>
+            <a:lvl9pPr marL="1828800" algn="ctr" rtl="0" fontAlgn="base">
+              <a:spcBef>
+                <a:spcPct val="0"/>
+              </a:spcBef>
+              <a:spcAft>
+                <a:spcPct val="0"/>
+              </a:spcAft>
+              <a:defRPr sz="2400" b="1">
+                <a:solidFill>
+                  <a:srgbClr val="646B86"/>
+                </a:solidFill>
+                <a:latin typeface="Arial" charset="0"/>
+              </a:defRPr>
+            </a:lvl9pPr>
+          </a:lstStyle>
+          <a:p>
+            <a:r>
+              <a:rPr lang="en-US" sz="2700" kern="0" dirty="0">
                 <a:solidFill>
                   <a:srgbClr val="005020"/>
                 </a:solidFill>
                 <a:latin typeface="Aptos"/>
               </a:rPr>
-              <a:t> &amp; OUTLOOK</a:t>
-            </a:r>
-          </a:p>
-        </p:txBody>
-      </p:sp>
-      <p:sp>
-        <p:nvSpPr>
-          <p:cNvPr id="5" name="TextBox 4"/>
-          <p:cNvSpPr txBox="1"/>
-          <p:nvPr/>
-        </p:nvSpPr>
-        <p:spPr>
-          <a:xfrm>
-            <a:off x="384048" y="109728"/>
-            <a:ext cx="365760" cy="182880"/>
+              <a:t>TOP 38 ROUTES (&gt; 0.1% OF TOTAL TRAFFIC / ~10M FLIGHTS)</a:t>
+            </a:r>
+          </a:p>
+          <a:p>
+            <a:r>
+              <a:rPr lang="en-US" sz="2700" kern="0" dirty="0">
+                <a:solidFill>
+                  <a:srgbClr val="005020"/>
+                </a:solidFill>
+                <a:latin typeface="Aptos"/>
+              </a:rPr>
+              <a:t>01/25 - 06/26, METRIC: </a:t>
+            </a:r>
+            <a:r>
+              <a:rPr lang="de-DE" sz="2700" kern="0" dirty="0">
+                <a:solidFill>
+                  <a:srgbClr val="005020"/>
+                </a:solidFill>
+                <a:latin typeface="Aptos"/>
+              </a:rPr>
+              <a:t>AVG.</a:t>
+            </a:r>
+            <a:r>
+              <a:rPr lang="en-US" sz="2700" kern="0" dirty="0">
+                <a:solidFill>
+                  <a:srgbClr val="005020"/>
+                </a:solidFill>
+                <a:latin typeface="Aptos"/>
+              </a:rPr>
+              <a:t> ARRIVAL DELAY</a:t>
+            </a:r>
+            <a:endParaRPr lang="de-DE" sz="2700" kern="0" dirty="0">
+              <a:solidFill>
+                <a:srgbClr val="005020"/>
+              </a:solidFill>
+              <a:latin typeface="Aptos"/>
+            </a:endParaRPr>
+          </a:p>
+        </p:txBody>
+      </p:sp>
+      <p:pic>
+        <p:nvPicPr>
+          <p:cNvPr id="5" name="Grafik 4">
+            <a:extLst>
+              <a:ext uri="{FF2B5EF4-FFF2-40B4-BE49-F238E27FC236}">
+                <a16:creationId xmlns:a16="http://schemas.microsoft.com/office/drawing/2014/main" id="{3CE344C4-EF7C-CABF-45B3-565F52332B8A}"/>
+              </a:ext>
+            </a:extLst>
+          </p:cNvPr>
+          <p:cNvPicPr>
+            <a:picLocks noChangeAspect="1"/>
+          </p:cNvPicPr>
+          <p:nvPr/>
+        </p:nvPicPr>
+        <p:blipFill>
+          <a:blip r:embed="rId2"/>
+          <a:stretch>
+            <a:fillRect/>
+          </a:stretch>
+        </p:blipFill>
+        <p:spPr>
+          <a:xfrm>
+            <a:off x="1564091" y="1478872"/>
+            <a:ext cx="7740746" cy="4807628"/>
           </a:xfrm>
           <a:prstGeom prst="rect">
             <a:avLst/>
           </a:prstGeom>
-          <a:noFill/>
-        </p:spPr>
-        <p:txBody>
-          <a:bodyPr wrap="square" anchor="t">
-            <a:spAutoFit/>
-          </a:bodyPr>
-          <a:lstStyle/>
-          <a:p>
-            <a:pPr algn="ctr"/>
-            <a:r>
-              <a:rPr sz="800" b="1">
+          <a:ln>
+            <a:solidFill>
+              <a:srgbClr val="0A7A35"/>
+            </a:solidFill>
+          </a:ln>
+        </p:spPr>
+      </p:pic>
+    </p:spTree>
+    <p:extLst>
+      <p:ext uri="{BB962C8B-B14F-4D97-AF65-F5344CB8AC3E}">
+        <p14:creationId xmlns:p14="http://schemas.microsoft.com/office/powerpoint/2010/main" val="1991136377"/>
+      </p:ext>
+    </p:extLst>
+  </p:cSld>
+  <p:clrMapOvr>
+    <a:masterClrMapping/>
+  </p:clrMapOvr>
+</p:sld>
+</file>
+
+<file path=ppt/slides/slide15.xml><?xml version="1.0" encoding="utf-8"?>
+<p:sld xmlns:a="http://schemas.openxmlformats.org/drawingml/2006/main" xmlns:r="http://schemas.openxmlformats.org/officeDocument/2006/relationships" xmlns:p="http://schemas.openxmlformats.org/presentationml/2006/main">
+  <p:cSld>
+    <p:spTree>
+      <p:nvGrpSpPr>
+        <p:cNvPr id="1" name="">
+          <a:extLst>
+            <a:ext uri="{FF2B5EF4-FFF2-40B4-BE49-F238E27FC236}">
+              <a16:creationId xmlns:a16="http://schemas.microsoft.com/office/drawing/2014/main" id="{ADA0EFB9-E461-C9F2-2FEE-0243995B2C63}"/>
+            </a:ext>
+          </a:extLst>
+        </p:cNvPr>
+        <p:cNvGrpSpPr/>
+        <p:nvPr/>
+      </p:nvGrpSpPr>
+      <p:grpSpPr>
+        <a:xfrm>
+          <a:off x="0" y="0"/>
+          <a:ext cx="0" cy="0"/>
+          <a:chOff x="0" y="0"/>
+          <a:chExt cx="0" cy="0"/>
+        </a:xfrm>
+      </p:grpSpPr>
+      <p:sp>
+        <p:nvSpPr>
+          <p:cNvPr id="6" name="Title 3">
+            <a:extLst>
+              <a:ext uri="{FF2B5EF4-FFF2-40B4-BE49-F238E27FC236}">
+                <a16:creationId xmlns:a16="http://schemas.microsoft.com/office/drawing/2014/main" id="{E0E7371F-2044-B3DB-92B0-57F75D5243FE}"/>
+              </a:ext>
+            </a:extLst>
+          </p:cNvPr>
+          <p:cNvSpPr txBox="1">
+            <a:spLocks/>
+          </p:cNvSpPr>
+          <p:nvPr/>
+        </p:nvSpPr>
+        <p:spPr>
+          <a:xfrm>
+            <a:off x="354416" y="280068"/>
+            <a:ext cx="11502621" cy="1143000"/>
+          </a:xfrm>
+          <a:prstGeom prst="rect">
+            <a:avLst/>
+          </a:prstGeom>
+        </p:spPr>
+        <p:txBody>
+          <a:bodyPr wrap="square" anchor="t"/>
+          <a:lstStyle>
+            <a:lvl1pPr algn="l" rtl="0" eaLnBrk="0" fontAlgn="base" hangingPunct="0">
+              <a:spcBef>
+                <a:spcPct val="0"/>
+              </a:spcBef>
+              <a:spcAft>
+                <a:spcPct val="0"/>
+              </a:spcAft>
+              <a:defRPr sz="2800" b="1">
+                <a:solidFill>
+                  <a:schemeClr val="bg2">
+                    <a:lumMod val="75000"/>
+                  </a:schemeClr>
+                </a:solidFill>
+                <a:latin typeface="Lato" panose="020F0502020204030203" pitchFamily="34" charset="0"/>
+                <a:ea typeface="Lato" panose="020F0502020204030203" pitchFamily="34" charset="0"/>
+                <a:cs typeface="Lato" panose="020F0502020204030203" pitchFamily="34" charset="0"/>
+              </a:defRPr>
+            </a:lvl1pPr>
+            <a:lvl2pPr algn="l" rtl="0" eaLnBrk="0" fontAlgn="base" hangingPunct="0">
+              <a:spcBef>
+                <a:spcPct val="0"/>
+              </a:spcBef>
+              <a:spcAft>
+                <a:spcPct val="0"/>
+              </a:spcAft>
+              <a:defRPr sz="2000" b="1">
+                <a:solidFill>
+                  <a:srgbClr val="595959"/>
+                </a:solidFill>
+                <a:latin typeface="Helvetica-Bold"/>
+                <a:cs typeface="Tahoma" pitchFamily="34" charset="0"/>
+              </a:defRPr>
+            </a:lvl2pPr>
+            <a:lvl3pPr algn="l" rtl="0" eaLnBrk="0" fontAlgn="base" hangingPunct="0">
+              <a:spcBef>
+                <a:spcPct val="0"/>
+              </a:spcBef>
+              <a:spcAft>
+                <a:spcPct val="0"/>
+              </a:spcAft>
+              <a:defRPr sz="2000" b="1">
+                <a:solidFill>
+                  <a:srgbClr val="595959"/>
+                </a:solidFill>
+                <a:latin typeface="Helvetica-Bold"/>
+                <a:cs typeface="Tahoma" pitchFamily="34" charset="0"/>
+              </a:defRPr>
+            </a:lvl3pPr>
+            <a:lvl4pPr algn="l" rtl="0" eaLnBrk="0" fontAlgn="base" hangingPunct="0">
+              <a:spcBef>
+                <a:spcPct val="0"/>
+              </a:spcBef>
+              <a:spcAft>
+                <a:spcPct val="0"/>
+              </a:spcAft>
+              <a:defRPr sz="2000" b="1">
+                <a:solidFill>
+                  <a:srgbClr val="595959"/>
+                </a:solidFill>
+                <a:latin typeface="Helvetica-Bold"/>
+                <a:cs typeface="Tahoma" pitchFamily="34" charset="0"/>
+              </a:defRPr>
+            </a:lvl4pPr>
+            <a:lvl5pPr algn="l" rtl="0" eaLnBrk="0" fontAlgn="base" hangingPunct="0">
+              <a:spcBef>
+                <a:spcPct val="0"/>
+              </a:spcBef>
+              <a:spcAft>
+                <a:spcPct val="0"/>
+              </a:spcAft>
+              <a:defRPr sz="2000" b="1">
+                <a:solidFill>
+                  <a:srgbClr val="595959"/>
+                </a:solidFill>
+                <a:latin typeface="Helvetica-Bold"/>
+                <a:cs typeface="Tahoma" pitchFamily="34" charset="0"/>
+              </a:defRPr>
+            </a:lvl5pPr>
+            <a:lvl6pPr marL="457200" algn="ctr" rtl="0" fontAlgn="base">
+              <a:spcBef>
+                <a:spcPct val="0"/>
+              </a:spcBef>
+              <a:spcAft>
+                <a:spcPct val="0"/>
+              </a:spcAft>
+              <a:defRPr sz="2400" b="1">
+                <a:solidFill>
+                  <a:srgbClr val="646B86"/>
+                </a:solidFill>
+                <a:latin typeface="Arial" charset="0"/>
+              </a:defRPr>
+            </a:lvl6pPr>
+            <a:lvl7pPr marL="914400" algn="ctr" rtl="0" fontAlgn="base">
+              <a:spcBef>
+                <a:spcPct val="0"/>
+              </a:spcBef>
+              <a:spcAft>
+                <a:spcPct val="0"/>
+              </a:spcAft>
+              <a:defRPr sz="2400" b="1">
+                <a:solidFill>
+                  <a:srgbClr val="646B86"/>
+                </a:solidFill>
+                <a:latin typeface="Arial" charset="0"/>
+              </a:defRPr>
+            </a:lvl7pPr>
+            <a:lvl8pPr marL="1371600" algn="ctr" rtl="0" fontAlgn="base">
+              <a:spcBef>
+                <a:spcPct val="0"/>
+              </a:spcBef>
+              <a:spcAft>
+                <a:spcPct val="0"/>
+              </a:spcAft>
+              <a:defRPr sz="2400" b="1">
+                <a:solidFill>
+                  <a:srgbClr val="646B86"/>
+                </a:solidFill>
+                <a:latin typeface="Arial" charset="0"/>
+              </a:defRPr>
+            </a:lvl8pPr>
+            <a:lvl9pPr marL="1828800" algn="ctr" rtl="0" fontAlgn="base">
+              <a:spcBef>
+                <a:spcPct val="0"/>
+              </a:spcBef>
+              <a:spcAft>
+                <a:spcPct val="0"/>
+              </a:spcAft>
+              <a:defRPr sz="2400" b="1">
+                <a:solidFill>
+                  <a:srgbClr val="646B86"/>
+                </a:solidFill>
+                <a:latin typeface="Arial" charset="0"/>
+              </a:defRPr>
+            </a:lvl9pPr>
+          </a:lstStyle>
+          <a:p>
+            <a:r>
+              <a:rPr lang="de-DE" sz="2700" kern="0" dirty="0">
                 <a:solidFill>
                   <a:srgbClr val="005020"/>
                 </a:solidFill>
                 <a:latin typeface="Aptos"/>
               </a:rPr>
-              <a:t>12</a:t>
-            </a:r>
-          </a:p>
-        </p:txBody>
-      </p:sp>
-      <p:sp>
-        <p:nvSpPr>
-          <p:cNvPr id="6" name="Rounded Rectangle 5"/>
+              <a:t>AIRPORTS WITH THE MOST FLIGHTS 01/25-06/26,</a:t>
+            </a:r>
+          </a:p>
+          <a:p>
+            <a:r>
+              <a:rPr lang="de-DE" sz="2700" kern="0" dirty="0">
+                <a:solidFill>
+                  <a:srgbClr val="005020"/>
+                </a:solidFill>
+                <a:latin typeface="Aptos"/>
+              </a:rPr>
+              <a:t>METRIC: ON-TIME</a:t>
+            </a:r>
+          </a:p>
+        </p:txBody>
+      </p:sp>
+      <p:pic>
+        <p:nvPicPr>
+          <p:cNvPr id="11" name="Grafik 10">
+            <a:extLst>
+              <a:ext uri="{FF2B5EF4-FFF2-40B4-BE49-F238E27FC236}">
+                <a16:creationId xmlns:a16="http://schemas.microsoft.com/office/drawing/2014/main" id="{B54C4406-D2AA-B45E-F009-E64D6BC30147}"/>
+              </a:ext>
+            </a:extLst>
+          </p:cNvPr>
+          <p:cNvPicPr>
+            <a:picLocks noChangeAspect="1"/>
+          </p:cNvPicPr>
+          <p:nvPr/>
+        </p:nvPicPr>
+        <p:blipFill>
+          <a:blip r:embed="rId2"/>
+          <a:stretch>
+            <a:fillRect/>
+          </a:stretch>
+        </p:blipFill>
+        <p:spPr>
+          <a:xfrm>
+            <a:off x="354415" y="1457118"/>
+            <a:ext cx="11471845" cy="4806947"/>
+          </a:xfrm>
+          <a:prstGeom prst="rect">
+            <a:avLst/>
+          </a:prstGeom>
+          <a:ln>
+            <a:solidFill>
+              <a:srgbClr val="0A7A35"/>
+            </a:solidFill>
+          </a:ln>
+        </p:spPr>
+      </p:pic>
+    </p:spTree>
+    <p:extLst>
+      <p:ext uri="{BB962C8B-B14F-4D97-AF65-F5344CB8AC3E}">
+        <p14:creationId xmlns:p14="http://schemas.microsoft.com/office/powerpoint/2010/main" val="533016556"/>
+      </p:ext>
+    </p:extLst>
+  </p:cSld>
+  <p:clrMapOvr>
+    <a:masterClrMapping/>
+  </p:clrMapOvr>
+</p:sld>
+</file>
+
+<file path=ppt/slides/slide16.xml><?xml version="1.0" encoding="utf-8"?>
+<p:sld xmlns:a="http://schemas.openxmlformats.org/drawingml/2006/main" xmlns:r="http://schemas.openxmlformats.org/officeDocument/2006/relationships" xmlns:p="http://schemas.openxmlformats.org/presentationml/2006/main">
+  <p:cSld>
+    <p:spTree>
+      <p:nvGrpSpPr>
+        <p:cNvPr id="1" name=""/>
+        <p:cNvGrpSpPr/>
+        <p:nvPr/>
+      </p:nvGrpSpPr>
+      <p:grpSpPr>
+        <a:xfrm>
+          <a:off x="0" y="0"/>
+          <a:ext cx="0" cy="0"/>
+          <a:chOff x="0" y="0"/>
+          <a:chExt cx="0" cy="0"/>
+        </a:xfrm>
+      </p:grpSpPr>
+      <p:sp>
+        <p:nvSpPr>
+          <p:cNvPr id="3" name="Rounded Rectangle 5">
+            <a:extLst>
+              <a:ext uri="{FF2B5EF4-FFF2-40B4-BE49-F238E27FC236}">
+                <a16:creationId xmlns:a16="http://schemas.microsoft.com/office/drawing/2014/main" id="{FA8F854D-81F5-9E10-5C10-EEFD2BA4A09A}"/>
+              </a:ext>
+            </a:extLst>
+          </p:cNvPr>
           <p:cNvSpPr/>
           <p:nvPr/>
         </p:nvSpPr>
         <p:spPr>
           <a:xfrm>
-            <a:off x="777240" y="1600200"/>
-            <a:ext cx="4800600" cy="3063240"/>
+            <a:off x="777240" y="1609725"/>
+            <a:ext cx="3956685" cy="3276600"/>
           </a:xfrm>
           <a:prstGeom prst="roundRect">
             <a:avLst/>
@@ -5056,154 +6380,26 @@
           <a:lstStyle/>
           <a:p>
             <a:pPr algn="ctr"/>
-            <a:endParaRPr/>
-          </a:p>
-        </p:txBody>
-      </p:sp>
-      <p:sp>
-        <p:nvSpPr>
-          <p:cNvPr id="7" name="TextBox 6"/>
-          <p:cNvSpPr txBox="1"/>
-          <p:nvPr/>
-        </p:nvSpPr>
-        <p:spPr>
-          <a:xfrm>
-            <a:off x="1051560" y="1901952"/>
-            <a:ext cx="2011680" cy="219456"/>
-          </a:xfrm>
-          <a:prstGeom prst="rect">
-            <a:avLst/>
-          </a:prstGeom>
-          <a:noFill/>
-        </p:spPr>
-        <p:txBody>
-          <a:bodyPr wrap="square" anchor="t">
-            <a:spAutoFit/>
-          </a:bodyPr>
-          <a:lstStyle/>
-          <a:p>
-            <a:pPr algn="l"/>
-            <a:r>
-              <a:rPr sz="1100" b="1">
-                <a:solidFill>
-                  <a:srgbClr val="DFF5E4"/>
-                </a:solidFill>
-                <a:latin typeface="Aptos"/>
-              </a:rPr>
-              <a:t>STAKEHOLDER VALUE</a:t>
-            </a:r>
-          </a:p>
-        </p:txBody>
-      </p:sp>
-      <p:sp>
-        <p:nvSpPr>
-          <p:cNvPr id="8" name="TextBox 7"/>
-          <p:cNvSpPr txBox="1"/>
-          <p:nvPr/>
-        </p:nvSpPr>
-        <p:spPr>
-          <a:xfrm>
-            <a:off x="1051560" y="2331720"/>
-            <a:ext cx="3886200" cy="1284967"/>
-          </a:xfrm>
-          <a:prstGeom prst="rect">
-            <a:avLst/>
-          </a:prstGeom>
-          <a:noFill/>
-        </p:spPr>
-        <p:txBody>
-          <a:bodyPr wrap="square">
-            <a:spAutoFit/>
-          </a:bodyPr>
-          <a:lstStyle/>
-          <a:p>
-            <a:pPr>
-              <a:spcAft>
-                <a:spcPts val="700"/>
-              </a:spcAft>
-              <a:defRPr sz="1500">
-                <a:solidFill>
-                  <a:srgbClr val="FFFFFF"/>
-                </a:solidFill>
-                <a:latin typeface="Aptos"/>
-              </a:defRPr>
-            </a:pPr>
-            <a:r>
-              <a:rPr dirty="0"/>
-              <a:t>• reliable monthly KPI basis</a:t>
-            </a:r>
-          </a:p>
-          <a:p>
-            <a:pPr>
-              <a:spcAft>
-                <a:spcPts val="700"/>
-              </a:spcAft>
-              <a:defRPr sz="1500">
-                <a:solidFill>
-                  <a:srgbClr val="FFFFFF"/>
-                </a:solidFill>
-                <a:latin typeface="Aptos"/>
-              </a:defRPr>
-            </a:pPr>
-            <a:r>
-              <a:rPr dirty="0"/>
-              <a:t>• airline, airport and route comparison</a:t>
-            </a:r>
-          </a:p>
-          <a:p>
-            <a:pPr>
-              <a:spcAft>
-                <a:spcPts val="700"/>
-              </a:spcAft>
-              <a:defRPr sz="1500">
-                <a:solidFill>
-                  <a:srgbClr val="FFFFFF"/>
-                </a:solidFill>
-                <a:latin typeface="Aptos"/>
-              </a:defRPr>
-            </a:pPr>
-            <a:r>
-              <a:rPr dirty="0"/>
-              <a:t>• identify areas for deeper analysis</a:t>
-            </a:r>
-          </a:p>
-          <a:p>
-            <a:pPr>
-              <a:spcAft>
-                <a:spcPts val="700"/>
-              </a:spcAft>
-              <a:defRPr sz="1500">
-                <a:solidFill>
-                  <a:srgbClr val="FFFFFF"/>
-                </a:solidFill>
-                <a:latin typeface="Aptos"/>
-              </a:defRPr>
-            </a:pPr>
-            <a:r>
-              <a:rPr dirty="0"/>
-              <a:t>• support decisions </a:t>
-            </a:r>
-            <a:r>
-              <a:rPr lang="de-DE" dirty="0"/>
-              <a:t>-</a:t>
-            </a:r>
-            <a:r>
-              <a:rPr dirty="0"/>
-              <a:t> not replace them</a:t>
-            </a:r>
-          </a:p>
-        </p:txBody>
-      </p:sp>
-      <p:sp>
-        <p:nvSpPr>
-          <p:cNvPr id="9" name="Rounded Rectangle 8"/>
+            <a:endParaRPr dirty="0"/>
+          </a:p>
+        </p:txBody>
+      </p:sp>
+      <p:sp>
+        <p:nvSpPr>
+          <p:cNvPr id="7" name="Rounded Rectangle 5">
+            <a:extLst>
+              <a:ext uri="{FF2B5EF4-FFF2-40B4-BE49-F238E27FC236}">
+                <a16:creationId xmlns:a16="http://schemas.microsoft.com/office/drawing/2014/main" id="{0E6F9DE6-F897-7CDC-F7ED-35186D78DEB9}"/>
+              </a:ext>
+            </a:extLst>
+          </p:cNvPr>
           <p:cNvSpPr/>
           <p:nvPr/>
         </p:nvSpPr>
         <p:spPr>
           <a:xfrm>
-            <a:off x="5897880" y="1600200"/>
-            <a:ext cx="4800600" cy="3063240"/>
+            <a:off x="5577840" y="1609725"/>
+            <a:ext cx="3956685" cy="3276600"/>
           </a:xfrm>
           <a:prstGeom prst="roundRect">
             <a:avLst/>
@@ -5236,20 +6432,80 @@
           <a:lstStyle/>
           <a:p>
             <a:pPr algn="ctr"/>
-            <a:endParaRPr/>
-          </a:p>
-        </p:txBody>
-      </p:sp>
-      <p:sp>
-        <p:nvSpPr>
-          <p:cNvPr id="10" name="TextBox 9"/>
+            <a:endParaRPr dirty="0"/>
+          </a:p>
+        </p:txBody>
+      </p:sp>
+      <p:sp>
+        <p:nvSpPr>
+          <p:cNvPr id="4" name="Title 3"/>
+          <p:cNvSpPr>
+            <a:spLocks noGrp="1"/>
+          </p:cNvSpPr>
+          <p:nvPr>
+            <p:ph type="title"/>
+          </p:nvPr>
+        </p:nvSpPr>
+        <p:spPr/>
+        <p:txBody>
+          <a:bodyPr wrap="square" anchor="t"/>
+          <a:lstStyle/>
+          <a:p>
+            <a:r>
+              <a:rPr sz="2700" b="1" dirty="0">
+                <a:solidFill>
+                  <a:srgbClr val="005020"/>
+                </a:solidFill>
+                <a:latin typeface="Aptos"/>
+              </a:rPr>
+              <a:t>RE</a:t>
+            </a:r>
+            <a:r>
+              <a:rPr lang="de-DE" sz="2700" b="1" dirty="0">
+                <a:solidFill>
+                  <a:srgbClr val="005020"/>
+                </a:solidFill>
+                <a:latin typeface="Aptos"/>
+              </a:rPr>
+              <a:t>SULTS</a:t>
+            </a:r>
+            <a:r>
+              <a:rPr sz="2700" b="1" dirty="0">
+                <a:solidFill>
+                  <a:srgbClr val="005020"/>
+                </a:solidFill>
+                <a:latin typeface="Aptos"/>
+              </a:rPr>
+              <a:t> &amp; </a:t>
+            </a:r>
+            <a:r>
+              <a:rPr lang="de-DE" sz="2700" b="1" dirty="0">
+                <a:solidFill>
+                  <a:srgbClr val="005020"/>
+                </a:solidFill>
+                <a:latin typeface="Aptos"/>
+              </a:rPr>
+              <a:t>RECOMMENDATIONS</a:t>
+            </a:r>
+            <a:endParaRPr sz="2700" b="1" dirty="0">
+              <a:solidFill>
+                <a:srgbClr val="005020"/>
+              </a:solidFill>
+              <a:latin typeface="Aptos"/>
+            </a:endParaRPr>
+          </a:p>
+        </p:txBody>
+      </p:sp>
+      <p:sp>
+        <p:nvSpPr>
+          <p:cNvPr id="13" name="TextBox 12"/>
           <p:cNvSpPr txBox="1"/>
           <p:nvPr/>
         </p:nvSpPr>
         <p:spPr>
           <a:xfrm>
-            <a:off x="6172200" y="1901952"/>
-            <a:ext cx="2011680" cy="219456"/>
+            <a:off x="2366097" y="5140518"/>
+            <a:ext cx="5730154" cy="584775"/>
           </a:xfrm>
           <a:prstGeom prst="rect">
             <a:avLst/>
@@ -5260,31 +6516,385 @@
           <a:bodyPr wrap="square" anchor="t">
             <a:spAutoFit/>
           </a:bodyPr>
-          <a:lstStyle/>
-          <a:p>
-            <a:pPr algn="l"/>
-            <a:r>
-              <a:rPr sz="1100" b="1">
-                <a:solidFill>
-                  <a:srgbClr val="DFF5E4"/>
-                </a:solidFill>
-                <a:latin typeface="Aptos"/>
-              </a:rPr>
-              <a:t>NEXT EVOLUTION</a:t>
-            </a:r>
-          </a:p>
-        </p:txBody>
-      </p:sp>
-      <p:sp>
-        <p:nvSpPr>
-          <p:cNvPr id="11" name="TextBox 10"/>
+          <a:lstStyle>
+            <a:defPPr>
+              <a:defRPr lang="de-DE"/>
+            </a:defPPr>
+            <a:lvl1pPr algn="ctr">
+              <a:defRPr sz="1200"/>
+            </a:lvl1pPr>
+          </a:lstStyle>
+          <a:p>
+            <a:r>
+              <a:rPr lang="en-US" sz="1600" b="1" dirty="0">
+                <a:latin typeface="Aptos" panose="020B0004020202020204" pitchFamily="34" charset="0"/>
+              </a:rPr>
+              <a:t>The outcome enables data-driven decisions on airline, airport, and route reliability - without accessing raw files.</a:t>
+            </a:r>
+          </a:p>
+        </p:txBody>
+      </p:sp>
+      <p:sp>
+        <p:nvSpPr>
+          <p:cNvPr id="24" name="Rounded Rectangle 5">
+            <a:extLst>
+              <a:ext uri="{FF2B5EF4-FFF2-40B4-BE49-F238E27FC236}">
+                <a16:creationId xmlns:a16="http://schemas.microsoft.com/office/drawing/2014/main" id="{A65B640E-5FA8-7B88-7D8D-0887B9160049}"/>
+              </a:ext>
+            </a:extLst>
+          </p:cNvPr>
+          <p:cNvSpPr/>
+          <p:nvPr/>
+        </p:nvSpPr>
+        <p:spPr>
+          <a:xfrm>
+            <a:off x="1293764" y="2094465"/>
+            <a:ext cx="2667600" cy="1047750"/>
+          </a:xfrm>
+          <a:prstGeom prst="roundRect">
+            <a:avLst/>
+          </a:prstGeom>
+          <a:solidFill>
+            <a:srgbClr val="FFFFFF"/>
+          </a:solidFill>
+          <a:ln>
+            <a:solidFill>
+              <a:srgbClr val="DFF5E4"/>
+            </a:solidFill>
+          </a:ln>
+        </p:spPr>
+        <p:style>
+          <a:lnRef idx="1">
+            <a:schemeClr val="accent1"/>
+          </a:lnRef>
+          <a:fillRef idx="3">
+            <a:schemeClr val="accent1"/>
+          </a:fillRef>
+          <a:effectRef idx="2">
+            <a:schemeClr val="accent1"/>
+          </a:effectRef>
+          <a:fontRef idx="minor">
+            <a:schemeClr val="lt1"/>
+          </a:fontRef>
+        </p:style>
+        <p:txBody>
+          <a:bodyPr rtlCol="0" anchor="ctr"/>
+          <a:lstStyle/>
+          <a:p>
+            <a:pPr algn="ctr"/>
+            <a:r>
+              <a:rPr lang="de-DE" dirty="0">
+                <a:solidFill>
+                  <a:srgbClr val="0C7D2C"/>
+                </a:solidFill>
+                <a:latin typeface="Aptos" panose="020B0004020202020204" pitchFamily="34" charset="0"/>
+              </a:rPr>
+              <a:t>Reliable </a:t>
+            </a:r>
+            <a:r>
+              <a:rPr lang="de-DE" dirty="0" err="1">
+                <a:solidFill>
+                  <a:srgbClr val="0C7D2C"/>
+                </a:solidFill>
+                <a:latin typeface="Aptos" panose="020B0004020202020204" pitchFamily="34" charset="0"/>
+              </a:rPr>
+              <a:t>monthly</a:t>
+            </a:r>
+            <a:r>
+              <a:rPr lang="de-DE" dirty="0">
+                <a:solidFill>
+                  <a:srgbClr val="0C7D2C"/>
+                </a:solidFill>
+                <a:latin typeface="Aptos" panose="020B0004020202020204" pitchFamily="34" charset="0"/>
+              </a:rPr>
+              <a:t> KPI </a:t>
+            </a:r>
+            <a:r>
+              <a:rPr lang="de-DE" dirty="0" err="1">
+                <a:solidFill>
+                  <a:srgbClr val="0C7D2C"/>
+                </a:solidFill>
+                <a:latin typeface="Aptos" panose="020B0004020202020204" pitchFamily="34" charset="0"/>
+              </a:rPr>
+              <a:t>basis</a:t>
+            </a:r>
+            <a:endParaRPr lang="de-DE" dirty="0">
+              <a:solidFill>
+                <a:srgbClr val="0C7D2C"/>
+              </a:solidFill>
+              <a:latin typeface="Aptos" panose="020B0004020202020204" pitchFamily="34" charset="0"/>
+            </a:endParaRPr>
+          </a:p>
+        </p:txBody>
+      </p:sp>
+      <p:sp>
+        <p:nvSpPr>
+          <p:cNvPr id="25" name="Rounded Rectangle 5">
+            <a:extLst>
+              <a:ext uri="{FF2B5EF4-FFF2-40B4-BE49-F238E27FC236}">
+                <a16:creationId xmlns:a16="http://schemas.microsoft.com/office/drawing/2014/main" id="{23C8AF63-9110-F2CE-7CB0-D8A4A52AFA81}"/>
+              </a:ext>
+            </a:extLst>
+          </p:cNvPr>
+          <p:cNvSpPr/>
+          <p:nvPr/>
+        </p:nvSpPr>
+        <p:spPr>
+          <a:xfrm>
+            <a:off x="6165232" y="2103990"/>
+            <a:ext cx="2667600" cy="1047750"/>
+          </a:xfrm>
+          <a:prstGeom prst="roundRect">
+            <a:avLst/>
+          </a:prstGeom>
+          <a:solidFill>
+            <a:srgbClr val="FFFFFF"/>
+          </a:solidFill>
+          <a:ln>
+            <a:solidFill>
+              <a:srgbClr val="DFF5E4"/>
+            </a:solidFill>
+          </a:ln>
+        </p:spPr>
+        <p:style>
+          <a:lnRef idx="1">
+            <a:schemeClr val="accent1"/>
+          </a:lnRef>
+          <a:fillRef idx="3">
+            <a:schemeClr val="accent1"/>
+          </a:fillRef>
+          <a:effectRef idx="2">
+            <a:schemeClr val="accent1"/>
+          </a:effectRef>
+          <a:fontRef idx="minor">
+            <a:schemeClr val="lt1"/>
+          </a:fontRef>
+        </p:style>
+        <p:txBody>
+          <a:bodyPr rtlCol="0" anchor="ctr"/>
+          <a:lstStyle/>
+          <a:p>
+            <a:pPr algn="ctr"/>
+            <a:r>
+              <a:rPr lang="de-DE" dirty="0">
+                <a:solidFill>
+                  <a:srgbClr val="0C7D2C"/>
+                </a:solidFill>
+                <a:latin typeface="Aptos" panose="020B0004020202020204" pitchFamily="34" charset="0"/>
+              </a:rPr>
+              <a:t>I</a:t>
+            </a:r>
+            <a:r>
+              <a:rPr lang="en-US" dirty="0" err="1">
+                <a:solidFill>
+                  <a:srgbClr val="0C7D2C"/>
+                </a:solidFill>
+                <a:latin typeface="Aptos" panose="020B0004020202020204" pitchFamily="34" charset="0"/>
+              </a:rPr>
+              <a:t>dentify</a:t>
+            </a:r>
+            <a:r>
+              <a:rPr lang="en-US" dirty="0">
+                <a:solidFill>
+                  <a:srgbClr val="0C7D2C"/>
+                </a:solidFill>
+                <a:latin typeface="Aptos" panose="020B0004020202020204" pitchFamily="34" charset="0"/>
+              </a:rPr>
+              <a:t> areas for deeper analysis</a:t>
+            </a:r>
+          </a:p>
+        </p:txBody>
+      </p:sp>
+      <p:sp>
+        <p:nvSpPr>
+          <p:cNvPr id="26" name="Rounded Rectangle 5">
+            <a:extLst>
+              <a:ext uri="{FF2B5EF4-FFF2-40B4-BE49-F238E27FC236}">
+                <a16:creationId xmlns:a16="http://schemas.microsoft.com/office/drawing/2014/main" id="{20BE8913-C6B3-E46A-96AB-67639D12720A}"/>
+              </a:ext>
+            </a:extLst>
+          </p:cNvPr>
+          <p:cNvSpPr/>
+          <p:nvPr/>
+        </p:nvSpPr>
+        <p:spPr>
+          <a:xfrm>
+            <a:off x="6165232" y="3396408"/>
+            <a:ext cx="2667600" cy="1047750"/>
+          </a:xfrm>
+          <a:prstGeom prst="roundRect">
+            <a:avLst/>
+          </a:prstGeom>
+          <a:solidFill>
+            <a:srgbClr val="FFFFFF"/>
+          </a:solidFill>
+          <a:ln>
+            <a:solidFill>
+              <a:srgbClr val="DFF5E4"/>
+            </a:solidFill>
+          </a:ln>
+        </p:spPr>
+        <p:style>
+          <a:lnRef idx="1">
+            <a:schemeClr val="accent1"/>
+          </a:lnRef>
+          <a:fillRef idx="3">
+            <a:schemeClr val="accent1"/>
+          </a:fillRef>
+          <a:effectRef idx="2">
+            <a:schemeClr val="accent1"/>
+          </a:effectRef>
+          <a:fontRef idx="minor">
+            <a:schemeClr val="lt1"/>
+          </a:fontRef>
+        </p:style>
+        <p:txBody>
+          <a:bodyPr rtlCol="0" anchor="ctr"/>
+          <a:lstStyle/>
+          <a:p>
+            <a:pPr algn="ctr"/>
+            <a:r>
+              <a:rPr lang="de-DE" dirty="0">
+                <a:solidFill>
+                  <a:srgbClr val="0C7D2C"/>
+                </a:solidFill>
+                <a:latin typeface="Aptos" panose="020B0004020202020204" pitchFamily="34" charset="0"/>
+              </a:rPr>
+              <a:t>S</a:t>
+            </a:r>
+            <a:r>
+              <a:rPr lang="en-US" dirty="0" err="1">
+                <a:solidFill>
+                  <a:srgbClr val="0C7D2C"/>
+                </a:solidFill>
+                <a:latin typeface="Aptos" panose="020B0004020202020204" pitchFamily="34" charset="0"/>
+              </a:rPr>
+              <a:t>upport</a:t>
+            </a:r>
+            <a:r>
+              <a:rPr lang="en-US" dirty="0">
+                <a:solidFill>
+                  <a:srgbClr val="0C7D2C"/>
+                </a:solidFill>
+                <a:latin typeface="Aptos" panose="020B0004020202020204" pitchFamily="34" charset="0"/>
+              </a:rPr>
+              <a:t> decisions -</a:t>
+            </a:r>
+          </a:p>
+          <a:p>
+            <a:pPr algn="ctr"/>
+            <a:r>
+              <a:rPr lang="en-US" dirty="0">
+                <a:solidFill>
+                  <a:srgbClr val="0C7D2C"/>
+                </a:solidFill>
+                <a:latin typeface="Aptos" panose="020B0004020202020204" pitchFamily="34" charset="0"/>
+              </a:rPr>
+              <a:t> not replace them</a:t>
+            </a:r>
+          </a:p>
+        </p:txBody>
+      </p:sp>
+      <p:sp>
+        <p:nvSpPr>
+          <p:cNvPr id="27" name="Rounded Rectangle 5">
+            <a:extLst>
+              <a:ext uri="{FF2B5EF4-FFF2-40B4-BE49-F238E27FC236}">
+                <a16:creationId xmlns:a16="http://schemas.microsoft.com/office/drawing/2014/main" id="{0FFB2AAF-3E04-86E9-A793-9AFAC53E51F3}"/>
+              </a:ext>
+            </a:extLst>
+          </p:cNvPr>
+          <p:cNvSpPr/>
+          <p:nvPr/>
+        </p:nvSpPr>
+        <p:spPr>
+          <a:xfrm>
+            <a:off x="1259857" y="3396408"/>
+            <a:ext cx="2667600" cy="1047750"/>
+          </a:xfrm>
+          <a:prstGeom prst="roundRect">
+            <a:avLst/>
+          </a:prstGeom>
+          <a:solidFill>
+            <a:srgbClr val="FFFFFF"/>
+          </a:solidFill>
+          <a:ln>
+            <a:solidFill>
+              <a:srgbClr val="DFF5E4"/>
+            </a:solidFill>
+          </a:ln>
+        </p:spPr>
+        <p:style>
+          <a:lnRef idx="1">
+            <a:schemeClr val="accent1"/>
+          </a:lnRef>
+          <a:fillRef idx="3">
+            <a:schemeClr val="accent1"/>
+          </a:fillRef>
+          <a:effectRef idx="2">
+            <a:schemeClr val="accent1"/>
+          </a:effectRef>
+          <a:fontRef idx="minor">
+            <a:schemeClr val="lt1"/>
+          </a:fontRef>
+        </p:style>
+        <p:txBody>
+          <a:bodyPr rtlCol="0" anchor="ctr"/>
+          <a:lstStyle/>
+          <a:p>
+            <a:pPr algn="ctr"/>
+            <a:r>
+              <a:rPr lang="de-DE" dirty="0">
+                <a:solidFill>
+                  <a:srgbClr val="0C7D2C"/>
+                </a:solidFill>
+                <a:latin typeface="Aptos" panose="020B0004020202020204" pitchFamily="34" charset="0"/>
+              </a:rPr>
+              <a:t>A</a:t>
+            </a:r>
+            <a:r>
+              <a:rPr lang="en-US" dirty="0" err="1">
+                <a:solidFill>
+                  <a:srgbClr val="0C7D2C"/>
+                </a:solidFill>
+                <a:latin typeface="Aptos" panose="020B0004020202020204" pitchFamily="34" charset="0"/>
+              </a:rPr>
+              <a:t>irline</a:t>
+            </a:r>
+            <a:r>
+              <a:rPr lang="en-US" dirty="0">
+                <a:solidFill>
+                  <a:srgbClr val="0C7D2C"/>
+                </a:solidFill>
+                <a:latin typeface="Aptos" panose="020B0004020202020204" pitchFamily="34" charset="0"/>
+              </a:rPr>
+              <a:t>, airport and route comparison </a:t>
+            </a:r>
+            <a:endParaRPr lang="de-DE" dirty="0">
+              <a:solidFill>
+                <a:srgbClr val="0C7D2C"/>
+              </a:solidFill>
+              <a:latin typeface="Aptos" panose="020B0004020202020204" pitchFamily="34" charset="0"/>
+            </a:endParaRPr>
+          </a:p>
+        </p:txBody>
+      </p:sp>
+      <p:sp>
+        <p:nvSpPr>
+          <p:cNvPr id="11" name="TextBox 9">
+            <a:extLst>
+              <a:ext uri="{FF2B5EF4-FFF2-40B4-BE49-F238E27FC236}">
+                <a16:creationId xmlns:a16="http://schemas.microsoft.com/office/drawing/2014/main" id="{6150A84C-BC0E-9EE2-978E-1C2883CD55F7}"/>
+              </a:ext>
+            </a:extLst>
+          </p:cNvPr>
           <p:cNvSpPr txBox="1"/>
           <p:nvPr/>
         </p:nvSpPr>
         <p:spPr>
           <a:xfrm>
-            <a:off x="6172200" y="4005072"/>
-            <a:ext cx="4114800" cy="457200"/>
+            <a:off x="5857875" y="1790320"/>
+            <a:ext cx="2011680" cy="261610"/>
           </a:xfrm>
           <a:prstGeom prst="rect">
             <a:avLst/>
@@ -5299,27 +6909,39 @@
           <a:p>
             <a:pPr algn="l"/>
             <a:r>
-              <a:rPr sz="1700" b="1">
-                <a:solidFill>
-                  <a:srgbClr val="FFFFFF"/>
-                </a:solidFill>
-                <a:latin typeface="Aptos"/>
-              </a:rPr>
-              <a:t>Descriptive → Diagnostic → Predictive</a:t>
-            </a:r>
-          </a:p>
-        </p:txBody>
-      </p:sp>
-      <p:sp>
-        <p:nvSpPr>
-          <p:cNvPr id="12" name="TextBox 11"/>
+              <a:rPr lang="de-DE" sz="1100" b="1" dirty="0" err="1">
+                <a:solidFill>
+                  <a:srgbClr val="DFF5E4"/>
+                </a:solidFill>
+                <a:latin typeface="Aptos"/>
+              </a:rPr>
+              <a:t>Recommendations</a:t>
+            </a:r>
+            <a:endParaRPr sz="1100" b="1" dirty="0">
+              <a:solidFill>
+                <a:srgbClr val="DFF5E4"/>
+              </a:solidFill>
+              <a:latin typeface="Aptos"/>
+            </a:endParaRPr>
+          </a:p>
+        </p:txBody>
+      </p:sp>
+      <p:sp>
+        <p:nvSpPr>
+          <p:cNvPr id="14" name="TextBox 9">
+            <a:extLst>
+              <a:ext uri="{FF2B5EF4-FFF2-40B4-BE49-F238E27FC236}">
+                <a16:creationId xmlns:a16="http://schemas.microsoft.com/office/drawing/2014/main" id="{A7A86DE2-B310-B42C-A26C-8E194B61807F}"/>
+              </a:ext>
+            </a:extLst>
+          </p:cNvPr>
           <p:cNvSpPr txBox="1"/>
           <p:nvPr/>
         </p:nvSpPr>
         <p:spPr>
           <a:xfrm>
-            <a:off x="6172200" y="2331720"/>
-            <a:ext cx="3886200" cy="1737360"/>
+            <a:off x="1019175" y="1769505"/>
+            <a:ext cx="2011680" cy="261610"/>
           </a:xfrm>
           <a:prstGeom prst="rect">
             <a:avLst/>
@@ -5327,85 +6949,110 @@
           <a:noFill/>
         </p:spPr>
         <p:txBody>
-          <a:bodyPr wrap="square">
+          <a:bodyPr wrap="square" anchor="t">
             <a:spAutoFit/>
           </a:bodyPr>
           <a:lstStyle/>
           <a:p>
-            <a:pPr>
-              <a:spcAft>
-                <a:spcPts val="700"/>
-              </a:spcAft>
-              <a:defRPr sz="1500">
-                <a:solidFill>
-                  <a:srgbClr val="FFFFFF"/>
-                </a:solidFill>
-                <a:latin typeface="Aptos"/>
-              </a:defRPr>
-            </a:pPr>
-            <a:r>
-              <a:t>• why did delays happen?</a:t>
-            </a:r>
-          </a:p>
-          <a:p>
-            <a:pPr>
-              <a:spcAft>
-                <a:spcPts val="700"/>
-              </a:spcAft>
-              <a:defRPr sz="1500">
-                <a:solidFill>
-                  <a:srgbClr val="FFFFFF"/>
-                </a:solidFill>
-                <a:latin typeface="Aptos"/>
-              </a:defRPr>
-            </a:pPr>
-            <a:r>
-              <a:t>• monitoring and alerting</a:t>
-            </a:r>
-          </a:p>
-          <a:p>
-            <a:pPr>
-              <a:spcAft>
-                <a:spcPts val="700"/>
-              </a:spcAft>
-              <a:defRPr sz="1500">
-                <a:solidFill>
-                  <a:srgbClr val="FFFFFF"/>
-                </a:solidFill>
-                <a:latin typeface="Aptos"/>
-              </a:defRPr>
-            </a:pPr>
-            <a:r>
-              <a:t>• cloud deployment / managed storage</a:t>
-            </a:r>
-          </a:p>
-          <a:p>
-            <a:pPr>
-              <a:spcAft>
-                <a:spcPts val="700"/>
-              </a:spcAft>
-              <a:defRPr sz="1500">
-                <a:solidFill>
-                  <a:srgbClr val="FFFFFF"/>
-                </a:solidFill>
-                <a:latin typeface="Aptos"/>
-              </a:defRPr>
-            </a:pPr>
-            <a:r>
-              <a:t>• delay and cancellation risk prediction</a:t>
-            </a:r>
-          </a:p>
-        </p:txBody>
-      </p:sp>
-      <p:sp>
-        <p:nvSpPr>
-          <p:cNvPr id="13" name="TextBox 12"/>
+            <a:pPr algn="l"/>
+            <a:r>
+              <a:rPr lang="de-DE" sz="1100" b="1" dirty="0" err="1">
+                <a:solidFill>
+                  <a:srgbClr val="DFF5E4"/>
+                </a:solidFill>
+                <a:latin typeface="Aptos"/>
+              </a:rPr>
+              <a:t>Results</a:t>
+            </a:r>
+            <a:endParaRPr sz="1100" b="1" dirty="0">
+              <a:solidFill>
+                <a:srgbClr val="DFF5E4"/>
+              </a:solidFill>
+              <a:latin typeface="Aptos"/>
+            </a:endParaRPr>
+          </a:p>
+        </p:txBody>
+      </p:sp>
+    </p:spTree>
+  </p:cSld>
+  <p:clrMapOvr>
+    <a:masterClrMapping/>
+  </p:clrMapOvr>
+</p:sld>
+</file>
+
+<file path=ppt/slides/slide17.xml><?xml version="1.0" encoding="utf-8"?>
+<p:sld xmlns:a="http://schemas.openxmlformats.org/drawingml/2006/main" xmlns:r="http://schemas.openxmlformats.org/officeDocument/2006/relationships" xmlns:p="http://schemas.openxmlformats.org/presentationml/2006/main">
+  <p:cSld>
+    <p:spTree>
+      <p:nvGrpSpPr>
+        <p:cNvPr id="1" name="">
+          <a:extLst>
+            <a:ext uri="{FF2B5EF4-FFF2-40B4-BE49-F238E27FC236}">
+              <a16:creationId xmlns:a16="http://schemas.microsoft.com/office/drawing/2014/main" id="{4BEBA5B6-B06B-B72A-05E4-19E157D04251}"/>
+            </a:ext>
+          </a:extLst>
+        </p:cNvPr>
+        <p:cNvGrpSpPr/>
+        <p:nvPr/>
+      </p:nvGrpSpPr>
+      <p:grpSpPr>
+        <a:xfrm>
+          <a:off x="0" y="0"/>
+          <a:ext cx="0" cy="0"/>
+          <a:chOff x="0" y="0"/>
+          <a:chExt cx="0" cy="0"/>
+        </a:xfrm>
+      </p:grpSpPr>
+      <p:sp>
+        <p:nvSpPr>
+          <p:cNvPr id="4" name="Title 3">
+            <a:extLst>
+              <a:ext uri="{FF2B5EF4-FFF2-40B4-BE49-F238E27FC236}">
+                <a16:creationId xmlns:a16="http://schemas.microsoft.com/office/drawing/2014/main" id="{A1F65230-2794-287F-E9AF-19CB6166C7E4}"/>
+              </a:ext>
+            </a:extLst>
+          </p:cNvPr>
+          <p:cNvSpPr>
+            <a:spLocks noGrp="1"/>
+          </p:cNvSpPr>
+          <p:nvPr>
+            <p:ph type="title"/>
+          </p:nvPr>
+        </p:nvSpPr>
+        <p:spPr/>
+        <p:txBody>
+          <a:bodyPr wrap="square" anchor="t"/>
+          <a:lstStyle/>
+          <a:p>
+            <a:pPr algn="l"/>
+            <a:r>
+              <a:rPr sz="2700" b="1" dirty="0">
+                <a:solidFill>
+                  <a:srgbClr val="005020"/>
+                </a:solidFill>
+                <a:latin typeface="Aptos"/>
+              </a:rPr>
+              <a:t>OUTLOOK</a:t>
+            </a:r>
+          </a:p>
+        </p:txBody>
+      </p:sp>
+      <p:sp>
+        <p:nvSpPr>
+          <p:cNvPr id="21" name="TextBox 12">
+            <a:extLst>
+              <a:ext uri="{FF2B5EF4-FFF2-40B4-BE49-F238E27FC236}">
+                <a16:creationId xmlns:a16="http://schemas.microsoft.com/office/drawing/2014/main" id="{3A1B939F-BBBB-33E0-8F9E-C3B5F32FEA95}"/>
+              </a:ext>
+            </a:extLst>
+          </p:cNvPr>
           <p:cNvSpPr txBox="1"/>
           <p:nvPr/>
         </p:nvSpPr>
         <p:spPr>
           <a:xfrm>
-            <a:off x="0" y="4828032"/>
+            <a:off x="354416" y="4966335"/>
             <a:ext cx="11234057" cy="707886"/>
           </a:xfrm>
           <a:prstGeom prst="rect">
@@ -5447,11 +7094,611 @@
           </a:p>
         </p:txBody>
       </p:sp>
+      <p:sp>
+        <p:nvSpPr>
+          <p:cNvPr id="3" name="Rounded Rectangle 5">
+            <a:extLst>
+              <a:ext uri="{FF2B5EF4-FFF2-40B4-BE49-F238E27FC236}">
+                <a16:creationId xmlns:a16="http://schemas.microsoft.com/office/drawing/2014/main" id="{244CB273-B769-F3EC-89A0-BB048D5998C2}"/>
+              </a:ext>
+            </a:extLst>
+          </p:cNvPr>
+          <p:cNvSpPr/>
+          <p:nvPr/>
+        </p:nvSpPr>
+        <p:spPr>
+          <a:xfrm>
+            <a:off x="777240" y="1600200"/>
+            <a:ext cx="7922380" cy="3276600"/>
+          </a:xfrm>
+          <a:prstGeom prst="roundRect">
+            <a:avLst/>
+          </a:prstGeom>
+          <a:solidFill>
+            <a:srgbClr val="219149"/>
+          </a:solidFill>
+          <a:ln>
+            <a:solidFill>
+              <a:srgbClr val="DFF5E4"/>
+            </a:solidFill>
+          </a:ln>
+        </p:spPr>
+        <p:style>
+          <a:lnRef idx="1">
+            <a:schemeClr val="accent1"/>
+          </a:lnRef>
+          <a:fillRef idx="3">
+            <a:schemeClr val="accent1"/>
+          </a:fillRef>
+          <a:effectRef idx="2">
+            <a:schemeClr val="accent1"/>
+          </a:effectRef>
+          <a:fontRef idx="minor">
+            <a:schemeClr val="lt1"/>
+          </a:fontRef>
+        </p:style>
+        <p:txBody>
+          <a:bodyPr rtlCol="0" anchor="ctr"/>
+          <a:lstStyle/>
+          <a:p>
+            <a:pPr algn="ctr"/>
+            <a:endParaRPr u="sng" dirty="0"/>
+          </a:p>
+        </p:txBody>
+      </p:sp>
+      <p:sp>
+        <p:nvSpPr>
+          <p:cNvPr id="6" name="Rounded Rectangle 5">
+            <a:extLst>
+              <a:ext uri="{FF2B5EF4-FFF2-40B4-BE49-F238E27FC236}">
+                <a16:creationId xmlns:a16="http://schemas.microsoft.com/office/drawing/2014/main" id="{D357B68C-B8EE-144F-34F4-798D236FAA72}"/>
+              </a:ext>
+            </a:extLst>
+          </p:cNvPr>
+          <p:cNvSpPr/>
+          <p:nvPr/>
+        </p:nvSpPr>
+        <p:spPr>
+          <a:xfrm>
+            <a:off x="1454400" y="2065890"/>
+            <a:ext cx="2668566" cy="1047750"/>
+          </a:xfrm>
+          <a:prstGeom prst="roundRect">
+            <a:avLst/>
+          </a:prstGeom>
+          <a:solidFill>
+            <a:srgbClr val="FFFFFF"/>
+          </a:solidFill>
+          <a:ln>
+            <a:solidFill>
+              <a:srgbClr val="DFF5E4"/>
+            </a:solidFill>
+          </a:ln>
+        </p:spPr>
+        <p:style>
+          <a:lnRef idx="1">
+            <a:schemeClr val="accent1"/>
+          </a:lnRef>
+          <a:fillRef idx="3">
+            <a:schemeClr val="accent1"/>
+          </a:fillRef>
+          <a:effectRef idx="2">
+            <a:schemeClr val="accent1"/>
+          </a:effectRef>
+          <a:fontRef idx="minor">
+            <a:schemeClr val="lt1"/>
+          </a:fontRef>
+        </p:style>
+        <p:txBody>
+          <a:bodyPr rtlCol="0" anchor="ctr"/>
+          <a:lstStyle/>
+          <a:p>
+            <a:pPr algn="ctr"/>
+            <a:r>
+              <a:rPr lang="de-DE" dirty="0">
+                <a:solidFill>
+                  <a:srgbClr val="0C7D2C"/>
+                </a:solidFill>
+                <a:latin typeface="Aptos" panose="020B0004020202020204" pitchFamily="34" charset="0"/>
+              </a:rPr>
+              <a:t>Why </a:t>
+            </a:r>
+            <a:r>
+              <a:rPr lang="de-DE" dirty="0" err="1">
+                <a:solidFill>
+                  <a:srgbClr val="0C7D2C"/>
+                </a:solidFill>
+                <a:latin typeface="Aptos" panose="020B0004020202020204" pitchFamily="34" charset="0"/>
+              </a:rPr>
+              <a:t>did</a:t>
+            </a:r>
+            <a:r>
+              <a:rPr lang="de-DE" dirty="0">
+                <a:solidFill>
+                  <a:srgbClr val="0C7D2C"/>
+                </a:solidFill>
+                <a:latin typeface="Aptos" panose="020B0004020202020204" pitchFamily="34" charset="0"/>
+              </a:rPr>
+              <a:t> </a:t>
+            </a:r>
+            <a:r>
+              <a:rPr lang="de-DE" dirty="0" err="1">
+                <a:solidFill>
+                  <a:srgbClr val="0C7D2C"/>
+                </a:solidFill>
+                <a:latin typeface="Aptos" panose="020B0004020202020204" pitchFamily="34" charset="0"/>
+              </a:rPr>
+              <a:t>delays</a:t>
+            </a:r>
+            <a:r>
+              <a:rPr lang="de-DE" dirty="0">
+                <a:solidFill>
+                  <a:srgbClr val="0C7D2C"/>
+                </a:solidFill>
+                <a:latin typeface="Aptos" panose="020B0004020202020204" pitchFamily="34" charset="0"/>
+              </a:rPr>
+              <a:t> happen?</a:t>
+            </a:r>
+          </a:p>
+        </p:txBody>
+      </p:sp>
+      <p:sp>
+        <p:nvSpPr>
+          <p:cNvPr id="8" name="Rounded Rectangle 5">
+            <a:extLst>
+              <a:ext uri="{FF2B5EF4-FFF2-40B4-BE49-F238E27FC236}">
+                <a16:creationId xmlns:a16="http://schemas.microsoft.com/office/drawing/2014/main" id="{9D8251A1-1F19-F385-B024-ED893033A2B7}"/>
+              </a:ext>
+            </a:extLst>
+          </p:cNvPr>
+          <p:cNvSpPr/>
+          <p:nvPr/>
+        </p:nvSpPr>
+        <p:spPr>
+          <a:xfrm>
+            <a:off x="1454400" y="3383281"/>
+            <a:ext cx="2668566" cy="1047750"/>
+          </a:xfrm>
+          <a:prstGeom prst="roundRect">
+            <a:avLst/>
+          </a:prstGeom>
+          <a:solidFill>
+            <a:srgbClr val="FFFFFF"/>
+          </a:solidFill>
+          <a:ln>
+            <a:solidFill>
+              <a:srgbClr val="DFF5E4"/>
+            </a:solidFill>
+          </a:ln>
+        </p:spPr>
+        <p:style>
+          <a:lnRef idx="1">
+            <a:schemeClr val="accent1"/>
+          </a:lnRef>
+          <a:fillRef idx="3">
+            <a:schemeClr val="accent1"/>
+          </a:fillRef>
+          <a:effectRef idx="2">
+            <a:schemeClr val="accent1"/>
+          </a:effectRef>
+          <a:fontRef idx="minor">
+            <a:schemeClr val="lt1"/>
+          </a:fontRef>
+        </p:style>
+        <p:txBody>
+          <a:bodyPr rtlCol="0" anchor="ctr"/>
+          <a:lstStyle/>
+          <a:p>
+            <a:pPr algn="ctr"/>
+            <a:r>
+              <a:rPr lang="de-DE" dirty="0">
+                <a:solidFill>
+                  <a:srgbClr val="0C7D2C"/>
+                </a:solidFill>
+                <a:latin typeface="Aptos" panose="020B0004020202020204" pitchFamily="34" charset="0"/>
+              </a:rPr>
+              <a:t>Monitoring and </a:t>
+            </a:r>
+            <a:r>
+              <a:rPr lang="de-DE" dirty="0" err="1">
+                <a:solidFill>
+                  <a:srgbClr val="0C7D2C"/>
+                </a:solidFill>
+                <a:latin typeface="Aptos" panose="020B0004020202020204" pitchFamily="34" charset="0"/>
+              </a:rPr>
+              <a:t>alerting</a:t>
+            </a:r>
+            <a:endParaRPr lang="en-US" dirty="0">
+              <a:solidFill>
+                <a:srgbClr val="0C7D2C"/>
+              </a:solidFill>
+              <a:latin typeface="Aptos" panose="020B0004020202020204" pitchFamily="34" charset="0"/>
+            </a:endParaRPr>
+          </a:p>
+        </p:txBody>
+      </p:sp>
+      <p:sp>
+        <p:nvSpPr>
+          <p:cNvPr id="14" name="Rounded Rectangle 5">
+            <a:extLst>
+              <a:ext uri="{FF2B5EF4-FFF2-40B4-BE49-F238E27FC236}">
+                <a16:creationId xmlns:a16="http://schemas.microsoft.com/office/drawing/2014/main" id="{B91B5611-EC39-AA78-7F37-B5F68706FCE9}"/>
+              </a:ext>
+            </a:extLst>
+          </p:cNvPr>
+          <p:cNvSpPr/>
+          <p:nvPr/>
+        </p:nvSpPr>
+        <p:spPr>
+          <a:xfrm>
+            <a:off x="5108105" y="3345602"/>
+            <a:ext cx="2668566" cy="1047750"/>
+          </a:xfrm>
+          <a:prstGeom prst="roundRect">
+            <a:avLst/>
+          </a:prstGeom>
+          <a:solidFill>
+            <a:srgbClr val="FFFFFF"/>
+          </a:solidFill>
+          <a:ln>
+            <a:solidFill>
+              <a:srgbClr val="DFF5E4"/>
+            </a:solidFill>
+          </a:ln>
+        </p:spPr>
+        <p:style>
+          <a:lnRef idx="1">
+            <a:schemeClr val="accent1"/>
+          </a:lnRef>
+          <a:fillRef idx="3">
+            <a:schemeClr val="accent1"/>
+          </a:fillRef>
+          <a:effectRef idx="2">
+            <a:schemeClr val="accent1"/>
+          </a:effectRef>
+          <a:fontRef idx="minor">
+            <a:schemeClr val="lt1"/>
+          </a:fontRef>
+        </p:style>
+        <p:txBody>
+          <a:bodyPr rtlCol="0" anchor="ctr"/>
+          <a:lstStyle/>
+          <a:p>
+            <a:pPr algn="ctr"/>
+            <a:r>
+              <a:rPr lang="en-US" dirty="0">
+                <a:solidFill>
+                  <a:srgbClr val="0C7D2C"/>
+                </a:solidFill>
+                <a:latin typeface="Aptos" panose="020B0004020202020204" pitchFamily="34" charset="0"/>
+              </a:rPr>
+              <a:t>Delay and cancellation risk prediction</a:t>
+            </a:r>
+          </a:p>
+        </p:txBody>
+      </p:sp>
+      <p:sp>
+        <p:nvSpPr>
+          <p:cNvPr id="16" name="Rounded Rectangle 5">
+            <a:extLst>
+              <a:ext uri="{FF2B5EF4-FFF2-40B4-BE49-F238E27FC236}">
+                <a16:creationId xmlns:a16="http://schemas.microsoft.com/office/drawing/2014/main" id="{41ABFD25-6018-42AF-E818-CE00359BEA65}"/>
+              </a:ext>
+            </a:extLst>
+          </p:cNvPr>
+          <p:cNvSpPr/>
+          <p:nvPr/>
+        </p:nvSpPr>
+        <p:spPr>
+          <a:xfrm>
+            <a:off x="5108105" y="2065890"/>
+            <a:ext cx="2668566" cy="1047750"/>
+          </a:xfrm>
+          <a:prstGeom prst="roundRect">
+            <a:avLst/>
+          </a:prstGeom>
+          <a:solidFill>
+            <a:srgbClr val="FFFFFF"/>
+          </a:solidFill>
+          <a:ln>
+            <a:solidFill>
+              <a:srgbClr val="DFF5E4"/>
+            </a:solidFill>
+          </a:ln>
+        </p:spPr>
+        <p:style>
+          <a:lnRef idx="1">
+            <a:schemeClr val="accent1"/>
+          </a:lnRef>
+          <a:fillRef idx="3">
+            <a:schemeClr val="accent1"/>
+          </a:fillRef>
+          <a:effectRef idx="2">
+            <a:schemeClr val="accent1"/>
+          </a:effectRef>
+          <a:fontRef idx="minor">
+            <a:schemeClr val="lt1"/>
+          </a:fontRef>
+        </p:style>
+        <p:txBody>
+          <a:bodyPr rtlCol="0" anchor="ctr"/>
+          <a:lstStyle/>
+          <a:p>
+            <a:pPr algn="ctr"/>
+            <a:r>
+              <a:rPr lang="de-DE" dirty="0">
+                <a:solidFill>
+                  <a:srgbClr val="0C7D2C"/>
+                </a:solidFill>
+                <a:latin typeface="Aptos" panose="020B0004020202020204" pitchFamily="34" charset="0"/>
+              </a:rPr>
+              <a:t>Cloud </a:t>
+            </a:r>
+            <a:r>
+              <a:rPr lang="de-DE" dirty="0" err="1">
+                <a:solidFill>
+                  <a:srgbClr val="0C7D2C"/>
+                </a:solidFill>
+                <a:latin typeface="Aptos" panose="020B0004020202020204" pitchFamily="34" charset="0"/>
+              </a:rPr>
+              <a:t>deployment</a:t>
+            </a:r>
+            <a:r>
+              <a:rPr lang="de-DE" dirty="0">
+                <a:solidFill>
+                  <a:srgbClr val="0C7D2C"/>
+                </a:solidFill>
+                <a:latin typeface="Aptos" panose="020B0004020202020204" pitchFamily="34" charset="0"/>
+              </a:rPr>
+              <a:t> / </a:t>
+            </a:r>
+            <a:r>
+              <a:rPr lang="de-DE" dirty="0" err="1">
+                <a:solidFill>
+                  <a:srgbClr val="0C7D2C"/>
+                </a:solidFill>
+                <a:latin typeface="Aptos" panose="020B0004020202020204" pitchFamily="34" charset="0"/>
+              </a:rPr>
+              <a:t>managed</a:t>
+            </a:r>
+            <a:r>
+              <a:rPr lang="de-DE" dirty="0">
+                <a:solidFill>
+                  <a:srgbClr val="0C7D2C"/>
+                </a:solidFill>
+                <a:latin typeface="Aptos" panose="020B0004020202020204" pitchFamily="34" charset="0"/>
+              </a:rPr>
+              <a:t> </a:t>
+            </a:r>
+            <a:r>
+              <a:rPr lang="de-DE" dirty="0" err="1">
+                <a:solidFill>
+                  <a:srgbClr val="0C7D2C"/>
+                </a:solidFill>
+                <a:latin typeface="Aptos" panose="020B0004020202020204" pitchFamily="34" charset="0"/>
+              </a:rPr>
+              <a:t>storage</a:t>
+            </a:r>
+            <a:endParaRPr lang="de-DE" dirty="0">
+              <a:solidFill>
+                <a:srgbClr val="0C7D2C"/>
+              </a:solidFill>
+              <a:latin typeface="Aptos" panose="020B0004020202020204" pitchFamily="34" charset="0"/>
+            </a:endParaRPr>
+          </a:p>
+        </p:txBody>
+      </p:sp>
+      <p:sp>
+        <p:nvSpPr>
+          <p:cNvPr id="10" name="TextBox 9">
+            <a:extLst>
+              <a:ext uri="{FF2B5EF4-FFF2-40B4-BE49-F238E27FC236}">
+                <a16:creationId xmlns:a16="http://schemas.microsoft.com/office/drawing/2014/main" id="{BAEBDD22-9B1B-F3BD-8E0F-CBC375AF86DE}"/>
+              </a:ext>
+            </a:extLst>
+          </p:cNvPr>
+          <p:cNvSpPr txBox="1"/>
+          <p:nvPr/>
+        </p:nvSpPr>
+        <p:spPr>
+          <a:xfrm>
+            <a:off x="1066800" y="1790855"/>
+            <a:ext cx="2011680" cy="219456"/>
+          </a:xfrm>
+          <a:prstGeom prst="rect">
+            <a:avLst/>
+          </a:prstGeom>
+          <a:noFill/>
+        </p:spPr>
+        <p:txBody>
+          <a:bodyPr wrap="square" anchor="t">
+            <a:spAutoFit/>
+          </a:bodyPr>
+          <a:lstStyle/>
+          <a:p>
+            <a:pPr algn="l"/>
+            <a:r>
+              <a:rPr sz="1100" b="1" dirty="0">
+                <a:solidFill>
+                  <a:srgbClr val="DFF5E4"/>
+                </a:solidFill>
+                <a:latin typeface="Aptos"/>
+              </a:rPr>
+              <a:t>NEXT EVOLUTION</a:t>
+            </a:r>
+          </a:p>
+        </p:txBody>
+      </p:sp>
+      <p:sp>
+        <p:nvSpPr>
+          <p:cNvPr id="11" name="TextBox 10">
+            <a:extLst>
+              <a:ext uri="{FF2B5EF4-FFF2-40B4-BE49-F238E27FC236}">
+                <a16:creationId xmlns:a16="http://schemas.microsoft.com/office/drawing/2014/main" id="{C0A9E6BB-FA0C-6BD5-8EAC-CB9E4C8875B3}"/>
+              </a:ext>
+            </a:extLst>
+          </p:cNvPr>
+          <p:cNvSpPr txBox="1"/>
+          <p:nvPr/>
+        </p:nvSpPr>
+        <p:spPr>
+          <a:xfrm>
+            <a:off x="2666641" y="4462436"/>
+            <a:ext cx="4048125" cy="400110"/>
+          </a:xfrm>
+          <a:prstGeom prst="rect">
+            <a:avLst/>
+          </a:prstGeom>
+          <a:noFill/>
+        </p:spPr>
+        <p:txBody>
+          <a:bodyPr wrap="square" anchor="ctr" anchorCtr="0">
+            <a:spAutoFit/>
+          </a:bodyPr>
+          <a:lstStyle/>
+          <a:p>
+            <a:r>
+              <a:rPr sz="1700" b="1" dirty="0">
+                <a:solidFill>
+                  <a:srgbClr val="FFFFFF"/>
+                </a:solidFill>
+                <a:latin typeface="Aptos"/>
+              </a:rPr>
+              <a:t>Descriptive → </a:t>
+            </a:r>
+            <a:r>
+              <a:rPr sz="2000" b="1" dirty="0">
+                <a:solidFill>
+                  <a:srgbClr val="FFFFFF"/>
+                </a:solidFill>
+                <a:latin typeface="Aptos"/>
+              </a:rPr>
+              <a:t>Diagnostic</a:t>
+            </a:r>
+            <a:r>
+              <a:rPr sz="1700" b="1" dirty="0">
+                <a:solidFill>
+                  <a:srgbClr val="FFFFFF"/>
+                </a:solidFill>
+                <a:latin typeface="Aptos"/>
+              </a:rPr>
+              <a:t> → </a:t>
+            </a:r>
+            <a:r>
+              <a:rPr sz="1700" b="1" dirty="0" err="1">
+                <a:solidFill>
+                  <a:srgbClr val="FFFFFF"/>
+                </a:solidFill>
+                <a:latin typeface="Aptos"/>
+              </a:rPr>
+              <a:t>Predictiv</a:t>
+            </a:r>
+            <a:r>
+              <a:rPr lang="de-DE" sz="1700" b="1" dirty="0">
+                <a:solidFill>
+                  <a:srgbClr val="FFFFFF"/>
+                </a:solidFill>
+                <a:latin typeface="Aptos"/>
+              </a:rPr>
+              <a:t>e</a:t>
+            </a:r>
+            <a:endParaRPr sz="1700" b="1" dirty="0">
+              <a:solidFill>
+                <a:srgbClr val="FFFFFF"/>
+              </a:solidFill>
+              <a:latin typeface="Aptos"/>
+            </a:endParaRPr>
+          </a:p>
+        </p:txBody>
+      </p:sp>
     </p:spTree>
+    <p:extLst>
+      <p:ext uri="{BB962C8B-B14F-4D97-AF65-F5344CB8AC3E}">
+        <p14:creationId xmlns:p14="http://schemas.microsoft.com/office/powerpoint/2010/main" val="2813608299"/>
+      </p:ext>
+    </p:extLst>
   </p:cSld>
   <p:clrMapOvr>
     <a:masterClrMapping/>
   </p:clrMapOvr>
+  <p:timing>
+    <p:tnLst>
+      <p:par>
+        <p:cTn id="1" dur="indefinite" restart="never" nodeType="tmRoot">
+          <p:childTnLst>
+            <p:seq concurrent="1" nextAc="seek">
+              <p:cTn id="2" dur="indefinite" nodeType="mainSeq">
+                <p:childTnLst>
+                  <p:par>
+                    <p:cTn id="3" fill="hold">
+                      <p:stCondLst>
+                        <p:cond delay="indefinite"/>
+                      </p:stCondLst>
+                      <p:childTnLst>
+                        <p:par>
+                          <p:cTn id="4" fill="hold">
+                            <p:stCondLst>
+                              <p:cond delay="0"/>
+                            </p:stCondLst>
+                            <p:childTnLst>
+                              <p:par>
+                                <p:cTn id="5" presetID="1" presetClass="entr" presetSubtype="0" fill="hold" grpId="0" nodeType="clickEffect">
+                                  <p:stCondLst>
+                                    <p:cond delay="0"/>
+                                  </p:stCondLst>
+                                  <p:childTnLst>
+                                    <p:set>
+                                      <p:cBhvr>
+                                        <p:cTn id="6" dur="1" fill="hold">
+                                          <p:stCondLst>
+                                            <p:cond delay="0"/>
+                                          </p:stCondLst>
+                                        </p:cTn>
+                                        <p:tgtEl>
+                                          <p:spTgt spid="21"/>
+                                        </p:tgtEl>
+                                        <p:attrNameLst>
+                                          <p:attrName>style.visibility</p:attrName>
+                                        </p:attrNameLst>
+                                      </p:cBhvr>
+                                      <p:to>
+                                        <p:strVal val="visible"/>
+                                      </p:to>
+                                    </p:set>
+                                  </p:childTnLst>
+                                </p:cTn>
+                              </p:par>
+                            </p:childTnLst>
+                          </p:cTn>
+                        </p:par>
+                      </p:childTnLst>
+                    </p:cTn>
+                  </p:par>
+                </p:childTnLst>
+              </p:cTn>
+              <p:prevCondLst>
+                <p:cond evt="onPrev" delay="0">
+                  <p:tgtEl>
+                    <p:sldTgt/>
+                  </p:tgtEl>
+                </p:cond>
+              </p:prevCondLst>
+              <p:nextCondLst>
+                <p:cond evt="onNext" delay="0">
+                  <p:tgtEl>
+                    <p:sldTgt/>
+                  </p:tgtEl>
+                </p:cond>
+              </p:nextCondLst>
+            </p:seq>
+          </p:childTnLst>
+        </p:cTn>
+      </p:par>
+    </p:tnLst>
+    <p:bldLst>
+      <p:bldP spid="21" grpId="0"/>
+    </p:bldLst>
+  </p:timing>
 </p:sld>
 </file>
 
@@ -5489,48 +7736,13 @@
           <a:p>
             <a:pPr algn="l"/>
             <a:r>
-              <a:rPr sz="2700" b="1">
+              <a:rPr sz="2700" b="1" dirty="0">
                 <a:solidFill>
                   <a:srgbClr val="005020"/>
                 </a:solidFill>
                 <a:latin typeface="Aptos"/>
               </a:rPr>
               <a:t>ABOUT ME &amp; PRESENTATION FOCUS</a:t>
-            </a:r>
-          </a:p>
-        </p:txBody>
-      </p:sp>
-      <p:sp>
-        <p:nvSpPr>
-          <p:cNvPr id="4" name="TextBox 3"/>
-          <p:cNvSpPr txBox="1"/>
-          <p:nvPr/>
-        </p:nvSpPr>
-        <p:spPr>
-          <a:xfrm>
-            <a:off x="384048" y="109728"/>
-            <a:ext cx="365760" cy="182880"/>
-          </a:xfrm>
-          <a:prstGeom prst="rect">
-            <a:avLst/>
-          </a:prstGeom>
-          <a:noFill/>
-        </p:spPr>
-        <p:txBody>
-          <a:bodyPr wrap="square" anchor="t">
-            <a:spAutoFit/>
-          </a:bodyPr>
-          <a:lstStyle/>
-          <a:p>
-            <a:pPr algn="ctr"/>
-            <a:r>
-              <a:rPr sz="800" b="1">
-                <a:solidFill>
-                  <a:srgbClr val="005020"/>
-                </a:solidFill>
-                <a:latin typeface="Aptos"/>
-              </a:rPr>
-              <a:t>01</a:t>
             </a:r>
           </a:p>
         </p:txBody>
@@ -5605,7 +7817,7 @@
           <a:p>
             <a:pPr algn="l"/>
             <a:r>
-              <a:rPr sz="1100" b="1">
+              <a:rPr sz="1100" b="1" dirty="0">
                 <a:solidFill>
                   <a:srgbClr val="DFF5E4"/>
                 </a:solidFill>
@@ -5625,7 +7837,7 @@
         <p:spPr>
           <a:xfrm>
             <a:off x="1024128" y="2240280"/>
-            <a:ext cx="3246120" cy="2144177"/>
+            <a:ext cx="3246120" cy="2015936"/>
           </a:xfrm>
           <a:prstGeom prst="rect">
             <a:avLst/>
@@ -5638,10 +7850,12 @@
           </a:bodyPr>
           <a:lstStyle/>
           <a:p>
-            <a:pPr>
+            <a:pPr marL="285750" indent="-285750">
               <a:spcAft>
                 <a:spcPts val="500"/>
               </a:spcAft>
+              <a:buFont typeface="Arial" panose="020B0604020202020204" pitchFamily="34" charset="0"/>
+              <a:buChar char="•"/>
               <a:defRPr sz="1250">
                 <a:solidFill>
                   <a:srgbClr val="FFFFFF"/>
@@ -5651,14 +7865,17 @@
             </a:pPr>
             <a:r>
               <a:rPr dirty="0"/>
-              <a:t>• Data Engineering final project</a:t>
-            </a:r>
-          </a:p>
-          <a:p>
-            <a:pPr>
+              <a:t>Data Engineering final project</a:t>
+            </a:r>
+            <a:endParaRPr lang="de-DE" dirty="0"/>
+          </a:p>
+          <a:p>
+            <a:pPr marL="285750" indent="-285750">
               <a:spcAft>
                 <a:spcPts val="500"/>
               </a:spcAft>
+              <a:buFont typeface="Arial" panose="020B0604020202020204" pitchFamily="34" charset="0"/>
+              <a:buChar char="•"/>
               <a:defRPr sz="1250">
                 <a:solidFill>
                   <a:srgbClr val="FFFFFF"/>
@@ -5667,15 +7884,38 @@
               </a:defRPr>
             </a:pPr>
             <a:r>
-              <a:rPr dirty="0"/>
-              <a:t>• Focus: realistic, complete pipeline</a:t>
-            </a:r>
-          </a:p>
-          <a:p>
-            <a:pPr>
+              <a:rPr lang="de-DE" dirty="0"/>
+              <a:t>Focus: </a:t>
+            </a:r>
+            <a:r>
+              <a:rPr lang="de-DE" dirty="0" err="1"/>
+              <a:t>realistic</a:t>
+            </a:r>
+            <a:r>
+              <a:rPr lang="de-DE" dirty="0"/>
+              <a:t>, </a:t>
+            </a:r>
+            <a:r>
+              <a:rPr lang="de-DE" dirty="0" err="1"/>
+              <a:t>complete</a:t>
+            </a:r>
+            <a:r>
+              <a:rPr lang="de-DE" dirty="0"/>
+              <a:t> </a:t>
+            </a:r>
+            <a:r>
+              <a:rPr lang="de-DE" dirty="0" err="1"/>
+              <a:t>pipeline</a:t>
+            </a:r>
+            <a:endParaRPr lang="de-DE" dirty="0"/>
+          </a:p>
+          <a:p>
+            <a:pPr marL="285750" indent="-285750">
               <a:spcAft>
                 <a:spcPts val="500"/>
               </a:spcAft>
+              <a:buFont typeface="Arial" panose="020B0604020202020204" pitchFamily="34" charset="0"/>
+              <a:buChar char="•"/>
               <a:defRPr sz="1250">
                 <a:solidFill>
                   <a:srgbClr val="FFFFFF"/>
@@ -5684,15 +7924,38 @@
               </a:defRPr>
             </a:pPr>
             <a:r>
-              <a:rPr dirty="0"/>
-              <a:t>• Job orientation: Data Engineering</a:t>
-            </a:r>
-          </a:p>
-          <a:p>
-            <a:pPr>
+              <a:rPr lang="de-DE" dirty="0"/>
+              <a:t>25+ </a:t>
+            </a:r>
+            <a:r>
+              <a:rPr lang="de-DE" dirty="0" err="1"/>
+              <a:t>years</a:t>
+            </a:r>
+            <a:r>
+              <a:rPr lang="de-DE" dirty="0"/>
+              <a:t> of </a:t>
+            </a:r>
+            <a:r>
+              <a:rPr lang="de-DE" dirty="0" err="1"/>
+              <a:t>database</a:t>
+            </a:r>
+            <a:r>
+              <a:rPr lang="de-DE" dirty="0"/>
+              <a:t> </a:t>
+            </a:r>
+            <a:r>
+              <a:rPr lang="de-DE" dirty="0" err="1"/>
+              <a:t>experience</a:t>
+            </a:r>
+            <a:endParaRPr lang="de-DE" dirty="0"/>
+          </a:p>
+          <a:p>
+            <a:pPr marL="285750" indent="-285750">
               <a:spcAft>
                 <a:spcPts val="500"/>
               </a:spcAft>
+              <a:buFont typeface="Arial" panose="020B0604020202020204" pitchFamily="34" charset="0"/>
+              <a:buChar char="•"/>
               <a:defRPr sz="1250">
                 <a:solidFill>
                   <a:srgbClr val="FFFFFF"/>
@@ -5701,23 +7964,25 @@
               </a:defRPr>
             </a:pPr>
             <a:r>
-              <a:rPr dirty="0"/>
-              <a:t>• Degree: Dipl.-</a:t>
-            </a:r>
-            <a:r>
-              <a:rPr dirty="0" err="1"/>
-              <a:t>Kfm</a:t>
-            </a:r>
-            <a:r>
-              <a:rPr dirty="0"/>
-              <a:t>. (FH)</a:t>
-            </a:r>
-          </a:p>
-          <a:p>
-            <a:pPr marL="1325880" indent="-1325880">
+              <a:rPr lang="de-DE" dirty="0"/>
+              <a:t>Career </a:t>
+            </a:r>
+            <a:r>
+              <a:rPr lang="de-DE" dirty="0" err="1"/>
+              <a:t>direction</a:t>
+            </a:r>
+            <a:r>
+              <a:rPr lang="de-DE" dirty="0"/>
+              <a:t>: Data Engineering</a:t>
+            </a:r>
+          </a:p>
+          <a:p>
+            <a:pPr marL="285750" indent="-285750">
               <a:spcAft>
                 <a:spcPts val="500"/>
               </a:spcAft>
+              <a:buFont typeface="Arial" panose="020B0604020202020204" pitchFamily="34" charset="0"/>
+              <a:buChar char="•"/>
               <a:defRPr sz="1250">
                 <a:solidFill>
                   <a:srgbClr val="FFFFFF"/>
@@ -5726,23 +7991,17 @@
               </a:defRPr>
             </a:pPr>
             <a:r>
-              <a:rPr dirty="0"/>
-              <a:t>• Preferred regions: Aachen / Cologne / Düsseldorf / Hamburg / Schleswig-Holstein </a:t>
-            </a:r>
-            <a:r>
               <a:rPr lang="de-DE" dirty="0"/>
-              <a:t>/</a:t>
-            </a:r>
-            <a:r>
-              <a:rPr dirty="0"/>
-              <a:t> Remote</a:t>
-            </a:r>
-          </a:p>
-          <a:p>
-            <a:pPr>
+              <a:t>Degree: Dipl.-Kfm. (FH)</a:t>
+            </a:r>
+          </a:p>
+          <a:p>
+            <a:pPr marL="285750" indent="-285750">
               <a:spcAft>
                 <a:spcPts val="500"/>
               </a:spcAft>
+              <a:buFont typeface="Arial" panose="020B0604020202020204" pitchFamily="34" charset="0"/>
+              <a:buChar char="•"/>
               <a:defRPr sz="1250">
                 <a:solidFill>
                   <a:srgbClr val="FFFFFF"/>
@@ -5751,8 +8010,60 @@
               </a:defRPr>
             </a:pPr>
             <a:r>
+              <a:rPr lang="de-DE" sz="1250" dirty="0" err="1">
+                <a:solidFill>
+                  <a:srgbClr val="FFFFFF"/>
+                </a:solidFill>
+                <a:latin typeface="Aptos"/>
+              </a:rPr>
+              <a:t>Preferred</a:t>
+            </a:r>
+            <a:r>
+              <a:rPr lang="de-DE" sz="1250" dirty="0">
+                <a:solidFill>
+                  <a:srgbClr val="FFFFFF"/>
+                </a:solidFill>
+                <a:latin typeface="Aptos"/>
+              </a:rPr>
+              <a:t> </a:t>
+            </a:r>
+            <a:r>
+              <a:rPr lang="de-DE" sz="1250" dirty="0" err="1">
+                <a:solidFill>
+                  <a:srgbClr val="FFFFFF"/>
+                </a:solidFill>
+                <a:latin typeface="Aptos"/>
+              </a:rPr>
+              <a:t>regions</a:t>
+            </a:r>
+            <a:r>
+              <a:rPr lang="de-DE" sz="1250" dirty="0">
+                <a:solidFill>
+                  <a:srgbClr val="FFFFFF"/>
+                </a:solidFill>
+                <a:latin typeface="Aptos"/>
+              </a:rPr>
+              <a:t>: NRW / Hamburg / Schleswig-Holstein · Remote</a:t>
+            </a:r>
+            <a:endParaRPr dirty="0"/>
+          </a:p>
+          <a:p>
+            <a:pPr marL="285750" indent="-285750">
+              <a:spcAft>
+                <a:spcPts val="500"/>
+              </a:spcAft>
+              <a:buFont typeface="Arial" panose="020B0604020202020204" pitchFamily="34" charset="0"/>
+              <a:buChar char="•"/>
+              <a:defRPr sz="1250">
+                <a:solidFill>
+                  <a:srgbClr val="FFFFFF"/>
+                </a:solidFill>
+                <a:latin typeface="Aptos"/>
+              </a:defRPr>
+            </a:pPr>
+            <a:r>
               <a:rPr dirty="0"/>
-              <a:t>• Contact: peter.blechert@web.de</a:t>
+              <a:t>Contact: peter.blechert@web.de</a:t>
             </a:r>
           </a:p>
         </p:txBody>
@@ -5862,7 +8173,7 @@
           <a:p>
             <a:pPr algn="l"/>
             <a:r>
-              <a:rPr sz="2200" b="1">
+              <a:rPr sz="2200" b="1" dirty="0">
                 <a:solidFill>
                   <a:srgbClr val="FFFFFF"/>
                 </a:solidFill>
@@ -5882,7 +8193,7 @@
         <p:spPr>
           <a:xfrm>
             <a:off x="5349240" y="3246120"/>
-            <a:ext cx="4754880" cy="822960"/>
+            <a:ext cx="4754880" cy="584775"/>
           </a:xfrm>
           <a:prstGeom prst="rect">
             <a:avLst/>
@@ -5897,13 +8208,13 @@
           <a:p>
             <a:pPr algn="l"/>
             <a:r>
-              <a:rPr sz="1600" b="0">
+              <a:rPr sz="1600" b="0" dirty="0">
                 <a:solidFill>
                   <a:srgbClr val="FFFFFF"/>
                 </a:solidFill>
                 <a:latin typeface="Aptos"/>
               </a:rPr>
-              <a:t>The next 15 minutes show the problem, the engineering solution, and the proof that it works.</a:t>
+              <a:t>The next 15 minutes show the problem, the engineering solution and the proof that it works.</a:t>
             </a:r>
           </a:p>
         </p:txBody>
@@ -5919,6 +8230,14 @@
 <file path=ppt/slides/slide3.xml><?xml version="1.0" encoding="utf-8"?>
 <p:sld xmlns:a="http://schemas.openxmlformats.org/drawingml/2006/main" xmlns:r="http://schemas.openxmlformats.org/officeDocument/2006/relationships" xmlns:p="http://schemas.openxmlformats.org/presentationml/2006/main">
   <p:cSld>
+    <p:bg>
+      <p:bgPr>
+        <a:solidFill>
+          <a:schemeClr val="bg1"/>
+        </a:solidFill>
+        <a:effectLst/>
+      </p:bgPr>
+    </p:bg>
     <p:spTree>
       <p:nvGrpSpPr>
         <p:cNvPr id="1" name=""/>
@@ -5956,60 +8275,7 @@
                 </a:solidFill>
                 <a:latin typeface="Aptos"/>
               </a:rPr>
-              <a:t>MOTIVATION &amp; GOALS </a:t>
-            </a:r>
-            <a:r>
-              <a:rPr lang="de-DE" sz="2700" b="1" dirty="0">
-                <a:solidFill>
-                  <a:srgbClr val="005020"/>
-                </a:solidFill>
-                <a:latin typeface="Aptos"/>
-              </a:rPr>
-              <a:t>-</a:t>
-            </a:r>
-            <a:r>
-              <a:rPr sz="2700" b="1" dirty="0">
-                <a:solidFill>
-                  <a:srgbClr val="005020"/>
-                </a:solidFill>
-                <a:latin typeface="Aptos"/>
-              </a:rPr>
-              <a:t> TWO PERSPECTIVES</a:t>
-            </a:r>
-          </a:p>
-        </p:txBody>
-      </p:sp>
-      <p:sp>
-        <p:nvSpPr>
-          <p:cNvPr id="4" name="TextBox 3"/>
-          <p:cNvSpPr txBox="1"/>
-          <p:nvPr/>
-        </p:nvSpPr>
-        <p:spPr>
-          <a:xfrm>
-            <a:off x="384048" y="109728"/>
-            <a:ext cx="365760" cy="182880"/>
-          </a:xfrm>
-          <a:prstGeom prst="rect">
-            <a:avLst/>
-          </a:prstGeom>
-          <a:noFill/>
-        </p:spPr>
-        <p:txBody>
-          <a:bodyPr wrap="square" anchor="t">
-            <a:spAutoFit/>
-          </a:bodyPr>
-          <a:lstStyle/>
-          <a:p>
-            <a:pPr algn="ctr"/>
-            <a:r>
-              <a:rPr sz="800" b="1">
-                <a:solidFill>
-                  <a:srgbClr val="005020"/>
-                </a:solidFill>
-                <a:latin typeface="Aptos"/>
-              </a:rPr>
-              <a:t>02</a:t>
+              <a:t>MOTIVATION &amp; GOALS</a:t>
             </a:r>
           </a:p>
         </p:txBody>
@@ -6022,8 +8288,8 @@
         </p:nvSpPr>
         <p:spPr>
           <a:xfrm>
-            <a:off x="777240" y="1508760"/>
-            <a:ext cx="4617720" cy="4160520"/>
+            <a:off x="777239" y="1508760"/>
+            <a:ext cx="6845609" cy="3901440"/>
           </a:xfrm>
           <a:prstGeom prst="roundRect">
             <a:avLst/>
@@ -6062,14 +8328,14 @@
       </p:sp>
       <p:sp>
         <p:nvSpPr>
-          <p:cNvPr id="6" name="TextBox 5"/>
+          <p:cNvPr id="7" name="TextBox 6"/>
           <p:cNvSpPr txBox="1"/>
           <p:nvPr/>
         </p:nvSpPr>
         <p:spPr>
           <a:xfrm>
-            <a:off x="1051560" y="1810512"/>
-            <a:ext cx="1463040" cy="219456"/>
+            <a:off x="1051560" y="1989998"/>
+            <a:ext cx="6060440" cy="307777"/>
           </a:xfrm>
           <a:prstGeom prst="rect">
             <a:avLst/>
@@ -6082,50 +8348,32 @@
           </a:bodyPr>
           <a:lstStyle/>
           <a:p>
-            <a:pPr algn="l"/>
-            <a:r>
-              <a:rPr sz="1100" b="1">
+            <a:r>
+              <a:rPr sz="1400" b="1" dirty="0">
                 <a:solidFill>
                   <a:srgbClr val="DFF5E4"/>
                 </a:solidFill>
                 <a:latin typeface="Aptos"/>
               </a:rPr>
-              <a:t>My Goal</a:t>
-            </a:r>
-          </a:p>
-        </p:txBody>
-      </p:sp>
-      <p:sp>
-        <p:nvSpPr>
-          <p:cNvPr id="7" name="TextBox 6"/>
-          <p:cNvSpPr txBox="1"/>
-          <p:nvPr/>
-        </p:nvSpPr>
-        <p:spPr>
-          <a:xfrm>
-            <a:off x="1051560" y="2176272"/>
-            <a:ext cx="4023360" cy="384048"/>
-          </a:xfrm>
-          <a:prstGeom prst="rect">
-            <a:avLst/>
-          </a:prstGeom>
-          <a:noFill/>
-        </p:spPr>
-        <p:txBody>
-          <a:bodyPr wrap="square" anchor="t">
-            <a:spAutoFit/>
-          </a:bodyPr>
-          <a:lstStyle/>
-          <a:p>
-            <a:pPr algn="l"/>
-            <a:r>
-              <a:rPr sz="1900" b="1">
-                <a:solidFill>
-                  <a:srgbClr val="FFFFFF"/>
-                </a:solidFill>
-                <a:latin typeface="Aptos"/>
-              </a:rPr>
-              <a:t>Build a small but complete production-like pipeline.</a:t>
+              <a:t>Build a</a:t>
+            </a:r>
+            <a:r>
+              <a:rPr lang="de-DE" sz="1400" b="1" dirty="0">
+                <a:solidFill>
+                  <a:srgbClr val="DFF5E4"/>
+                </a:solidFill>
+                <a:latin typeface="Aptos"/>
+              </a:rPr>
+              <a:t> </a:t>
+            </a:r>
+            <a:r>
+              <a:rPr sz="1400" b="1" dirty="0">
+                <a:solidFill>
+                  <a:srgbClr val="DFF5E4"/>
+                </a:solidFill>
+                <a:latin typeface="Aptos"/>
+              </a:rPr>
+              <a:t>small but complete production-like pipeline.</a:t>
             </a:r>
           </a:p>
         </p:txBody>
@@ -6138,7 +8386,7 @@
         </p:nvSpPr>
         <p:spPr>
           <a:xfrm>
-            <a:off x="1051560" y="2788920"/>
+            <a:off x="1051560" y="2376000"/>
             <a:ext cx="3886200" cy="2192908"/>
           </a:xfrm>
           <a:prstGeom prst="rect">
@@ -6286,197 +8534,10 @@
           </a:p>
         </p:txBody>
       </p:sp>
-      <p:sp>
-        <p:nvSpPr>
-          <p:cNvPr id="9" name="Rounded Rectangle 8"/>
-          <p:cNvSpPr/>
-          <p:nvPr/>
-        </p:nvSpPr>
-        <p:spPr>
-          <a:xfrm>
-            <a:off x="5715000" y="1508760"/>
-            <a:ext cx="4617720" cy="4160520"/>
-          </a:xfrm>
-          <a:prstGeom prst="roundRect">
-            <a:avLst/>
-          </a:prstGeom>
-          <a:solidFill>
-            <a:srgbClr val="219149"/>
-          </a:solidFill>
-          <a:ln>
-            <a:solidFill>
-              <a:srgbClr val="DFF5E4"/>
-            </a:solidFill>
-          </a:ln>
-        </p:spPr>
-        <p:style>
-          <a:lnRef idx="1">
-            <a:schemeClr val="accent1"/>
-          </a:lnRef>
-          <a:fillRef idx="3">
-            <a:schemeClr val="accent1"/>
-          </a:fillRef>
-          <a:effectRef idx="2">
-            <a:schemeClr val="accent1"/>
-          </a:effectRef>
-          <a:fontRef idx="minor">
-            <a:schemeClr val="lt1"/>
-          </a:fontRef>
-        </p:style>
-        <p:txBody>
-          <a:bodyPr rtlCol="0" anchor="ctr"/>
-          <a:lstStyle/>
-          <a:p>
-            <a:pPr algn="ctr"/>
-            <a:endParaRPr/>
-          </a:p>
-        </p:txBody>
-      </p:sp>
-      <p:sp>
-        <p:nvSpPr>
-          <p:cNvPr id="10" name="TextBox 9"/>
-          <p:cNvSpPr txBox="1"/>
-          <p:nvPr/>
-        </p:nvSpPr>
-        <p:spPr>
-          <a:xfrm>
-            <a:off x="5989320" y="1810512"/>
-            <a:ext cx="6080760" cy="219456"/>
-          </a:xfrm>
-          <a:prstGeom prst="rect">
-            <a:avLst/>
-          </a:prstGeom>
-          <a:noFill/>
-        </p:spPr>
-        <p:txBody>
-          <a:bodyPr wrap="square" anchor="t">
-            <a:spAutoFit/>
-          </a:bodyPr>
-          <a:lstStyle/>
-          <a:p>
-            <a:pPr algn="l"/>
-            <a:r>
-              <a:rPr sz="1100" b="1">
-                <a:solidFill>
-                  <a:srgbClr val="DFF5E4"/>
-                </a:solidFill>
-                <a:latin typeface="Aptos"/>
-              </a:rPr>
-              <a:t>Stakeholder: Corporate Travel / Travel Ops. Manager - Goal</a:t>
-            </a:r>
-          </a:p>
-        </p:txBody>
-      </p:sp>
-      <p:sp>
-        <p:nvSpPr>
-          <p:cNvPr id="11" name="TextBox 10"/>
-          <p:cNvSpPr txBox="1"/>
-          <p:nvPr/>
-        </p:nvSpPr>
-        <p:spPr>
-          <a:xfrm>
-            <a:off x="5989320" y="2176272"/>
-            <a:ext cx="3977639" cy="502920"/>
-          </a:xfrm>
-          <a:prstGeom prst="rect">
-            <a:avLst/>
-          </a:prstGeom>
-          <a:noFill/>
-        </p:spPr>
-        <p:txBody>
-          <a:bodyPr wrap="square" anchor="t">
-            <a:spAutoFit/>
-          </a:bodyPr>
-          <a:lstStyle/>
-          <a:p>
-            <a:pPr algn="l"/>
-            <a:r>
-              <a:rPr sz="1900" b="1">
-                <a:solidFill>
-                  <a:srgbClr val="FFFFFF"/>
-                </a:solidFill>
-                <a:latin typeface="Aptos"/>
-              </a:rPr>
-              <a:t>Get trusted, comparable reliability information.</a:t>
-            </a:r>
-          </a:p>
-        </p:txBody>
-      </p:sp>
-      <p:sp>
-        <p:nvSpPr>
-          <p:cNvPr id="12" name="TextBox 11"/>
-          <p:cNvSpPr txBox="1"/>
-          <p:nvPr/>
-        </p:nvSpPr>
-        <p:spPr>
-          <a:xfrm>
-            <a:off x="5989320" y="2834640"/>
-            <a:ext cx="3794760" cy="1737360"/>
-          </a:xfrm>
-          <a:prstGeom prst="rect">
-            <a:avLst/>
-          </a:prstGeom>
-          <a:noFill/>
-        </p:spPr>
-        <p:txBody>
-          <a:bodyPr wrap="square">
-            <a:spAutoFit/>
-          </a:bodyPr>
-          <a:lstStyle/>
-          <a:p>
-            <a:pPr>
-              <a:spcAft>
-                <a:spcPts val="700"/>
-              </a:spcAft>
-              <a:defRPr sz="1450">
-                <a:solidFill>
-                  <a:srgbClr val="FFFFFF"/>
-                </a:solidFill>
-                <a:latin typeface="Aptos"/>
-              </a:defRPr>
-            </a:pPr>
-            <a:r>
-              <a:t>• Which airlines are reliable?</a:t>
-            </a:r>
-          </a:p>
-          <a:p>
-            <a:pPr>
-              <a:spcAft>
-                <a:spcPts val="700"/>
-              </a:spcAft>
-              <a:defRPr sz="1450">
-                <a:solidFill>
-                  <a:srgbClr val="FFFFFF"/>
-                </a:solidFill>
-                <a:latin typeface="Aptos"/>
-              </a:defRPr>
-            </a:pPr>
-            <a:r>
-              <a:t>• Which airports concentrate problems?</a:t>
-            </a:r>
-          </a:p>
-          <a:p>
-            <a:pPr>
-              <a:spcAft>
-                <a:spcPts val="700"/>
-              </a:spcAft>
-              <a:defRPr sz="1450">
-                <a:solidFill>
-                  <a:srgbClr val="FFFFFF"/>
-                </a:solidFill>
-                <a:latin typeface="Aptos"/>
-              </a:defRPr>
-            </a:pPr>
-            <a:r>
-              <a:t>• Which routes are operationally robust?</a:t>
-            </a:r>
-          </a:p>
-        </p:txBody>
-      </p:sp>
     </p:spTree>
   </p:cSld>
   <p:clrMapOvr>
-    <a:masterClrMapping/>
+    <a:overrideClrMapping bg1="lt1" tx1="dk1" bg2="lt2" tx2="dk2" accent1="accent1" accent2="accent2" accent3="accent3" accent4="accent4" accent5="accent5" accent6="accent6" hlink="hlink" folHlink="folHlink"/>
   </p:clrMapOvr>
 </p:sld>
 </file>
@@ -6486,7 +8547,13 @@
   <p:cSld>
     <p:spTree>
       <p:nvGrpSpPr>
-        <p:cNvPr id="1" name=""/>
+        <p:cNvPr id="1" name="">
+          <a:extLst>
+            <a:ext uri="{FF2B5EF4-FFF2-40B4-BE49-F238E27FC236}">
+              <a16:creationId xmlns:a16="http://schemas.microsoft.com/office/drawing/2014/main" id="{74CC147E-87C4-A948-E131-050911DFE615}"/>
+            </a:ext>
+          </a:extLst>
+        </p:cNvPr>
         <p:cNvGrpSpPr/>
         <p:nvPr/>
       </p:nvGrpSpPr>
@@ -6500,183 +8567,20 @@
       </p:grpSpPr>
       <p:sp>
         <p:nvSpPr>
-          <p:cNvPr id="2" name="Title 1"/>
-          <p:cNvSpPr>
-            <a:spLocks noGrp="1"/>
-          </p:cNvSpPr>
-          <p:nvPr>
-            <p:ph type="title"/>
-          </p:nvPr>
-        </p:nvSpPr>
-        <p:spPr/>
-        <p:txBody>
-          <a:bodyPr wrap="square" anchor="t"/>
-          <a:lstStyle/>
-          <a:p>
-            <a:pPr algn="l"/>
-            <a:r>
-              <a:rPr sz="2700" b="1" dirty="0">
-                <a:solidFill>
-                  <a:srgbClr val="005020"/>
-                </a:solidFill>
-                <a:latin typeface="Aptos"/>
-              </a:rPr>
-              <a:t>STAKEHOLDER &amp; DECISION DIMENSIONS</a:t>
-            </a:r>
-          </a:p>
-        </p:txBody>
-      </p:sp>
-      <p:sp>
-        <p:nvSpPr>
-          <p:cNvPr id="4" name="TextBox 3"/>
-          <p:cNvSpPr txBox="1"/>
-          <p:nvPr/>
-        </p:nvSpPr>
-        <p:spPr>
-          <a:xfrm>
-            <a:off x="384048" y="109728"/>
-            <a:ext cx="365760" cy="182880"/>
-          </a:xfrm>
-          <a:prstGeom prst="rect">
-            <a:avLst/>
-          </a:prstGeom>
-          <a:noFill/>
-        </p:spPr>
-        <p:txBody>
-          <a:bodyPr wrap="square" anchor="t">
-            <a:spAutoFit/>
-          </a:bodyPr>
-          <a:lstStyle/>
-          <a:p>
-            <a:pPr algn="ctr"/>
-            <a:r>
-              <a:rPr sz="800" b="1">
-                <a:solidFill>
-                  <a:srgbClr val="005020"/>
-                </a:solidFill>
-                <a:latin typeface="Aptos"/>
-              </a:rPr>
-              <a:t>03</a:t>
-            </a:r>
-          </a:p>
-        </p:txBody>
-      </p:sp>
-      <p:sp>
-        <p:nvSpPr>
-          <p:cNvPr id="5" name="TextBox 4"/>
-          <p:cNvSpPr txBox="1"/>
-          <p:nvPr/>
-        </p:nvSpPr>
-        <p:spPr>
-          <a:xfrm>
-            <a:off x="777240" y="1444752"/>
-            <a:ext cx="9875520" cy="347472"/>
-          </a:xfrm>
-          <a:prstGeom prst="rect">
-            <a:avLst/>
-          </a:prstGeom>
-          <a:noFill/>
-        </p:spPr>
-        <p:txBody>
-          <a:bodyPr wrap="square" anchor="t">
-            <a:spAutoFit/>
-          </a:bodyPr>
-          <a:lstStyle/>
-          <a:p>
-            <a:pPr algn="l"/>
-            <a:r>
-              <a:rPr sz="2000" b="1">
-                <a:solidFill>
-                  <a:srgbClr val="FFFFFF"/>
-                </a:solidFill>
-                <a:latin typeface="Aptos"/>
-              </a:rPr>
-              <a:t>Stakeholder: Corporate Travel / Travel Operations Manager</a:t>
-            </a:r>
-          </a:p>
-        </p:txBody>
-      </p:sp>
-      <p:sp>
-        <p:nvSpPr>
-          <p:cNvPr id="6" name="TextBox 5"/>
-          <p:cNvSpPr txBox="1"/>
-          <p:nvPr/>
-        </p:nvSpPr>
-        <p:spPr>
-          <a:xfrm>
-            <a:off x="777240" y="1443776"/>
-            <a:ext cx="9784080" cy="677108"/>
-          </a:xfrm>
-          <a:prstGeom prst="rect">
-            <a:avLst/>
-          </a:prstGeom>
-          <a:noFill/>
-        </p:spPr>
-        <p:txBody>
-          <a:bodyPr wrap="square" anchor="t">
-            <a:spAutoFit/>
-          </a:bodyPr>
-          <a:lstStyle/>
-          <a:p>
-            <a:pPr algn="l"/>
-            <a:r>
-              <a:rPr sz="1900" b="1" dirty="0">
-                <a:solidFill>
-                  <a:srgbClr val="58645B"/>
-                </a:solidFill>
-                <a:latin typeface="Aptos"/>
-              </a:rPr>
-              <a:t>Why this stakeholder? The result supports decisions across airline, airport and route reliability </a:t>
-            </a:r>
-            <a:r>
-              <a:rPr lang="de-DE" sz="1900" b="1" dirty="0">
-                <a:solidFill>
-                  <a:srgbClr val="58645B"/>
-                </a:solidFill>
-                <a:latin typeface="Aptos"/>
-              </a:rPr>
-              <a:t>-</a:t>
-            </a:r>
-            <a:r>
-              <a:rPr sz="1900" b="1" dirty="0">
-                <a:solidFill>
-                  <a:srgbClr val="58645B"/>
-                </a:solidFill>
-                <a:latin typeface="Aptos"/>
-              </a:rPr>
-              <a:t> without </a:t>
-            </a:r>
-            <a:r>
-              <a:rPr lang="de-DE" sz="1900" b="1" dirty="0" err="1">
-                <a:solidFill>
-                  <a:srgbClr val="58645B"/>
-                </a:solidFill>
-                <a:latin typeface="Aptos"/>
-              </a:rPr>
-              <a:t>needing</a:t>
-            </a:r>
-            <a:r>
-              <a:rPr sz="1900" b="1" dirty="0">
-                <a:solidFill>
-                  <a:srgbClr val="58645B"/>
-                </a:solidFill>
-                <a:latin typeface="Aptos"/>
-              </a:rPr>
-              <a:t> raw files.</a:t>
-            </a:r>
-          </a:p>
-        </p:txBody>
-      </p:sp>
-      <p:sp>
-        <p:nvSpPr>
-          <p:cNvPr id="7" name="Rounded Rectangle 6"/>
+          <p:cNvPr id="14" name="Rounded Rectangle 4">
+            <a:extLst>
+              <a:ext uri="{FF2B5EF4-FFF2-40B4-BE49-F238E27FC236}">
+                <a16:creationId xmlns:a16="http://schemas.microsoft.com/office/drawing/2014/main" id="{D62EDD4C-6874-AF48-686F-7ACDFCE463B7}"/>
+              </a:ext>
+            </a:extLst>
+          </p:cNvPr>
           <p:cNvSpPr/>
           <p:nvPr/>
         </p:nvSpPr>
         <p:spPr>
           <a:xfrm>
-            <a:off x="777240" y="2606040"/>
-            <a:ext cx="2971800" cy="2331720"/>
+            <a:off x="777239" y="1508760"/>
+            <a:ext cx="6847200" cy="3902400"/>
           </a:xfrm>
           <a:prstGeom prst="roundRect">
             <a:avLst/>
@@ -6715,14 +8619,60 @@
       </p:sp>
       <p:sp>
         <p:nvSpPr>
-          <p:cNvPr id="8" name="TextBox 7"/>
+          <p:cNvPr id="2" name="Title 1">
+            <a:extLst>
+              <a:ext uri="{FF2B5EF4-FFF2-40B4-BE49-F238E27FC236}">
+                <a16:creationId xmlns:a16="http://schemas.microsoft.com/office/drawing/2014/main" id="{3066E872-D310-3626-029F-C603742A6B5C}"/>
+              </a:ext>
+            </a:extLst>
+          </p:cNvPr>
+          <p:cNvSpPr>
+            <a:spLocks noGrp="1"/>
+          </p:cNvSpPr>
+          <p:nvPr>
+            <p:ph type="title"/>
+          </p:nvPr>
+        </p:nvSpPr>
+        <p:spPr/>
+        <p:txBody>
+          <a:bodyPr wrap="square" anchor="t"/>
+          <a:lstStyle/>
+          <a:p>
+            <a:pPr algn="l"/>
+            <a:r>
+              <a:rPr lang="de-DE" sz="2700" dirty="0">
+                <a:solidFill>
+                  <a:srgbClr val="005020"/>
+                </a:solidFill>
+                <a:latin typeface="Aptos"/>
+              </a:rPr>
+              <a:t>STAKEHOLDER PERSPECTIVE - CORPORATE TRAVEL</a:t>
+            </a:r>
+            <a:endParaRPr sz="2700" b="1" dirty="0">
+              <a:solidFill>
+                <a:srgbClr val="005020"/>
+              </a:solidFill>
+              <a:latin typeface="Aptos"/>
+            </a:endParaRPr>
+          </a:p>
+        </p:txBody>
+      </p:sp>
+      <p:sp>
+        <p:nvSpPr>
+          <p:cNvPr id="11" name="TextBox 10">
+            <a:extLst>
+              <a:ext uri="{FF2B5EF4-FFF2-40B4-BE49-F238E27FC236}">
+                <a16:creationId xmlns:a16="http://schemas.microsoft.com/office/drawing/2014/main" id="{70E15AE3-2D63-E342-721F-85505FAACDF9}"/>
+              </a:ext>
+            </a:extLst>
+          </p:cNvPr>
           <p:cNvSpPr txBox="1"/>
           <p:nvPr/>
         </p:nvSpPr>
         <p:spPr>
           <a:xfrm>
-            <a:off x="960120" y="2852928"/>
-            <a:ext cx="2560320" cy="274320"/>
+            <a:off x="1041299" y="1990800"/>
+            <a:ext cx="6162806" cy="307777"/>
           </a:xfrm>
           <a:prstGeom prst="rect">
             <a:avLst/>
@@ -6735,29 +8685,43 @@
           </a:bodyPr>
           <a:lstStyle/>
           <a:p>
-            <a:pPr algn="ctr"/>
-            <a:r>
-              <a:rPr sz="1600" b="1">
+            <a:r>
+              <a:rPr sz="1400" b="1" dirty="0">
                 <a:solidFill>
                   <a:srgbClr val="DFF5E4"/>
                 </a:solidFill>
                 <a:latin typeface="Aptos"/>
               </a:rPr>
-              <a:t>AIRLINES</a:t>
-            </a:r>
-          </a:p>
-        </p:txBody>
-      </p:sp>
-      <p:sp>
-        <p:nvSpPr>
-          <p:cNvPr id="9" name="TextBox 8"/>
+              <a:t>Get trusted, comparable reliability information</a:t>
+            </a:r>
+            <a:r>
+              <a:rPr sz="1100" b="1" dirty="0">
+                <a:solidFill>
+                  <a:srgbClr val="DFF5E4"/>
+                </a:solidFill>
+                <a:latin typeface="Aptos"/>
+              </a:rPr>
+              <a:t>.</a:t>
+            </a:r>
+          </a:p>
+        </p:txBody>
+      </p:sp>
+      <p:sp>
+        <p:nvSpPr>
+          <p:cNvPr id="12" name="TextBox 11">
+            <a:extLst>
+              <a:ext uri="{FF2B5EF4-FFF2-40B4-BE49-F238E27FC236}">
+                <a16:creationId xmlns:a16="http://schemas.microsoft.com/office/drawing/2014/main" id="{2DA5AADF-D4E5-D63E-4696-2F391B4C3F0F}"/>
+              </a:ext>
+            </a:extLst>
+          </p:cNvPr>
           <p:cNvSpPr txBox="1"/>
           <p:nvPr/>
         </p:nvSpPr>
         <p:spPr>
           <a:xfrm>
-            <a:off x="1005840" y="3383280"/>
-            <a:ext cx="2514600" cy="502920"/>
+            <a:off x="1041298" y="2374200"/>
+            <a:ext cx="6369152" cy="2569934"/>
           </a:xfrm>
           <a:prstGeom prst="rect">
             <a:avLst/>
@@ -6765,397 +8729,365 @@
           <a:noFill/>
         </p:spPr>
         <p:txBody>
-          <a:bodyPr wrap="square" anchor="t">
+          <a:bodyPr wrap="square">
             <a:spAutoFit/>
           </a:bodyPr>
           <a:lstStyle/>
           <a:p>
-            <a:pPr algn="ctr"/>
-            <a:r>
-              <a:rPr sz="1600" b="1">
+            <a:pPr marL="342900" indent="-342900">
+              <a:buFont typeface="Arial" panose="020B0604020202020204" pitchFamily="34" charset="0"/>
+              <a:buChar char="•"/>
+              <a:defRPr sz="1450">
                 <a:solidFill>
                   <a:srgbClr val="FFFFFF"/>
                 </a:solidFill>
                 <a:latin typeface="Aptos"/>
-              </a:rPr>
-              <a:t>Which carriers operate most reliably?</a:t>
-            </a:r>
-          </a:p>
-        </p:txBody>
-      </p:sp>
-      <p:sp>
-        <p:nvSpPr>
-          <p:cNvPr id="10" name="TextBox 9"/>
-          <p:cNvSpPr txBox="1"/>
-          <p:nvPr/>
-        </p:nvSpPr>
-        <p:spPr>
-          <a:xfrm>
-            <a:off x="1005840" y="4251960"/>
-            <a:ext cx="2514600" cy="292608"/>
-          </a:xfrm>
-          <a:prstGeom prst="rect">
-            <a:avLst/>
-          </a:prstGeom>
-          <a:noFill/>
-        </p:spPr>
-        <p:txBody>
-          <a:bodyPr wrap="square" anchor="t">
-            <a:spAutoFit/>
-          </a:bodyPr>
-          <a:lstStyle/>
-          <a:p>
-            <a:pPr algn="ctr"/>
-            <a:r>
-              <a:rPr sz="1150" b="0">
+              </a:defRPr>
+            </a:pPr>
+            <a:r>
+              <a:rPr sz="2200" b="1" dirty="0">
+                <a:solidFill>
+                  <a:srgbClr val="FFFFFF"/>
+                </a:solidFill>
+                <a:latin typeface="Aptos"/>
+              </a:rPr>
+              <a:t>Which airlines are reliable?</a:t>
+            </a:r>
+            <a:r>
+              <a:rPr lang="de-DE" sz="2200" b="1" dirty="0">
+                <a:solidFill>
+                  <a:srgbClr val="FFFFFF"/>
+                </a:solidFill>
+                <a:latin typeface="Aptos"/>
+              </a:rPr>
+              <a:t> </a:t>
+            </a:r>
+          </a:p>
+          <a:p>
+            <a:pPr lvl="1">
+              <a:lnSpc>
+                <a:spcPts val="1500"/>
+              </a:lnSpc>
+              <a:defRPr sz="1450">
+                <a:solidFill>
+                  <a:srgbClr val="FFFFFF"/>
+                </a:solidFill>
+                <a:latin typeface="Aptos"/>
+              </a:defRPr>
+            </a:pPr>
+            <a:r>
+              <a:rPr lang="de-DE" sz="1600" dirty="0">
+                <a:solidFill>
+                  <a:srgbClr val="FFFFFF"/>
+                </a:solidFill>
+                <a:latin typeface="Aptos"/>
+              </a:rPr>
+              <a:t>→</a:t>
+            </a:r>
+            <a:r>
+              <a:rPr lang="de-DE" sz="1600" b="1" dirty="0">
+                <a:solidFill>
+                  <a:srgbClr val="FFFFFF"/>
+                </a:solidFill>
+                <a:latin typeface="Aptos"/>
+              </a:rPr>
+              <a:t> </a:t>
+            </a:r>
+            <a:r>
+              <a:rPr lang="de-DE" sz="1600" dirty="0">
                 <a:solidFill>
                   <a:srgbClr val="DFF5E4"/>
                 </a:solidFill>
                 <a:latin typeface="Aptos"/>
               </a:rPr>
-              <a:t>carrier selection / benchmarking</a:t>
-            </a:r>
-          </a:p>
-        </p:txBody>
-      </p:sp>
-      <p:sp>
-        <p:nvSpPr>
-          <p:cNvPr id="11" name="Rounded Rectangle 10"/>
-          <p:cNvSpPr/>
-          <p:nvPr/>
-        </p:nvSpPr>
-        <p:spPr>
-          <a:xfrm>
-            <a:off x="4142232" y="2606040"/>
-            <a:ext cx="2971800" cy="2331720"/>
-          </a:xfrm>
-          <a:prstGeom prst="roundRect">
-            <a:avLst/>
-          </a:prstGeom>
-          <a:solidFill>
-            <a:srgbClr val="219149"/>
-          </a:solidFill>
-          <a:ln>
-            <a:solidFill>
-              <a:srgbClr val="DFF5E4"/>
-            </a:solidFill>
-          </a:ln>
-        </p:spPr>
-        <p:style>
-          <a:lnRef idx="1">
-            <a:schemeClr val="accent1"/>
-          </a:lnRef>
-          <a:fillRef idx="3">
-            <a:schemeClr val="accent1"/>
-          </a:fillRef>
-          <a:effectRef idx="2">
-            <a:schemeClr val="accent1"/>
-          </a:effectRef>
-          <a:fontRef idx="minor">
-            <a:schemeClr val="lt1"/>
-          </a:fontRef>
-        </p:style>
-        <p:txBody>
-          <a:bodyPr rtlCol="0" anchor="ctr"/>
-          <a:lstStyle/>
-          <a:p>
-            <a:pPr algn="ctr"/>
-            <a:endParaRPr/>
-          </a:p>
-        </p:txBody>
-      </p:sp>
-      <p:sp>
-        <p:nvSpPr>
-          <p:cNvPr id="12" name="TextBox 11"/>
-          <p:cNvSpPr txBox="1"/>
-          <p:nvPr/>
-        </p:nvSpPr>
-        <p:spPr>
-          <a:xfrm>
-            <a:off x="4325112" y="2852928"/>
-            <a:ext cx="2560320" cy="274320"/>
-          </a:xfrm>
-          <a:prstGeom prst="rect">
-            <a:avLst/>
-          </a:prstGeom>
-          <a:noFill/>
-        </p:spPr>
-        <p:txBody>
-          <a:bodyPr wrap="square" anchor="t">
-            <a:spAutoFit/>
-          </a:bodyPr>
-          <a:lstStyle/>
-          <a:p>
-            <a:pPr algn="ctr"/>
-            <a:r>
-              <a:rPr sz="1600" b="1">
+              <a:t>Carrier </a:t>
+            </a:r>
+            <a:r>
+              <a:rPr lang="de-DE" sz="1600" dirty="0" err="1">
                 <a:solidFill>
                   <a:srgbClr val="DFF5E4"/>
                 </a:solidFill>
                 <a:latin typeface="Aptos"/>
               </a:rPr>
-              <a:t>AIRPORTS</a:t>
-            </a:r>
-          </a:p>
-        </p:txBody>
-      </p:sp>
-      <p:sp>
-        <p:nvSpPr>
-          <p:cNvPr id="13" name="TextBox 12"/>
-          <p:cNvSpPr txBox="1"/>
-          <p:nvPr/>
-        </p:nvSpPr>
-        <p:spPr>
-          <a:xfrm>
-            <a:off x="4370832" y="3383280"/>
-            <a:ext cx="2514600" cy="502920"/>
-          </a:xfrm>
-          <a:prstGeom prst="rect">
-            <a:avLst/>
-          </a:prstGeom>
-          <a:noFill/>
-        </p:spPr>
-        <p:txBody>
-          <a:bodyPr wrap="square" anchor="t">
-            <a:spAutoFit/>
-          </a:bodyPr>
-          <a:lstStyle/>
-          <a:p>
-            <a:pPr algn="ctr"/>
-            <a:r>
-              <a:rPr sz="1600" b="1">
+              <a:t>selection</a:t>
+            </a:r>
+            <a:r>
+              <a:rPr lang="de-DE" sz="1600" dirty="0">
+                <a:solidFill>
+                  <a:srgbClr val="DFF5E4"/>
+                </a:solidFill>
+                <a:latin typeface="Aptos"/>
+              </a:rPr>
+              <a:t> / </a:t>
+            </a:r>
+            <a:r>
+              <a:rPr lang="de-DE" sz="1600" dirty="0" err="1">
+                <a:solidFill>
+                  <a:srgbClr val="DFF5E4"/>
+                </a:solidFill>
+                <a:latin typeface="Aptos"/>
+              </a:rPr>
+              <a:t>benchmarking</a:t>
+            </a:r>
+            <a:endParaRPr lang="de-DE" sz="1600" dirty="0">
+              <a:solidFill>
+                <a:srgbClr val="DFF5E4"/>
+              </a:solidFill>
+              <a:latin typeface="Aptos"/>
+            </a:endParaRPr>
+          </a:p>
+          <a:p>
+            <a:pPr lvl="1">
+              <a:defRPr sz="1450">
                 <a:solidFill>
                   <a:srgbClr val="FFFFFF"/>
                 </a:solidFill>
                 <a:latin typeface="Aptos"/>
-              </a:rPr>
-              <a:t>Where are disruptions concentrated?</a:t>
-            </a:r>
-          </a:p>
-        </p:txBody>
-      </p:sp>
-      <p:sp>
-        <p:nvSpPr>
-          <p:cNvPr id="14" name="TextBox 13"/>
-          <p:cNvSpPr txBox="1"/>
-          <p:nvPr/>
-        </p:nvSpPr>
-        <p:spPr>
-          <a:xfrm>
-            <a:off x="4370832" y="4251960"/>
-            <a:ext cx="2514600" cy="292608"/>
-          </a:xfrm>
-          <a:prstGeom prst="rect">
-            <a:avLst/>
-          </a:prstGeom>
-          <a:noFill/>
-        </p:spPr>
-        <p:txBody>
-          <a:bodyPr wrap="square" anchor="t">
-            <a:spAutoFit/>
-          </a:bodyPr>
-          <a:lstStyle/>
-          <a:p>
-            <a:pPr algn="ctr"/>
-            <a:r>
-              <a:rPr sz="1150" b="0" dirty="0">
+              </a:defRPr>
+            </a:pPr>
+            <a:endParaRPr lang="de-DE" sz="1600" dirty="0">
+              <a:solidFill>
+                <a:srgbClr val="DFF5E4"/>
+              </a:solidFill>
+              <a:latin typeface="Aptos"/>
+            </a:endParaRPr>
+          </a:p>
+          <a:p>
+            <a:pPr marL="342900" indent="-342900">
+              <a:buFont typeface="Arial" panose="020B0604020202020204" pitchFamily="34" charset="0"/>
+              <a:buChar char="•"/>
+              <a:defRPr sz="1450">
+                <a:solidFill>
+                  <a:srgbClr val="FFFFFF"/>
+                </a:solidFill>
+                <a:latin typeface="Aptos"/>
+              </a:defRPr>
+            </a:pPr>
+            <a:r>
+              <a:rPr sz="2200" b="1" dirty="0">
+                <a:solidFill>
+                  <a:srgbClr val="FFFFFF"/>
+                </a:solidFill>
+                <a:latin typeface="Aptos"/>
+              </a:rPr>
+              <a:t>Which airports concentrate problems?</a:t>
+            </a:r>
+            <a:endParaRPr lang="de-DE" sz="2200" b="1" dirty="0">
+              <a:solidFill>
+                <a:srgbClr val="FFFFFF"/>
+              </a:solidFill>
+              <a:latin typeface="Aptos"/>
+            </a:endParaRPr>
+          </a:p>
+          <a:p>
+            <a:pPr lvl="1">
+              <a:lnSpc>
+                <a:spcPts val="1500"/>
+              </a:lnSpc>
+              <a:defRPr sz="1450">
+                <a:solidFill>
+                  <a:srgbClr val="FFFFFF"/>
+                </a:solidFill>
+                <a:latin typeface="Aptos"/>
+              </a:defRPr>
+            </a:pPr>
+            <a:r>
+              <a:rPr lang="de-DE" sz="1600" dirty="0">
+                <a:solidFill>
+                  <a:srgbClr val="FFFFFF"/>
+                </a:solidFill>
+                <a:latin typeface="Aptos"/>
+              </a:rPr>
+              <a:t>→</a:t>
+            </a:r>
+            <a:r>
+              <a:rPr lang="de-DE" sz="1600" b="1" dirty="0">
+                <a:solidFill>
+                  <a:srgbClr val="FFFFFF"/>
+                </a:solidFill>
+                <a:latin typeface="Aptos"/>
+              </a:rPr>
+              <a:t> </a:t>
+            </a:r>
+            <a:r>
+              <a:rPr lang="de-DE" sz="1600" dirty="0">
                 <a:solidFill>
                   <a:srgbClr val="DFF5E4"/>
                 </a:solidFill>
                 <a:latin typeface="Aptos"/>
               </a:rPr>
-              <a:t>connection and disruption risk</a:t>
-            </a:r>
-          </a:p>
-        </p:txBody>
-      </p:sp>
-      <p:sp>
-        <p:nvSpPr>
-          <p:cNvPr id="15" name="Rounded Rectangle 14"/>
-          <p:cNvSpPr/>
-          <p:nvPr/>
-        </p:nvSpPr>
-        <p:spPr>
-          <a:xfrm>
-            <a:off x="7507224" y="2606040"/>
-            <a:ext cx="2971800" cy="2331720"/>
-          </a:xfrm>
-          <a:prstGeom prst="roundRect">
-            <a:avLst/>
-          </a:prstGeom>
-          <a:solidFill>
-            <a:srgbClr val="219149"/>
-          </a:solidFill>
-          <a:ln>
-            <a:solidFill>
-              <a:srgbClr val="DFF5E4"/>
-            </a:solidFill>
-          </a:ln>
-        </p:spPr>
-        <p:style>
-          <a:lnRef idx="1">
-            <a:schemeClr val="accent1"/>
-          </a:lnRef>
-          <a:fillRef idx="3">
-            <a:schemeClr val="accent1"/>
-          </a:fillRef>
-          <a:effectRef idx="2">
-            <a:schemeClr val="accent1"/>
-          </a:effectRef>
-          <a:fontRef idx="minor">
-            <a:schemeClr val="lt1"/>
-          </a:fontRef>
-        </p:style>
-        <p:txBody>
-          <a:bodyPr rtlCol="0" anchor="ctr"/>
-          <a:lstStyle/>
-          <a:p>
-            <a:pPr algn="ctr"/>
-            <a:endParaRPr/>
-          </a:p>
-        </p:txBody>
-      </p:sp>
-      <p:sp>
-        <p:nvSpPr>
-          <p:cNvPr id="16" name="TextBox 15"/>
-          <p:cNvSpPr txBox="1"/>
-          <p:nvPr/>
-        </p:nvSpPr>
-        <p:spPr>
-          <a:xfrm>
-            <a:off x="7690104" y="2852928"/>
-            <a:ext cx="2560320" cy="274320"/>
-          </a:xfrm>
-          <a:prstGeom prst="rect">
-            <a:avLst/>
-          </a:prstGeom>
-          <a:noFill/>
-        </p:spPr>
-        <p:txBody>
-          <a:bodyPr wrap="square" anchor="t">
-            <a:spAutoFit/>
-          </a:bodyPr>
-          <a:lstStyle/>
-          <a:p>
-            <a:pPr algn="ctr"/>
-            <a:r>
-              <a:rPr sz="1600" b="1">
+              <a:t>Connection / </a:t>
+            </a:r>
+            <a:r>
+              <a:rPr lang="de-DE" sz="1600" dirty="0" err="1">
                 <a:solidFill>
                   <a:srgbClr val="DFF5E4"/>
                 </a:solidFill>
                 <a:latin typeface="Aptos"/>
               </a:rPr>
-              <a:t>ROUTES</a:t>
-            </a:r>
-          </a:p>
-        </p:txBody>
-      </p:sp>
-      <p:sp>
-        <p:nvSpPr>
-          <p:cNvPr id="17" name="TextBox 16"/>
-          <p:cNvSpPr txBox="1"/>
-          <p:nvPr/>
-        </p:nvSpPr>
-        <p:spPr>
-          <a:xfrm>
-            <a:off x="7735824" y="3383280"/>
-            <a:ext cx="2514600" cy="502920"/>
-          </a:xfrm>
-          <a:prstGeom prst="rect">
-            <a:avLst/>
-          </a:prstGeom>
-          <a:noFill/>
-        </p:spPr>
-        <p:txBody>
-          <a:bodyPr wrap="square" anchor="t">
-            <a:spAutoFit/>
-          </a:bodyPr>
-          <a:lstStyle/>
-          <a:p>
-            <a:pPr algn="ctr"/>
-            <a:r>
-              <a:rPr sz="1600" b="1">
+              <a:t>disruption</a:t>
+            </a:r>
+            <a:r>
+              <a:rPr lang="de-DE" sz="1600" dirty="0">
+                <a:solidFill>
+                  <a:srgbClr val="DFF5E4"/>
+                </a:solidFill>
+                <a:latin typeface="Aptos"/>
+              </a:rPr>
+              <a:t> </a:t>
+            </a:r>
+            <a:r>
+              <a:rPr lang="de-DE" sz="1600" dirty="0" err="1">
+                <a:solidFill>
+                  <a:srgbClr val="DFF5E4"/>
+                </a:solidFill>
+                <a:latin typeface="Aptos"/>
+              </a:rPr>
+              <a:t>risk</a:t>
+            </a:r>
+            <a:endParaRPr lang="de-DE" sz="1600" dirty="0">
+              <a:solidFill>
+                <a:srgbClr val="DFF5E4"/>
+              </a:solidFill>
+              <a:latin typeface="Aptos"/>
+            </a:endParaRPr>
+          </a:p>
+          <a:p>
+            <a:pPr lvl="1">
+              <a:defRPr sz="1450">
                 <a:solidFill>
                   <a:srgbClr val="FFFFFF"/>
                 </a:solidFill>
                 <a:latin typeface="Aptos"/>
-              </a:rPr>
-              <a:t>Which connections are robust?</a:t>
-            </a:r>
-          </a:p>
-        </p:txBody>
-      </p:sp>
-      <p:sp>
-        <p:nvSpPr>
-          <p:cNvPr id="18" name="TextBox 17"/>
-          <p:cNvSpPr txBox="1"/>
-          <p:nvPr/>
-        </p:nvSpPr>
-        <p:spPr>
-          <a:xfrm>
-            <a:off x="7735824" y="4251960"/>
-            <a:ext cx="2651760" cy="269304"/>
-          </a:xfrm>
-          <a:prstGeom prst="rect">
-            <a:avLst/>
-          </a:prstGeom>
-          <a:noFill/>
-        </p:spPr>
-        <p:txBody>
-          <a:bodyPr wrap="square" anchor="t">
-            <a:spAutoFit/>
-          </a:bodyPr>
-          <a:lstStyle/>
-          <a:p>
-            <a:pPr algn="ctr"/>
-            <a:r>
-              <a:rPr sz="1150" b="0" dirty="0">
+              </a:defRPr>
+            </a:pPr>
+            <a:endParaRPr lang="de-DE" sz="1600" b="1" dirty="0">
+              <a:solidFill>
+                <a:srgbClr val="FFFFFF"/>
+              </a:solidFill>
+              <a:latin typeface="Aptos"/>
+            </a:endParaRPr>
+          </a:p>
+          <a:p>
+            <a:pPr marL="342900" indent="-342900">
+              <a:buFont typeface="Arial" panose="020B0604020202020204" pitchFamily="34" charset="0"/>
+              <a:buChar char="•"/>
+              <a:defRPr sz="1450">
+                <a:solidFill>
+                  <a:srgbClr val="FFFFFF"/>
+                </a:solidFill>
+                <a:latin typeface="Aptos"/>
+              </a:defRPr>
+            </a:pPr>
+            <a:r>
+              <a:rPr sz="2200" b="1" dirty="0">
+                <a:solidFill>
+                  <a:srgbClr val="FFFFFF"/>
+                </a:solidFill>
+                <a:latin typeface="Aptos"/>
+              </a:rPr>
+              <a:t>Which routes are operationally robust?</a:t>
+            </a:r>
+            <a:r>
+              <a:rPr lang="de-DE" sz="2200" b="1" dirty="0">
+                <a:solidFill>
+                  <a:srgbClr val="FFFFFF"/>
+                </a:solidFill>
+                <a:latin typeface="Aptos"/>
+              </a:rPr>
+              <a:t> </a:t>
+            </a:r>
+          </a:p>
+          <a:p>
+            <a:pPr lvl="1">
+              <a:lnSpc>
+                <a:spcPts val="1500"/>
+              </a:lnSpc>
+              <a:defRPr sz="1450">
+                <a:solidFill>
+                  <a:srgbClr val="FFFFFF"/>
+                </a:solidFill>
+                <a:latin typeface="Aptos"/>
+              </a:defRPr>
+            </a:pPr>
+            <a:r>
+              <a:rPr lang="de-DE" sz="1600" dirty="0">
+                <a:solidFill>
+                  <a:srgbClr val="FFFFFF"/>
+                </a:solidFill>
+                <a:latin typeface="Aptos"/>
+              </a:rPr>
+              <a:t>→</a:t>
+            </a:r>
+            <a:r>
+              <a:rPr lang="de-DE" sz="1600" dirty="0">
                 <a:solidFill>
                   <a:srgbClr val="DFF5E4"/>
                 </a:solidFill>
                 <a:latin typeface="Aptos"/>
               </a:rPr>
-              <a:t>route selection / reliability comparison</a:t>
-            </a:r>
-          </a:p>
-        </p:txBody>
-      </p:sp>
-      <p:sp>
-        <p:nvSpPr>
-          <p:cNvPr id="19" name="TextBox 18"/>
-          <p:cNvSpPr txBox="1"/>
-          <p:nvPr/>
-        </p:nvSpPr>
-        <p:spPr>
-          <a:xfrm>
-            <a:off x="1005840" y="5285232"/>
-            <a:ext cx="9326880" cy="292608"/>
-          </a:xfrm>
-          <a:prstGeom prst="rect">
-            <a:avLst/>
-          </a:prstGeom>
-          <a:noFill/>
-        </p:spPr>
-        <p:txBody>
-          <a:bodyPr wrap="square" anchor="t">
-            <a:spAutoFit/>
-          </a:bodyPr>
-          <a:lstStyle/>
-          <a:p>
-            <a:pPr algn="ctr"/>
-            <a:r>
-              <a:rPr sz="1700" b="1">
+              <a:t> Route </a:t>
+            </a:r>
+            <a:r>
+              <a:rPr lang="de-DE" sz="1600" dirty="0" err="1">
+                <a:solidFill>
+                  <a:srgbClr val="DFF5E4"/>
+                </a:solidFill>
+                <a:latin typeface="Aptos"/>
+              </a:rPr>
+              <a:t>selection</a:t>
+            </a:r>
+            <a:r>
+              <a:rPr lang="de-DE" sz="1600" dirty="0">
+                <a:solidFill>
+                  <a:srgbClr val="DFF5E4"/>
+                </a:solidFill>
+                <a:latin typeface="Aptos"/>
+              </a:rPr>
+              <a:t> / </a:t>
+            </a:r>
+            <a:r>
+              <a:rPr lang="de-DE" sz="1600" dirty="0" err="1">
+                <a:solidFill>
+                  <a:srgbClr val="DFF5E4"/>
+                </a:solidFill>
+                <a:latin typeface="Aptos"/>
+              </a:rPr>
+              <a:t>comparison</a:t>
+            </a:r>
+            <a:endParaRPr lang="de-DE" sz="1600" dirty="0">
+              <a:solidFill>
+                <a:srgbClr val="DFF5E4"/>
+              </a:solidFill>
+              <a:latin typeface="Aptos"/>
+            </a:endParaRPr>
+          </a:p>
+          <a:p>
+            <a:pPr marL="342900" indent="-342900">
+              <a:buFont typeface="Arial" panose="020B0604020202020204" pitchFamily="34" charset="0"/>
+              <a:buChar char="•"/>
+              <a:defRPr sz="1450">
                 <a:solidFill>
                   <a:srgbClr val="FFFFFF"/>
                 </a:solidFill>
                 <a:latin typeface="Aptos"/>
-              </a:rPr>
-              <a:t>Core idea: one data product can serve several decision perspectives.</a:t>
-            </a:r>
+              </a:defRPr>
+            </a:pPr>
+            <a:endParaRPr sz="2200" b="1" dirty="0">
+              <a:solidFill>
+                <a:srgbClr val="FFFFFF"/>
+              </a:solidFill>
+              <a:latin typeface="Aptos"/>
+            </a:endParaRPr>
           </a:p>
         </p:txBody>
       </p:sp>
     </p:spTree>
+    <p:extLst>
+      <p:ext uri="{BB962C8B-B14F-4D97-AF65-F5344CB8AC3E}">
+        <p14:creationId xmlns:p14="http://schemas.microsoft.com/office/powerpoint/2010/main" val="2138906758"/>
+      </p:ext>
+    </p:extLst>
   </p:cSld>
   <p:clrMapOvr>
     <a:masterClrMapping/>
@@ -7210,14 +9142,14 @@
       </p:sp>
       <p:sp>
         <p:nvSpPr>
-          <p:cNvPr id="4" name="TextBox 3"/>
+          <p:cNvPr id="5" name="TextBox 4"/>
           <p:cNvSpPr txBox="1"/>
           <p:nvPr/>
         </p:nvSpPr>
         <p:spPr>
           <a:xfrm>
-            <a:off x="384048" y="109728"/>
-            <a:ext cx="365760" cy="182880"/>
+            <a:off x="777240" y="1417320"/>
+            <a:ext cx="9875520" cy="477054"/>
           </a:xfrm>
           <a:prstGeom prst="rect">
             <a:avLst/>
@@ -7230,41 +9162,6 @@
           </a:bodyPr>
           <a:lstStyle/>
           <a:p>
-            <a:pPr algn="ctr"/>
-            <a:r>
-              <a:rPr sz="800" b="1">
-                <a:solidFill>
-                  <a:srgbClr val="005020"/>
-                </a:solidFill>
-                <a:latin typeface="Aptos"/>
-              </a:rPr>
-              <a:t>04</a:t>
-            </a:r>
-          </a:p>
-        </p:txBody>
-      </p:sp>
-      <p:sp>
-        <p:nvSpPr>
-          <p:cNvPr id="5" name="TextBox 4"/>
-          <p:cNvSpPr txBox="1"/>
-          <p:nvPr/>
-        </p:nvSpPr>
-        <p:spPr>
-          <a:xfrm>
-            <a:off x="777240" y="1417320"/>
-            <a:ext cx="9875520" cy="477054"/>
-          </a:xfrm>
-          <a:prstGeom prst="rect">
-            <a:avLst/>
-          </a:prstGeom>
-          <a:noFill/>
-        </p:spPr>
-        <p:txBody>
-          <a:bodyPr wrap="square" anchor="t">
-            <a:spAutoFit/>
-          </a:bodyPr>
-          <a:lstStyle/>
-          <a:p>
             <a:pPr algn="l"/>
             <a:r>
               <a:rPr sz="1500" b="1" dirty="0">
@@ -7282,7 +9179,7 @@
                 </a:solidFill>
                 <a:latin typeface="Aptos"/>
               </a:rPr>
-              <a:t>BTS -</a:t>
+              <a:t>BTS - </a:t>
             </a:r>
             <a:r>
               <a:rPr sz="1500" b="1" dirty="0">
@@ -7316,7 +9213,7 @@
         </p:nvSpPr>
         <p:spPr>
           <a:xfrm>
-            <a:off x="777240" y="1965960"/>
+            <a:off x="777240" y="2089785"/>
             <a:ext cx="2240280" cy="859536"/>
           </a:xfrm>
           <a:prstGeom prst="roundRect">
@@ -7362,7 +9259,7 @@
         </p:nvSpPr>
         <p:spPr>
           <a:xfrm>
-            <a:off x="905256" y="2066543"/>
+            <a:off x="905256" y="2190368"/>
             <a:ext cx="1984248" cy="310896"/>
           </a:xfrm>
           <a:prstGeom prst="rect">
@@ -7397,7 +9294,7 @@
         </p:nvSpPr>
         <p:spPr>
           <a:xfrm>
-            <a:off x="905256" y="2468880"/>
+            <a:off x="905256" y="2592705"/>
             <a:ext cx="1984248" cy="201168"/>
           </a:xfrm>
           <a:prstGeom prst="rect">
@@ -7432,7 +9329,7 @@
         </p:nvSpPr>
         <p:spPr>
           <a:xfrm>
-            <a:off x="3291840" y="1965960"/>
+            <a:off x="3291840" y="2089785"/>
             <a:ext cx="2240280" cy="859536"/>
           </a:xfrm>
           <a:prstGeom prst="roundRect">
@@ -7478,7 +9375,7 @@
         </p:nvSpPr>
         <p:spPr>
           <a:xfrm>
-            <a:off x="3419856" y="2066543"/>
+            <a:off x="3419856" y="2190368"/>
             <a:ext cx="1984248" cy="310896"/>
           </a:xfrm>
           <a:prstGeom prst="rect">
@@ -7513,7 +9410,7 @@
         </p:nvSpPr>
         <p:spPr>
           <a:xfrm>
-            <a:off x="3419856" y="2468880"/>
+            <a:off x="3419856" y="2592705"/>
             <a:ext cx="1984248" cy="201168"/>
           </a:xfrm>
           <a:prstGeom prst="rect">
@@ -7548,7 +9445,7 @@
         </p:nvSpPr>
         <p:spPr>
           <a:xfrm>
-            <a:off x="5806440" y="1965960"/>
+            <a:off x="5806440" y="2089785"/>
             <a:ext cx="2240280" cy="859536"/>
           </a:xfrm>
           <a:prstGeom prst="roundRect">
@@ -7594,7 +9491,7 @@
         </p:nvSpPr>
         <p:spPr>
           <a:xfrm>
-            <a:off x="5934455" y="2066543"/>
+            <a:off x="5934455" y="2190368"/>
             <a:ext cx="1984248" cy="310896"/>
           </a:xfrm>
           <a:prstGeom prst="rect">
@@ -7629,7 +9526,7 @@
         </p:nvSpPr>
         <p:spPr>
           <a:xfrm>
-            <a:off x="5934455" y="2468880"/>
+            <a:off x="5934455" y="2592705"/>
             <a:ext cx="1984248" cy="201168"/>
           </a:xfrm>
           <a:prstGeom prst="rect">
@@ -7664,7 +9561,7 @@
         </p:nvSpPr>
         <p:spPr>
           <a:xfrm>
-            <a:off x="8321040" y="1965960"/>
+            <a:off x="8321040" y="2089785"/>
             <a:ext cx="2240280" cy="859536"/>
           </a:xfrm>
           <a:prstGeom prst="roundRect">
@@ -7710,7 +9607,7 @@
         </p:nvSpPr>
         <p:spPr>
           <a:xfrm>
-            <a:off x="8449056" y="2066543"/>
+            <a:off x="8449056" y="2190368"/>
             <a:ext cx="1984248" cy="310896"/>
           </a:xfrm>
           <a:prstGeom prst="rect">
@@ -7745,7 +9642,7 @@
         </p:nvSpPr>
         <p:spPr>
           <a:xfrm>
-            <a:off x="8449056" y="2468880"/>
+            <a:off x="8449056" y="2592705"/>
             <a:ext cx="1984248" cy="201168"/>
           </a:xfrm>
           <a:prstGeom prst="rect">
@@ -7862,7 +9759,7 @@
         <p:spPr>
           <a:xfrm>
             <a:off x="1005840" y="3822191"/>
-            <a:ext cx="4160520" cy="960120"/>
+            <a:ext cx="4160520" cy="1149545"/>
           </a:xfrm>
           <a:prstGeom prst="rect">
             <a:avLst/>
@@ -7875,10 +9772,12 @@
           </a:bodyPr>
           <a:lstStyle/>
           <a:p>
-            <a:pPr>
+            <a:pPr marL="285750" indent="-285750">
               <a:spcAft>
                 <a:spcPts val="700"/>
               </a:spcAft>
+              <a:buFont typeface="Arial" panose="020B0604020202020204" pitchFamily="34" charset="0"/>
+              <a:buChar char="•"/>
               <a:defRPr sz="1280">
                 <a:solidFill>
                   <a:srgbClr val="FFFFFF"/>
@@ -7887,14 +9786,17 @@
               </a:defRPr>
             </a:pPr>
             <a:r>
-              <a:t>• Flight date, airline, origin and destination airport</a:t>
-            </a:r>
-          </a:p>
-          <a:p>
-            <a:pPr>
+              <a:rPr dirty="0"/>
+              <a:t>Flight date, airline, origin and destination airport</a:t>
+            </a:r>
+          </a:p>
+          <a:p>
+            <a:pPr marL="285750" indent="-285750">
               <a:spcAft>
                 <a:spcPts val="700"/>
               </a:spcAft>
+              <a:buFont typeface="Arial" panose="020B0604020202020204" pitchFamily="34" charset="0"/>
+              <a:buChar char="•"/>
               <a:defRPr sz="1280">
                 <a:solidFill>
                   <a:srgbClr val="FFFFFF"/>
@@ -7903,14 +9805,17 @@
               </a:defRPr>
             </a:pPr>
             <a:r>
-              <a:t>• planned and actual times</a:t>
-            </a:r>
-          </a:p>
-          <a:p>
-            <a:pPr>
+              <a:rPr dirty="0"/>
+              <a:t>planned and actual times</a:t>
+            </a:r>
+          </a:p>
+          <a:p>
+            <a:pPr marL="285750" indent="-285750">
               <a:spcAft>
                 <a:spcPts val="700"/>
               </a:spcAft>
+              <a:buFont typeface="Arial" panose="020B0604020202020204" pitchFamily="34" charset="0"/>
+              <a:buChar char="•"/>
               <a:defRPr sz="1280">
                 <a:solidFill>
                   <a:srgbClr val="FFFFFF"/>
@@ -7919,14 +9824,17 @@
               </a:defRPr>
             </a:pPr>
             <a:r>
-              <a:t>• delays, cancellations, diversions</a:t>
-            </a:r>
-          </a:p>
-          <a:p>
-            <a:pPr>
+              <a:rPr dirty="0"/>
+              <a:t>delays, cancellations, diversions</a:t>
+            </a:r>
+          </a:p>
+          <a:p>
+            <a:pPr marL="285750" indent="-285750">
               <a:spcAft>
                 <a:spcPts val="700"/>
               </a:spcAft>
+              <a:buFont typeface="Arial" panose="020B0604020202020204" pitchFamily="34" charset="0"/>
+              <a:buChar char="•"/>
               <a:defRPr sz="1280">
                 <a:solidFill>
                   <a:srgbClr val="FFFFFF"/>
@@ -7935,7 +9843,8 @@
               </a:defRPr>
             </a:pPr>
             <a:r>
-              <a:t>• delay causes and reference data</a:t>
+              <a:rPr dirty="0"/>
+              <a:t>delay causes and reference data</a:t>
             </a:r>
           </a:p>
         </p:txBody>
@@ -8010,7 +9919,7 @@
           <a:p>
             <a:pPr algn="l"/>
             <a:r>
-              <a:rPr sz="1100" b="1">
+              <a:rPr sz="1100" b="1" dirty="0">
                 <a:solidFill>
                   <a:srgbClr val="DFF5E4"/>
                 </a:solidFill>
@@ -8030,7 +9939,7 @@
         <p:spPr>
           <a:xfrm>
             <a:off x="6126480" y="3822191"/>
-            <a:ext cx="4160520" cy="1097280"/>
+            <a:ext cx="4160520" cy="1436291"/>
           </a:xfrm>
           <a:prstGeom prst="rect">
             <a:avLst/>
@@ -8043,10 +9952,12 @@
           </a:bodyPr>
           <a:lstStyle/>
           <a:p>
-            <a:pPr>
+            <a:pPr marL="285750" indent="-285750">
               <a:spcAft>
                 <a:spcPts val="700"/>
               </a:spcAft>
+              <a:buFont typeface="Arial" panose="020B0604020202020204" pitchFamily="34" charset="0"/>
+              <a:buChar char="•"/>
               <a:defRPr sz="1280">
                 <a:solidFill>
                   <a:srgbClr val="FFFFFF"/>
@@ -8055,14 +9966,17 @@
               </a:defRPr>
             </a:pPr>
             <a:r>
-              <a:t>• quality boundary</a:t>
-            </a:r>
-          </a:p>
-          <a:p>
-            <a:pPr>
+              <a:rPr dirty="0"/>
+              <a:t>quality boundary</a:t>
+            </a:r>
+          </a:p>
+          <a:p>
+            <a:pPr marL="285750" indent="-285750">
               <a:spcAft>
                 <a:spcPts val="700"/>
               </a:spcAft>
+              <a:buFont typeface="Arial" panose="020B0604020202020204" pitchFamily="34" charset="0"/>
+              <a:buChar char="•"/>
               <a:defRPr sz="1280">
                 <a:solidFill>
                   <a:srgbClr val="FFFFFF"/>
@@ -8071,14 +9985,17 @@
               </a:defRPr>
             </a:pPr>
             <a:r>
-              <a:t>• standardized schema</a:t>
-            </a:r>
-          </a:p>
-          <a:p>
-            <a:pPr>
+              <a:rPr dirty="0"/>
+              <a:t>standardized schema</a:t>
+            </a:r>
+          </a:p>
+          <a:p>
+            <a:pPr marL="285750" indent="-285750">
               <a:spcAft>
                 <a:spcPts val="700"/>
               </a:spcAft>
+              <a:buFont typeface="Arial" panose="020B0604020202020204" pitchFamily="34" charset="0"/>
+              <a:buChar char="•"/>
               <a:defRPr sz="1280">
                 <a:solidFill>
                   <a:srgbClr val="FFFFFF"/>
@@ -8087,14 +10004,17 @@
               </a:defRPr>
             </a:pPr>
             <a:r>
-              <a:t>• analytical model</a:t>
-            </a:r>
-          </a:p>
-          <a:p>
-            <a:pPr>
+              <a:rPr dirty="0"/>
+              <a:t>analytical model</a:t>
+            </a:r>
+          </a:p>
+          <a:p>
+            <a:pPr marL="285750" indent="-285750">
               <a:spcAft>
                 <a:spcPts val="700"/>
               </a:spcAft>
+              <a:buFont typeface="Arial" panose="020B0604020202020204" pitchFamily="34" charset="0"/>
+              <a:buChar char="•"/>
               <a:defRPr sz="1280">
                 <a:solidFill>
                   <a:srgbClr val="FFFFFF"/>
@@ -8103,14 +10023,17 @@
               </a:defRPr>
             </a:pPr>
             <a:r>
-              <a:t>• business-ready reliability metrics</a:t>
-            </a:r>
-          </a:p>
-          <a:p>
-            <a:pPr>
+              <a:rPr dirty="0"/>
+              <a:t>business-ready reliability metrics</a:t>
+            </a:r>
+          </a:p>
+          <a:p>
+            <a:pPr marL="285750" indent="-285750">
               <a:spcAft>
                 <a:spcPts val="700"/>
               </a:spcAft>
+              <a:buFont typeface="Arial" panose="020B0604020202020204" pitchFamily="34" charset="0"/>
+              <a:buChar char="•"/>
               <a:defRPr sz="1280">
                 <a:solidFill>
                   <a:srgbClr val="FFFFFF"/>
@@ -8119,7 +10042,8 @@
               </a:defRPr>
             </a:pPr>
             <a:r>
-              <a:t>• reproducible monthly processing</a:t>
+              <a:rPr dirty="0"/>
+              <a:t>reproducible monthly processing</a:t>
             </a:r>
           </a:p>
         </p:txBody>
@@ -8129,6 +10053,224 @@
   <p:clrMapOvr>
     <a:masterClrMapping/>
   </p:clrMapOvr>
+  <p:timing>
+    <p:tnLst>
+      <p:par>
+        <p:cTn id="1" dur="indefinite" restart="never" nodeType="tmRoot">
+          <p:childTnLst>
+            <p:seq concurrent="1" nextAc="seek">
+              <p:cTn id="2" dur="indefinite" nodeType="mainSeq">
+                <p:childTnLst>
+                  <p:par>
+                    <p:cTn id="3" fill="hold">
+                      <p:stCondLst>
+                        <p:cond delay="indefinite"/>
+                      </p:stCondLst>
+                      <p:childTnLst>
+                        <p:par>
+                          <p:cTn id="4" fill="hold">
+                            <p:stCondLst>
+                              <p:cond delay="0"/>
+                            </p:stCondLst>
+                            <p:childTnLst>
+                              <p:par>
+                                <p:cTn id="5" presetID="1" presetClass="entr" presetSubtype="0" fill="hold" grpId="0" nodeType="clickEffect">
+                                  <p:stCondLst>
+                                    <p:cond delay="0"/>
+                                  </p:stCondLst>
+                                  <p:childTnLst>
+                                    <p:set>
+                                      <p:cBhvr>
+                                        <p:cTn id="6" dur="1" fill="hold">
+                                          <p:stCondLst>
+                                            <p:cond delay="0"/>
+                                          </p:stCondLst>
+                                        </p:cTn>
+                                        <p:tgtEl>
+                                          <p:spTgt spid="23"/>
+                                        </p:tgtEl>
+                                        <p:attrNameLst>
+                                          <p:attrName>style.visibility</p:attrName>
+                                        </p:attrNameLst>
+                                      </p:cBhvr>
+                                      <p:to>
+                                        <p:strVal val="visible"/>
+                                      </p:to>
+                                    </p:set>
+                                  </p:childTnLst>
+                                </p:cTn>
+                              </p:par>
+                              <p:par>
+                                <p:cTn id="7" presetID="1" presetClass="entr" presetSubtype="0" fill="hold" grpId="0" nodeType="withEffect">
+                                  <p:stCondLst>
+                                    <p:cond delay="0"/>
+                                  </p:stCondLst>
+                                  <p:childTnLst>
+                                    <p:set>
+                                      <p:cBhvr>
+                                        <p:cTn id="8" dur="1" fill="hold">
+                                          <p:stCondLst>
+                                            <p:cond delay="0"/>
+                                          </p:stCondLst>
+                                        </p:cTn>
+                                        <p:tgtEl>
+                                          <p:spTgt spid="21"/>
+                                        </p:tgtEl>
+                                        <p:attrNameLst>
+                                          <p:attrName>style.visibility</p:attrName>
+                                        </p:attrNameLst>
+                                      </p:cBhvr>
+                                      <p:to>
+                                        <p:strVal val="visible"/>
+                                      </p:to>
+                                    </p:set>
+                                  </p:childTnLst>
+                                </p:cTn>
+                              </p:par>
+                              <p:par>
+                                <p:cTn id="9" presetID="1" presetClass="entr" presetSubtype="0" fill="hold" grpId="0" nodeType="withEffect">
+                                  <p:stCondLst>
+                                    <p:cond delay="0"/>
+                                  </p:stCondLst>
+                                  <p:childTnLst>
+                                    <p:set>
+                                      <p:cBhvr>
+                                        <p:cTn id="10" dur="1" fill="hold">
+                                          <p:stCondLst>
+                                            <p:cond delay="0"/>
+                                          </p:stCondLst>
+                                        </p:cTn>
+                                        <p:tgtEl>
+                                          <p:spTgt spid="22"/>
+                                        </p:tgtEl>
+                                        <p:attrNameLst>
+                                          <p:attrName>style.visibility</p:attrName>
+                                        </p:attrNameLst>
+                                      </p:cBhvr>
+                                      <p:to>
+                                        <p:strVal val="visible"/>
+                                      </p:to>
+                                    </p:set>
+                                  </p:childTnLst>
+                                </p:cTn>
+                              </p:par>
+                              <p:par>
+                                <p:cTn id="11" presetID="1" presetClass="entr" presetSubtype="0" fill="hold" grpId="0" nodeType="withEffect">
+                                  <p:stCondLst>
+                                    <p:cond delay="0"/>
+                                  </p:stCondLst>
+                                  <p:childTnLst>
+                                    <p:set>
+                                      <p:cBhvr>
+                                        <p:cTn id="12" dur="1" fill="hold">
+                                          <p:stCondLst>
+                                            <p:cond delay="0"/>
+                                          </p:stCondLst>
+                                        </p:cTn>
+                                        <p:tgtEl>
+                                          <p:spTgt spid="19"/>
+                                        </p:tgtEl>
+                                        <p:attrNameLst>
+                                          <p:attrName>style.visibility</p:attrName>
+                                        </p:attrNameLst>
+                                      </p:cBhvr>
+                                      <p:to>
+                                        <p:strVal val="visible"/>
+                                      </p:to>
+                                    </p:set>
+                                  </p:childTnLst>
+                                </p:cTn>
+                              </p:par>
+                              <p:par>
+                                <p:cTn id="13" presetID="1" presetClass="entr" presetSubtype="0" fill="hold" grpId="0" nodeType="withEffect">
+                                  <p:stCondLst>
+                                    <p:cond delay="0"/>
+                                  </p:stCondLst>
+                                  <p:childTnLst>
+                                    <p:set>
+                                      <p:cBhvr>
+                                        <p:cTn id="14" dur="1" fill="hold">
+                                          <p:stCondLst>
+                                            <p:cond delay="0"/>
+                                          </p:stCondLst>
+                                        </p:cTn>
+                                        <p:tgtEl>
+                                          <p:spTgt spid="20"/>
+                                        </p:tgtEl>
+                                        <p:attrNameLst>
+                                          <p:attrName>style.visibility</p:attrName>
+                                        </p:attrNameLst>
+                                      </p:cBhvr>
+                                      <p:to>
+                                        <p:strVal val="visible"/>
+                                      </p:to>
+                                    </p:set>
+                                  </p:childTnLst>
+                                </p:cTn>
+                              </p:par>
+                              <p:par>
+                                <p:cTn id="15" presetID="1" presetClass="entr" presetSubtype="0" fill="hold" grpId="0" nodeType="withEffect">
+                                  <p:stCondLst>
+                                    <p:cond delay="0"/>
+                                  </p:stCondLst>
+                                  <p:childTnLst>
+                                    <p:set>
+                                      <p:cBhvr>
+                                        <p:cTn id="16" dur="1" fill="hold">
+                                          <p:stCondLst>
+                                            <p:cond delay="0"/>
+                                          </p:stCondLst>
+                                        </p:cTn>
+                                        <p:tgtEl>
+                                          <p:spTgt spid="18"/>
+                                        </p:tgtEl>
+                                        <p:attrNameLst>
+                                          <p:attrName>style.visibility</p:attrName>
+                                        </p:attrNameLst>
+                                      </p:cBhvr>
+                                      <p:to>
+                                        <p:strVal val="visible"/>
+                                      </p:to>
+                                    </p:set>
+                                  </p:childTnLst>
+                                </p:cTn>
+                              </p:par>
+                            </p:childTnLst>
+                          </p:cTn>
+                        </p:par>
+                      </p:childTnLst>
+                    </p:cTn>
+                  </p:par>
+                </p:childTnLst>
+              </p:cTn>
+              <p:prevCondLst>
+                <p:cond evt="onPrev" delay="0">
+                  <p:tgtEl>
+                    <p:sldTgt/>
+                  </p:tgtEl>
+                </p:cond>
+              </p:prevCondLst>
+              <p:nextCondLst>
+                <p:cond evt="onNext" delay="0">
+                  <p:tgtEl>
+                    <p:sldTgt/>
+                  </p:tgtEl>
+                </p:cond>
+              </p:nextCondLst>
+            </p:seq>
+          </p:childTnLst>
+        </p:cTn>
+      </p:par>
+    </p:tnLst>
+    <p:bldLst>
+      <p:bldP spid="18" grpId="0" animBg="1"/>
+      <p:bldP spid="19" grpId="0"/>
+      <p:bldP spid="20" grpId="0"/>
+      <p:bldP spid="21" grpId="0" animBg="1"/>
+      <p:bldP spid="22" grpId="0"/>
+      <p:bldP spid="23" grpId="0"/>
+    </p:bldLst>
+  </p:timing>
 </p:sld>
 </file>
 
@@ -8179,14 +10321,14 @@
       </p:sp>
       <p:sp>
         <p:nvSpPr>
-          <p:cNvPr id="4" name="TextBox 3"/>
+          <p:cNvPr id="5" name="TextBox 4"/>
           <p:cNvSpPr txBox="1"/>
           <p:nvPr/>
         </p:nvSpPr>
         <p:spPr>
           <a:xfrm>
-            <a:off x="384048" y="109728"/>
-            <a:ext cx="365760" cy="182880"/>
+            <a:off x="596264" y="1512570"/>
+            <a:ext cx="10719435" cy="384721"/>
           </a:xfrm>
           <a:prstGeom prst="rect">
             <a:avLst/>
@@ -8199,41 +10341,6 @@
           </a:bodyPr>
           <a:lstStyle/>
           <a:p>
-            <a:pPr algn="ctr"/>
-            <a:r>
-              <a:rPr sz="800" b="1">
-                <a:solidFill>
-                  <a:srgbClr val="005020"/>
-                </a:solidFill>
-                <a:latin typeface="Aptos"/>
-              </a:rPr>
-              <a:t>05</a:t>
-            </a:r>
-          </a:p>
-        </p:txBody>
-      </p:sp>
-      <p:sp>
-        <p:nvSpPr>
-          <p:cNvPr id="5" name="TextBox 4"/>
-          <p:cNvSpPr txBox="1"/>
-          <p:nvPr/>
-        </p:nvSpPr>
-        <p:spPr>
-          <a:xfrm>
-            <a:off x="777240" y="1417320"/>
-            <a:ext cx="9875520" cy="384048"/>
-          </a:xfrm>
-          <a:prstGeom prst="rect">
-            <a:avLst/>
-          </a:prstGeom>
-          <a:noFill/>
-        </p:spPr>
-        <p:txBody>
-          <a:bodyPr wrap="square" anchor="t">
-            <a:spAutoFit/>
-          </a:bodyPr>
-          <a:lstStyle/>
-          <a:p>
             <a:pPr algn="l"/>
             <a:r>
               <a:rPr sz="1900" b="1" dirty="0">
@@ -8256,7 +10363,7 @@
         <p:spPr>
           <a:xfrm>
             <a:off x="566928" y="2377440"/>
-            <a:ext cx="1481328" cy="749808"/>
+            <a:ext cx="1499617" cy="744491"/>
           </a:xfrm>
           <a:prstGeom prst="roundRect">
             <a:avLst/>
@@ -8407,7 +10514,7 @@
         <p:spPr>
           <a:xfrm>
             <a:off x="2350008" y="2377440"/>
-            <a:ext cx="1481328" cy="749808"/>
+            <a:ext cx="1499617" cy="744491"/>
           </a:xfrm>
           <a:prstGeom prst="roundRect">
             <a:avLst/>
@@ -8468,7 +10575,7 @@
           <a:p>
             <a:pPr algn="ctr"/>
             <a:r>
-              <a:rPr sz="1050" b="1">
+              <a:rPr sz="1050" b="1" dirty="0">
                 <a:solidFill>
                   <a:srgbClr val="005020"/>
                 </a:solidFill>
@@ -8558,7 +10665,7 @@
         <p:spPr>
           <a:xfrm>
             <a:off x="4133087" y="2377440"/>
-            <a:ext cx="1481328" cy="749808"/>
+            <a:ext cx="1499617" cy="744491"/>
           </a:xfrm>
           <a:prstGeom prst="roundRect">
             <a:avLst/>
@@ -8709,7 +10816,7 @@
         <p:spPr>
           <a:xfrm>
             <a:off x="5916168" y="2377440"/>
-            <a:ext cx="1481328" cy="749808"/>
+            <a:ext cx="1499617" cy="744491"/>
           </a:xfrm>
           <a:prstGeom prst="roundRect">
             <a:avLst/>
@@ -8860,7 +10967,7 @@
         <p:spPr>
           <a:xfrm>
             <a:off x="7699248" y="2377440"/>
-            <a:ext cx="1481328" cy="749808"/>
+            <a:ext cx="1499617" cy="744491"/>
           </a:xfrm>
           <a:prstGeom prst="roundRect">
             <a:avLst/>
@@ -9011,7 +11118,7 @@
         <p:spPr>
           <a:xfrm>
             <a:off x="9482328" y="2377440"/>
-            <a:ext cx="1481328" cy="749808"/>
+            <a:ext cx="1499617" cy="744491"/>
           </a:xfrm>
           <a:prstGeom prst="roundRect">
             <a:avLst/>
@@ -9072,7 +11179,7 @@
           <a:p>
             <a:pPr algn="ctr"/>
             <a:r>
-              <a:rPr sz="1050" b="1">
+              <a:rPr sz="1050" b="1" dirty="0">
                 <a:solidFill>
                   <a:srgbClr val="005020"/>
                 </a:solidFill>
@@ -9107,7 +11214,7 @@
           <a:p>
             <a:pPr algn="ctr"/>
             <a:r>
-              <a:rPr sz="800" b="0">
+              <a:rPr sz="800" b="0" dirty="0">
                 <a:solidFill>
                   <a:srgbClr val="58645B"/>
                 </a:solidFill>
@@ -9126,7 +11233,7 @@
         </p:nvSpPr>
         <p:spPr>
           <a:xfrm>
-            <a:off x="1234440" y="3840480"/>
+            <a:off x="1234440" y="3830955"/>
             <a:ext cx="8961120" cy="868680"/>
           </a:xfrm>
           <a:prstGeom prst="roundRect">
@@ -9172,8 +11279,8 @@
         </p:nvSpPr>
         <p:spPr>
           <a:xfrm>
-            <a:off x="1508760" y="4096512"/>
-            <a:ext cx="8412480" cy="274320"/>
+            <a:off x="1508760" y="3963162"/>
+            <a:ext cx="8640000" cy="553998"/>
           </a:xfrm>
           <a:prstGeom prst="rect">
             <a:avLst/>
@@ -9188,14 +11295,50 @@
           <a:p>
             <a:pPr algn="ctr"/>
             <a:r>
-              <a:rPr sz="1500" b="1">
+              <a:rPr lang="en-US" sz="1500" b="1" dirty="0">
                 <a:solidFill>
                   <a:srgbClr val="FFFFFF"/>
                 </a:solidFill>
                 <a:latin typeface="Aptos"/>
               </a:rPr>
+              <a:t>Python &amp; </a:t>
+            </a:r>
+            <a:r>
+              <a:rPr lang="en-US" sz="1500" b="1" dirty="0" err="1">
+                <a:solidFill>
+                  <a:srgbClr val="FFFFFF"/>
+                </a:solidFill>
+                <a:latin typeface="Aptos"/>
+              </a:rPr>
+              <a:t>PySpark</a:t>
+            </a:r>
+            <a:r>
+              <a:rPr lang="en-US" sz="1500" b="1" dirty="0">
+                <a:solidFill>
+                  <a:srgbClr val="FFFFFF"/>
+                </a:solidFill>
+                <a:latin typeface="Aptos"/>
+              </a:rPr>
+              <a:t> implement and process the data</a:t>
+            </a:r>
+          </a:p>
+          <a:p>
+            <a:pPr algn="ctr"/>
+            <a:r>
+              <a:rPr lang="en-US" sz="1500" b="1" dirty="0">
+                <a:solidFill>
+                  <a:srgbClr val="FFFFFF"/>
+                </a:solidFill>
+                <a:latin typeface="Aptos"/>
+              </a:rPr>
               <a:t>Airflow orchestrates the process · Docker provides the reproducible runtime</a:t>
             </a:r>
+            <a:endParaRPr sz="1500" b="1" dirty="0">
+              <a:solidFill>
+                <a:srgbClr val="FFFFFF"/>
+              </a:solidFill>
+              <a:latin typeface="Aptos"/>
+            </a:endParaRPr>
           </a:p>
         </p:txBody>
       </p:sp>
@@ -9207,8 +11350,8 @@
         </p:nvSpPr>
         <p:spPr>
           <a:xfrm>
-            <a:off x="822960" y="5212080"/>
-            <a:ext cx="9875520" cy="310896"/>
+            <a:off x="1508760" y="4916805"/>
+            <a:ext cx="8640000" cy="338554"/>
           </a:xfrm>
           <a:prstGeom prst="rect">
             <a:avLst/>
@@ -9258,7 +11401,7 @@
           <a:p>
             <a:pPr algn="ctr"/>
             <a:r>
-              <a:rPr sz="750" b="1">
+              <a:rPr sz="750" b="1" dirty="0">
                 <a:solidFill>
                   <a:srgbClr val="5F6B66"/>
                 </a:solidFill>
@@ -9293,7 +11436,7 @@
           <a:p>
             <a:pPr algn="ctr"/>
             <a:r>
-              <a:rPr sz="750" b="1">
+              <a:rPr sz="750" b="1" dirty="0">
                 <a:solidFill>
                   <a:srgbClr val="5F6B66"/>
                 </a:solidFill>
@@ -9449,6 +11592,920 @@
   <p:clrMapOvr>
     <a:masterClrMapping/>
   </p:clrMapOvr>
+  <p:timing>
+    <p:tnLst>
+      <p:par>
+        <p:cTn id="1" dur="indefinite" restart="never" nodeType="tmRoot">
+          <p:childTnLst>
+            <p:seq concurrent="1" nextAc="seek">
+              <p:cTn id="2" dur="indefinite" nodeType="mainSeq">
+                <p:childTnLst>
+                  <p:par>
+                    <p:cTn id="3" fill="hold">
+                      <p:stCondLst>
+                        <p:cond delay="indefinite"/>
+                      </p:stCondLst>
+                      <p:childTnLst>
+                        <p:par>
+                          <p:cTn id="4" fill="hold">
+                            <p:stCondLst>
+                              <p:cond delay="0"/>
+                            </p:stCondLst>
+                            <p:childTnLst>
+                              <p:par>
+                                <p:cTn id="5" presetID="1" presetClass="entr" presetSubtype="0" fill="hold" grpId="0" nodeType="clickEffect">
+                                  <p:stCondLst>
+                                    <p:cond delay="0"/>
+                                  </p:stCondLst>
+                                  <p:childTnLst>
+                                    <p:set>
+                                      <p:cBhvr>
+                                        <p:cTn id="6" dur="1" fill="hold">
+                                          <p:stCondLst>
+                                            <p:cond delay="0"/>
+                                          </p:stCondLst>
+                                        </p:cTn>
+                                        <p:tgtEl>
+                                          <p:spTgt spid="7"/>
+                                        </p:tgtEl>
+                                        <p:attrNameLst>
+                                          <p:attrName>style.visibility</p:attrName>
+                                        </p:attrNameLst>
+                                      </p:cBhvr>
+                                      <p:to>
+                                        <p:strVal val="visible"/>
+                                      </p:to>
+                                    </p:set>
+                                  </p:childTnLst>
+                                </p:cTn>
+                              </p:par>
+                              <p:par>
+                                <p:cTn id="7" presetID="1" presetClass="entr" presetSubtype="0" fill="hold" grpId="0" nodeType="withEffect">
+                                  <p:stCondLst>
+                                    <p:cond delay="0"/>
+                                  </p:stCondLst>
+                                  <p:childTnLst>
+                                    <p:set>
+                                      <p:cBhvr>
+                                        <p:cTn id="8" dur="1" fill="hold">
+                                          <p:stCondLst>
+                                            <p:cond delay="0"/>
+                                          </p:stCondLst>
+                                        </p:cTn>
+                                        <p:tgtEl>
+                                          <p:spTgt spid="6"/>
+                                        </p:tgtEl>
+                                        <p:attrNameLst>
+                                          <p:attrName>style.visibility</p:attrName>
+                                        </p:attrNameLst>
+                                      </p:cBhvr>
+                                      <p:to>
+                                        <p:strVal val="visible"/>
+                                      </p:to>
+                                    </p:set>
+                                  </p:childTnLst>
+                                </p:cTn>
+                              </p:par>
+                              <p:par>
+                                <p:cTn id="9" presetID="1" presetClass="entr" presetSubtype="0" fill="hold" grpId="0" nodeType="withEffect">
+                                  <p:stCondLst>
+                                    <p:cond delay="0"/>
+                                  </p:stCondLst>
+                                  <p:childTnLst>
+                                    <p:set>
+                                      <p:cBhvr>
+                                        <p:cTn id="10" dur="1" fill="hold">
+                                          <p:stCondLst>
+                                            <p:cond delay="0"/>
+                                          </p:stCondLst>
+                                        </p:cTn>
+                                        <p:tgtEl>
+                                          <p:spTgt spid="8"/>
+                                        </p:tgtEl>
+                                        <p:attrNameLst>
+                                          <p:attrName>style.visibility</p:attrName>
+                                        </p:attrNameLst>
+                                      </p:cBhvr>
+                                      <p:to>
+                                        <p:strVal val="visible"/>
+                                      </p:to>
+                                    </p:set>
+                                  </p:childTnLst>
+                                </p:cTn>
+                              </p:par>
+                              <p:par>
+                                <p:cTn id="11" presetID="1" presetClass="entr" presetSubtype="0" fill="hold" grpId="0" nodeType="withEffect">
+                                  <p:stCondLst>
+                                    <p:cond delay="0"/>
+                                  </p:stCondLst>
+                                  <p:childTnLst>
+                                    <p:set>
+                                      <p:cBhvr>
+                                        <p:cTn id="12" dur="1" fill="hold">
+                                          <p:stCondLst>
+                                            <p:cond delay="0"/>
+                                          </p:stCondLst>
+                                        </p:cTn>
+                                        <p:tgtEl>
+                                          <p:spTgt spid="32"/>
+                                        </p:tgtEl>
+                                        <p:attrNameLst>
+                                          <p:attrName>style.visibility</p:attrName>
+                                        </p:attrNameLst>
+                                      </p:cBhvr>
+                                      <p:to>
+                                        <p:strVal val="visible"/>
+                                      </p:to>
+                                    </p:set>
+                                  </p:childTnLst>
+                                </p:cTn>
+                              </p:par>
+                            </p:childTnLst>
+                          </p:cTn>
+                        </p:par>
+                      </p:childTnLst>
+                    </p:cTn>
+                  </p:par>
+                  <p:par>
+                    <p:cTn id="13" fill="hold">
+                      <p:stCondLst>
+                        <p:cond delay="indefinite"/>
+                      </p:stCondLst>
+                      <p:childTnLst>
+                        <p:par>
+                          <p:cTn id="14" fill="hold">
+                            <p:stCondLst>
+                              <p:cond delay="0"/>
+                            </p:stCondLst>
+                            <p:childTnLst>
+                              <p:par>
+                                <p:cTn id="15" presetID="1" presetClass="entr" presetSubtype="0" fill="hold" grpId="0" nodeType="clickEffect">
+                                  <p:stCondLst>
+                                    <p:cond delay="0"/>
+                                  </p:stCondLst>
+                                  <p:childTnLst>
+                                    <p:set>
+                                      <p:cBhvr>
+                                        <p:cTn id="16" dur="1" fill="hold">
+                                          <p:stCondLst>
+                                            <p:cond delay="0"/>
+                                          </p:stCondLst>
+                                        </p:cTn>
+                                        <p:tgtEl>
+                                          <p:spTgt spid="10"/>
+                                        </p:tgtEl>
+                                        <p:attrNameLst>
+                                          <p:attrName>style.visibility</p:attrName>
+                                        </p:attrNameLst>
+                                      </p:cBhvr>
+                                      <p:to>
+                                        <p:strVal val="visible"/>
+                                      </p:to>
+                                    </p:set>
+                                  </p:childTnLst>
+                                </p:cTn>
+                              </p:par>
+                              <p:par>
+                                <p:cTn id="17" presetID="1" presetClass="entr" presetSubtype="0" fill="hold" grpId="0" nodeType="withEffect">
+                                  <p:stCondLst>
+                                    <p:cond delay="0"/>
+                                  </p:stCondLst>
+                                  <p:childTnLst>
+                                    <p:set>
+                                      <p:cBhvr>
+                                        <p:cTn id="18" dur="1" fill="hold">
+                                          <p:stCondLst>
+                                            <p:cond delay="0"/>
+                                          </p:stCondLst>
+                                        </p:cTn>
+                                        <p:tgtEl>
+                                          <p:spTgt spid="11"/>
+                                        </p:tgtEl>
+                                        <p:attrNameLst>
+                                          <p:attrName>style.visibility</p:attrName>
+                                        </p:attrNameLst>
+                                      </p:cBhvr>
+                                      <p:to>
+                                        <p:strVal val="visible"/>
+                                      </p:to>
+                                    </p:set>
+                                  </p:childTnLst>
+                                </p:cTn>
+                              </p:par>
+                              <p:par>
+                                <p:cTn id="19" presetID="1" presetClass="entr" presetSubtype="0" fill="hold" grpId="0" nodeType="withEffect">
+                                  <p:stCondLst>
+                                    <p:cond delay="0"/>
+                                  </p:stCondLst>
+                                  <p:childTnLst>
+                                    <p:set>
+                                      <p:cBhvr>
+                                        <p:cTn id="20" dur="1" fill="hold">
+                                          <p:stCondLst>
+                                            <p:cond delay="0"/>
+                                          </p:stCondLst>
+                                        </p:cTn>
+                                        <p:tgtEl>
+                                          <p:spTgt spid="12"/>
+                                        </p:tgtEl>
+                                        <p:attrNameLst>
+                                          <p:attrName>style.visibility</p:attrName>
+                                        </p:attrNameLst>
+                                      </p:cBhvr>
+                                      <p:to>
+                                        <p:strVal val="visible"/>
+                                      </p:to>
+                                    </p:set>
+                                  </p:childTnLst>
+                                </p:cTn>
+                              </p:par>
+                              <p:par>
+                                <p:cTn id="21" presetID="1" presetClass="entr" presetSubtype="0" fill="hold" grpId="0" nodeType="withEffect">
+                                  <p:stCondLst>
+                                    <p:cond delay="0"/>
+                                  </p:stCondLst>
+                                  <p:childTnLst>
+                                    <p:set>
+                                      <p:cBhvr>
+                                        <p:cTn id="22" dur="1" fill="hold">
+                                          <p:stCondLst>
+                                            <p:cond delay="0"/>
+                                          </p:stCondLst>
+                                        </p:cTn>
+                                        <p:tgtEl>
+                                          <p:spTgt spid="33"/>
+                                        </p:tgtEl>
+                                        <p:attrNameLst>
+                                          <p:attrName>style.visibility</p:attrName>
+                                        </p:attrNameLst>
+                                      </p:cBhvr>
+                                      <p:to>
+                                        <p:strVal val="visible"/>
+                                      </p:to>
+                                    </p:set>
+                                  </p:childTnLst>
+                                </p:cTn>
+                              </p:par>
+                            </p:childTnLst>
+                          </p:cTn>
+                        </p:par>
+                      </p:childTnLst>
+                    </p:cTn>
+                  </p:par>
+                  <p:par>
+                    <p:cTn id="23" fill="hold">
+                      <p:stCondLst>
+                        <p:cond delay="indefinite"/>
+                      </p:stCondLst>
+                      <p:childTnLst>
+                        <p:par>
+                          <p:cTn id="24" fill="hold">
+                            <p:stCondLst>
+                              <p:cond delay="0"/>
+                            </p:stCondLst>
+                            <p:childTnLst>
+                              <p:par>
+                                <p:cTn id="25" presetID="1" presetClass="entr" presetSubtype="0" fill="hold" grpId="0" nodeType="clickEffect">
+                                  <p:stCondLst>
+                                    <p:cond delay="0"/>
+                                  </p:stCondLst>
+                                  <p:childTnLst>
+                                    <p:set>
+                                      <p:cBhvr>
+                                        <p:cTn id="26" dur="1" fill="hold">
+                                          <p:stCondLst>
+                                            <p:cond delay="0"/>
+                                          </p:stCondLst>
+                                        </p:cTn>
+                                        <p:tgtEl>
+                                          <p:spTgt spid="14"/>
+                                        </p:tgtEl>
+                                        <p:attrNameLst>
+                                          <p:attrName>style.visibility</p:attrName>
+                                        </p:attrNameLst>
+                                      </p:cBhvr>
+                                      <p:to>
+                                        <p:strVal val="visible"/>
+                                      </p:to>
+                                    </p:set>
+                                  </p:childTnLst>
+                                </p:cTn>
+                              </p:par>
+                              <p:par>
+                                <p:cTn id="27" presetID="1" presetClass="entr" presetSubtype="0" fill="hold" grpId="0" nodeType="withEffect">
+                                  <p:stCondLst>
+                                    <p:cond delay="0"/>
+                                  </p:stCondLst>
+                                  <p:childTnLst>
+                                    <p:set>
+                                      <p:cBhvr>
+                                        <p:cTn id="28" dur="1" fill="hold">
+                                          <p:stCondLst>
+                                            <p:cond delay="0"/>
+                                          </p:stCondLst>
+                                        </p:cTn>
+                                        <p:tgtEl>
+                                          <p:spTgt spid="15"/>
+                                        </p:tgtEl>
+                                        <p:attrNameLst>
+                                          <p:attrName>style.visibility</p:attrName>
+                                        </p:attrNameLst>
+                                      </p:cBhvr>
+                                      <p:to>
+                                        <p:strVal val="visible"/>
+                                      </p:to>
+                                    </p:set>
+                                  </p:childTnLst>
+                                </p:cTn>
+                              </p:par>
+                              <p:par>
+                                <p:cTn id="29" presetID="1" presetClass="entr" presetSubtype="0" fill="hold" grpId="0" nodeType="withEffect">
+                                  <p:stCondLst>
+                                    <p:cond delay="0"/>
+                                  </p:stCondLst>
+                                  <p:childTnLst>
+                                    <p:set>
+                                      <p:cBhvr>
+                                        <p:cTn id="30" dur="1" fill="hold">
+                                          <p:stCondLst>
+                                            <p:cond delay="0"/>
+                                          </p:stCondLst>
+                                        </p:cTn>
+                                        <p:tgtEl>
+                                          <p:spTgt spid="16"/>
+                                        </p:tgtEl>
+                                        <p:attrNameLst>
+                                          <p:attrName>style.visibility</p:attrName>
+                                        </p:attrNameLst>
+                                      </p:cBhvr>
+                                      <p:to>
+                                        <p:strVal val="visible"/>
+                                      </p:to>
+                                    </p:set>
+                                  </p:childTnLst>
+                                </p:cTn>
+                              </p:par>
+                              <p:par>
+                                <p:cTn id="31" presetID="1" presetClass="entr" presetSubtype="0" fill="hold" grpId="0" nodeType="withEffect">
+                                  <p:stCondLst>
+                                    <p:cond delay="0"/>
+                                  </p:stCondLst>
+                                  <p:childTnLst>
+                                    <p:set>
+                                      <p:cBhvr>
+                                        <p:cTn id="32" dur="1" fill="hold">
+                                          <p:stCondLst>
+                                            <p:cond delay="0"/>
+                                          </p:stCondLst>
+                                        </p:cTn>
+                                        <p:tgtEl>
+                                          <p:spTgt spid="34"/>
+                                        </p:tgtEl>
+                                        <p:attrNameLst>
+                                          <p:attrName>style.visibility</p:attrName>
+                                        </p:attrNameLst>
+                                      </p:cBhvr>
+                                      <p:to>
+                                        <p:strVal val="visible"/>
+                                      </p:to>
+                                    </p:set>
+                                  </p:childTnLst>
+                                </p:cTn>
+                              </p:par>
+                            </p:childTnLst>
+                          </p:cTn>
+                        </p:par>
+                      </p:childTnLst>
+                    </p:cTn>
+                  </p:par>
+                  <p:par>
+                    <p:cTn id="33" fill="hold">
+                      <p:stCondLst>
+                        <p:cond delay="indefinite"/>
+                      </p:stCondLst>
+                      <p:childTnLst>
+                        <p:par>
+                          <p:cTn id="34" fill="hold">
+                            <p:stCondLst>
+                              <p:cond delay="0"/>
+                            </p:stCondLst>
+                            <p:childTnLst>
+                              <p:par>
+                                <p:cTn id="35" presetID="1" presetClass="entr" presetSubtype="0" fill="hold" grpId="0" nodeType="clickEffect">
+                                  <p:stCondLst>
+                                    <p:cond delay="0"/>
+                                  </p:stCondLst>
+                                  <p:childTnLst>
+                                    <p:set>
+                                      <p:cBhvr>
+                                        <p:cTn id="36" dur="1" fill="hold">
+                                          <p:stCondLst>
+                                            <p:cond delay="0"/>
+                                          </p:stCondLst>
+                                        </p:cTn>
+                                        <p:tgtEl>
+                                          <p:spTgt spid="18"/>
+                                        </p:tgtEl>
+                                        <p:attrNameLst>
+                                          <p:attrName>style.visibility</p:attrName>
+                                        </p:attrNameLst>
+                                      </p:cBhvr>
+                                      <p:to>
+                                        <p:strVal val="visible"/>
+                                      </p:to>
+                                    </p:set>
+                                  </p:childTnLst>
+                                </p:cTn>
+                              </p:par>
+                              <p:par>
+                                <p:cTn id="37" presetID="1" presetClass="entr" presetSubtype="0" fill="hold" grpId="0" nodeType="withEffect">
+                                  <p:stCondLst>
+                                    <p:cond delay="0"/>
+                                  </p:stCondLst>
+                                  <p:childTnLst>
+                                    <p:set>
+                                      <p:cBhvr>
+                                        <p:cTn id="38" dur="1" fill="hold">
+                                          <p:stCondLst>
+                                            <p:cond delay="0"/>
+                                          </p:stCondLst>
+                                        </p:cTn>
+                                        <p:tgtEl>
+                                          <p:spTgt spid="19"/>
+                                        </p:tgtEl>
+                                        <p:attrNameLst>
+                                          <p:attrName>style.visibility</p:attrName>
+                                        </p:attrNameLst>
+                                      </p:cBhvr>
+                                      <p:to>
+                                        <p:strVal val="visible"/>
+                                      </p:to>
+                                    </p:set>
+                                  </p:childTnLst>
+                                </p:cTn>
+                              </p:par>
+                              <p:par>
+                                <p:cTn id="39" presetID="1" presetClass="entr" presetSubtype="0" fill="hold" grpId="0" nodeType="withEffect">
+                                  <p:stCondLst>
+                                    <p:cond delay="0"/>
+                                  </p:stCondLst>
+                                  <p:childTnLst>
+                                    <p:set>
+                                      <p:cBhvr>
+                                        <p:cTn id="40" dur="1" fill="hold">
+                                          <p:stCondLst>
+                                            <p:cond delay="0"/>
+                                          </p:stCondLst>
+                                        </p:cTn>
+                                        <p:tgtEl>
+                                          <p:spTgt spid="20"/>
+                                        </p:tgtEl>
+                                        <p:attrNameLst>
+                                          <p:attrName>style.visibility</p:attrName>
+                                        </p:attrNameLst>
+                                      </p:cBhvr>
+                                      <p:to>
+                                        <p:strVal val="visible"/>
+                                      </p:to>
+                                    </p:set>
+                                  </p:childTnLst>
+                                </p:cTn>
+                              </p:par>
+                              <p:par>
+                                <p:cTn id="41" presetID="1" presetClass="entr" presetSubtype="0" fill="hold" grpId="0" nodeType="withEffect">
+                                  <p:stCondLst>
+                                    <p:cond delay="0"/>
+                                  </p:stCondLst>
+                                  <p:childTnLst>
+                                    <p:set>
+                                      <p:cBhvr>
+                                        <p:cTn id="42" dur="1" fill="hold">
+                                          <p:stCondLst>
+                                            <p:cond delay="0"/>
+                                          </p:stCondLst>
+                                        </p:cTn>
+                                        <p:tgtEl>
+                                          <p:spTgt spid="35"/>
+                                        </p:tgtEl>
+                                        <p:attrNameLst>
+                                          <p:attrName>style.visibility</p:attrName>
+                                        </p:attrNameLst>
+                                      </p:cBhvr>
+                                      <p:to>
+                                        <p:strVal val="visible"/>
+                                      </p:to>
+                                    </p:set>
+                                  </p:childTnLst>
+                                </p:cTn>
+                              </p:par>
+                            </p:childTnLst>
+                          </p:cTn>
+                        </p:par>
+                      </p:childTnLst>
+                    </p:cTn>
+                  </p:par>
+                  <p:par>
+                    <p:cTn id="43" fill="hold">
+                      <p:stCondLst>
+                        <p:cond delay="indefinite"/>
+                      </p:stCondLst>
+                      <p:childTnLst>
+                        <p:par>
+                          <p:cTn id="44" fill="hold">
+                            <p:stCondLst>
+                              <p:cond delay="0"/>
+                            </p:stCondLst>
+                            <p:childTnLst>
+                              <p:par>
+                                <p:cTn id="45" presetID="1" presetClass="entr" presetSubtype="0" fill="hold" grpId="0" nodeType="clickEffect">
+                                  <p:stCondLst>
+                                    <p:cond delay="0"/>
+                                  </p:stCondLst>
+                                  <p:childTnLst>
+                                    <p:set>
+                                      <p:cBhvr>
+                                        <p:cTn id="46" dur="1" fill="hold">
+                                          <p:stCondLst>
+                                            <p:cond delay="0"/>
+                                          </p:stCondLst>
+                                        </p:cTn>
+                                        <p:tgtEl>
+                                          <p:spTgt spid="22"/>
+                                        </p:tgtEl>
+                                        <p:attrNameLst>
+                                          <p:attrName>style.visibility</p:attrName>
+                                        </p:attrNameLst>
+                                      </p:cBhvr>
+                                      <p:to>
+                                        <p:strVal val="visible"/>
+                                      </p:to>
+                                    </p:set>
+                                  </p:childTnLst>
+                                </p:cTn>
+                              </p:par>
+                              <p:par>
+                                <p:cTn id="47" presetID="1" presetClass="entr" presetSubtype="0" fill="hold" grpId="0" nodeType="withEffect">
+                                  <p:stCondLst>
+                                    <p:cond delay="0"/>
+                                  </p:stCondLst>
+                                  <p:childTnLst>
+                                    <p:set>
+                                      <p:cBhvr>
+                                        <p:cTn id="48" dur="1" fill="hold">
+                                          <p:stCondLst>
+                                            <p:cond delay="0"/>
+                                          </p:stCondLst>
+                                        </p:cTn>
+                                        <p:tgtEl>
+                                          <p:spTgt spid="23"/>
+                                        </p:tgtEl>
+                                        <p:attrNameLst>
+                                          <p:attrName>style.visibility</p:attrName>
+                                        </p:attrNameLst>
+                                      </p:cBhvr>
+                                      <p:to>
+                                        <p:strVal val="visible"/>
+                                      </p:to>
+                                    </p:set>
+                                  </p:childTnLst>
+                                </p:cTn>
+                              </p:par>
+                              <p:par>
+                                <p:cTn id="49" presetID="1" presetClass="entr" presetSubtype="0" fill="hold" grpId="0" nodeType="withEffect">
+                                  <p:stCondLst>
+                                    <p:cond delay="0"/>
+                                  </p:stCondLst>
+                                  <p:childTnLst>
+                                    <p:set>
+                                      <p:cBhvr>
+                                        <p:cTn id="50" dur="1" fill="hold">
+                                          <p:stCondLst>
+                                            <p:cond delay="0"/>
+                                          </p:stCondLst>
+                                        </p:cTn>
+                                        <p:tgtEl>
+                                          <p:spTgt spid="24"/>
+                                        </p:tgtEl>
+                                        <p:attrNameLst>
+                                          <p:attrName>style.visibility</p:attrName>
+                                        </p:attrNameLst>
+                                      </p:cBhvr>
+                                      <p:to>
+                                        <p:strVal val="visible"/>
+                                      </p:to>
+                                    </p:set>
+                                  </p:childTnLst>
+                                </p:cTn>
+                              </p:par>
+                              <p:par>
+                                <p:cTn id="51" presetID="1" presetClass="entr" presetSubtype="0" fill="hold" grpId="0" nodeType="withEffect">
+                                  <p:stCondLst>
+                                    <p:cond delay="0"/>
+                                  </p:stCondLst>
+                                  <p:childTnLst>
+                                    <p:set>
+                                      <p:cBhvr>
+                                        <p:cTn id="52" dur="1" fill="hold">
+                                          <p:stCondLst>
+                                            <p:cond delay="0"/>
+                                          </p:stCondLst>
+                                        </p:cTn>
+                                        <p:tgtEl>
+                                          <p:spTgt spid="36"/>
+                                        </p:tgtEl>
+                                        <p:attrNameLst>
+                                          <p:attrName>style.visibility</p:attrName>
+                                        </p:attrNameLst>
+                                      </p:cBhvr>
+                                      <p:to>
+                                        <p:strVal val="visible"/>
+                                      </p:to>
+                                    </p:set>
+                                  </p:childTnLst>
+                                </p:cTn>
+                              </p:par>
+                            </p:childTnLst>
+                          </p:cTn>
+                        </p:par>
+                      </p:childTnLst>
+                    </p:cTn>
+                  </p:par>
+                  <p:par>
+                    <p:cTn id="53" fill="hold">
+                      <p:stCondLst>
+                        <p:cond delay="indefinite"/>
+                      </p:stCondLst>
+                      <p:childTnLst>
+                        <p:par>
+                          <p:cTn id="54" fill="hold">
+                            <p:stCondLst>
+                              <p:cond delay="0"/>
+                            </p:stCondLst>
+                            <p:childTnLst>
+                              <p:par>
+                                <p:cTn id="55" presetID="1" presetClass="entr" presetSubtype="0" fill="hold" grpId="0" nodeType="clickEffect">
+                                  <p:stCondLst>
+                                    <p:cond delay="0"/>
+                                  </p:stCondLst>
+                                  <p:childTnLst>
+                                    <p:set>
+                                      <p:cBhvr>
+                                        <p:cTn id="56" dur="1" fill="hold">
+                                          <p:stCondLst>
+                                            <p:cond delay="0"/>
+                                          </p:stCondLst>
+                                        </p:cTn>
+                                        <p:tgtEl>
+                                          <p:spTgt spid="26"/>
+                                        </p:tgtEl>
+                                        <p:attrNameLst>
+                                          <p:attrName>style.visibility</p:attrName>
+                                        </p:attrNameLst>
+                                      </p:cBhvr>
+                                      <p:to>
+                                        <p:strVal val="visible"/>
+                                      </p:to>
+                                    </p:set>
+                                  </p:childTnLst>
+                                </p:cTn>
+                              </p:par>
+                              <p:par>
+                                <p:cTn id="57" presetID="1" presetClass="entr" presetSubtype="0" fill="hold" grpId="0" nodeType="withEffect">
+                                  <p:stCondLst>
+                                    <p:cond delay="0"/>
+                                  </p:stCondLst>
+                                  <p:childTnLst>
+                                    <p:set>
+                                      <p:cBhvr>
+                                        <p:cTn id="58" dur="1" fill="hold">
+                                          <p:stCondLst>
+                                            <p:cond delay="0"/>
+                                          </p:stCondLst>
+                                        </p:cTn>
+                                        <p:tgtEl>
+                                          <p:spTgt spid="27"/>
+                                        </p:tgtEl>
+                                        <p:attrNameLst>
+                                          <p:attrName>style.visibility</p:attrName>
+                                        </p:attrNameLst>
+                                      </p:cBhvr>
+                                      <p:to>
+                                        <p:strVal val="visible"/>
+                                      </p:to>
+                                    </p:set>
+                                  </p:childTnLst>
+                                </p:cTn>
+                              </p:par>
+                              <p:par>
+                                <p:cTn id="59" presetID="1" presetClass="entr" presetSubtype="0" fill="hold" grpId="0" nodeType="withEffect">
+                                  <p:stCondLst>
+                                    <p:cond delay="0"/>
+                                  </p:stCondLst>
+                                  <p:childTnLst>
+                                    <p:set>
+                                      <p:cBhvr>
+                                        <p:cTn id="60" dur="1" fill="hold">
+                                          <p:stCondLst>
+                                            <p:cond delay="0"/>
+                                          </p:stCondLst>
+                                        </p:cTn>
+                                        <p:tgtEl>
+                                          <p:spTgt spid="28"/>
+                                        </p:tgtEl>
+                                        <p:attrNameLst>
+                                          <p:attrName>style.visibility</p:attrName>
+                                        </p:attrNameLst>
+                                      </p:cBhvr>
+                                      <p:to>
+                                        <p:strVal val="visible"/>
+                                      </p:to>
+                                    </p:set>
+                                  </p:childTnLst>
+                                </p:cTn>
+                              </p:par>
+                              <p:par>
+                                <p:cTn id="61" presetID="1" presetClass="entr" presetSubtype="0" fill="hold" grpId="0" nodeType="withEffect">
+                                  <p:stCondLst>
+                                    <p:cond delay="0"/>
+                                  </p:stCondLst>
+                                  <p:childTnLst>
+                                    <p:set>
+                                      <p:cBhvr>
+                                        <p:cTn id="62" dur="1" fill="hold">
+                                          <p:stCondLst>
+                                            <p:cond delay="0"/>
+                                          </p:stCondLst>
+                                        </p:cTn>
+                                        <p:tgtEl>
+                                          <p:spTgt spid="37"/>
+                                        </p:tgtEl>
+                                        <p:attrNameLst>
+                                          <p:attrName>style.visibility</p:attrName>
+                                        </p:attrNameLst>
+                                      </p:cBhvr>
+                                      <p:to>
+                                        <p:strVal val="visible"/>
+                                      </p:to>
+                                    </p:set>
+                                  </p:childTnLst>
+                                </p:cTn>
+                              </p:par>
+                            </p:childTnLst>
+                          </p:cTn>
+                        </p:par>
+                      </p:childTnLst>
+                    </p:cTn>
+                  </p:par>
+                  <p:par>
+                    <p:cTn id="63" fill="hold">
+                      <p:stCondLst>
+                        <p:cond delay="indefinite"/>
+                      </p:stCondLst>
+                      <p:childTnLst>
+                        <p:par>
+                          <p:cTn id="64" fill="hold">
+                            <p:stCondLst>
+                              <p:cond delay="0"/>
+                            </p:stCondLst>
+                            <p:childTnLst>
+                              <p:par>
+                                <p:cTn id="65" presetID="1" presetClass="entr" presetSubtype="0" fill="hold" grpId="0" nodeType="clickEffect">
+                                  <p:stCondLst>
+                                    <p:cond delay="0"/>
+                                  </p:stCondLst>
+                                  <p:childTnLst>
+                                    <p:set>
+                                      <p:cBhvr>
+                                        <p:cTn id="66" dur="1" fill="hold">
+                                          <p:stCondLst>
+                                            <p:cond delay="0"/>
+                                          </p:stCondLst>
+                                        </p:cTn>
+                                        <p:tgtEl>
+                                          <p:spTgt spid="29"/>
+                                        </p:tgtEl>
+                                        <p:attrNameLst>
+                                          <p:attrName>style.visibility</p:attrName>
+                                        </p:attrNameLst>
+                                      </p:cBhvr>
+                                      <p:to>
+                                        <p:strVal val="visible"/>
+                                      </p:to>
+                                    </p:set>
+                                  </p:childTnLst>
+                                </p:cTn>
+                              </p:par>
+                              <p:par>
+                                <p:cTn id="67" presetID="1" presetClass="entr" presetSubtype="0" fill="hold" grpId="0" nodeType="withEffect">
+                                  <p:stCondLst>
+                                    <p:cond delay="0"/>
+                                  </p:stCondLst>
+                                  <p:childTnLst>
+                                    <p:set>
+                                      <p:cBhvr>
+                                        <p:cTn id="68" dur="1" fill="hold">
+                                          <p:stCondLst>
+                                            <p:cond delay="0"/>
+                                          </p:stCondLst>
+                                        </p:cTn>
+                                        <p:tgtEl>
+                                          <p:spTgt spid="30"/>
+                                        </p:tgtEl>
+                                        <p:attrNameLst>
+                                          <p:attrName>style.visibility</p:attrName>
+                                        </p:attrNameLst>
+                                      </p:cBhvr>
+                                      <p:to>
+                                        <p:strVal val="visible"/>
+                                      </p:to>
+                                    </p:set>
+                                  </p:childTnLst>
+                                </p:cTn>
+                              </p:par>
+                              <p:par>
+                                <p:cTn id="69" presetID="1" presetClass="entr" presetSubtype="0" fill="hold" grpId="0" nodeType="withEffect">
+                                  <p:stCondLst>
+                                    <p:cond delay="0"/>
+                                  </p:stCondLst>
+                                  <p:childTnLst>
+                                    <p:set>
+                                      <p:cBhvr>
+                                        <p:cTn id="70" dur="1" fill="hold">
+                                          <p:stCondLst>
+                                            <p:cond delay="0"/>
+                                          </p:stCondLst>
+                                        </p:cTn>
+                                        <p:tgtEl>
+                                          <p:spTgt spid="31"/>
+                                        </p:tgtEl>
+                                        <p:attrNameLst>
+                                          <p:attrName>style.visibility</p:attrName>
+                                        </p:attrNameLst>
+                                      </p:cBhvr>
+                                      <p:to>
+                                        <p:strVal val="visible"/>
+                                      </p:to>
+                                    </p:set>
+                                  </p:childTnLst>
+                                </p:cTn>
+                              </p:par>
+                            </p:childTnLst>
+                          </p:cTn>
+                        </p:par>
+                      </p:childTnLst>
+                    </p:cTn>
+                  </p:par>
+                </p:childTnLst>
+              </p:cTn>
+              <p:prevCondLst>
+                <p:cond evt="onPrev" delay="0">
+                  <p:tgtEl>
+                    <p:sldTgt/>
+                  </p:tgtEl>
+                </p:cond>
+              </p:prevCondLst>
+              <p:nextCondLst>
+                <p:cond evt="onNext" delay="0">
+                  <p:tgtEl>
+                    <p:sldTgt/>
+                  </p:tgtEl>
+                </p:cond>
+              </p:nextCondLst>
+            </p:seq>
+          </p:childTnLst>
+        </p:cTn>
+      </p:par>
+    </p:tnLst>
+    <p:bldLst>
+      <p:bldP spid="6" grpId="0" animBg="1"/>
+      <p:bldP spid="7" grpId="0"/>
+      <p:bldP spid="8" grpId="0"/>
+      <p:bldP spid="10" grpId="0" animBg="1"/>
+      <p:bldP spid="11" grpId="0"/>
+      <p:bldP spid="12" grpId="0"/>
+      <p:bldP spid="14" grpId="0" animBg="1"/>
+      <p:bldP spid="15" grpId="0"/>
+      <p:bldP spid="16" grpId="0"/>
+      <p:bldP spid="18" grpId="0" animBg="1"/>
+      <p:bldP spid="19" grpId="0"/>
+      <p:bldP spid="20" grpId="0"/>
+      <p:bldP spid="22" grpId="0" animBg="1"/>
+      <p:bldP spid="23" grpId="0"/>
+      <p:bldP spid="24" grpId="0"/>
+      <p:bldP spid="26" grpId="0" animBg="1"/>
+      <p:bldP spid="27" grpId="0"/>
+      <p:bldP spid="28" grpId="0"/>
+      <p:bldP spid="29" grpId="0" animBg="1"/>
+      <p:bldP spid="30" grpId="0"/>
+      <p:bldP spid="31" grpId="0"/>
+      <p:bldP spid="32" grpId="0"/>
+      <p:bldP spid="33" grpId="0"/>
+      <p:bldP spid="34" grpId="0"/>
+      <p:bldP spid="35" grpId="0"/>
+      <p:bldP spid="36" grpId="0"/>
+      <p:bldP spid="37" grpId="0"/>
+    </p:bldLst>
+  </p:timing>
 </p:sld>
 </file>
 
@@ -9517,41 +12574,6 @@
       </p:sp>
       <p:sp>
         <p:nvSpPr>
-          <p:cNvPr id="4" name="TextBox 3"/>
-          <p:cNvSpPr txBox="1"/>
-          <p:nvPr/>
-        </p:nvSpPr>
-        <p:spPr>
-          <a:xfrm>
-            <a:off x="384048" y="109728"/>
-            <a:ext cx="365760" cy="182880"/>
-          </a:xfrm>
-          <a:prstGeom prst="rect">
-            <a:avLst/>
-          </a:prstGeom>
-          <a:noFill/>
-        </p:spPr>
-        <p:txBody>
-          <a:bodyPr wrap="square" anchor="t">
-            <a:spAutoFit/>
-          </a:bodyPr>
-          <a:lstStyle/>
-          <a:p>
-            <a:pPr algn="ctr"/>
-            <a:r>
-              <a:rPr sz="800" b="1">
-                <a:solidFill>
-                  <a:srgbClr val="005020"/>
-                </a:solidFill>
-                <a:latin typeface="Aptos"/>
-              </a:rPr>
-              <a:t>06</a:t>
-            </a:r>
-          </a:p>
-        </p:txBody>
-      </p:sp>
-      <p:sp>
-        <p:nvSpPr>
           <p:cNvPr id="5" name="Rounded Rectangle 4"/>
           <p:cNvSpPr/>
           <p:nvPr/>
@@ -9559,7 +12581,7 @@
         <p:spPr>
           <a:xfrm>
             <a:off x="777240" y="1554480"/>
-            <a:ext cx="4663440" cy="3840480"/>
+            <a:ext cx="4709160" cy="3846195"/>
           </a:xfrm>
           <a:prstGeom prst="roundRect">
             <a:avLst/>
@@ -9620,7 +12642,7 @@
           <a:p>
             <a:pPr algn="l"/>
             <a:r>
-              <a:rPr sz="1100" b="1">
+              <a:rPr sz="1100" b="1" dirty="0">
                 <a:solidFill>
                   <a:srgbClr val="DFF5E4"/>
                 </a:solidFill>
@@ -9640,7 +12662,7 @@
         <p:spPr>
           <a:xfrm>
             <a:off x="1051560" y="2267712"/>
-            <a:ext cx="3931920" cy="2103120"/>
+            <a:ext cx="3931920" cy="1682512"/>
           </a:xfrm>
           <a:prstGeom prst="rect">
             <a:avLst/>
@@ -9653,10 +12675,12 @@
           </a:bodyPr>
           <a:lstStyle/>
           <a:p>
-            <a:pPr>
+            <a:pPr marL="285750" indent="-285750">
               <a:spcAft>
                 <a:spcPts val="700"/>
               </a:spcAft>
+              <a:buFont typeface="Arial" panose="020B0604020202020204" pitchFamily="34" charset="0"/>
+              <a:buChar char="•"/>
               <a:defRPr sz="1600">
                 <a:solidFill>
                   <a:srgbClr val="FFFFFF"/>
@@ -9665,14 +12689,17 @@
               </a:defRPr>
             </a:pPr>
             <a:r>
-              <a:t>• monthly available ZIP / CSV files</a:t>
-            </a:r>
-          </a:p>
-          <a:p>
-            <a:pPr>
+              <a:rPr dirty="0"/>
+              <a:t>monthly available ZIP / CSV files</a:t>
+            </a:r>
+          </a:p>
+          <a:p>
+            <a:pPr marL="285750" indent="-285750">
               <a:spcAft>
                 <a:spcPts val="700"/>
               </a:spcAft>
+              <a:buFont typeface="Arial" panose="020B0604020202020204" pitchFamily="34" charset="0"/>
+              <a:buChar char="•"/>
               <a:defRPr sz="1600">
                 <a:solidFill>
                   <a:srgbClr val="FFFFFF"/>
@@ -9681,14 +12708,17 @@
               </a:defRPr>
             </a:pPr>
             <a:r>
-              <a:t>• reference files for airlines and airports</a:t>
-            </a:r>
-          </a:p>
-          <a:p>
-            <a:pPr>
+              <a:rPr dirty="0"/>
+              <a:t>reference files for airlines and airports</a:t>
+            </a:r>
+          </a:p>
+          <a:p>
+            <a:pPr marL="285750" indent="-285750">
               <a:spcAft>
                 <a:spcPts val="700"/>
               </a:spcAft>
+              <a:buFont typeface="Arial" panose="020B0604020202020204" pitchFamily="34" charset="0"/>
+              <a:buChar char="•"/>
               <a:defRPr sz="1600">
                 <a:solidFill>
                   <a:srgbClr val="FFFFFF"/>
@@ -9697,14 +12727,17 @@
               </a:defRPr>
             </a:pPr>
             <a:r>
-              <a:t>• routes derived from flights</a:t>
-            </a:r>
-          </a:p>
-          <a:p>
-            <a:pPr>
+              <a:rPr dirty="0"/>
+              <a:t>routes derived from flights</a:t>
+            </a:r>
+          </a:p>
+          <a:p>
+            <a:pPr marL="285750" indent="-285750">
               <a:spcAft>
                 <a:spcPts val="700"/>
               </a:spcAft>
+              <a:buFont typeface="Arial" panose="020B0604020202020204" pitchFamily="34" charset="0"/>
+              <a:buChar char="•"/>
               <a:defRPr sz="1600">
                 <a:solidFill>
                   <a:srgbClr val="FFFFFF"/>
@@ -9713,14 +12746,17 @@
               </a:defRPr>
             </a:pPr>
             <a:r>
-              <a:t>• download only when missing</a:t>
-            </a:r>
-          </a:p>
-          <a:p>
-            <a:pPr>
+              <a:rPr dirty="0"/>
+              <a:t>download only when missing</a:t>
+            </a:r>
+          </a:p>
+          <a:p>
+            <a:pPr marL="285750" indent="-285750">
               <a:spcAft>
                 <a:spcPts val="700"/>
               </a:spcAft>
+              <a:buFont typeface="Arial" panose="020B0604020202020204" pitchFamily="34" charset="0"/>
+              <a:buChar char="•"/>
               <a:defRPr sz="1600">
                 <a:solidFill>
                   <a:srgbClr val="FFFFFF"/>
@@ -9729,7 +12765,8 @@
               </a:defRPr>
             </a:pPr>
             <a:r>
-              <a:t>• year/month partitioning</a:t>
+              <a:rPr dirty="0"/>
+              <a:t>year/month partitioning</a:t>
             </a:r>
           </a:p>
         </p:txBody>
@@ -9743,7 +12780,7 @@
         <p:spPr>
           <a:xfrm>
             <a:off x="5715000" y="1554480"/>
-            <a:ext cx="4663440" cy="3840480"/>
+            <a:ext cx="4709160" cy="3846195"/>
           </a:xfrm>
           <a:prstGeom prst="roundRect">
             <a:avLst/>
@@ -9804,7 +12841,7 @@
           <a:p>
             <a:pPr algn="l"/>
             <a:r>
-              <a:rPr sz="1100" b="1">
+              <a:rPr sz="1100" b="1" dirty="0">
                 <a:solidFill>
                   <a:srgbClr val="DFF5E4"/>
                 </a:solidFill>
@@ -9859,7 +12896,7 @@
         <p:spPr>
           <a:xfrm>
             <a:off x="5989320" y="2267712"/>
-            <a:ext cx="4572000" cy="1280160"/>
+            <a:ext cx="4572000" cy="1010533"/>
           </a:xfrm>
           <a:prstGeom prst="rect">
             <a:avLst/>
@@ -9872,10 +12909,12 @@
           </a:bodyPr>
           <a:lstStyle/>
           <a:p>
-            <a:pPr>
+            <a:pPr marL="285750" indent="-285750">
               <a:spcAft>
                 <a:spcPts val="700"/>
               </a:spcAft>
+              <a:buFont typeface="Arial" panose="020B0604020202020204" pitchFamily="34" charset="0"/>
+              <a:buChar char="•"/>
               <a:defRPr sz="1600">
                 <a:solidFill>
                   <a:srgbClr val="FFFFFF"/>
@@ -9884,14 +12923,17 @@
               </a:defRPr>
             </a:pPr>
             <a:r>
-              <a:t>• traceability to source</a:t>
-            </a:r>
-          </a:p>
-          <a:p>
-            <a:pPr>
+              <a:rPr dirty="0"/>
+              <a:t>traceability to source</a:t>
+            </a:r>
+          </a:p>
+          <a:p>
+            <a:pPr marL="285750" indent="-285750">
               <a:spcAft>
                 <a:spcPts val="700"/>
               </a:spcAft>
+              <a:buFont typeface="Arial" panose="020B0604020202020204" pitchFamily="34" charset="0"/>
+              <a:buChar char="•"/>
               <a:defRPr sz="1600">
                 <a:solidFill>
                   <a:srgbClr val="FFFFFF"/>
@@ -9900,14 +12942,17 @@
               </a:defRPr>
             </a:pPr>
             <a:r>
-              <a:t>• repeatable monthly loads</a:t>
-            </a:r>
-          </a:p>
-          <a:p>
-            <a:pPr>
+              <a:rPr dirty="0"/>
+              <a:t>repeatable monthly loads</a:t>
+            </a:r>
+          </a:p>
+          <a:p>
+            <a:pPr marL="285750" indent="-285750">
               <a:spcAft>
                 <a:spcPts val="700"/>
               </a:spcAft>
+              <a:buFont typeface="Arial" panose="020B0604020202020204" pitchFamily="34" charset="0"/>
+              <a:buChar char="•"/>
               <a:defRPr sz="1600">
                 <a:solidFill>
                   <a:srgbClr val="FFFFFF"/>
@@ -9916,7 +12961,8 @@
               </a:defRPr>
             </a:pPr>
             <a:r>
-              <a:t>• clean separation from transformation logic</a:t>
+              <a:rPr dirty="0"/>
+              <a:t>clean separation from transformation logic</a:t>
             </a:r>
           </a:p>
         </p:txBody>
@@ -10004,27 +13050,45 @@
           <a:p>
             <a:pPr algn="l"/>
             <a:r>
-              <a:rPr sz="2700" b="1">
+              <a:rPr sz="2700" b="1" dirty="0">
                 <a:solidFill>
                   <a:srgbClr val="005020"/>
                 </a:solidFill>
                 <a:latin typeface="Aptos"/>
               </a:rPr>
-              <a:t>SILVER &amp; DATA QUALITY — CREATE TRUST</a:t>
-            </a:r>
-          </a:p>
-        </p:txBody>
-      </p:sp>
-      <p:sp>
-        <p:nvSpPr>
-          <p:cNvPr id="4" name="TextBox 3"/>
+              <a:t>SILVER &amp; DATA QUALITY </a:t>
+            </a:r>
+            <a:r>
+              <a:rPr lang="de-DE" sz="2700" b="1" dirty="0">
+                <a:solidFill>
+                  <a:srgbClr val="005020"/>
+                </a:solidFill>
+                <a:latin typeface="Aptos"/>
+              </a:rPr>
+              <a:t>-</a:t>
+            </a:r>
+            <a:r>
+              <a:rPr sz="2700" b="1" dirty="0">
+                <a:solidFill>
+                  <a:srgbClr val="005020"/>
+                </a:solidFill>
+                <a:latin typeface="Aptos"/>
+              </a:rPr>
+              <a:t> CREATE TRUST</a:t>
+            </a:r>
+          </a:p>
+        </p:txBody>
+      </p:sp>
+      <p:sp>
+        <p:nvSpPr>
+          <p:cNvPr id="5" name="TextBox 4"/>
           <p:cNvSpPr txBox="1"/>
           <p:nvPr/>
         </p:nvSpPr>
         <p:spPr>
           <a:xfrm>
-            <a:off x="384048" y="109728"/>
-            <a:ext cx="365760" cy="182880"/>
+            <a:off x="777240" y="1447036"/>
+            <a:ext cx="9875520" cy="384721"/>
           </a:xfrm>
           <a:prstGeom prst="rect">
             <a:avLst/>
@@ -10037,41 +13101,6 @@
           </a:bodyPr>
           <a:lstStyle/>
           <a:p>
-            <a:pPr algn="ctr"/>
-            <a:r>
-              <a:rPr sz="800" b="1">
-                <a:solidFill>
-                  <a:srgbClr val="005020"/>
-                </a:solidFill>
-                <a:latin typeface="Aptos"/>
-              </a:rPr>
-              <a:t>07</a:t>
-            </a:r>
-          </a:p>
-        </p:txBody>
-      </p:sp>
-      <p:sp>
-        <p:nvSpPr>
-          <p:cNvPr id="5" name="TextBox 4"/>
-          <p:cNvSpPr txBox="1"/>
-          <p:nvPr/>
-        </p:nvSpPr>
-        <p:spPr>
-          <a:xfrm>
-            <a:off x="777240" y="1447036"/>
-            <a:ext cx="9875520" cy="384721"/>
-          </a:xfrm>
-          <a:prstGeom prst="rect">
-            <a:avLst/>
-          </a:prstGeom>
-          <a:noFill/>
-        </p:spPr>
-        <p:txBody>
-          <a:bodyPr wrap="square" anchor="t">
-            <a:spAutoFit/>
-          </a:bodyPr>
-          <a:lstStyle/>
-          <a:p>
             <a:pPr algn="l"/>
             <a:r>
               <a:rPr sz="1900" b="1" dirty="0">
@@ -10111,8 +13140,8 @@
         </p:nvSpPr>
         <p:spPr>
           <a:xfrm>
-            <a:off x="731520" y="2103120"/>
-            <a:ext cx="2880360" cy="1097280"/>
+            <a:off x="731519" y="2103120"/>
+            <a:ext cx="2903515" cy="1097280"/>
           </a:xfrm>
           <a:prstGeom prst="roundRect">
             <a:avLst/>
@@ -10173,7 +13202,7 @@
           <a:p>
             <a:pPr algn="l"/>
             <a:r>
-              <a:rPr sz="1500" b="1">
+              <a:rPr sz="1500" b="1" dirty="0">
                 <a:solidFill>
                   <a:srgbClr val="DFF5E4"/>
                 </a:solidFill>
@@ -10208,7 +13237,7 @@
           <a:p>
             <a:pPr algn="l"/>
             <a:r>
-              <a:rPr sz="1250" b="0">
+              <a:rPr sz="1250" b="0" dirty="0">
                 <a:solidFill>
                   <a:srgbClr val="FFFFFF"/>
                 </a:solidFill>
@@ -10227,8 +13256,8 @@
         </p:nvSpPr>
         <p:spPr>
           <a:xfrm>
-            <a:off x="3977639" y="2103120"/>
-            <a:ext cx="2880360" cy="1097280"/>
+            <a:off x="3977638" y="2103120"/>
+            <a:ext cx="2903515" cy="1097280"/>
           </a:xfrm>
           <a:prstGeom prst="roundRect">
             <a:avLst/>
@@ -10273,7 +13302,7 @@
         </p:nvSpPr>
         <p:spPr>
           <a:xfrm>
-            <a:off x="4142231" y="2267712"/>
+            <a:off x="4142230" y="2267712"/>
             <a:ext cx="2468880" cy="228600"/>
           </a:xfrm>
           <a:prstGeom prst="rect">
@@ -10376,8 +13405,8 @@
         </p:nvSpPr>
         <p:spPr>
           <a:xfrm>
-            <a:off x="7223759" y="2103120"/>
-            <a:ext cx="2880360" cy="1097280"/>
+            <a:off x="7223758" y="2103120"/>
+            <a:ext cx="2903515" cy="1097280"/>
           </a:xfrm>
           <a:prstGeom prst="roundRect">
             <a:avLst/>
@@ -10438,7 +13467,7 @@
           <a:p>
             <a:pPr algn="l"/>
             <a:r>
-              <a:rPr sz="1500" b="1">
+              <a:rPr sz="1500" b="1" dirty="0">
                 <a:solidFill>
                   <a:srgbClr val="DFF5E4"/>
                 </a:solidFill>
@@ -10473,7 +13502,7 @@
           <a:p>
             <a:pPr algn="l"/>
             <a:r>
-              <a:rPr sz="1250" b="0">
+              <a:rPr sz="1250" b="0" dirty="0">
                 <a:solidFill>
                   <a:srgbClr val="FFFFFF"/>
                 </a:solidFill>
@@ -10492,8 +13521,8 @@
         </p:nvSpPr>
         <p:spPr>
           <a:xfrm>
-            <a:off x="2335236" y="3611879"/>
-            <a:ext cx="2880360" cy="1097280"/>
+            <a:off x="2335235" y="3545204"/>
+            <a:ext cx="2903515" cy="1097280"/>
           </a:xfrm>
           <a:prstGeom prst="roundRect">
             <a:avLst/>
@@ -10538,7 +13567,7 @@
         </p:nvSpPr>
         <p:spPr>
           <a:xfrm>
-            <a:off x="2499828" y="3776472"/>
+            <a:off x="2499828" y="3709797"/>
             <a:ext cx="2468880" cy="228600"/>
           </a:xfrm>
           <a:prstGeom prst="rect">
@@ -10554,7 +13583,7 @@
           <a:p>
             <a:pPr algn="l"/>
             <a:r>
-              <a:rPr sz="1500" b="1">
+              <a:rPr sz="1500" b="1" dirty="0">
                 <a:solidFill>
                   <a:srgbClr val="DFF5E4"/>
                 </a:solidFill>
@@ -10573,7 +13602,7 @@
         </p:nvSpPr>
         <p:spPr>
           <a:xfrm>
-            <a:off x="2499828" y="4123944"/>
+            <a:off x="2499828" y="4057269"/>
             <a:ext cx="2468880" cy="320040"/>
           </a:xfrm>
           <a:prstGeom prst="rect">
@@ -10608,8 +13637,8 @@
         </p:nvSpPr>
         <p:spPr>
           <a:xfrm>
-            <a:off x="5581355" y="3611879"/>
-            <a:ext cx="2880360" cy="1097280"/>
+            <a:off x="5581354" y="3545204"/>
+            <a:ext cx="2903515" cy="1097280"/>
           </a:xfrm>
           <a:prstGeom prst="roundRect">
             <a:avLst/>
@@ -10654,7 +13683,7 @@
         </p:nvSpPr>
         <p:spPr>
           <a:xfrm>
-            <a:off x="5745947" y="3776472"/>
+            <a:off x="5745947" y="3709797"/>
             <a:ext cx="2468880" cy="228600"/>
           </a:xfrm>
           <a:prstGeom prst="rect">
@@ -10670,7 +13699,7 @@
           <a:p>
             <a:pPr algn="l"/>
             <a:r>
-              <a:rPr sz="1500" b="1">
+              <a:rPr sz="1500" b="1" dirty="0">
                 <a:solidFill>
                   <a:srgbClr val="DFF5E4"/>
                 </a:solidFill>
@@ -10689,7 +13718,7 @@
         </p:nvSpPr>
         <p:spPr>
           <a:xfrm>
-            <a:off x="5745947" y="4123944"/>
+            <a:off x="5745947" y="4057269"/>
             <a:ext cx="2468880" cy="320040"/>
           </a:xfrm>
           <a:prstGeom prst="rect">
@@ -10724,7 +13753,7 @@
         </p:nvSpPr>
         <p:spPr>
           <a:xfrm>
-            <a:off x="960120" y="5257800"/>
+            <a:off x="960120" y="4972050"/>
             <a:ext cx="9326880" cy="329184"/>
           </a:xfrm>
           <a:prstGeom prst="rect">
@@ -10759,7 +13788,7 @@
         </p:nvSpPr>
         <p:spPr>
           <a:xfrm>
-            <a:off x="960120" y="5550408"/>
+            <a:off x="960120" y="5264658"/>
             <a:ext cx="9326880" cy="246221"/>
           </a:xfrm>
           <a:prstGeom prst="rect">
@@ -10791,6 +13820,112 @@
   <p:clrMapOvr>
     <a:masterClrMapping/>
   </p:clrMapOvr>
+  <p:timing>
+    <p:tnLst>
+      <p:par>
+        <p:cTn id="1" dur="indefinite" restart="never" nodeType="tmRoot">
+          <p:childTnLst>
+            <p:seq concurrent="1" nextAc="seek">
+              <p:cTn id="2" dur="indefinite" nodeType="mainSeq">
+                <p:childTnLst>
+                  <p:par>
+                    <p:cTn id="3" fill="hold">
+                      <p:stCondLst>
+                        <p:cond delay="indefinite"/>
+                      </p:stCondLst>
+                      <p:childTnLst>
+                        <p:par>
+                          <p:cTn id="4" fill="hold">
+                            <p:stCondLst>
+                              <p:cond delay="0"/>
+                            </p:stCondLst>
+                            <p:childTnLst>
+                              <p:par>
+                                <p:cTn id="5" presetID="1" presetClass="entr" presetSubtype="0" fill="hold" grpId="0" nodeType="clickEffect">
+                                  <p:stCondLst>
+                                    <p:cond delay="0"/>
+                                  </p:stCondLst>
+                                  <p:childTnLst>
+                                    <p:set>
+                                      <p:cBhvr>
+                                        <p:cTn id="6" dur="1" fill="hold">
+                                          <p:stCondLst>
+                                            <p:cond delay="0"/>
+                                          </p:stCondLst>
+                                        </p:cTn>
+                                        <p:tgtEl>
+                                          <p:spTgt spid="22"/>
+                                        </p:tgtEl>
+                                        <p:attrNameLst>
+                                          <p:attrName>style.visibility</p:attrName>
+                                        </p:attrNameLst>
+                                      </p:cBhvr>
+                                      <p:to>
+                                        <p:strVal val="visible"/>
+                                      </p:to>
+                                    </p:set>
+                                  </p:childTnLst>
+                                </p:cTn>
+                              </p:par>
+                              <p:par>
+                                <p:cTn id="7" presetID="1" presetClass="entr" presetSubtype="0" fill="hold" grpId="0" nodeType="withEffect">
+                                  <p:stCondLst>
+                                    <p:cond delay="0"/>
+                                  </p:stCondLst>
+                                  <p:childTnLst>
+                                    <p:set>
+                                      <p:cBhvr>
+                                        <p:cTn id="8" dur="1" fill="hold">
+                                          <p:stCondLst>
+                                            <p:cond delay="0"/>
+                                          </p:stCondLst>
+                                        </p:cTn>
+                                        <p:tgtEl>
+                                          <p:spTgt spid="21"/>
+                                        </p:tgtEl>
+                                        <p:attrNameLst>
+                                          <p:attrName>style.visibility</p:attrName>
+                                        </p:attrNameLst>
+                                      </p:cBhvr>
+                                      <p:to>
+                                        <p:strVal val="visible"/>
+                                      </p:to>
+                                    </p:set>
+                                  </p:childTnLst>
+                                </p:cTn>
+                              </p:par>
+                            </p:childTnLst>
+                          </p:cTn>
+                        </p:par>
+                      </p:childTnLst>
+                    </p:cTn>
+                  </p:par>
+                </p:childTnLst>
+              </p:cTn>
+              <p:prevCondLst>
+                <p:cond evt="onPrev" delay="0">
+                  <p:tgtEl>
+                    <p:sldTgt/>
+                  </p:tgtEl>
+                </p:cond>
+              </p:prevCondLst>
+              <p:nextCondLst>
+                <p:cond evt="onNext" delay="0">
+                  <p:tgtEl>
+                    <p:sldTgt/>
+                  </p:tgtEl>
+                </p:cond>
+              </p:nextCondLst>
+            </p:seq>
+          </p:childTnLst>
+        </p:cTn>
+      </p:par>
+    </p:tnLst>
+    <p:bldLst>
+      <p:bldP spid="21" grpId="0"/>
+      <p:bldP spid="22" grpId="0"/>
+    </p:bldLst>
+  </p:timing>
 </p:sld>
 </file>
 
@@ -10828,48 +13963,13 @@
           <a:p>
             <a:pPr algn="l"/>
             <a:r>
-              <a:rPr sz="2700" b="1">
+              <a:rPr sz="2700" b="1" dirty="0">
                 <a:solidFill>
                   <a:srgbClr val="005020"/>
                 </a:solidFill>
                 <a:latin typeface="Aptos"/>
               </a:rPr>
               <a:t>DATA MODEL &amp; GOLD MARTS</a:t>
-            </a:r>
-          </a:p>
-        </p:txBody>
-      </p:sp>
-      <p:sp>
-        <p:nvSpPr>
-          <p:cNvPr id="4" name="TextBox 3"/>
-          <p:cNvSpPr txBox="1"/>
-          <p:nvPr/>
-        </p:nvSpPr>
-        <p:spPr>
-          <a:xfrm>
-            <a:off x="384048" y="109728"/>
-            <a:ext cx="365760" cy="182880"/>
-          </a:xfrm>
-          <a:prstGeom prst="rect">
-            <a:avLst/>
-          </a:prstGeom>
-          <a:noFill/>
-        </p:spPr>
-        <p:txBody>
-          <a:bodyPr wrap="square" anchor="t">
-            <a:spAutoFit/>
-          </a:bodyPr>
-          <a:lstStyle/>
-          <a:p>
-            <a:pPr algn="ctr"/>
-            <a:r>
-              <a:rPr sz="800" b="1">
-                <a:solidFill>
-                  <a:srgbClr val="005020"/>
-                </a:solidFill>
-                <a:latin typeface="Aptos"/>
-              </a:rPr>
-              <a:t>08</a:t>
             </a:r>
           </a:p>
         </p:txBody>
@@ -11513,7 +14613,70 @@
                 </a:solidFill>
                 <a:latin typeface="Aptos"/>
               </a:rPr>
-              <a:t>model separates operational detail from business-level reliability metrics.</a:t>
+              <a:t>model separates operational detail</a:t>
+            </a:r>
+            <a:r>
+              <a:rPr lang="de-DE" sz="1600" b="1" dirty="0">
+                <a:solidFill>
+                  <a:srgbClr val="005020"/>
+                </a:solidFill>
+                <a:latin typeface="Aptos"/>
+              </a:rPr>
+              <a:t>s…</a:t>
+            </a:r>
+            <a:r>
+              <a:rPr lang="de-DE" sz="1600" b="1" dirty="0" err="1">
+                <a:solidFill>
+                  <a:schemeClr val="bg1"/>
+                </a:solidFill>
+                <a:latin typeface="Aptos"/>
+              </a:rPr>
+              <a:t>om</a:t>
+            </a:r>
+            <a:r>
+              <a:rPr lang="de-DE" sz="1600" b="1" dirty="0">
+                <a:solidFill>
+                  <a:schemeClr val="bg1"/>
+                </a:solidFill>
+                <a:latin typeface="Aptos"/>
+              </a:rPr>
+              <a:t> business-level </a:t>
+            </a:r>
+            <a:r>
+              <a:rPr lang="de-DE" sz="1600" b="1" dirty="0" err="1">
+                <a:solidFill>
+                  <a:schemeClr val="bg1"/>
+                </a:solidFill>
+                <a:latin typeface="Aptos"/>
+              </a:rPr>
+              <a:t>reliability</a:t>
+            </a:r>
+            <a:r>
+              <a:rPr lang="de-DE" sz="1600" b="1" dirty="0">
+                <a:solidFill>
+                  <a:schemeClr val="bg1"/>
+                </a:solidFill>
+                <a:latin typeface="Aptos"/>
+              </a:rPr>
+              <a:t> </a:t>
+            </a:r>
+            <a:r>
+              <a:rPr lang="de-DE" sz="1600" b="1" dirty="0" err="1">
+                <a:solidFill>
+                  <a:schemeClr val="bg1"/>
+                </a:solidFill>
+                <a:latin typeface="Aptos"/>
+              </a:rPr>
+              <a:t>metrics</a:t>
+            </a:r>
+            <a:r>
+              <a:rPr lang="de-DE" sz="1600" b="1" dirty="0">
+                <a:solidFill>
+                  <a:schemeClr val="bg1"/>
+                </a:solidFill>
+                <a:latin typeface="Aptos"/>
+              </a:rPr>
+              <a:t>.</a:t>
             </a:r>
           </a:p>
         </p:txBody>
@@ -11731,11 +14894,443 @@
           </a:fontRef>
         </p:style>
       </p:cxnSp>
+      <p:sp>
+        <p:nvSpPr>
+          <p:cNvPr id="4" name="TextBox 24">
+            <a:extLst>
+              <a:ext uri="{FF2B5EF4-FFF2-40B4-BE49-F238E27FC236}">
+                <a16:creationId xmlns:a16="http://schemas.microsoft.com/office/drawing/2014/main" id="{46AC1ECC-5EF4-03FA-978B-6B70ADF864F9}"/>
+              </a:ext>
+            </a:extLst>
+          </p:cNvPr>
+          <p:cNvSpPr txBox="1"/>
+          <p:nvPr/>
+        </p:nvSpPr>
+        <p:spPr>
+          <a:xfrm>
+            <a:off x="1051560" y="5413248"/>
+            <a:ext cx="9509760" cy="338554"/>
+          </a:xfrm>
+          <a:prstGeom prst="rect">
+            <a:avLst/>
+          </a:prstGeom>
+          <a:noFill/>
+        </p:spPr>
+        <p:txBody>
+          <a:bodyPr wrap="square" anchor="t">
+            <a:spAutoFit/>
+          </a:bodyPr>
+          <a:lstStyle/>
+          <a:p>
+            <a:pPr algn="ctr"/>
+            <a:r>
+              <a:rPr sz="1600" b="1" dirty="0">
+                <a:solidFill>
+                  <a:srgbClr val="005020"/>
+                </a:solidFill>
+                <a:latin typeface="Aptos"/>
+              </a:rPr>
+              <a:t>The </a:t>
+            </a:r>
+            <a:r>
+              <a:rPr lang="de-DE" sz="1600" b="1" dirty="0">
+                <a:solidFill>
+                  <a:srgbClr val="005020"/>
+                </a:solidFill>
+                <a:latin typeface="Aptos"/>
+              </a:rPr>
+              <a:t>star-schema </a:t>
+            </a:r>
+            <a:r>
+              <a:rPr sz="1600" b="1" dirty="0">
+                <a:solidFill>
+                  <a:srgbClr val="005020"/>
+                </a:solidFill>
+                <a:latin typeface="Aptos"/>
+              </a:rPr>
+              <a:t>model separates operational detail</a:t>
+            </a:r>
+            <a:r>
+              <a:rPr lang="de-DE" sz="1600" b="1" dirty="0">
+                <a:solidFill>
+                  <a:srgbClr val="005020"/>
+                </a:solidFill>
+                <a:latin typeface="Aptos"/>
+              </a:rPr>
+              <a:t>s</a:t>
+            </a:r>
+            <a:r>
+              <a:rPr sz="1600" b="1" dirty="0">
+                <a:solidFill>
+                  <a:srgbClr val="005020"/>
+                </a:solidFill>
+                <a:latin typeface="Aptos"/>
+              </a:rPr>
+              <a:t> from business-level reliability metrics.</a:t>
+            </a:r>
+          </a:p>
+        </p:txBody>
+      </p:sp>
     </p:spTree>
   </p:cSld>
   <p:clrMapOvr>
     <a:masterClrMapping/>
   </p:clrMapOvr>
+  <p:timing>
+    <p:tnLst>
+      <p:par>
+        <p:cTn id="1" dur="indefinite" restart="never" nodeType="tmRoot">
+          <p:childTnLst>
+            <p:seq concurrent="1" nextAc="seek">
+              <p:cTn id="2" dur="indefinite" nodeType="mainSeq">
+                <p:childTnLst>
+                  <p:par>
+                    <p:cTn id="3" fill="hold">
+                      <p:stCondLst>
+                        <p:cond delay="indefinite"/>
+                      </p:stCondLst>
+                      <p:childTnLst>
+                        <p:par>
+                          <p:cTn id="4" fill="hold">
+                            <p:stCondLst>
+                              <p:cond delay="0"/>
+                            </p:stCondLst>
+                            <p:childTnLst>
+                              <p:par>
+                                <p:cTn id="5" presetID="1" presetClass="entr" presetSubtype="0" fill="hold" grpId="0" nodeType="clickEffect">
+                                  <p:stCondLst>
+                                    <p:cond delay="0"/>
+                                  </p:stCondLst>
+                                  <p:childTnLst>
+                                    <p:set>
+                                      <p:cBhvr>
+                                        <p:cTn id="6" dur="1" fill="hold">
+                                          <p:stCondLst>
+                                            <p:cond delay="0"/>
+                                          </p:stCondLst>
+                                        </p:cTn>
+                                        <p:tgtEl>
+                                          <p:spTgt spid="17"/>
+                                        </p:tgtEl>
+                                        <p:attrNameLst>
+                                          <p:attrName>style.visibility</p:attrName>
+                                        </p:attrNameLst>
+                                      </p:cBhvr>
+                                      <p:to>
+                                        <p:strVal val="visible"/>
+                                      </p:to>
+                                    </p:set>
+                                  </p:childTnLst>
+                                </p:cTn>
+                              </p:par>
+                              <p:par>
+                                <p:cTn id="7" presetID="1" presetClass="entr" presetSubtype="0" fill="hold" nodeType="withEffect">
+                                  <p:stCondLst>
+                                    <p:cond delay="0"/>
+                                  </p:stCondLst>
+                                  <p:childTnLst>
+                                    <p:set>
+                                      <p:cBhvr>
+                                        <p:cTn id="8" dur="1" fill="hold">
+                                          <p:stCondLst>
+                                            <p:cond delay="0"/>
+                                          </p:stCondLst>
+                                        </p:cTn>
+                                        <p:tgtEl>
+                                          <p:spTgt spid="29"/>
+                                        </p:tgtEl>
+                                        <p:attrNameLst>
+                                          <p:attrName>style.visibility</p:attrName>
+                                        </p:attrNameLst>
+                                      </p:cBhvr>
+                                      <p:to>
+                                        <p:strVal val="visible"/>
+                                      </p:to>
+                                    </p:set>
+                                  </p:childTnLst>
+                                </p:cTn>
+                              </p:par>
+                              <p:par>
+                                <p:cTn id="9" presetID="1" presetClass="entr" presetSubtype="0" fill="hold" grpId="0" nodeType="withEffect">
+                                  <p:stCondLst>
+                                    <p:cond delay="0"/>
+                                  </p:stCondLst>
+                                  <p:childTnLst>
+                                    <p:set>
+                                      <p:cBhvr>
+                                        <p:cTn id="10" dur="1" fill="hold">
+                                          <p:stCondLst>
+                                            <p:cond delay="0"/>
+                                          </p:stCondLst>
+                                        </p:cTn>
+                                        <p:tgtEl>
+                                          <p:spTgt spid="18"/>
+                                        </p:tgtEl>
+                                        <p:attrNameLst>
+                                          <p:attrName>style.visibility</p:attrName>
+                                        </p:attrNameLst>
+                                      </p:cBhvr>
+                                      <p:to>
+                                        <p:strVal val="visible"/>
+                                      </p:to>
+                                    </p:set>
+                                  </p:childTnLst>
+                                </p:cTn>
+                              </p:par>
+                              <p:par>
+                                <p:cTn id="11" presetID="1" presetClass="entr" presetSubtype="0" fill="hold" grpId="0" nodeType="withEffect">
+                                  <p:stCondLst>
+                                    <p:cond delay="0"/>
+                                  </p:stCondLst>
+                                  <p:childTnLst>
+                                    <p:set>
+                                      <p:cBhvr>
+                                        <p:cTn id="12" dur="1" fill="hold">
+                                          <p:stCondLst>
+                                            <p:cond delay="0"/>
+                                          </p:stCondLst>
+                                        </p:cTn>
+                                        <p:tgtEl>
+                                          <p:spTgt spid="21"/>
+                                        </p:tgtEl>
+                                        <p:attrNameLst>
+                                          <p:attrName>style.visibility</p:attrName>
+                                        </p:attrNameLst>
+                                      </p:cBhvr>
+                                      <p:to>
+                                        <p:strVal val="visible"/>
+                                      </p:to>
+                                    </p:set>
+                                  </p:childTnLst>
+                                </p:cTn>
+                              </p:par>
+                              <p:par>
+                                <p:cTn id="13" presetID="1" presetClass="entr" presetSubtype="0" fill="hold" grpId="0" nodeType="withEffect">
+                                  <p:stCondLst>
+                                    <p:cond delay="0"/>
+                                  </p:stCondLst>
+                                  <p:childTnLst>
+                                    <p:set>
+                                      <p:cBhvr>
+                                        <p:cTn id="14" dur="1" fill="hold">
+                                          <p:stCondLst>
+                                            <p:cond delay="0"/>
+                                          </p:stCondLst>
+                                        </p:cTn>
+                                        <p:tgtEl>
+                                          <p:spTgt spid="20"/>
+                                        </p:tgtEl>
+                                        <p:attrNameLst>
+                                          <p:attrName>style.visibility</p:attrName>
+                                        </p:attrNameLst>
+                                      </p:cBhvr>
+                                      <p:to>
+                                        <p:strVal val="visible"/>
+                                      </p:to>
+                                    </p:set>
+                                  </p:childTnLst>
+                                </p:cTn>
+                              </p:par>
+                              <p:par>
+                                <p:cTn id="15" presetID="1" presetClass="entr" presetSubtype="0" fill="hold" grpId="0" nodeType="withEffect">
+                                  <p:stCondLst>
+                                    <p:cond delay="0"/>
+                                  </p:stCondLst>
+                                  <p:childTnLst>
+                                    <p:set>
+                                      <p:cBhvr>
+                                        <p:cTn id="16" dur="1" fill="hold">
+                                          <p:stCondLst>
+                                            <p:cond delay="0"/>
+                                          </p:stCondLst>
+                                        </p:cTn>
+                                        <p:tgtEl>
+                                          <p:spTgt spid="23"/>
+                                        </p:tgtEl>
+                                        <p:attrNameLst>
+                                          <p:attrName>style.visibility</p:attrName>
+                                        </p:attrNameLst>
+                                      </p:cBhvr>
+                                      <p:to>
+                                        <p:strVal val="visible"/>
+                                      </p:to>
+                                    </p:set>
+                                  </p:childTnLst>
+                                </p:cTn>
+                              </p:par>
+                              <p:par>
+                                <p:cTn id="17" presetID="1" presetClass="entr" presetSubtype="0" fill="hold" grpId="0" nodeType="withEffect">
+                                  <p:stCondLst>
+                                    <p:cond delay="0"/>
+                                  </p:stCondLst>
+                                  <p:childTnLst>
+                                    <p:set>
+                                      <p:cBhvr>
+                                        <p:cTn id="18" dur="1" fill="hold">
+                                          <p:stCondLst>
+                                            <p:cond delay="0"/>
+                                          </p:stCondLst>
+                                        </p:cTn>
+                                        <p:tgtEl>
+                                          <p:spTgt spid="24"/>
+                                        </p:tgtEl>
+                                        <p:attrNameLst>
+                                          <p:attrName>style.visibility</p:attrName>
+                                        </p:attrNameLst>
+                                      </p:cBhvr>
+                                      <p:to>
+                                        <p:strVal val="visible"/>
+                                      </p:to>
+                                    </p:set>
+                                  </p:childTnLst>
+                                </p:cTn>
+                              </p:par>
+                              <p:par>
+                                <p:cTn id="19" presetID="1" presetClass="entr" presetSubtype="0" fill="hold" nodeType="withEffect">
+                                  <p:stCondLst>
+                                    <p:cond delay="0"/>
+                                  </p:stCondLst>
+                                  <p:childTnLst>
+                                    <p:set>
+                                      <p:cBhvr>
+                                        <p:cTn id="20" dur="1" fill="hold">
+                                          <p:stCondLst>
+                                            <p:cond delay="0"/>
+                                          </p:stCondLst>
+                                        </p:cTn>
+                                        <p:tgtEl>
+                                          <p:spTgt spid="31"/>
+                                        </p:tgtEl>
+                                        <p:attrNameLst>
+                                          <p:attrName>style.visibility</p:attrName>
+                                        </p:attrNameLst>
+                                      </p:cBhvr>
+                                      <p:to>
+                                        <p:strVal val="visible"/>
+                                      </p:to>
+                                    </p:set>
+                                  </p:childTnLst>
+                                </p:cTn>
+                              </p:par>
+                              <p:par>
+                                <p:cTn id="21" presetID="1" presetClass="entr" presetSubtype="0" fill="hold" nodeType="withEffect">
+                                  <p:stCondLst>
+                                    <p:cond delay="0"/>
+                                  </p:stCondLst>
+                                  <p:childTnLst>
+                                    <p:set>
+                                      <p:cBhvr>
+                                        <p:cTn id="22" dur="1" fill="hold">
+                                          <p:stCondLst>
+                                            <p:cond delay="0"/>
+                                          </p:stCondLst>
+                                        </p:cTn>
+                                        <p:tgtEl>
+                                          <p:spTgt spid="30"/>
+                                        </p:tgtEl>
+                                        <p:attrNameLst>
+                                          <p:attrName>style.visibility</p:attrName>
+                                        </p:attrNameLst>
+                                      </p:cBhvr>
+                                      <p:to>
+                                        <p:strVal val="visible"/>
+                                      </p:to>
+                                    </p:set>
+                                  </p:childTnLst>
+                                </p:cTn>
+                              </p:par>
+                              <p:par>
+                                <p:cTn id="23" presetID="1" presetClass="entr" presetSubtype="0" fill="hold" grpId="0" nodeType="withEffect">
+                                  <p:stCondLst>
+                                    <p:cond delay="0"/>
+                                  </p:stCondLst>
+                                  <p:childTnLst>
+                                    <p:set>
+                                      <p:cBhvr>
+                                        <p:cTn id="24" dur="1" fill="hold">
+                                          <p:stCondLst>
+                                            <p:cond delay="0"/>
+                                          </p:stCondLst>
+                                        </p:cTn>
+                                        <p:tgtEl>
+                                          <p:spTgt spid="4"/>
+                                        </p:tgtEl>
+                                        <p:attrNameLst>
+                                          <p:attrName>style.visibility</p:attrName>
+                                        </p:attrNameLst>
+                                      </p:cBhvr>
+                                      <p:to>
+                                        <p:strVal val="visible"/>
+                                      </p:to>
+                                    </p:set>
+                                  </p:childTnLst>
+                                </p:cTn>
+                              </p:par>
+                              <p:par>
+                                <p:cTn id="25" presetID="1" presetClass="exit" presetSubtype="0" fill="hold" grpId="0" nodeType="withEffect">
+                                  <p:stCondLst>
+                                    <p:cond delay="0"/>
+                                  </p:stCondLst>
+                                  <p:childTnLst>
+                                    <p:set>
+                                      <p:cBhvr>
+                                        <p:cTn id="26" dur="1" fill="hold">
+                                          <p:stCondLst>
+                                            <p:cond delay="0"/>
+                                          </p:stCondLst>
+                                        </p:cTn>
+                                        <p:tgtEl>
+                                          <p:spTgt spid="25"/>
+                                        </p:tgtEl>
+                                        <p:attrNameLst>
+                                          <p:attrName>style.visibility</p:attrName>
+                                        </p:attrNameLst>
+                                      </p:cBhvr>
+                                      <p:to>
+                                        <p:strVal val="hidden"/>
+                                      </p:to>
+                                    </p:set>
+                                  </p:childTnLst>
+                                </p:cTn>
+                              </p:par>
+                            </p:childTnLst>
+                          </p:cTn>
+                        </p:par>
+                      </p:childTnLst>
+                    </p:cTn>
+                  </p:par>
+                </p:childTnLst>
+              </p:cTn>
+              <p:prevCondLst>
+                <p:cond evt="onPrev" delay="0">
+                  <p:tgtEl>
+                    <p:sldTgt/>
+                  </p:tgtEl>
+                </p:cond>
+              </p:prevCondLst>
+              <p:nextCondLst>
+                <p:cond evt="onNext" delay="0">
+                  <p:tgtEl>
+                    <p:sldTgt/>
+                  </p:tgtEl>
+                </p:cond>
+              </p:nextCondLst>
+            </p:seq>
+          </p:childTnLst>
+        </p:cTn>
+      </p:par>
+    </p:tnLst>
+    <p:bldLst>
+      <p:bldP spid="17" grpId="0" animBg="1"/>
+      <p:bldP spid="18" grpId="0"/>
+      <p:bldP spid="20" grpId="0" animBg="1"/>
+      <p:bldP spid="21" grpId="0"/>
+      <p:bldP spid="23" grpId="0" animBg="1"/>
+      <p:bldP spid="24" grpId="0"/>
+      <p:bldP spid="25" grpId="0"/>
+      <p:bldP spid="4" grpId="0"/>
+    </p:bldLst>
+  </p:timing>
 </p:sld>
 </file>
 
@@ -12371,6 +15966,679 @@
 </a:theme>
 </file>
 
+<file path=ppt/theme/theme2.xml><?xml version="1.0" encoding="utf-8"?>
+<a:theme xmlns:a="http://schemas.openxmlformats.org/drawingml/2006/main" name="Office">
+  <a:themeElements>
+    <a:clrScheme name="Office">
+      <a:dk1>
+        <a:sysClr val="windowText" lastClr="000000"/>
+      </a:dk1>
+      <a:lt1>
+        <a:sysClr val="window" lastClr="FFFFFF"/>
+      </a:lt1>
+      <a:dk2>
+        <a:srgbClr val="0E2841"/>
+      </a:dk2>
+      <a:lt2>
+        <a:srgbClr val="E8E8E8"/>
+      </a:lt2>
+      <a:accent1>
+        <a:srgbClr val="156082"/>
+      </a:accent1>
+      <a:accent2>
+        <a:srgbClr val="E97132"/>
+      </a:accent2>
+      <a:accent3>
+        <a:srgbClr val="196B24"/>
+      </a:accent3>
+      <a:accent4>
+        <a:srgbClr val="0F9ED5"/>
+      </a:accent4>
+      <a:accent5>
+        <a:srgbClr val="A02B93"/>
+      </a:accent5>
+      <a:accent6>
+        <a:srgbClr val="4EA72E"/>
+      </a:accent6>
+      <a:hlink>
+        <a:srgbClr val="467886"/>
+      </a:hlink>
+      <a:folHlink>
+        <a:srgbClr val="96607D"/>
+      </a:folHlink>
+    </a:clrScheme>
+    <a:fontScheme name="Office">
+      <a:majorFont>
+        <a:latin typeface="Aptos Display" panose="02110004020202020204"/>
+        <a:ea typeface=""/>
+        <a:cs typeface=""/>
+        <a:font script="Jpan" typeface="游ゴシック Light"/>
+        <a:font script="Hang" typeface="맑은 고딕"/>
+        <a:font script="Hans" typeface="等线 Light"/>
+        <a:font script="Hant" typeface="新細明體"/>
+        <a:font script="Arab" typeface="Times New Roman"/>
+        <a:font script="Hebr" typeface="Times New Roman"/>
+        <a:font script="Thai" typeface="Angsana New"/>
+        <a:font script="Ethi" typeface="Nyala"/>
+        <a:font script="Beng" typeface="Vrinda"/>
+        <a:font script="Gujr" typeface="Shruti"/>
+        <a:font script="Khmr" typeface="MoolBoran"/>
+        <a:font script="Knda" typeface="Tunga"/>
+        <a:font script="Guru" typeface="Raavi"/>
+        <a:font script="Cans" typeface="Euphemia"/>
+        <a:font script="Cher" typeface="Plantagenet Cherokee"/>
+        <a:font script="Yiii" typeface="Microsoft Yi Baiti"/>
+        <a:font script="Tibt" typeface="Microsoft Himalaya"/>
+        <a:font script="Thaa" typeface="MV Boli"/>
+        <a:font script="Deva" typeface="Mangal"/>
+        <a:font script="Telu" typeface="Gautami"/>
+        <a:font script="Taml" typeface="Latha"/>
+        <a:font script="Syrc" typeface="Estrangelo Edessa"/>
+        <a:font script="Orya" typeface="Kalinga"/>
+        <a:font script="Mlym" typeface="Kartika"/>
+        <a:font script="Laoo" typeface="DokChampa"/>
+        <a:font script="Sinh" typeface="Iskoola Pota"/>
+        <a:font script="Mong" typeface="Mongolian Baiti"/>
+        <a:font script="Viet" typeface="Times New Roman"/>
+        <a:font script="Uigh" typeface="Microsoft Uighur"/>
+        <a:font script="Geor" typeface="Sylfaen"/>
+        <a:font script="Armn" typeface="Arial"/>
+        <a:font script="Bugi" typeface="Leelawadee UI"/>
+        <a:font script="Bopo" typeface="Microsoft JhengHei"/>
+        <a:font script="Java" typeface="Javanese Text"/>
+        <a:font script="Lisu" typeface="Segoe UI"/>
+        <a:font script="Mymr" typeface="Myanmar Text"/>
+        <a:font script="Nkoo" typeface="Ebrima"/>
+        <a:font script="Olck" typeface="Nirmala UI"/>
+        <a:font script="Osma" typeface="Ebrima"/>
+        <a:font script="Phag" typeface="Phagspa"/>
+        <a:font script="Syrn" typeface="Estrangelo Edessa"/>
+        <a:font script="Syrj" typeface="Estrangelo Edessa"/>
+        <a:font script="Syre" typeface="Estrangelo Edessa"/>
+        <a:font script="Sora" typeface="Nirmala UI"/>
+        <a:font script="Tale" typeface="Microsoft Tai Le"/>
+        <a:font script="Talu" typeface="Microsoft New Tai Lue"/>
+        <a:font script="Tfng" typeface="Ebrima"/>
+      </a:majorFont>
+      <a:minorFont>
+        <a:latin typeface="Aptos" panose="02110004020202020204"/>
+        <a:ea typeface=""/>
+        <a:cs typeface=""/>
+        <a:font script="Jpan" typeface="游ゴシック"/>
+        <a:font script="Hang" typeface="맑은 고딕"/>
+        <a:font script="Hans" typeface="等线"/>
+        <a:font script="Hant" typeface="新細明體"/>
+        <a:font script="Arab" typeface="Arial"/>
+        <a:font script="Hebr" typeface="Arial"/>
+        <a:font script="Thai" typeface="Cordia New"/>
+        <a:font script="Ethi" typeface="Nyala"/>
+        <a:font script="Beng" typeface="Vrinda"/>
+        <a:font script="Gujr" typeface="Shruti"/>
+        <a:font script="Khmr" typeface="DaunPenh"/>
+        <a:font script="Knda" typeface="Tunga"/>
+        <a:font script="Guru" typeface="Raavi"/>
+        <a:font script="Cans" typeface="Euphemia"/>
+        <a:font script="Cher" typeface="Plantagenet Cherokee"/>
+        <a:font script="Yiii" typeface="Microsoft Yi Baiti"/>
+        <a:font script="Tibt" typeface="Microsoft Himalaya"/>
+        <a:font script="Thaa" typeface="MV Boli"/>
+        <a:font script="Deva" typeface="Mangal"/>
+        <a:font script="Telu" typeface="Gautami"/>
+        <a:font script="Taml" typeface="Latha"/>
+        <a:font script="Syrc" typeface="Estrangelo Edessa"/>
+        <a:font script="Orya" typeface="Kalinga"/>
+        <a:font script="Mlym" typeface="Kartika"/>
+        <a:font script="Laoo" typeface="DokChampa"/>
+        <a:font script="Sinh" typeface="Iskoola Pota"/>
+        <a:font script="Mong" typeface="Mongolian Baiti"/>
+        <a:font script="Viet" typeface="Arial"/>
+        <a:font script="Uigh" typeface="Microsoft Uighur"/>
+        <a:font script="Geor" typeface="Sylfaen"/>
+        <a:font script="Armn" typeface="Arial"/>
+        <a:font script="Bugi" typeface="Leelawadee UI"/>
+        <a:font script="Bopo" typeface="Microsoft JhengHei"/>
+        <a:font script="Java" typeface="Javanese Text"/>
+        <a:font script="Lisu" typeface="Segoe UI"/>
+        <a:font script="Mymr" typeface="Myanmar Text"/>
+        <a:font script="Nkoo" typeface="Ebrima"/>
+        <a:font script="Olck" typeface="Nirmala UI"/>
+        <a:font script="Osma" typeface="Ebrima"/>
+        <a:font script="Phag" typeface="Phagspa"/>
+        <a:font script="Syrn" typeface="Estrangelo Edessa"/>
+        <a:font script="Syrj" typeface="Estrangelo Edessa"/>
+        <a:font script="Syre" typeface="Estrangelo Edessa"/>
+        <a:font script="Sora" typeface="Nirmala UI"/>
+        <a:font script="Tale" typeface="Microsoft Tai Le"/>
+        <a:font script="Talu" typeface="Microsoft New Tai Lue"/>
+        <a:font script="Tfng" typeface="Ebrima"/>
+      </a:minorFont>
+    </a:fontScheme>
+    <a:fmtScheme name="Office">
+      <a:fillStyleLst>
+        <a:solidFill>
+          <a:schemeClr val="phClr"/>
+        </a:solidFill>
+        <a:gradFill rotWithShape="1">
+          <a:gsLst>
+            <a:gs pos="0">
+              <a:schemeClr val="phClr">
+                <a:lumMod val="110000"/>
+                <a:satMod val="105000"/>
+                <a:tint val="67000"/>
+              </a:schemeClr>
+            </a:gs>
+            <a:gs pos="50000">
+              <a:schemeClr val="phClr">
+                <a:lumMod val="105000"/>
+                <a:satMod val="103000"/>
+                <a:tint val="73000"/>
+              </a:schemeClr>
+            </a:gs>
+            <a:gs pos="100000">
+              <a:schemeClr val="phClr">
+                <a:lumMod val="105000"/>
+                <a:satMod val="109000"/>
+                <a:tint val="81000"/>
+              </a:schemeClr>
+            </a:gs>
+          </a:gsLst>
+          <a:lin ang="5400000" scaled="0"/>
+        </a:gradFill>
+        <a:gradFill rotWithShape="1">
+          <a:gsLst>
+            <a:gs pos="0">
+              <a:schemeClr val="phClr">
+                <a:satMod val="103000"/>
+                <a:lumMod val="102000"/>
+                <a:tint val="94000"/>
+              </a:schemeClr>
+            </a:gs>
+            <a:gs pos="50000">
+              <a:schemeClr val="phClr">
+                <a:satMod val="110000"/>
+                <a:lumMod val="100000"/>
+                <a:shade val="100000"/>
+              </a:schemeClr>
+            </a:gs>
+            <a:gs pos="100000">
+              <a:schemeClr val="phClr">
+                <a:lumMod val="99000"/>
+                <a:satMod val="120000"/>
+                <a:shade val="78000"/>
+              </a:schemeClr>
+            </a:gs>
+          </a:gsLst>
+          <a:lin ang="5400000" scaled="0"/>
+        </a:gradFill>
+      </a:fillStyleLst>
+      <a:lnStyleLst>
+        <a:ln w="12700" cap="flat" cmpd="sng" algn="ctr">
+          <a:solidFill>
+            <a:schemeClr val="phClr"/>
+          </a:solidFill>
+          <a:prstDash val="solid"/>
+          <a:miter lim="800000"/>
+        </a:ln>
+        <a:ln w="19050" cap="flat" cmpd="sng" algn="ctr">
+          <a:solidFill>
+            <a:schemeClr val="phClr"/>
+          </a:solidFill>
+          <a:prstDash val="solid"/>
+          <a:miter lim="800000"/>
+        </a:ln>
+        <a:ln w="25400" cap="flat" cmpd="sng" algn="ctr">
+          <a:solidFill>
+            <a:schemeClr val="phClr"/>
+          </a:solidFill>
+          <a:prstDash val="solid"/>
+          <a:miter lim="800000"/>
+        </a:ln>
+      </a:lnStyleLst>
+      <a:effectStyleLst>
+        <a:effectStyle>
+          <a:effectLst/>
+        </a:effectStyle>
+        <a:effectStyle>
+          <a:effectLst/>
+        </a:effectStyle>
+        <a:effectStyle>
+          <a:effectLst>
+            <a:outerShdw blurRad="57150" dist="19050" dir="5400000" algn="ctr" rotWithShape="0">
+              <a:srgbClr val="000000">
+                <a:alpha val="63000"/>
+              </a:srgbClr>
+            </a:outerShdw>
+          </a:effectLst>
+        </a:effectStyle>
+      </a:effectStyleLst>
+      <a:bgFillStyleLst>
+        <a:solidFill>
+          <a:schemeClr val="phClr"/>
+        </a:solidFill>
+        <a:solidFill>
+          <a:schemeClr val="phClr">
+            <a:tint val="95000"/>
+            <a:satMod val="170000"/>
+          </a:schemeClr>
+        </a:solidFill>
+        <a:gradFill rotWithShape="1">
+          <a:gsLst>
+            <a:gs pos="0">
+              <a:schemeClr val="phClr">
+                <a:tint val="93000"/>
+                <a:satMod val="150000"/>
+                <a:shade val="98000"/>
+                <a:lumMod val="102000"/>
+              </a:schemeClr>
+            </a:gs>
+            <a:gs pos="50000">
+              <a:schemeClr val="phClr">
+                <a:tint val="98000"/>
+                <a:satMod val="130000"/>
+                <a:shade val="90000"/>
+                <a:lumMod val="103000"/>
+              </a:schemeClr>
+            </a:gs>
+            <a:gs pos="100000">
+              <a:schemeClr val="phClr">
+                <a:shade val="63000"/>
+                <a:satMod val="120000"/>
+              </a:schemeClr>
+            </a:gs>
+          </a:gsLst>
+          <a:lin ang="5400000" scaled="0"/>
+        </a:gradFill>
+      </a:bgFillStyleLst>
+    </a:fmtScheme>
+  </a:themeElements>
+  <a:objectDefaults>
+    <a:lnDef>
+      <a:spPr/>
+      <a:bodyPr/>
+      <a:lstStyle/>
+      <a:style>
+        <a:lnRef idx="2">
+          <a:schemeClr val="accent1"/>
+        </a:lnRef>
+        <a:fillRef idx="0">
+          <a:schemeClr val="accent1"/>
+        </a:fillRef>
+        <a:effectRef idx="1">
+          <a:schemeClr val="accent1"/>
+        </a:effectRef>
+        <a:fontRef idx="minor">
+          <a:schemeClr val="tx1"/>
+        </a:fontRef>
+      </a:style>
+    </a:lnDef>
+  </a:objectDefaults>
+  <a:extraClrSchemeLst/>
+  <a:extLst>
+    <a:ext uri="{05A4C25C-085E-4340-85A3-A5531E510DB2}">
+      <thm15:themeFamily xmlns:thm15="http://schemas.microsoft.com/office/thememl/2012/main" name="Office Theme" id="{2E142A2C-CD16-42D6-873A-C26D2A0506FA}" vid="{1BDDFF52-6CD6-40A5-AB3C-68EB2F1E4D0A}"/>
+    </a:ext>
+  </a:extLst>
+</a:theme>
+</file>
+
+<file path=ppt/theme/theme3.xml><?xml version="1.0" encoding="utf-8"?>
+<a:theme xmlns:a="http://schemas.openxmlformats.org/drawingml/2006/main" name="Office">
+  <a:themeElements>
+    <a:clrScheme name="Office">
+      <a:dk1>
+        <a:sysClr val="windowText" lastClr="000000"/>
+      </a:dk1>
+      <a:lt1>
+        <a:sysClr val="window" lastClr="FFFFFF"/>
+      </a:lt1>
+      <a:dk2>
+        <a:srgbClr val="0E2841"/>
+      </a:dk2>
+      <a:lt2>
+        <a:srgbClr val="E8E8E8"/>
+      </a:lt2>
+      <a:accent1>
+        <a:srgbClr val="156082"/>
+      </a:accent1>
+      <a:accent2>
+        <a:srgbClr val="E97132"/>
+      </a:accent2>
+      <a:accent3>
+        <a:srgbClr val="196B24"/>
+      </a:accent3>
+      <a:accent4>
+        <a:srgbClr val="0F9ED5"/>
+      </a:accent4>
+      <a:accent5>
+        <a:srgbClr val="A02B93"/>
+      </a:accent5>
+      <a:accent6>
+        <a:srgbClr val="4EA72E"/>
+      </a:accent6>
+      <a:hlink>
+        <a:srgbClr val="467886"/>
+      </a:hlink>
+      <a:folHlink>
+        <a:srgbClr val="96607D"/>
+      </a:folHlink>
+    </a:clrScheme>
+    <a:fontScheme name="Office">
+      <a:majorFont>
+        <a:latin typeface="Aptos Display" panose="02110004020202020204"/>
+        <a:ea typeface=""/>
+        <a:cs typeface=""/>
+        <a:font script="Jpan" typeface="游ゴシック Light"/>
+        <a:font script="Hang" typeface="맑은 고딕"/>
+        <a:font script="Hans" typeface="等线 Light"/>
+        <a:font script="Hant" typeface="新細明體"/>
+        <a:font script="Arab" typeface="Times New Roman"/>
+        <a:font script="Hebr" typeface="Times New Roman"/>
+        <a:font script="Thai" typeface="Angsana New"/>
+        <a:font script="Ethi" typeface="Nyala"/>
+        <a:font script="Beng" typeface="Vrinda"/>
+        <a:font script="Gujr" typeface="Shruti"/>
+        <a:font script="Khmr" typeface="MoolBoran"/>
+        <a:font script="Knda" typeface="Tunga"/>
+        <a:font script="Guru" typeface="Raavi"/>
+        <a:font script="Cans" typeface="Euphemia"/>
+        <a:font script="Cher" typeface="Plantagenet Cherokee"/>
+        <a:font script="Yiii" typeface="Microsoft Yi Baiti"/>
+        <a:font script="Tibt" typeface="Microsoft Himalaya"/>
+        <a:font script="Thaa" typeface="MV Boli"/>
+        <a:font script="Deva" typeface="Mangal"/>
+        <a:font script="Telu" typeface="Gautami"/>
+        <a:font script="Taml" typeface="Latha"/>
+        <a:font script="Syrc" typeface="Estrangelo Edessa"/>
+        <a:font script="Orya" typeface="Kalinga"/>
+        <a:font script="Mlym" typeface="Kartika"/>
+        <a:font script="Laoo" typeface="DokChampa"/>
+        <a:font script="Sinh" typeface="Iskoola Pota"/>
+        <a:font script="Mong" typeface="Mongolian Baiti"/>
+        <a:font script="Viet" typeface="Times New Roman"/>
+        <a:font script="Uigh" typeface="Microsoft Uighur"/>
+        <a:font script="Geor" typeface="Sylfaen"/>
+        <a:font script="Armn" typeface="Arial"/>
+        <a:font script="Bugi" typeface="Leelawadee UI"/>
+        <a:font script="Bopo" typeface="Microsoft JhengHei"/>
+        <a:font script="Java" typeface="Javanese Text"/>
+        <a:font script="Lisu" typeface="Segoe UI"/>
+        <a:font script="Mymr" typeface="Myanmar Text"/>
+        <a:font script="Nkoo" typeface="Ebrima"/>
+        <a:font script="Olck" typeface="Nirmala UI"/>
+        <a:font script="Osma" typeface="Ebrima"/>
+        <a:font script="Phag" typeface="Phagspa"/>
+        <a:font script="Syrn" typeface="Estrangelo Edessa"/>
+        <a:font script="Syrj" typeface="Estrangelo Edessa"/>
+        <a:font script="Syre" typeface="Estrangelo Edessa"/>
+        <a:font script="Sora" typeface="Nirmala UI"/>
+        <a:font script="Tale" typeface="Microsoft Tai Le"/>
+        <a:font script="Talu" typeface="Microsoft New Tai Lue"/>
+        <a:font script="Tfng" typeface="Ebrima"/>
+      </a:majorFont>
+      <a:minorFont>
+        <a:latin typeface="Aptos" panose="02110004020202020204"/>
+        <a:ea typeface=""/>
+        <a:cs typeface=""/>
+        <a:font script="Jpan" typeface="游ゴシック"/>
+        <a:font script="Hang" typeface="맑은 고딕"/>
+        <a:font script="Hans" typeface="等线"/>
+        <a:font script="Hant" typeface="新細明體"/>
+        <a:font script="Arab" typeface="Arial"/>
+        <a:font script="Hebr" typeface="Arial"/>
+        <a:font script="Thai" typeface="Cordia New"/>
+        <a:font script="Ethi" typeface="Nyala"/>
+        <a:font script="Beng" typeface="Vrinda"/>
+        <a:font script="Gujr" typeface="Shruti"/>
+        <a:font script="Khmr" typeface="DaunPenh"/>
+        <a:font script="Knda" typeface="Tunga"/>
+        <a:font script="Guru" typeface="Raavi"/>
+        <a:font script="Cans" typeface="Euphemia"/>
+        <a:font script="Cher" typeface="Plantagenet Cherokee"/>
+        <a:font script="Yiii" typeface="Microsoft Yi Baiti"/>
+        <a:font script="Tibt" typeface="Microsoft Himalaya"/>
+        <a:font script="Thaa" typeface="MV Boli"/>
+        <a:font script="Deva" typeface="Mangal"/>
+        <a:font script="Telu" typeface="Gautami"/>
+        <a:font script="Taml" typeface="Latha"/>
+        <a:font script="Syrc" typeface="Estrangelo Edessa"/>
+        <a:font script="Orya" typeface="Kalinga"/>
+        <a:font script="Mlym" typeface="Kartika"/>
+        <a:font script="Laoo" typeface="DokChampa"/>
+        <a:font script="Sinh" typeface="Iskoola Pota"/>
+        <a:font script="Mong" typeface="Mongolian Baiti"/>
+        <a:font script="Viet" typeface="Arial"/>
+        <a:font script="Uigh" typeface="Microsoft Uighur"/>
+        <a:font script="Geor" typeface="Sylfaen"/>
+        <a:font script="Armn" typeface="Arial"/>
+        <a:font script="Bugi" typeface="Leelawadee UI"/>
+        <a:font script="Bopo" typeface="Microsoft JhengHei"/>
+        <a:font script="Java" typeface="Javanese Text"/>
+        <a:font script="Lisu" typeface="Segoe UI"/>
+        <a:font script="Mymr" typeface="Myanmar Text"/>
+        <a:font script="Nkoo" typeface="Ebrima"/>
+        <a:font script="Olck" typeface="Nirmala UI"/>
+        <a:font script="Osma" typeface="Ebrima"/>
+        <a:font script="Phag" typeface="Phagspa"/>
+        <a:font script="Syrn" typeface="Estrangelo Edessa"/>
+        <a:font script="Syrj" typeface="Estrangelo Edessa"/>
+        <a:font script="Syre" typeface="Estrangelo Edessa"/>
+        <a:font script="Sora" typeface="Nirmala UI"/>
+        <a:font script="Tale" typeface="Microsoft Tai Le"/>
+        <a:font script="Talu" typeface="Microsoft New Tai Lue"/>
+        <a:font script="Tfng" typeface="Ebrima"/>
+      </a:minorFont>
+    </a:fontScheme>
+    <a:fmtScheme name="Office">
+      <a:fillStyleLst>
+        <a:solidFill>
+          <a:schemeClr val="phClr"/>
+        </a:solidFill>
+        <a:gradFill rotWithShape="1">
+          <a:gsLst>
+            <a:gs pos="0">
+              <a:schemeClr val="phClr">
+                <a:lumMod val="110000"/>
+                <a:satMod val="105000"/>
+                <a:tint val="67000"/>
+              </a:schemeClr>
+            </a:gs>
+            <a:gs pos="50000">
+              <a:schemeClr val="phClr">
+                <a:lumMod val="105000"/>
+                <a:satMod val="103000"/>
+                <a:tint val="73000"/>
+              </a:schemeClr>
+            </a:gs>
+            <a:gs pos="100000">
+              <a:schemeClr val="phClr">
+                <a:lumMod val="105000"/>
+                <a:satMod val="109000"/>
+                <a:tint val="81000"/>
+              </a:schemeClr>
+            </a:gs>
+          </a:gsLst>
+          <a:lin ang="5400000" scaled="0"/>
+        </a:gradFill>
+        <a:gradFill rotWithShape="1">
+          <a:gsLst>
+            <a:gs pos="0">
+              <a:schemeClr val="phClr">
+                <a:satMod val="103000"/>
+                <a:lumMod val="102000"/>
+                <a:tint val="94000"/>
+              </a:schemeClr>
+            </a:gs>
+            <a:gs pos="50000">
+              <a:schemeClr val="phClr">
+                <a:satMod val="110000"/>
+                <a:lumMod val="100000"/>
+                <a:shade val="100000"/>
+              </a:schemeClr>
+            </a:gs>
+            <a:gs pos="100000">
+              <a:schemeClr val="phClr">
+                <a:lumMod val="99000"/>
+                <a:satMod val="120000"/>
+                <a:shade val="78000"/>
+              </a:schemeClr>
+            </a:gs>
+          </a:gsLst>
+          <a:lin ang="5400000" scaled="0"/>
+        </a:gradFill>
+      </a:fillStyleLst>
+      <a:lnStyleLst>
+        <a:ln w="12700" cap="flat" cmpd="sng" algn="ctr">
+          <a:solidFill>
+            <a:schemeClr val="phClr"/>
+          </a:solidFill>
+          <a:prstDash val="solid"/>
+          <a:miter lim="800000"/>
+        </a:ln>
+        <a:ln w="19050" cap="flat" cmpd="sng" algn="ctr">
+          <a:solidFill>
+            <a:schemeClr val="phClr"/>
+          </a:solidFill>
+          <a:prstDash val="solid"/>
+          <a:miter lim="800000"/>
+        </a:ln>
+        <a:ln w="25400" cap="flat" cmpd="sng" algn="ctr">
+          <a:solidFill>
+            <a:schemeClr val="phClr"/>
+          </a:solidFill>
+          <a:prstDash val="solid"/>
+          <a:miter lim="800000"/>
+        </a:ln>
+      </a:lnStyleLst>
+      <a:effectStyleLst>
+        <a:effectStyle>
+          <a:effectLst/>
+        </a:effectStyle>
+        <a:effectStyle>
+          <a:effectLst/>
+        </a:effectStyle>
+        <a:effectStyle>
+          <a:effectLst>
+            <a:outerShdw blurRad="57150" dist="19050" dir="5400000" algn="ctr" rotWithShape="0">
+              <a:srgbClr val="000000">
+                <a:alpha val="63000"/>
+              </a:srgbClr>
+            </a:outerShdw>
+          </a:effectLst>
+        </a:effectStyle>
+      </a:effectStyleLst>
+      <a:bgFillStyleLst>
+        <a:solidFill>
+          <a:schemeClr val="phClr"/>
+        </a:solidFill>
+        <a:solidFill>
+          <a:schemeClr val="phClr">
+            <a:tint val="95000"/>
+            <a:satMod val="170000"/>
+          </a:schemeClr>
+        </a:solidFill>
+        <a:gradFill rotWithShape="1">
+          <a:gsLst>
+            <a:gs pos="0">
+              <a:schemeClr val="phClr">
+                <a:tint val="93000"/>
+                <a:satMod val="150000"/>
+                <a:shade val="98000"/>
+                <a:lumMod val="102000"/>
+              </a:schemeClr>
+            </a:gs>
+            <a:gs pos="50000">
+              <a:schemeClr val="phClr">
+                <a:tint val="98000"/>
+                <a:satMod val="130000"/>
+                <a:shade val="90000"/>
+                <a:lumMod val="103000"/>
+              </a:schemeClr>
+            </a:gs>
+            <a:gs pos="100000">
+              <a:schemeClr val="phClr">
+                <a:shade val="63000"/>
+                <a:satMod val="120000"/>
+              </a:schemeClr>
+            </a:gs>
+          </a:gsLst>
+          <a:lin ang="5400000" scaled="0"/>
+        </a:gradFill>
+      </a:bgFillStyleLst>
+    </a:fmtScheme>
+  </a:themeElements>
+  <a:objectDefaults>
+    <a:lnDef>
+      <a:spPr/>
+      <a:bodyPr/>
+      <a:lstStyle/>
+      <a:style>
+        <a:lnRef idx="2">
+          <a:schemeClr val="accent1"/>
+        </a:lnRef>
+        <a:fillRef idx="0">
+          <a:schemeClr val="accent1"/>
+        </a:fillRef>
+        <a:effectRef idx="1">
+          <a:schemeClr val="accent1"/>
+        </a:effectRef>
+        <a:fontRef idx="minor">
+          <a:schemeClr val="tx1"/>
+        </a:fontRef>
+      </a:style>
+    </a:lnDef>
+  </a:objectDefaults>
+  <a:extraClrSchemeLst/>
+  <a:extLst>
+    <a:ext uri="{05A4C25C-085E-4340-85A3-A5531E510DB2}">
+      <thm15:themeFamily xmlns:thm15="http://schemas.microsoft.com/office/thememl/2012/main" name="Office Theme" id="{2E142A2C-CD16-42D6-873A-C26D2A0506FA}" vid="{1BDDFF52-6CD6-40A5-AB3C-68EB2F1E4D0A}"/>
+    </a:ext>
+  </a:extLst>
+</a:theme>
+</file>
+
+<file path=ppt/theme/themeOverride1.xml><?xml version="1.0" encoding="utf-8"?>
+<a:themeOverride xmlns:a="http://schemas.openxmlformats.org/drawingml/2006/main">
+  <a:clrScheme name="1_Standarddesign 4">
+    <a:dk1>
+      <a:srgbClr val="000000"/>
+    </a:dk1>
+    <a:lt1>
+      <a:srgbClr val="FFFFFF"/>
+    </a:lt1>
+    <a:dk2>
+      <a:srgbClr val="000000"/>
+    </a:dk2>
+    <a:lt2>
+      <a:srgbClr val="333333"/>
+    </a:lt2>
+    <a:accent1>
+      <a:srgbClr val="DDDDDD"/>
+    </a:accent1>
+    <a:accent2>
+      <a:srgbClr val="808080"/>
+    </a:accent2>
+    <a:accent3>
+      <a:srgbClr val="FFFFFF"/>
+    </a:accent3>
+    <a:accent4>
+      <a:srgbClr val="000000"/>
+    </a:accent4>
+    <a:accent5>
+      <a:srgbClr val="EBEBEB"/>
+    </a:accent5>
+    <a:accent6>
+      <a:srgbClr val="737373"/>
+    </a:accent6>
+    <a:hlink>
+      <a:srgbClr val="4D4D4D"/>
+    </a:hlink>
+    <a:folHlink>
+      <a:srgbClr val="EAEAEA"/>
+    </a:folHlink>
+  </a:clrScheme>
+</a:themeOverride>
+</file>
+
 <file path=customXml/item1.xml><?xml version="1.0" encoding="utf-8"?>
 <p:properties xmlns:p="http://schemas.microsoft.com/office/2006/metadata/properties" xmlns:xsi="http://www.w3.org/2001/XMLSchema-instance" xmlns:pc="http://schemas.microsoft.com/office/infopath/2007/PartnerControls">
   <documentManagement>
